--- a/courses/ai-native/sessions/s09.pptx
+++ b/courses/ai-native/sessions/s09.pptx
@@ -12816,7 +12816,7 @@
                 <a:latin typeface="맑은 고딕"/>
                 <a:ea typeface="맑은 고딕"/>
               </a:rPr>
-              <a:t>"계산적 센서도 추론적 센서도 </a:t>
+              <a:t>계산적 센서도 추론적 센서도 </a:t>
             </a:r>
             <a:r>
               <a:rPr sz="1800" b="1">
@@ -12836,7 +12836,7 @@
                 <a:latin typeface="맑은 고딕"/>
                 <a:ea typeface="맑은 고딕"/>
               </a:rPr>
-              <a:t>는 믿을 만하게 잡아내지 못한다 — 문제를 잘못 짚는 것, 과한 설계와 필요 없는 기능, 지시를 잘못 이해한 것"</a:t>
+              <a:t>는 믿을 만하게 잡아내지 못한다 — 문제를 잘못 짚는 것과 과한 설계와 필요 없는 기능과 지시를 잘못 이해한 것이다</a:t>
             </a:r>
             <a:r>
               <a:rPr sz="1000" b="0">
@@ -12856,27 +12856,7 @@
                 <a:latin typeface="맑은 고딕"/>
                 <a:ea typeface="맑은 고딕"/>
               </a:rPr>
-              <a:t>"Neither catches reliably some of the higher-impact problems: Misdiagnosis of issues, overengineering and unnecessary features, misunderstood instructions."</a:t>
-            </a:r>
-            <a:r>
-              <a:rPr sz="1000" b="0">
-                <a:solidFill>
-                  <a:srgbClr val="000000"/>
-                </a:solidFill>
-                <a:latin typeface="맑은 고딕"/>
-                <a:ea typeface="맑은 고딕"/>
-              </a:rPr>
-              <a:t>, </a:t>
-            </a:r>
-            <a:r>
-              <a:rPr sz="1000" b="0">
-                <a:solidFill>
-                  <a:srgbClr val="000000"/>
-                </a:solidFill>
-                <a:latin typeface="맑은 고딕"/>
-                <a:ea typeface="맑은 고딕"/>
-              </a:rPr>
-              <a:t>[Böckeler 2026a]</a:t>
+              <a:t>"Neither catches reliably some of the higher-impact problems: Misdiagnosis of issues, overengineering and unnecessary features, misunderstood instructions.", [Böckeler 2026a]</a:t>
             </a:r>
           </a:p>
           <a:p>
@@ -13671,7 +13651,7 @@
                 <a:latin typeface="맑은 고딕"/>
                 <a:ea typeface="맑은 고딕"/>
               </a:rPr>
-              <a:t>"SW 엔지니어링 팀의 주된 일은 이제 코드를 쓰는 것이 아니라 </a:t>
+              <a:t>SW 엔지니어링 팀의 주된 일은 이제 코드를 쓰는 것이 아니라 </a:t>
             </a:r>
             <a:r>
               <a:rPr sz="1800" b="1">
@@ -13681,7 +13661,7 @@
                 <a:latin typeface="맑은 고딕"/>
                 <a:ea typeface="맑은 고딕"/>
               </a:rPr>
-              <a:t>환경을 설계하고, 의도를 명세하고, 피드백 루프를 만드는 것</a:t>
+              <a:t>환경을 설계하고 의도를 명세하고 피드백 루프를 만드는 것</a:t>
             </a:r>
             <a:r>
               <a:rPr sz="1800" b="0">
@@ -13691,7 +13671,7 @@
                 <a:latin typeface="맑은 고딕"/>
                 <a:ea typeface="맑은 고딕"/>
               </a:rPr>
-              <a:t>이다"</a:t>
+              <a:t>이다</a:t>
             </a:r>
             <a:r>
               <a:rPr sz="1000" b="0">
@@ -13711,27 +13691,7 @@
                 <a:latin typeface="맑은 고딕"/>
                 <a:ea typeface="맑은 고딕"/>
               </a:rPr>
-              <a:t>"A software engineering team's primary job is no longer to write code, but to design environments, specify intent, and build feedback loops"</a:t>
-            </a:r>
-            <a:r>
-              <a:rPr sz="1000" b="0">
-                <a:solidFill>
-                  <a:srgbClr val="000000"/>
-                </a:solidFill>
-                <a:latin typeface="맑은 고딕"/>
-                <a:ea typeface="맑은 고딕"/>
-              </a:rPr>
-              <a:t>, </a:t>
-            </a:r>
-            <a:r>
-              <a:rPr sz="1000" b="0">
-                <a:solidFill>
-                  <a:srgbClr val="000000"/>
-                </a:solidFill>
-                <a:latin typeface="맑은 고딕"/>
-                <a:ea typeface="맑은 고딕"/>
-              </a:rPr>
-              <a:t>[Lopopolo 2026]</a:t>
+              <a:t>"A software engineering team's primary job is no longer to write code, but to design environments, specify intent, and build feedback loops", [Lopopolo 2026]</a:t>
             </a:r>
           </a:p>
           <a:p>

--- a/courses/ai-native/sessions/s09.pptx
+++ b/courses/ai-native/sessions/s09.pptx
@@ -34,6 +34,7 @@
     <p:sldId id="279" r:id="javaLecture24"/>
     <p:sldId id="280" r:id="javaLecture25"/>
     <p:sldId id="281" r:id="javaLecture26"/>
+    <p:sldId id="282" r:id="javaLecture27"/>
   </p:sldIdLst>
   <p:sldSz cx="9144000" cy="6858000" type="screen4x3"/>
   <p:notesSz cx="6858000" cy="9144000"/>
@@ -883,81 +884,6 @@
 </p:notes>
 </file>
 
-<file path=ppt/notesSlides/notesSlide16.xml><?xml version="1.0" encoding="utf-8"?>
-<p:notes xmlns:a="http://schemas.openxmlformats.org/drawingml/2006/main" xmlns:r="http://schemas.openxmlformats.org/officeDocument/2006/relationships" xmlns:p="http://schemas.openxmlformats.org/presentationml/2006/main">
-  <p:cSld>
-    <p:spTree>
-      <p:nvGrpSpPr>
-        <p:cNvPr id="1" name=""/>
-        <p:cNvGrpSpPr/>
-        <p:nvPr/>
-      </p:nvGrpSpPr>
-      <p:grpSpPr>
-        <a:xfrm>
-          <a:off x="0" y="0"/>
-          <a:ext cx="0" cy="0"/>
-          <a:chOff x="0" y="0"/>
-          <a:chExt cx="0" cy="0"/>
-        </a:xfrm>
-      </p:grpSpPr>
-      <p:sp>
-        <p:nvSpPr>
-          <p:cNvPr id="2" name="슬라이드 이미지 개체 틀"/>
-          <p:cNvSpPr/>
-          <p:nvPr>
-            <p:ph type="sldImg" idx="2"/>
-          </p:nvPr>
-        </p:nvSpPr>
-        <p:spPr/>
-        <p:txBody>
-          <a:bodyPr/>
-          <a:lstStyle/>
-          <a:p/>
-        </p:txBody>
-      </p:sp>
-      <p:sp>
-        <p:nvSpPr>
-          <p:cNvPr id="3" name="슬라이드 노트 개체 틀"/>
-          <p:cNvSpPr/>
-          <p:nvPr>
-            <p:ph type="body" idx="3"/>
-          </p:nvPr>
-        </p:nvSpPr>
-        <p:spPr/>
-        <p:txBody>
-          <a:bodyPr/>
-          <a:lstStyle/>
-          <a:p>
-            <a:pPr lvl="0"/>
-            <a:r>
-              <a:rPr lang="ko-KR" sz="1200"/>
-              <a:t>인용 근거: [Böckeler 2026a] 원문 확인. 프롬프트 주입을 좋은 쪽으로 쓴다는 표현이 원문의 것이다. 공격으로서의 프롬프트 주입은 "세션 08. 실행 제약과 가드레일의 역할"의 「04. 치명적 삼박자」에서 다뤘다.</a:t>
-            </a:r>
-          </a:p>
-          <a:p>
-            <a:pPr lvl="0"/>
-            <a:r>
-              <a:rPr lang="ko-KR" sz="1200"/>
-              <a:t>왼쪽 열은 흔한 도구의 기본 메시지이고, 오른쪽 열은 「06. 주문한다의 하네스」의 「센서가 잡은 것」에서 실제로 출력된 문장이다.</a:t>
-            </a:r>
-          </a:p>
-          <a:p>
-            <a:pPr lvl="0"/>
-            <a:r>
-              <a:rPr lang="ko-KR" sz="1200"/>
-              <a:t>수강생에게 묻는다 — 지금 쓰는 검사의 실패 메시지를 에이전트가 읽고 고칠 수 있는가? 대부분은 사람을 향해 쓰여 있다.</a:t>
-            </a:r>
-          </a:p>
-        </p:txBody>
-      </p:sp>
-    </p:spTree>
-  </p:cSld>
-  <p:clrMapOvr>
-    <a:masterClrMapping/>
-  </p:clrMapOvr>
-</p:notes>
-</file>
-
 <file path=ppt/notesSlides/notesSlide17.xml><?xml version="1.0" encoding="utf-8"?>
 <p:notes xmlns:a="http://schemas.openxmlformats.org/drawingml/2006/main" xmlns:r="http://schemas.openxmlformats.org/officeDocument/2006/relationships" xmlns:p="http://schemas.openxmlformats.org/presentationml/2006/main">
   <p:cSld>
@@ -1006,21 +932,21 @@
             <a:pPr lvl="0"/>
             <a:r>
               <a:rPr lang="ko-KR" sz="1200"/>
-              <a:t>거절 뒤 재결제의 실패와 상태 기계의 자기 전이는 "세션 10. 실패 대응·재시도·복구"가 실패의 유형으로 다룬다. 여기서는 센서의 실패가 가리키는 자리까지만 본다.</a:t>
+              <a:t>인용 근거: [Böckeler 2026a] 원문 확인. 프롬프트 주입을 좋은 쪽으로 쓴다는 표현이 원문의 것이다. 공격으로서의 프롬프트 주입은 "세션 08. 실행 제약과 가드레일의 역할"의 「04. 치명적 삼박자」에서 다뤘다.</a:t>
             </a:r>
           </a:p>
           <a:p>
             <a:pPr lvl="0"/>
             <a:r>
               <a:rPr lang="ko-KR" sz="1200"/>
-              <a:t>같은 실패 3회의 멈춤은 "세션 06. 작업 위임과 도구·권한·상태의 경계"의 「07. 위임 계약」의 「주문한다의 위임 계약」에 적은 멈출 조건이다.</a:t>
+              <a:t>왼쪽 열은 흔한 도구의 기본 메시지이고, 오른쪽 열은 「06. 주문한다의 하네스」의 「센서가 잡은 것」에서 실제로 출력된 문장이다.</a:t>
             </a:r>
           </a:p>
           <a:p>
             <a:pPr lvl="0"/>
             <a:r>
               <a:rPr lang="ko-KR" sz="1200"/>
-              <a:t>표의 다섯 줄은 「06. 주문한다의 하네스」의 「센서 다섯」과 순서가 같다. 센서를 세우는 일과 실패를 읽는 일이 한 줄씩 이어진다.</a:t>
+              <a:t>수강생에게 묻는다 — 지금 쓰는 검사의 실패 메시지를 에이전트가 읽고 고칠 수 있는가? 대부분은 사람을 향해 쓰여 있다.</a:t>
             </a:r>
           </a:p>
         </p:txBody>
@@ -1081,21 +1007,21 @@
             <a:pPr lvl="0"/>
             <a:r>
               <a:rPr lang="ko-KR" sz="1200"/>
-              <a:t>인용 근거: [Böckeler 2026a]·[Anthropic 2025a] 원문 확인. 세 가지 문제의 이름이 [Böckeler 2026a]의 것이고, 오른쪽 두 열은 과정의 적용이다.</a:t>
+              <a:t>거절 뒤 재결제의 실패와 상태 기계의 자기 전이는 "세션 10. 실패 대응·재시도·복구"가 실패의 유형으로 다룬다. 여기서는 센서의 실패가 가리키는 자리까지만 본다.</a:t>
             </a:r>
           </a:p>
           <a:p>
             <a:pPr lvl="0"/>
             <a:r>
               <a:rPr lang="ko-KR" sz="1200"/>
-              <a:t>세 자리(계획·결제 관련 변경·병합)는 "세션 07. 워크플로·에이전트와 사람의 개입"의 「07. 주문한다의 실행 흐름」의 「활동 다이어그램」에서 정했다. 가드레일과 센서가 받쳐 주는 덕분에 그 셋으로 충분하다.</a:t>
+              <a:t>같은 실패 3회의 멈춤은 "세션 06. 작업 위임과 도구·권한·상태의 경계"의 「07. 위임 계약」의 「주문한다의 위임 계약」에 적은 멈출 조건이다.</a:t>
             </a:r>
           </a:p>
           <a:p>
             <a:pPr lvl="0"/>
             <a:r>
               <a:rPr lang="ko-KR" sz="1200"/>
-              <a:t>승인 피로는 "세션 07. 워크플로·에이전트와 사람의 개입"의 「08. 잘못된 관행」의 「모든 단계의 형식적 승인」에서 다뤘다. 센서의 증거가 리뷰의 읽을 거리를 줄여 그 피로를 막는다.</a:t>
+              <a:t>표의 다섯 줄은 「06. 주문한다의 하네스」의 「센서 다섯」과 순서가 같다. 센서를 세우는 일과 실패를 읽는 일이 한 줄씩 이어진다.</a:t>
             </a:r>
           </a:p>
         </p:txBody>
@@ -1156,21 +1082,21 @@
             <a:pPr lvl="0"/>
             <a:r>
               <a:rPr lang="ko-KR" sz="1200"/>
-              <a:t>인용 근거: [Böckeler 2026a]·[Lopopolo 2026] 원문 확인. [Böckeler 2026a]는 이미 있는 코드베이스가 어려운 이유도 함께 다루지만, 이 과정의 사례는 빈 저장소에서 시작하므로 신규 개발 쪽만 인용했다.</a:t>
+              <a:t>인용 근거: [Böckeler 2026a]·[Anthropic 2025a] 원문 확인. 세 가지 문제의 이름이 [Böckeler 2026a]의 것이고, 오른쪽 두 열은 과정의 적용이다.</a:t>
             </a:r>
           </a:p>
           <a:p>
             <a:pPr lvl="0"/>
             <a:r>
               <a:rPr lang="ko-KR" sz="1200"/>
-              <a:t>네 결정이 내려진 곳 — 패키지와 인터페이스는 "세션 05. 도메인·설계 지식과 맥락 구성"의 「08. 설계 지식」, 허용·거절 예시는 "세션 04. 수용 기준과 검증 가능한 작업 단위"의 「03. 허용·거절 예시」, 용어집은 "세션 05. 도메인·설계 지식과 맥락 구성"의 「07. 도메인 지식」이다.</a:t>
+              <a:t>세 자리(계획·결제 관련 변경·병합)는 "세션 07. 워크플로·에이전트와 사람의 개입"의 「07. 주문한다의 실행 흐름」의 「활동 다이어그램」에서 정했다. 가드레일과 센서가 받쳐 주는 덕분에 그 셋으로 충분하다.</a:t>
             </a:r>
           </a:p>
           <a:p>
             <a:pPr lvl="0"/>
             <a:r>
               <a:rPr lang="ko-KR" sz="1200"/>
-              <a:t>[Lopopolo 2026]의 문장은 "세션 01. AI 협업의 특성과 사람의 판단 책임"의 역할 나눔과 같은 방향이다. 이 세션은 그중 피드백 루프를 만드는 일을 맡는다.</a:t>
+              <a:t>승인 피로는 "세션 07. 워크플로·에이전트와 사람의 개입"의 「08. 잘못된 관행」의 「모든 단계의 형식적 승인」에서 다뤘다. 센서의 증거가 리뷰의 읽을 거리를 줄여 그 피로를 막는다.</a:t>
             </a:r>
           </a:p>
         </p:txBody>
@@ -1306,21 +1232,21 @@
             <a:pPr lvl="0"/>
             <a:r>
               <a:rPr lang="ko-KR" sz="1200"/>
-              <a:t>테스트를 끄거나 지우는 징후는 [Beck 2025]를 인용해 "세션 04. 수용 기준과 검증 가능한 작업 단위"의 「08. 잘못된 관행」에서 다뤘다. 여기서는 그것을 센서의 눈으로 다시 본다.</a:t>
+              <a:t>인용 근거: [Böckeler 2026a]·[Lopopolo 2026] 원문 확인. [Böckeler 2026a]는 이미 있는 코드베이스가 어려운 이유도 함께 다루지만, 이 과정의 사례는 빈 저장소에서 시작하므로 신규 개발 쪽만 인용했다.</a:t>
             </a:r>
           </a:p>
           <a:p>
             <a:pPr lvl="0"/>
             <a:r>
               <a:rPr lang="ko-KR" sz="1200"/>
-              <a:t>쓰기 금지는 "세션 08. 실행 제약과 가드레일의 역할"의 「07. 주문한다의 가드레일」의 「배치표」에 있다. 예방과 탐지가 같은 위험을 겹으로 막는 예다.</a:t>
+              <a:t>네 결정이 내려진 곳 — 패키지와 인터페이스는 "세션 05. 도메인·설계 지식과 맥락 구성"의 「08. 설계 지식」, 허용·거절 예시는 "세션 04. 수용 기준과 검증 가능한 작업 단위"의 「03. 허용·거절 예시」, 용어집은 "세션 05. 도메인·설계 지식과 맥락 구성"의 「07. 도메인 지식」이다.</a:t>
             </a:r>
           </a:p>
           <a:p>
             <a:pPr lvl="0"/>
             <a:r>
               <a:rPr lang="ko-KR" sz="1200"/>
-              <a:t>수강생에게 묻는다 — 에이전트가 테스트를 고치는 것이 늘 나쁜가? 명세가 바뀌었으면 사람이 기대값을 고치고, 그 변경은 확인 지점에서 본다.</a:t>
+              <a:t>[Lopopolo 2026]의 문장은 "세션 01. AI 협업의 특성과 사람의 판단 책임"의 역할 나눔과 같은 방향이다. 이 세션은 그중 피드백 루프를 만드는 일을 맡는다.</a:t>
             </a:r>
           </a:p>
         </p:txBody>
@@ -1381,21 +1307,21 @@
             <a:pPr lvl="0"/>
             <a:r>
               <a:rPr lang="ko-KR" sz="1200"/>
-              <a:t>이 관행은 「04. 조종 루프」의 「품질을 왼쪽에」를 한쪽으로만 읽은 결과다. 두 topic을 나란히 짚는다.</a:t>
+              <a:t>테스트를 끄거나 지우는 징후는 [Beck 2025]를 인용해 "세션 04. 수용 기준과 검증 가능한 작업 단위"의 「08. 잘못된 관행」에서 다뤘다. 여기서는 그것을 센서의 눈으로 다시 본다.</a:t>
             </a:r>
           </a:p>
           <a:p>
             <a:pPr lvl="0"/>
             <a:r>
               <a:rPr lang="ko-KR" sz="1200"/>
-              <a:t>변이 테스트는 "주문한다"에 두지 않았다. 과제가 작아 값에 비해 얻는 것이 적다는 판단이며, 값이 싼 도구가 나오면 다시 본다.</a:t>
+              <a:t>쓰기 금지는 "세션 08. 실행 제약과 가드레일의 역할"의 「07. 주문한다의 가드레일」의 「배치표」에 있다. 예방과 탐지가 같은 위험을 겹으로 막는 예다.</a:t>
             </a:r>
           </a:p>
           <a:p>
             <a:pPr lvl="0"/>
             <a:r>
               <a:rPr lang="ko-KR" sz="1200"/>
-              <a:t>수강생에게 묻는다 — 루프 안 센서가 2분이면 무엇이 일어나는가? 에이전트는 기다리고, 사람은 검사를 줄인다.</a:t>
+              <a:t>수강생에게 묻는다 — 에이전트가 테스트를 고치는 것이 늘 나쁜가? 명세가 바뀌었으면 사람이 기대값을 고치고, 그 변경은 확인 지점에서 본다.</a:t>
             </a:r>
           </a:p>
         </p:txBody>
@@ -1456,21 +1382,21 @@
             <a:pPr lvl="0"/>
             <a:r>
               <a:rPr lang="ko-KR" sz="1200"/>
-              <a:t>정기배송의 기대값은 회차 7개·만료일 2월 2일·회차 금액 10,000원이다. 모델 패키지는 code/s01/subscription/docs/에 있다.</a:t>
+              <a:t>이 관행은 「04. 조종 루프」의 「품질을 왼쪽에」를 한쪽으로만 읽은 결과다. 두 topic을 나란히 짚는다.</a:t>
             </a:r>
           </a:p>
           <a:p>
             <a:pPr lvl="0"/>
             <a:r>
               <a:rPr lang="ko-KR" sz="1200"/>
-              <a:t>LLM은 센서를 "테스트를 많이 짠다"로 제안하고, 가이드 쪽을 비운다. 점검 1·3으로 되돌린다.</a:t>
+              <a:t>변이 테스트는 "주문한다"에 두지 않았다. 과제가 작아 값에 비해 얻는 것이 적다는 판단이며, 값이 싼 도구가 나오면 다시 본다.</a:t>
             </a:r>
           </a:p>
           <a:p>
             <a:pPr lvl="0"/>
             <a:r>
               <a:rPr lang="ko-KR" sz="1200"/>
-              <a:t>평가는 표의 줄 수보다 센서가 판정하는 것을 한 줄로 적었는지를 본다. 적을 수 없는 센서는 사람의 리뷰로 가야 한다.</a:t>
+              <a:t>수강생에게 묻는다 — 루프 안 센서가 2분이면 무엇이 일어나는가? 에이전트는 기다리고, 사람은 검사를 줄인다.</a:t>
             </a:r>
           </a:p>
         </p:txBody>
@@ -1531,14 +1457,21 @@
             <a:pPr lvl="0"/>
             <a:r>
               <a:rPr lang="ko-KR" sz="1200"/>
-              <a:t>실습 9의 하네스 배치가 실습 10의 입력이 된다. 거기서 두 번째 기능인 배송지 변경을 같은 하네스로 진행하며 실패를 만난다.</a:t>
+              <a:t>정기배송의 기대값은 회차 7개·만료일 2월 2일·회차 금액 10,000원이다. 모델 패키지는 code/s01/subscription/docs/에 있다.</a:t>
             </a:r>
           </a:p>
           <a:p>
             <a:pPr lvl="0"/>
             <a:r>
               <a:rPr lang="ko-KR" sz="1200"/>
-              <a:t>"세션 08. 실행 제약과 가드레일의 역할"과 이 세션이 예방과 탐지를 짝으로 맞췄다. 다음 세션은 탐지된 실패의 복구를 맡는다.</a:t>
+              <a:t>LLM은 센서를 "테스트를 많이 짠다"로 제안하고, 가이드 쪽을 비운다. 점검 1·3으로 되돌린다.</a:t>
+            </a:r>
+          </a:p>
+          <a:p>
+            <a:pPr lvl="0"/>
+            <a:r>
+              <a:rPr lang="ko-KR" sz="1200"/>
+              <a:t>평가는 표의 줄 수보다 센서가 판정하는 것을 한 줄로 적었는지를 본다. 적을 수 없는 센서는 사람의 리뷰로 가야 한다.</a:t>
             </a:r>
           </a:p>
         </p:txBody>
@@ -1599,21 +1532,14 @@
             <a:pPr lvl="0"/>
             <a:r>
               <a:rPr lang="ko-KR" sz="1200"/>
-              <a:t>회차 7개·만료일 2월 2일은 "세션 03. 요구의 구체화와 명세"의 실습 답에서 정한 교육용 값이다. 기대값을 지키는 것이 수용 기준을 지키는 것이다.</a:t>
+              <a:t>실습 9의 하네스 배치가 실습 10의 입력이 된다. 거기서 두 번째 기능인 배송지 변경을 같은 하네스로 진행하며 실패를 만난다.</a:t>
             </a:r>
           </a:p>
           <a:p>
             <a:pPr lvl="0"/>
             <a:r>
               <a:rPr lang="ko-KR" sz="1200"/>
-              <a:t>컴파일 줄의 가이드가 비어 있는 것은 빠뜨린 것이 아니다. 짝이 필요 없는 센서도 있다는 점을 보인다.</a:t>
-            </a:r>
-          </a:p>
-          <a:p>
-            <a:pPr lvl="0"/>
-            <a:r>
-              <a:rPr lang="ko-KR" sz="1200"/>
-              <a:t>두 표를 두 (안)으로 나눈 것은 실습 9의 결과물이 배치와 대응 둘이기 때문이다.</a:t>
+              <a:t>"세션 08. 실행 제약과 가드레일의 역할"과 이 세션이 예방과 탐지를 짝으로 맞췄다. 다음 세션은 탐지된 실패의 복구를 맡는다.</a:t>
             </a:r>
           </a:p>
         </p:txBody>
@@ -1674,21 +1600,21 @@
             <a:pPr lvl="0"/>
             <a:r>
               <a:rPr lang="ko-KR" sz="1200"/>
-              <a:t>공휴일 규칙은 "세션 08. 실행 제약과 가드레일의 역할"의 별첨에서 멈출 조건으로 남긴 항목이다. 센서로도 판정되지 않아 사람에게 남는다.</a:t>
+              <a:t>회차 7개·만료일 2월 2일은 "세션 03. 요구의 구체화와 명세"의 실습 답에서 정한 교육용 값이다. 기대값을 지키는 것이 수용 기준을 지키는 것이다.</a:t>
             </a:r>
           </a:p>
           <a:p>
             <a:pPr lvl="0"/>
             <a:r>
               <a:rPr lang="ko-KR" sz="1200"/>
-              <a:t>회차가 6개가 되는 실패는 명세의 빈칸을 가리킨다. 같은 입력으로 다시 돌려도 회차 수는 달라지지 않는다.</a:t>
+              <a:t>컴파일 줄의 가이드가 비어 있는 것은 빠뜨린 것이 아니다. 짝이 필요 없는 센서도 있다는 점을 보인다.</a:t>
             </a:r>
           </a:p>
           <a:p>
             <a:pPr lvl="0"/>
             <a:r>
               <a:rPr lang="ko-KR" sz="1200"/>
-              <a:t>세 줄의 되돌릴 곳이 모두 실습 10의 입력이 된다.</a:t>
+              <a:t>두 표를 두 (안)으로 나눈 것은 실습 9의 결과물이 배치와 대응 둘이기 때문이다.</a:t>
             </a:r>
           </a:p>
         </p:txBody>
@@ -1702,6 +1628,81 @@
 </file>
 
 <file path=ppt/notesSlides/notesSlide26.xml><?xml version="1.0" encoding="utf-8"?>
+<p:notes xmlns:a="http://schemas.openxmlformats.org/drawingml/2006/main" xmlns:r="http://schemas.openxmlformats.org/officeDocument/2006/relationships" xmlns:p="http://schemas.openxmlformats.org/presentationml/2006/main">
+  <p:cSld>
+    <p:spTree>
+      <p:nvGrpSpPr>
+        <p:cNvPr id="1" name=""/>
+        <p:cNvGrpSpPr/>
+        <p:nvPr/>
+      </p:nvGrpSpPr>
+      <p:grpSpPr>
+        <a:xfrm>
+          <a:off x="0" y="0"/>
+          <a:ext cx="0" cy="0"/>
+          <a:chOff x="0" y="0"/>
+          <a:chExt cx="0" cy="0"/>
+        </a:xfrm>
+      </p:grpSpPr>
+      <p:sp>
+        <p:nvSpPr>
+          <p:cNvPr id="2" name="슬라이드 이미지 개체 틀"/>
+          <p:cNvSpPr/>
+          <p:nvPr>
+            <p:ph type="sldImg" idx="2"/>
+          </p:nvPr>
+        </p:nvSpPr>
+        <p:spPr/>
+        <p:txBody>
+          <a:bodyPr/>
+          <a:lstStyle/>
+          <a:p/>
+        </p:txBody>
+      </p:sp>
+      <p:sp>
+        <p:nvSpPr>
+          <p:cNvPr id="3" name="슬라이드 노트 개체 틀"/>
+          <p:cNvSpPr/>
+          <p:nvPr>
+            <p:ph type="body" idx="3"/>
+          </p:nvPr>
+        </p:nvSpPr>
+        <p:spPr/>
+        <p:txBody>
+          <a:bodyPr/>
+          <a:lstStyle/>
+          <a:p>
+            <a:pPr lvl="0"/>
+            <a:r>
+              <a:rPr lang="ko-KR" sz="1200"/>
+              <a:t>공휴일 규칙은 "세션 08. 실행 제약과 가드레일의 역할"의 별첨에서 멈출 조건으로 남긴 항목이다. 센서로도 판정되지 않아 사람에게 남는다.</a:t>
+            </a:r>
+          </a:p>
+          <a:p>
+            <a:pPr lvl="0"/>
+            <a:r>
+              <a:rPr lang="ko-KR" sz="1200"/>
+              <a:t>회차가 6개가 되는 실패는 명세의 빈칸을 가리킨다. 같은 입력으로 다시 돌려도 회차 수는 달라지지 않는다.</a:t>
+            </a:r>
+          </a:p>
+          <a:p>
+            <a:pPr lvl="0"/>
+            <a:r>
+              <a:rPr lang="ko-KR" sz="1200"/>
+              <a:t>세 줄의 되돌릴 곳이 모두 실습 10의 입력이 된다.</a:t>
+            </a:r>
+          </a:p>
+        </p:txBody>
+      </p:sp>
+    </p:spTree>
+  </p:cSld>
+  <p:clrMapOvr>
+    <a:masterClrMapping/>
+  </p:clrMapOvr>
+</p:notes>
+</file>
+
+<file path=ppt/notesSlides/notesSlide27.xml><?xml version="1.0" encoding="utf-8"?>
 <p:notes xmlns:a="http://schemas.openxmlformats.org/drawingml/2006/main" xmlns:r="http://schemas.openxmlformats.org/officeDocument/2006/relationships" xmlns:p="http://schemas.openxmlformats.org/presentationml/2006/main">
   <p:cSld>
     <p:spTree>
@@ -4171,7 +4172,7 @@
                 <a:latin typeface="맑은 고딕"/>
                 <a:ea typeface="맑은 고딕"/>
               </a:rPr>
-              <a:t>"주문한다"의 하네스는 </a:t>
+              <a:t>에이전트에게 방향을 주는 자료는 앞 세션에서 이미 만들었다. 맥락 파일·작업 명세서·수용 기준이 </a:t>
             </a:r>
             <a:r>
               <a:rPr sz="1800" b="1">
@@ -4181,7 +4182,7 @@
                 <a:latin typeface="맑은 고딕"/>
                 <a:ea typeface="맑은 고딕"/>
               </a:rPr>
-              <a:t>가이드 셋과 센서 다섯</a:t>
+              <a:t>가이드</a:t>
             </a:r>
             <a:r>
               <a:rPr sz="1800" b="0">
@@ -4191,7 +4192,27 @@
                 <a:latin typeface="맑은 고딕"/>
                 <a:ea typeface="맑은 고딕"/>
               </a:rPr>
-              <a:t>이다. 가이드는 앞 세션의 산출물이 그대로 맡는다.</a:t>
+              <a:t>가 되고, 결과를 판정하는 </a:t>
+            </a:r>
+            <a:r>
+              <a:rPr sz="1800" b="1">
+                <a:solidFill>
+                  <a:srgbClr val="000000"/>
+                </a:solidFill>
+                <a:latin typeface="맑은 고딕"/>
+                <a:ea typeface="맑은 고딕"/>
+              </a:rPr>
+              <a:t>센서는 다섯</a:t>
+            </a:r>
+            <a:r>
+              <a:rPr sz="1800" b="0">
+                <a:solidFill>
+                  <a:srgbClr val="000000"/>
+                </a:solidFill>
+                <a:latin typeface="맑은 고딕"/>
+                <a:ea typeface="맑은 고딕"/>
+              </a:rPr>
+              <a:t>이다.</a:t>
             </a:r>
           </a:p>
           <a:p>
@@ -4214,7 +4235,7 @@
                 <a:latin typeface="맑은 고딕"/>
                 <a:ea typeface="맑은 고딕"/>
               </a:rPr>
-              <a:t>가이드 셋은 </a:t>
+              <a:t>가이드로 쓸 자료를 </a:t>
             </a:r>
             <a:r>
               <a:rPr sz="1800" b="1">
@@ -4234,7 +4255,7 @@
                 <a:latin typeface="맑은 고딕"/>
                 <a:ea typeface="맑은 고딕"/>
               </a:rPr>
-              <a:t>. 맥락 파일·작업 명세서·수용 기준이 하네스의 가이드 자리에 그대로 들어간다.</a:t>
+              <a:t>. 앞 세션에서 만든 맥락 파일·작업 명세서·수용 기준을 그대로 에이전트에게 준다.</a:t>
             </a:r>
           </a:p>
           <a:p>
@@ -4296,7 +4317,7 @@
         </p:nvSpPr>
         <p:spPr>
           <a:xfrm>
-            <a:off x="365760" y="3136392"/>
+            <a:off x="365760" y="3410712"/>
             <a:ext cx="8412480" cy="201168"/>
           </a:xfrm>
           <a:prstGeom prst="rect">
@@ -4340,7 +4361,7 @@
         </p:blipFill>
         <p:spPr>
           <a:xfrm>
-            <a:off x="1382861" y="3374136"/>
+            <a:off x="1382861" y="3648456"/>
             <a:ext cx="6378277" cy="1513214"/>
           </a:xfrm>
           <a:prstGeom prst="rect">
@@ -6479,7 +6500,7 @@
                 <a:latin typeface="맑은 고딕"/>
                 <a:ea typeface="맑은 고딕"/>
               </a:rPr>
-              <a:t>에이전트는 결제 연동을 </a:t>
+              <a:t>에이전트는 주문 서비스 안에서 결제 연동 객체를 </a:t>
             </a:r>
             <a:r>
               <a:rPr sz="1800" b="1">
@@ -6489,7 +6510,7 @@
                 <a:latin typeface="맑은 고딕"/>
                 <a:ea typeface="맑은 고딕"/>
               </a:rPr>
-              <a:t>주문 서비스 안에서 직접 조립</a:t>
+              <a:t>직접 생성하는 코드</a:t>
             </a:r>
             <a:r>
               <a:rPr sz="1800" b="0">
@@ -6499,7 +6520,7 @@
                 <a:latin typeface="맑은 고딕"/>
                 <a:ea typeface="맑은 고딕"/>
               </a:rPr>
-              <a:t>했다. 수용 테스트는 그대로 녹색이었다.</a:t>
+              <a:t>를 넣었다. 수용 테스트는 그대로 통과했다.</a:t>
             </a:r>
           </a:p>
           <a:p>
@@ -8191,7 +8212,7 @@
                 <a:latin typeface="맑은 고딕"/>
                 <a:ea typeface="맑은 고딕"/>
               </a:rPr>
-              <a:t>조립을 바깥으로</a:t>
+              <a:t>연동 객체를 바깥에서 받도록</a:t>
             </a:r>
             <a:r>
               <a:rPr sz="1800" b="0">
@@ -8201,7 +8222,7 @@
                 <a:latin typeface="맑은 고딕"/>
                 <a:ea typeface="맑은 고딕"/>
               </a:rPr>
-              <a:t> 돌렸다. 다시 돌린 센서는 </a:t>
+              <a:t> 고쳤다. 다시 돌린 센서는 </a:t>
             </a:r>
             <a:r>
               <a:rPr sz="1800" b="1">
@@ -8291,7 +8312,17 @@
                 <a:latin typeface="맑은 고딕"/>
                 <a:ea typeface="맑은 고딕"/>
               </a:rPr>
-              <a:t>수용 테스트와 LLM 심사</a:t>
+              <a:t>수용 테스트와 LLM 심사 </a:t>
+            </a:r>
+            <a:r>
+              <a:rPr sz="2000" b="1">
+                <a:solidFill>
+                  <a:srgbClr val="000000"/>
+                </a:solidFill>
+                <a:latin typeface="맑은 고딕"/>
+                <a:ea typeface="맑은 고딕"/>
+              </a:rPr>
+              <a:t>(1/2)</a:t>
             </a:r>
           </a:p>
           <a:p>
@@ -8407,7 +8438,7 @@
           </p:nvPr>
         </p:nvGraphicFramePr>
         <p:xfrm>
-          <a:off x="1997266" y="2112010"/>
+          <a:off x="1997266" y="2386330"/>
           <a:ext cx="5135880" cy="3873500"/>
         </p:xfrm>
         <a:graphic>
@@ -8907,7 +8938,7 @@
         <p:spPr>
           <a:xfrm>
             <a:off x="365760" y="960120"/>
-            <a:ext cx="8412480" cy="781278"/>
+            <a:ext cx="8412480" cy="1038316"/>
           </a:xfrm>
           <a:prstGeom prst="rect">
             <a:avLst/>
@@ -8937,7 +8968,7 @@
                 <a:latin typeface="맑은 고딕"/>
                 <a:ea typeface="맑은 고딕"/>
               </a:rPr>
-              <a:t>수용 테스트는 </a:t>
+              <a:t>수용 테스트는 미리 정한 </a:t>
             </a:r>
             <a:r>
               <a:rPr sz="1800" b="1">
@@ -8947,7 +8978,7 @@
                 <a:latin typeface="맑은 고딕"/>
                 <a:ea typeface="맑은 고딕"/>
               </a:rPr>
-              <a:t>정해 둔 네 예</a:t>
+              <a:t>네 가지 사례</a:t>
             </a:r>
             <a:r>
               <a:rPr sz="1800" b="0">
@@ -8957,7 +8988,7 @@
                 <a:latin typeface="맑은 고딕"/>
                 <a:ea typeface="맑은 고딕"/>
               </a:rPr>
-              <a:t>를 지키고, LLM 심사는 </a:t>
+              <a:t>에서 구현이 기대대로 동작하는지 확인한다. LLM 심사는 </a:t>
             </a:r>
             <a:r>
               <a:rPr sz="1800" b="1">
@@ -8967,7 +8998,7 @@
                 <a:latin typeface="맑은 고딕"/>
                 <a:ea typeface="맑은 고딕"/>
               </a:rPr>
-              <a:t>예로 적을 수 없는 것</a:t>
+              <a:t>사례로 적어 두기 어려운</a:t>
             </a:r>
             <a:r>
               <a:rPr sz="1800" b="0">
@@ -8977,7 +9008,7 @@
                 <a:latin typeface="맑은 고딕"/>
                 <a:ea typeface="맑은 고딕"/>
               </a:rPr>
-              <a:t>을 본다.</a:t>
+              <a:t> 코드의 의미와 구조를 검토한다.</a:t>
             </a:r>
           </a:p>
         </p:txBody>
@@ -9061,7 +9092,7 @@
         </p:nvSpPr>
         <p:spPr>
           <a:xfrm>
-            <a:off x="365760" y="1813560"/>
+            <a:off x="365760" y="2087880"/>
             <a:ext cx="8412480" cy="222250"/>
           </a:xfrm>
           <a:prstGeom prst="rect">
@@ -9092,244 +9123,6 @@
                 <a:ea typeface="맑은 고딕"/>
               </a:rPr>
               <a:t>LLM 심사에 맡기는 것과 맡기지 않는 것</a:t>
-            </a:r>
-          </a:p>
-        </p:txBody>
-      </p:sp>
-      <p:sp>
-        <p:nvSpPr>
-          <p:cNvPr id="15" name="TextBox 12">
-            <a:extLst>
-              <a:ext uri="{FF2B5EF4-FFF2-40B4-BE49-F238E27FC236}">
-                <a16:creationId xmlns:a16="http://schemas.microsoft.com/office/drawing/2014/main" id="{654EDDB4-901F-3D48-A715-17D163E8A7AC}"/>
-              </a:ext>
-            </a:extLst>
-          </p:cNvPr>
-          <p:cNvSpPr txBox="1"/>
-          <p:nvPr/>
-        </p:nvSpPr>
-        <p:spPr>
-          <a:xfrm>
-            <a:off x="365760" y="3492610"/>
-            <a:ext cx="8412480" cy="2802529"/>
-          </a:xfrm>
-          <a:prstGeom prst="rect">
-            <a:avLst/>
-          </a:prstGeom>
-          <a:noFill/>
-        </p:spPr>
-        <p:txBody>
-          <a:bodyPr wrap="square">
-            <a:spAutoFit/>
-          </a:bodyPr>
-          <a:lstStyle/>
-          <a:p>
-            <a:pPr lvl="2" marL="723900" indent="-368300">
-              <a:spcBef>
-                <a:spcPts val="600"/>
-              </a:spcBef>
-              <a:spcAft>
-                <a:spcPts val="600"/>
-              </a:spcAft>
-              <a:buSzPct val="90000"/>
-              <a:buFont typeface="Wingdings" pitchFamily="2" charset="2"/>
-              <a:buChar char=""/>
-            </a:pPr>
-            <a:r>
-              <a:rPr sz="1800" b="0">
-                <a:solidFill>
-                  <a:srgbClr val="000000"/>
-                </a:solidFill>
-                <a:latin typeface="맑은 고딕"/>
-                <a:ea typeface="맑은 고딕"/>
-              </a:rPr>
-              <a:t>추론적 센서는 비결정적이어도 </a:t>
-            </a:r>
-            <a:r>
-              <a:rPr sz="1800" b="1">
-                <a:solidFill>
-                  <a:srgbClr val="000000"/>
-                </a:solidFill>
-                <a:latin typeface="맑은 고딕"/>
-                <a:ea typeface="맑은 고딕"/>
-              </a:rPr>
-              <a:t>과제에 맞는 강한 모델</a:t>
-            </a:r>
-            <a:r>
-              <a:rPr sz="1800" b="0">
-                <a:solidFill>
-                  <a:srgbClr val="000000"/>
-                </a:solidFill>
-                <a:latin typeface="맑은 고딕"/>
-                <a:ea typeface="맑은 고딕"/>
-              </a:rPr>
-              <a:t>과 함께 쓰면 결과를 더 믿을 수 있게 해 준다</a:t>
-            </a:r>
-            <a:r>
-              <a:rPr sz="1000" b="0">
-                <a:solidFill>
-                  <a:srgbClr val="000000"/>
-                </a:solidFill>
-                <a:latin typeface="맑은 고딕"/>
-                <a:ea typeface="맑은 고딕"/>
-              </a:rPr>
-              <a:t>, </a:t>
-            </a:r>
-            <a:r>
-              <a:rPr sz="1000" b="0">
-                <a:solidFill>
-                  <a:srgbClr val="000000"/>
-                </a:solidFill>
-                <a:latin typeface="맑은 고딕"/>
-                <a:ea typeface="맑은 고딕"/>
-              </a:rPr>
-              <a:t>"In spite of their non-determinism, inferential sensors can particularly increase our trust when used with a strong model, or rather a model that is suitable to the task at hand.", [Böckeler 2026a]</a:t>
-            </a:r>
-          </a:p>
-          <a:p>
-            <a:pPr lvl="3" marL="1077913" indent="-354013">
-              <a:spcBef>
-                <a:spcPts val="600"/>
-              </a:spcBef>
-              <a:spcAft>
-                <a:spcPts val="600"/>
-              </a:spcAft>
-              <a:buSzPct val="90000"/>
-              <a:buFont typeface="Wingdings" pitchFamily="2" charset="2"/>
-              <a:buChar char=""/>
-            </a:pPr>
-            <a:r>
-              <a:rPr sz="1600" b="0">
-                <a:solidFill>
-                  <a:srgbClr val="000000"/>
-                </a:solidFill>
-                <a:latin typeface="맑은 고딕"/>
-                <a:ea typeface="맑은 고딕"/>
-              </a:rPr>
-              <a:t>중요한 일이라면 LLM으로 하는 분석은 </a:t>
-            </a:r>
-            <a:r>
-              <a:rPr sz="1600" b="1">
-                <a:solidFill>
-                  <a:srgbClr val="000000"/>
-                </a:solidFill>
-                <a:latin typeface="맑은 고딕"/>
-                <a:ea typeface="맑은 고딕"/>
-              </a:rPr>
-              <a:t>여러 번 돌려 보는 것</a:t>
-            </a:r>
-            <a:r>
-              <a:rPr sz="1600" b="0">
-                <a:solidFill>
-                  <a:srgbClr val="000000"/>
-                </a:solidFill>
-                <a:latin typeface="맑은 고딕"/>
-                <a:ea typeface="맑은 고딕"/>
-              </a:rPr>
-              <a:t>이 낫다 — 한 번에는 다 보이지 않는다</a:t>
-            </a:r>
-            <a:r>
-              <a:rPr sz="1000" b="0">
-                <a:solidFill>
-                  <a:srgbClr val="000000"/>
-                </a:solidFill>
-                <a:latin typeface="맑은 고딕"/>
-                <a:ea typeface="맑은 고딕"/>
-              </a:rPr>
-              <a:t>, </a:t>
-            </a:r>
-            <a:r>
-              <a:rPr sz="1000" b="0">
-                <a:solidFill>
-                  <a:srgbClr val="000000"/>
-                </a:solidFill>
-                <a:latin typeface="맑은 고딕"/>
-                <a:ea typeface="맑은 고딕"/>
-              </a:rPr>
-              <a:t>"A useful reminder that when it matters, it's often worth running an LLM-based analysis multiple times, to get a fuller picture."</a:t>
-            </a:r>
-            <a:r>
-              <a:rPr sz="1000" b="0">
-                <a:solidFill>
-                  <a:srgbClr val="000000"/>
-                </a:solidFill>
-                <a:latin typeface="맑은 고딕"/>
-                <a:ea typeface="맑은 고딕"/>
-              </a:rPr>
-              <a:t>, </a:t>
-            </a:r>
-            <a:r>
-              <a:rPr sz="1000" b="0">
-                <a:solidFill>
-                  <a:srgbClr val="000000"/>
-                </a:solidFill>
-                <a:latin typeface="맑은 고딕"/>
-                <a:ea typeface="맑은 고딕"/>
-              </a:rPr>
-              <a:t>[Böckeler 2026b]</a:t>
-            </a:r>
-          </a:p>
-          <a:p>
-            <a:pPr lvl="2" marL="723900" indent="-368300">
-              <a:spcBef>
-                <a:spcPts val="600"/>
-              </a:spcBef>
-              <a:spcAft>
-                <a:spcPts val="600"/>
-              </a:spcAft>
-              <a:buSzPct val="90000"/>
-              <a:buFont typeface="Wingdings" pitchFamily="2" charset="2"/>
-              <a:buChar char=""/>
-            </a:pPr>
-            <a:r>
-              <a:rPr sz="1800" b="0">
-                <a:solidFill>
-                  <a:srgbClr val="000000"/>
-                </a:solidFill>
-                <a:latin typeface="맑은 고딕"/>
-                <a:ea typeface="맑은 고딕"/>
-              </a:rPr>
-              <a:t>맡기지 않는 쪽은 </a:t>
-            </a:r>
-            <a:r>
-              <a:rPr sz="1800" b="1">
-                <a:solidFill>
-                  <a:srgbClr val="000000"/>
-                </a:solidFill>
-                <a:latin typeface="맑은 고딕"/>
-                <a:ea typeface="맑은 고딕"/>
-              </a:rPr>
-              <a:t>기대값이 있어</a:t>
-            </a:r>
-            <a:r>
-              <a:rPr sz="1800" b="0">
-                <a:solidFill>
-                  <a:srgbClr val="000000"/>
-                </a:solidFill>
-                <a:latin typeface="맑은 고딕"/>
-                <a:ea typeface="맑은 고딕"/>
-              </a:rPr>
-              <a:t> 테스트가 더 싸고 흔들리지 않는다. LLM 심사의 결과는 통과·실패가 아니라 </a:t>
-            </a:r>
-            <a:r>
-              <a:rPr sz="1800" b="1">
-                <a:solidFill>
-                  <a:srgbClr val="000000"/>
-                </a:solidFill>
-                <a:latin typeface="맑은 고딕"/>
-                <a:ea typeface="맑은 고딕"/>
-              </a:rPr>
-              <a:t>지적</a:t>
-            </a:r>
-            <a:r>
-              <a:rPr sz="1800" b="0">
-                <a:solidFill>
-                  <a:srgbClr val="000000"/>
-                </a:solidFill>
-                <a:latin typeface="맑은 고딕"/>
-                <a:ea typeface="맑은 고딕"/>
-              </a:rPr>
-              <a:t>이며, 받아들일지는 확인 지점에서 사람이 정한다.</a:t>
             </a:r>
           </a:p>
         </p:txBody>
@@ -9399,7 +9192,29 @@
                 <a:latin typeface="맑은 고딕"/>
                 <a:ea typeface="맑은 고딕"/>
               </a:rPr>
-              <a:t>07. 고치는 방법을 담은 메시지</a:t>
+              <a:t>수용 테스트와 LLM 심사 </a:t>
+            </a:r>
+            <a:r>
+              <a:rPr sz="2000" b="1">
+                <a:solidFill>
+                  <a:srgbClr val="000000"/>
+                </a:solidFill>
+                <a:latin typeface="맑은 고딕"/>
+                <a:ea typeface="맑은 고딕"/>
+              </a:rPr>
+              <a:t>(2/2)</a:t>
+            </a:r>
+          </a:p>
+          <a:p>
+            <a:r>
+              <a:rPr sz="1100" b="1">
+                <a:solidFill>
+                  <a:srgbClr val="000000"/>
+                </a:solidFill>
+                <a:latin typeface="맑은 고딕"/>
+                <a:ea typeface="맑은 고딕"/>
+              </a:rPr>
+              <a:t>06. 주문한다의 하네스</a:t>
             </a:r>
           </a:p>
         </p:txBody>
@@ -9540,67 +9355,6 @@
           </a:bodyPr>
           <a:lstStyle/>
           <a:p>
-            <a:pPr marL="0" indent="0">
-              <a:spcBef>
-                <a:spcPts val="600"/>
-              </a:spcBef>
-              <a:spcAft>
-                <a:spcPts val="600"/>
-              </a:spcAft>
-              <a:buNone/>
-            </a:pPr>
-            <a:r>
-              <a:rPr sz="1800" b="0">
-                <a:solidFill>
-                  <a:srgbClr val="000000"/>
-                </a:solidFill>
-                <a:latin typeface="맑은 고딕"/>
-                <a:ea typeface="맑은 고딕"/>
-              </a:rPr>
-              <a:t>센서의 메시지는 </a:t>
-            </a:r>
-            <a:r>
-              <a:rPr sz="1800" b="1">
-                <a:solidFill>
-                  <a:srgbClr val="000000"/>
-                </a:solidFill>
-                <a:latin typeface="맑은 고딕"/>
-                <a:ea typeface="맑은 고딕"/>
-              </a:rPr>
-              <a:t>무엇이 틀렸는지</a:t>
-            </a:r>
-            <a:r>
-              <a:rPr sz="1800" b="0">
-                <a:solidFill>
-                  <a:srgbClr val="000000"/>
-                </a:solidFill>
-                <a:latin typeface="맑은 고딕"/>
-                <a:ea typeface="맑은 고딕"/>
-              </a:rPr>
-              <a:t>가 아니라 </a:t>
-            </a:r>
-            <a:r>
-              <a:rPr sz="1800" b="1">
-                <a:solidFill>
-                  <a:srgbClr val="000000"/>
-                </a:solidFill>
-                <a:latin typeface="맑은 고딕"/>
-                <a:ea typeface="맑은 고딕"/>
-              </a:rPr>
-              <a:t>어떻게 고칠지</a:t>
-            </a:r>
-            <a:r>
-              <a:rPr sz="1800" b="0">
-                <a:solidFill>
-                  <a:srgbClr val="000000"/>
-                </a:solidFill>
-                <a:latin typeface="맑은 고딕"/>
-                <a:ea typeface="맑은 고딕"/>
-              </a:rPr>
-              <a:t>를 말해야 에이전트가 스스로 고친다.</a:t>
-            </a:r>
-          </a:p>
-          <a:p>
             <a:pPr lvl="2" marL="723900" indent="-368300">
               <a:spcBef>
                 <a:spcPts val="600"/>
@@ -9613,6 +9367,16 @@
               <a:buChar char=""/>
             </a:pPr>
             <a:r>
+              <a:rPr sz="1800" b="0">
+                <a:solidFill>
+                  <a:srgbClr val="000000"/>
+                </a:solidFill>
+                <a:latin typeface="맑은 고딕"/>
+                <a:ea typeface="맑은 고딕"/>
+              </a:rPr>
+              <a:t>추론적 센서는 비결정적이어도 </a:t>
+            </a:r>
+            <a:r>
               <a:rPr sz="1800" b="1">
                 <a:solidFill>
                   <a:srgbClr val="000000"/>
@@ -9620,7 +9384,7 @@
                 <a:latin typeface="맑은 고딕"/>
                 <a:ea typeface="맑은 고딕"/>
               </a:rPr>
-              <a:t>고치는 방법을 함께 담은</a:t>
+              <a:t>과제에 맞는 강한 모델</a:t>
             </a:r>
             <a:r>
               <a:rPr sz="1800" b="0">
@@ -9630,7 +9394,7 @@
                 <a:latin typeface="맑은 고딕"/>
                 <a:ea typeface="맑은 고딕"/>
               </a:rPr>
-              <a:t> 린터 메시지는 좋은 쪽으로 쓰는 프롬프트 주입이다</a:t>
+              <a:t>과 함께 쓰면 결과를 더 믿을 수 있게 해 준다</a:t>
             </a:r>
             <a:r>
               <a:rPr sz="1000" b="0">
@@ -9650,7 +9414,110 @@
                 <a:latin typeface="맑은 고딕"/>
                 <a:ea typeface="맑은 고딕"/>
               </a:rPr>
-              <a:t>"custom linter messages that include instructions for the self-correction - a positive kind of prompt injection", [Böckeler 2026a]</a:t>
+              <a:t>"In spite of their non-determinism, inferential sensors can particularly increase our trust when used with a strong model, or rather a model that is suitable to the task at hand."</a:t>
+            </a:r>
+            <a:r>
+              <a:rPr sz="1000" b="0">
+                <a:solidFill>
+                  <a:srgbClr val="000000"/>
+                </a:solidFill>
+                <a:latin typeface="맑은 고딕"/>
+                <a:ea typeface="맑은 고딕"/>
+              </a:rPr>
+              <a:t>, </a:t>
+            </a:r>
+            <a:r>
+              <a:rPr sz="1000" b="0">
+                <a:solidFill>
+                  <a:srgbClr val="000000"/>
+                </a:solidFill>
+                <a:latin typeface="맑은 고딕"/>
+                <a:ea typeface="맑은 고딕"/>
+              </a:rPr>
+              <a:t>[Böckeler 2026a]</a:t>
+            </a:r>
+          </a:p>
+          <a:p>
+            <a:pPr lvl="3" marL="1077913" indent="-354013">
+              <a:spcBef>
+                <a:spcPts val="600"/>
+              </a:spcBef>
+              <a:spcAft>
+                <a:spcPts val="600"/>
+              </a:spcAft>
+              <a:buSzPct val="90000"/>
+              <a:buFont typeface="Wingdings" pitchFamily="2" charset="2"/>
+              <a:buChar char=""/>
+            </a:pPr>
+            <a:r>
+              <a:rPr sz="1600" b="0">
+                <a:solidFill>
+                  <a:srgbClr val="000000"/>
+                </a:solidFill>
+                <a:latin typeface="맑은 고딕"/>
+                <a:ea typeface="맑은 고딕"/>
+              </a:rPr>
+              <a:t>중요한 일이라면 LLM으로 하는 분석은 </a:t>
+            </a:r>
+            <a:r>
+              <a:rPr sz="1600" b="1">
+                <a:solidFill>
+                  <a:srgbClr val="000000"/>
+                </a:solidFill>
+                <a:latin typeface="맑은 고딕"/>
+                <a:ea typeface="맑은 고딕"/>
+              </a:rPr>
+              <a:t>여러 번 돌려 보는 것</a:t>
+            </a:r>
+            <a:r>
+              <a:rPr sz="1600" b="0">
+                <a:solidFill>
+                  <a:srgbClr val="000000"/>
+                </a:solidFill>
+                <a:latin typeface="맑은 고딕"/>
+                <a:ea typeface="맑은 고딕"/>
+              </a:rPr>
+              <a:t>이 낫다 — 한 번에는 다 보이지 않는다</a:t>
+            </a:r>
+            <a:r>
+              <a:rPr sz="1000" b="0">
+                <a:solidFill>
+                  <a:srgbClr val="000000"/>
+                </a:solidFill>
+                <a:latin typeface="맑은 고딕"/>
+                <a:ea typeface="맑은 고딕"/>
+              </a:rPr>
+              <a:t>, </a:t>
+            </a:r>
+            <a:r>
+              <a:rPr sz="1000" b="0">
+                <a:solidFill>
+                  <a:srgbClr val="000000"/>
+                </a:solidFill>
+                <a:latin typeface="맑은 고딕"/>
+                <a:ea typeface="맑은 고딕"/>
+              </a:rPr>
+              <a:t>"A useful reminder that when it matters, it's often worth running an LLM-based analysis multiple times, to get a fuller picture."</a:t>
+            </a:r>
+            <a:r>
+              <a:rPr sz="1000" b="0">
+                <a:solidFill>
+                  <a:srgbClr val="000000"/>
+                </a:solidFill>
+                <a:latin typeface="맑은 고딕"/>
+                <a:ea typeface="맑은 고딕"/>
+              </a:rPr>
+              <a:t>, </a:t>
+            </a:r>
+            <a:r>
+              <a:rPr sz="1000" b="0">
+                <a:solidFill>
+                  <a:srgbClr val="000000"/>
+                </a:solidFill>
+                <a:latin typeface="맑은 고딕"/>
+                <a:ea typeface="맑은 고딕"/>
+              </a:rPr>
+              <a:t>[Böckeler 2026b]</a:t>
             </a:r>
           </a:p>
           <a:p>
@@ -9666,6 +9533,16 @@
               <a:buChar char=""/>
             </a:pPr>
             <a:r>
+              <a:rPr sz="1800" b="0">
+                <a:solidFill>
+                  <a:srgbClr val="000000"/>
+                </a:solidFill>
+                <a:latin typeface="맑은 고딕"/>
+                <a:ea typeface="맑은 고딕"/>
+              </a:rPr>
+              <a:t>맡기지 않는 쪽은 </a:t>
+            </a:r>
+            <a:r>
               <a:rPr sz="1800" b="1">
                 <a:solidFill>
                   <a:srgbClr val="000000"/>
@@ -9673,7 +9550,7 @@
                 <a:latin typeface="맑은 고딕"/>
                 <a:ea typeface="맑은 고딕"/>
               </a:rPr>
-              <a:t>판정만 적은 메시지</a:t>
+              <a:t>기대값이 있어</a:t>
             </a:r>
             <a:r>
               <a:rPr sz="1800" b="0">
@@ -9683,74 +9560,8 @@
                 <a:latin typeface="맑은 고딕"/>
                 <a:ea typeface="맑은 고딕"/>
               </a:rPr>
-              <a:t> —</a:t>
-            </a:r>
-            <a:r>
-              <a:rPr sz="1600" b="0">
-                <a:solidFill>
-                  <a:srgbClr val="000000"/>
-                </a:solidFill>
-                <a:latin typeface="맑은 고딕"/>
-                <a:ea typeface="맑은 고딕"/>
-              </a:rPr>
-              <a:t> "의존 규칙 위반: order → paymentadapter"</a:t>
-            </a:r>
-          </a:p>
-          <a:p>
-            <a:pPr lvl="3" marL="1077913" indent="-354013">
-              <a:spcBef>
-                <a:spcPts val="600"/>
-              </a:spcBef>
-              <a:spcAft>
-                <a:spcPts val="600"/>
-              </a:spcAft>
-              <a:buSzPct val="90000"/>
-              <a:buFont typeface="Wingdings" pitchFamily="2" charset="2"/>
-              <a:buChar char=""/>
-            </a:pPr>
-            <a:r>
-              <a:rPr sz="1600" b="0">
-                <a:solidFill>
-                  <a:srgbClr val="000000"/>
-                </a:solidFill>
-                <a:latin typeface="맑은 고딕"/>
-                <a:ea typeface="맑은 고딕"/>
-              </a:rPr>
-              <a:t>에이전트는 규칙을 </a:t>
-            </a:r>
-            <a:r>
-              <a:rPr sz="1600" b="1">
-                <a:solidFill>
-                  <a:srgbClr val="000000"/>
-                </a:solidFill>
-                <a:latin typeface="맑은 고딕"/>
-                <a:ea typeface="맑은 고딕"/>
-              </a:rPr>
-              <a:t>피할 길</a:t>
-            </a:r>
-            <a:r>
-              <a:rPr sz="1600" b="0">
-                <a:solidFill>
-                  <a:srgbClr val="000000"/>
-                </a:solidFill>
-                <a:latin typeface="맑은 고딕"/>
-                <a:ea typeface="맑은 고딕"/>
-              </a:rPr>
-              <a:t>을 찾고, 다음 시도에 다른 모양의 같은 위반이 나온다</a:t>
-            </a:r>
-          </a:p>
-          <a:p>
-            <a:pPr lvl="2" marL="723900" indent="-368300">
-              <a:spcBef>
-                <a:spcPts val="600"/>
-              </a:spcBef>
-              <a:spcAft>
-                <a:spcPts val="600"/>
-              </a:spcAft>
-              <a:buSzPct val="90000"/>
-              <a:buFont typeface="Wingdings" pitchFamily="2" charset="2"/>
-              <a:buChar char=""/>
-            </a:pPr>
+              <a:t> 테스트가 더 싸고 흔들리지 않는다. LLM 심사의 결과는 통과·실패가 아니라 </a:t>
+            </a:r>
             <a:r>
               <a:rPr sz="1800" b="1">
                 <a:solidFill>
@@ -9759,7 +9570,7 @@
                 <a:latin typeface="맑은 고딕"/>
                 <a:ea typeface="맑은 고딕"/>
               </a:rPr>
-              <a:t>고치는 방법을 담은 메시지</a:t>
+              <a:t>지적</a:t>
             </a:r>
             <a:r>
               <a:rPr sz="1800" b="0">
@@ -9769,146 +9580,7 @@
                 <a:latin typeface="맑은 고딕"/>
                 <a:ea typeface="맑은 고딕"/>
               </a:rPr>
-              <a:t> —</a:t>
-            </a:r>
-            <a:r>
-              <a:rPr sz="1600" b="0">
-                <a:solidFill>
-                  <a:srgbClr val="000000"/>
-                </a:solidFill>
-                <a:latin typeface="맑은 고딕"/>
-                <a:ea typeface="맑은 고딕"/>
-              </a:rPr>
-              <a:t> "order는 payment.PaymentGateway에 의존하고, 연동 객체는 생성자로 받는다"</a:t>
-            </a:r>
-          </a:p>
-          <a:p>
-            <a:pPr lvl="3" marL="1077913" indent="-354013">
-              <a:spcBef>
-                <a:spcPts val="600"/>
-              </a:spcBef>
-              <a:spcAft>
-                <a:spcPts val="600"/>
-              </a:spcAft>
-              <a:buSzPct val="90000"/>
-              <a:buFont typeface="Wingdings" pitchFamily="2" charset="2"/>
-              <a:buChar char=""/>
-            </a:pPr>
-            <a:r>
-              <a:rPr sz="1600" b="0">
-                <a:solidFill>
-                  <a:srgbClr val="000000"/>
-                </a:solidFill>
-                <a:latin typeface="맑은 고딕"/>
-                <a:ea typeface="맑은 고딕"/>
-              </a:rPr>
-              <a:t>적힌 길이 </a:t>
-            </a:r>
-            <a:r>
-              <a:rPr sz="1600" b="1">
-                <a:solidFill>
-                  <a:srgbClr val="000000"/>
-                </a:solidFill>
-                <a:latin typeface="맑은 고딕"/>
-                <a:ea typeface="맑은 고딕"/>
-              </a:rPr>
-              <a:t>가장 쉬운 길</a:t>
-            </a:r>
-            <a:r>
-              <a:rPr sz="1600" b="0">
-                <a:solidFill>
-                  <a:srgbClr val="000000"/>
-                </a:solidFill>
-                <a:latin typeface="맑은 고딕"/>
-                <a:ea typeface="맑은 고딕"/>
-              </a:rPr>
-              <a:t>이므로 그대로 고치고, 다음 시도에 통과한다</a:t>
-            </a:r>
-          </a:p>
-          <a:p>
-            <a:pPr lvl="2" marL="723900" indent="-368300">
-              <a:spcBef>
-                <a:spcPts val="600"/>
-              </a:spcBef>
-              <a:spcAft>
-                <a:spcPts val="600"/>
-              </a:spcAft>
-              <a:buSzPct val="90000"/>
-              <a:buFont typeface="Wingdings" pitchFamily="2" charset="2"/>
-              <a:buChar char=""/>
-            </a:pPr>
-            <a:r>
-              <a:rPr sz="1800" b="0">
-                <a:solidFill>
-                  <a:srgbClr val="000000"/>
-                </a:solidFill>
-                <a:latin typeface="맑은 고딕"/>
-                <a:ea typeface="맑은 고딕"/>
-              </a:rPr>
-              <a:t>센서의 출력은 그대로 </a:t>
-            </a:r>
-            <a:r>
-              <a:rPr sz="1800" b="1">
-                <a:solidFill>
-                  <a:srgbClr val="000000"/>
-                </a:solidFill>
-                <a:latin typeface="맑은 고딕"/>
-                <a:ea typeface="맑은 고딕"/>
-              </a:rPr>
-              <a:t>에이전트의 맥락</a:t>
-            </a:r>
-            <a:r>
-              <a:rPr sz="1800" b="0">
-                <a:solidFill>
-                  <a:srgbClr val="000000"/>
-                </a:solidFill>
-                <a:latin typeface="맑은 고딕"/>
-                <a:ea typeface="맑은 고딕"/>
-              </a:rPr>
-              <a:t>이 된다. 메시지를 쓰는 일은 맥락을 쓰는 일이다.</a:t>
-            </a:r>
-          </a:p>
-          <a:p>
-            <a:pPr lvl="2" marL="723900" indent="-368300">
-              <a:spcBef>
-                <a:spcPts val="600"/>
-              </a:spcBef>
-              <a:spcAft>
-                <a:spcPts val="600"/>
-              </a:spcAft>
-              <a:buSzPct val="90000"/>
-              <a:buFont typeface="Wingdings" pitchFamily="2" charset="2"/>
-              <a:buChar char=""/>
-            </a:pPr>
-            <a:r>
-              <a:rPr sz="1800" b="0">
-                <a:solidFill>
-                  <a:srgbClr val="000000"/>
-                </a:solidFill>
-                <a:latin typeface="맑은 고딕"/>
-                <a:ea typeface="맑은 고딕"/>
-              </a:rPr>
-              <a:t>같은 메시지가 </a:t>
-            </a:r>
-            <a:r>
-              <a:rPr sz="1800" b="1">
-                <a:solidFill>
-                  <a:srgbClr val="000000"/>
-                </a:solidFill>
-                <a:latin typeface="맑은 고딕"/>
-                <a:ea typeface="맑은 고딕"/>
-              </a:rPr>
-              <a:t>사람에게도 이득</a:t>
-            </a:r>
-            <a:r>
-              <a:rPr sz="1800" b="0">
-                <a:solidFill>
-                  <a:srgbClr val="000000"/>
-                </a:solidFill>
-                <a:latin typeface="맑은 고딕"/>
-                <a:ea typeface="맑은 고딕"/>
-              </a:rPr>
-              <a:t>이다. 리뷰에서 "왜 막혔는지"를 다시 설명하지 않아도 된다.</a:t>
+              <a:t>이며, 받아들일지는 확인 지점에서 사람이 정한다.</a:t>
             </a:r>
           </a:p>
         </p:txBody>
@@ -9927,6 +9599,605 @@
 </file>
 
 <file path=ppt/slides/slide17.xml><?xml version="1.0" encoding="utf-8"?>
+<p:sld xmlns:a="http://schemas.openxmlformats.org/drawingml/2006/main" xmlns:r="http://schemas.openxmlformats.org/officeDocument/2006/relationships" xmlns:p="http://schemas.openxmlformats.org/presentationml/2006/main">
+  <p:cSld>
+    <p:spTree>
+      <p:nvGrpSpPr>
+        <p:cNvPr id="1" name="">
+          <a:extLst>
+            <a:ext uri="{FF2B5EF4-FFF2-40B4-BE49-F238E27FC236}">
+              <a16:creationId xmlns:a16="http://schemas.microsoft.com/office/drawing/2014/main" id="{8E4F1F13-426B-086B-7D8C-9A58A0F879DB}"/>
+            </a:ext>
+          </a:extLst>
+        </p:cNvPr>
+        <p:cNvGrpSpPr/>
+        <p:nvPr/>
+      </p:nvGrpSpPr>
+      <p:grpSpPr>
+        <a:xfrm>
+          <a:off x="0" y="0"/>
+          <a:ext cx="0" cy="0"/>
+          <a:chOff x="0" y="0"/>
+          <a:chExt cx="0" cy="0"/>
+        </a:xfrm>
+      </p:grpSpPr>
+      <p:sp>
+        <p:nvSpPr>
+          <p:cNvPr id="2" name="제목 1">
+            <a:extLst>
+              <a:ext uri="{FF2B5EF4-FFF2-40B4-BE49-F238E27FC236}">
+                <a16:creationId xmlns:a16="http://schemas.microsoft.com/office/drawing/2014/main" id="{AA26A92D-924E-0575-9551-F8FD7BFD3FAD}"/>
+              </a:ext>
+            </a:extLst>
+          </p:cNvPr>
+          <p:cNvSpPr>
+            <a:spLocks noGrp="1"/>
+          </p:cNvSpPr>
+          <p:nvPr>
+            <p:ph type="title"/>
+          </p:nvPr>
+        </p:nvSpPr>
+        <p:spPr/>
+        <p:txBody>
+          <a:bodyPr/>
+          <a:lstStyle/>
+          <a:p>
+            <a:r>
+              <a:rPr sz="2400" b="1">
+                <a:solidFill>
+                  <a:srgbClr val="000000"/>
+                </a:solidFill>
+                <a:latin typeface="맑은 고딕"/>
+                <a:ea typeface="맑은 고딕"/>
+              </a:rPr>
+              <a:t>07. 고치는 방법을 담은 메시지</a:t>
+            </a:r>
+          </a:p>
+        </p:txBody>
+      </p:sp>
+      <p:sp>
+        <p:nvSpPr>
+          <p:cNvPr id="3" name="슬라이드 번호 개체 틀 2">
+            <a:extLst>
+              <a:ext uri="{FF2B5EF4-FFF2-40B4-BE49-F238E27FC236}">
+                <a16:creationId xmlns:a16="http://schemas.microsoft.com/office/drawing/2014/main" id="{12CF30EE-4DFD-8063-56B8-B8689E76DFCA}"/>
+              </a:ext>
+            </a:extLst>
+          </p:cNvPr>
+          <p:cNvSpPr>
+            <a:spLocks noGrp="1"/>
+          </p:cNvSpPr>
+          <p:nvPr>
+            <p:ph type="sldNum" sz="quarter" idx="10"/>
+          </p:nvPr>
+        </p:nvSpPr>
+        <p:spPr/>
+        <p:txBody>
+          <a:bodyPr/>
+          <a:lstStyle/>
+          <a:p>
+            <a:pPr>
+              <a:defRPr/>
+            </a:pPr>
+            <a:r>
+              <a:rPr lang="en-US" altLang="ko-KR">
+                <a:solidFill>
+                  <a:prstClr val="black"/>
+                </a:solidFill>
+              </a:rPr>
+              <a:t>- 17 -</a:t>
+            </a:r>
+          </a:p>
+        </p:txBody>
+      </p:sp>
+      <p:sp>
+        <p:nvSpPr>
+          <p:cNvPr id="5" name="텍스트 개체 틀 4">
+            <a:extLst>
+              <a:ext uri="{FF2B5EF4-FFF2-40B4-BE49-F238E27FC236}">
+                <a16:creationId xmlns:a16="http://schemas.microsoft.com/office/drawing/2014/main" id="{D66274C8-E16F-5AEB-614B-D8D32DA3E8C6}"/>
+              </a:ext>
+            </a:extLst>
+          </p:cNvPr>
+          <p:cNvSpPr>
+            <a:spLocks noGrp="1"/>
+          </p:cNvSpPr>
+          <p:nvPr>
+            <p:ph type="body" sz="quarter" idx="11"/>
+          </p:nvPr>
+        </p:nvSpPr>
+        <p:spPr/>
+        <p:txBody>
+          <a:bodyPr/>
+          <a:lstStyle/>
+          <a:p>
+            <a:r>
+              <a:rPr kumimoji="1" lang="en-US" altLang="ko-KR" sz="1400" dirty="0" err="1"/>
+              <a:t>09. 검증 하네스·결과 점검·피드백</a:t>
+            </a:r>
+          </a:p>
+        </p:txBody>
+      </p:sp>
+      <p:sp>
+        <p:nvSpPr>
+          <p:cNvPr id="6" name="텍스트 개체 틀 5">
+            <a:extLst>
+              <a:ext uri="{FF2B5EF4-FFF2-40B4-BE49-F238E27FC236}">
+                <a16:creationId xmlns:a16="http://schemas.microsoft.com/office/drawing/2014/main" id="{A24E58E1-194B-A320-AEEE-24D08685BB67}"/>
+              </a:ext>
+            </a:extLst>
+          </p:cNvPr>
+          <p:cNvSpPr>
+            <a:spLocks noGrp="1"/>
+          </p:cNvSpPr>
+          <p:nvPr>
+            <p:ph type="body" sz="quarter" idx="12"/>
+          </p:nvPr>
+        </p:nvSpPr>
+        <p:spPr/>
+        <p:txBody>
+          <a:bodyPr/>
+          <a:lstStyle/>
+          <a:p>
+            <a:endParaRPr kumimoji="1" lang="ko-KR" altLang="en-US" dirty="0"/>
+          </a:p>
+        </p:txBody>
+      </p:sp>
+      <p:sp>
+        <p:nvSpPr>
+          <p:cNvPr id="7" name="텍스트 개체 틀 6">
+            <a:extLst>
+              <a:ext uri="{FF2B5EF4-FFF2-40B4-BE49-F238E27FC236}">
+                <a16:creationId xmlns:a16="http://schemas.microsoft.com/office/drawing/2014/main" id="{A219F420-613B-6234-45F6-0955A9A4505F}"/>
+              </a:ext>
+            </a:extLst>
+          </p:cNvPr>
+          <p:cNvSpPr>
+            <a:spLocks noGrp="1"/>
+          </p:cNvSpPr>
+          <p:nvPr>
+            <p:ph type="body" sz="quarter" idx="13"/>
+          </p:nvPr>
+        </p:nvSpPr>
+        <p:spPr/>
+        <p:txBody>
+          <a:bodyPr/>
+          <a:lstStyle/>
+          <a:p>
+            <a:endParaRPr kumimoji="1" lang="en-US" altLang="ko-KR" dirty="0"/>
+          </a:p>
+        </p:txBody>
+      </p:sp>
+      <p:sp>
+        <p:nvSpPr>
+          <p:cNvPr id="8" name="내용 개체 틀 7">
+            <a:extLst>
+              <a:ext uri="{FF2B5EF4-FFF2-40B4-BE49-F238E27FC236}">
+                <a16:creationId xmlns:a16="http://schemas.microsoft.com/office/drawing/2014/main" id="{BEBA2C4A-B0BF-F2E4-EA6E-614C99CBA184}"/>
+              </a:ext>
+            </a:extLst>
+          </p:cNvPr>
+          <p:cNvSpPr>
+            <a:spLocks noGrp="1"/>
+          </p:cNvSpPr>
+          <p:nvPr>
+            <p:ph idx="1"/>
+          </p:nvPr>
+        </p:nvSpPr>
+        <p:spPr/>
+        <p:txBody>
+          <a:bodyPr>
+            <a:normAutofit/>
+          </a:bodyPr>
+          <a:lstStyle/>
+          <a:p>
+            <a:pPr marL="0" indent="0">
+              <a:spcBef>
+                <a:spcPts val="600"/>
+              </a:spcBef>
+              <a:spcAft>
+                <a:spcPts val="600"/>
+              </a:spcAft>
+              <a:buNone/>
+            </a:pPr>
+            <a:r>
+              <a:rPr sz="1800" b="0">
+                <a:solidFill>
+                  <a:srgbClr val="000000"/>
+                </a:solidFill>
+                <a:latin typeface="맑은 고딕"/>
+                <a:ea typeface="맑은 고딕"/>
+              </a:rPr>
+              <a:t>센서의 메시지는 </a:t>
+            </a:r>
+            <a:r>
+              <a:rPr sz="1800" b="1">
+                <a:solidFill>
+                  <a:srgbClr val="000000"/>
+                </a:solidFill>
+                <a:latin typeface="맑은 고딕"/>
+                <a:ea typeface="맑은 고딕"/>
+              </a:rPr>
+              <a:t>무엇이 틀렸는지</a:t>
+            </a:r>
+            <a:r>
+              <a:rPr sz="1800" b="0">
+                <a:solidFill>
+                  <a:srgbClr val="000000"/>
+                </a:solidFill>
+                <a:latin typeface="맑은 고딕"/>
+                <a:ea typeface="맑은 고딕"/>
+              </a:rPr>
+              <a:t>가 아니라 </a:t>
+            </a:r>
+            <a:r>
+              <a:rPr sz="1800" b="1">
+                <a:solidFill>
+                  <a:srgbClr val="000000"/>
+                </a:solidFill>
+                <a:latin typeface="맑은 고딕"/>
+                <a:ea typeface="맑은 고딕"/>
+              </a:rPr>
+              <a:t>어떻게 고칠지</a:t>
+            </a:r>
+            <a:r>
+              <a:rPr sz="1800" b="0">
+                <a:solidFill>
+                  <a:srgbClr val="000000"/>
+                </a:solidFill>
+                <a:latin typeface="맑은 고딕"/>
+                <a:ea typeface="맑은 고딕"/>
+              </a:rPr>
+              <a:t>를 말해야 에이전트가 스스로 고친다.</a:t>
+            </a:r>
+          </a:p>
+          <a:p>
+            <a:pPr lvl="2" marL="723900" indent="-368300">
+              <a:spcBef>
+                <a:spcPts val="600"/>
+              </a:spcBef>
+              <a:spcAft>
+                <a:spcPts val="600"/>
+              </a:spcAft>
+              <a:buSzPct val="90000"/>
+              <a:buFont typeface="Wingdings" pitchFamily="2" charset="2"/>
+              <a:buChar char=""/>
+            </a:pPr>
+            <a:r>
+              <a:rPr sz="1800" b="1">
+                <a:solidFill>
+                  <a:srgbClr val="000000"/>
+                </a:solidFill>
+                <a:latin typeface="맑은 고딕"/>
+                <a:ea typeface="맑은 고딕"/>
+              </a:rPr>
+              <a:t>고치는 방법을 함께 담은</a:t>
+            </a:r>
+            <a:r>
+              <a:rPr sz="1800" b="0">
+                <a:solidFill>
+                  <a:srgbClr val="000000"/>
+                </a:solidFill>
+                <a:latin typeface="맑은 고딕"/>
+                <a:ea typeface="맑은 고딕"/>
+              </a:rPr>
+              <a:t> 린터 메시지는 좋은 쪽으로 쓰는 프롬프트 주입이다</a:t>
+            </a:r>
+            <a:r>
+              <a:rPr sz="1000" b="0">
+                <a:solidFill>
+                  <a:srgbClr val="000000"/>
+                </a:solidFill>
+                <a:latin typeface="맑은 고딕"/>
+                <a:ea typeface="맑은 고딕"/>
+              </a:rPr>
+              <a:t>, </a:t>
+            </a:r>
+            <a:r>
+              <a:rPr sz="1000" b="0">
+                <a:solidFill>
+                  <a:srgbClr val="000000"/>
+                </a:solidFill>
+                <a:latin typeface="맑은 고딕"/>
+                <a:ea typeface="맑은 고딕"/>
+              </a:rPr>
+              <a:t>"custom linter messages that include instructions for the self-correction - a positive kind of prompt injection"</a:t>
+            </a:r>
+            <a:r>
+              <a:rPr sz="1000" b="0">
+                <a:solidFill>
+                  <a:srgbClr val="000000"/>
+                </a:solidFill>
+                <a:latin typeface="맑은 고딕"/>
+                <a:ea typeface="맑은 고딕"/>
+              </a:rPr>
+              <a:t>, </a:t>
+            </a:r>
+            <a:r>
+              <a:rPr sz="1000" b="0">
+                <a:solidFill>
+                  <a:srgbClr val="000000"/>
+                </a:solidFill>
+                <a:latin typeface="맑은 고딕"/>
+                <a:ea typeface="맑은 고딕"/>
+              </a:rPr>
+              <a:t>[Böckeler 2026a]</a:t>
+            </a:r>
+          </a:p>
+          <a:p>
+            <a:pPr lvl="2" marL="723900" indent="-368300">
+              <a:spcBef>
+                <a:spcPts val="600"/>
+              </a:spcBef>
+              <a:spcAft>
+                <a:spcPts val="600"/>
+              </a:spcAft>
+              <a:buSzPct val="90000"/>
+              <a:buFont typeface="Wingdings" pitchFamily="2" charset="2"/>
+              <a:buChar char=""/>
+            </a:pPr>
+            <a:r>
+              <a:rPr sz="1800" b="1">
+                <a:solidFill>
+                  <a:srgbClr val="000000"/>
+                </a:solidFill>
+                <a:latin typeface="맑은 고딕"/>
+                <a:ea typeface="맑은 고딕"/>
+              </a:rPr>
+              <a:t>판정만 적은 메시지</a:t>
+            </a:r>
+            <a:r>
+              <a:rPr sz="1800" b="0">
+                <a:solidFill>
+                  <a:srgbClr val="000000"/>
+                </a:solidFill>
+                <a:latin typeface="맑은 고딕"/>
+                <a:ea typeface="맑은 고딕"/>
+              </a:rPr>
+              <a:t> —</a:t>
+            </a:r>
+            <a:r>
+              <a:rPr sz="1600" b="0">
+                <a:solidFill>
+                  <a:srgbClr val="000000"/>
+                </a:solidFill>
+                <a:latin typeface="맑은 고딕"/>
+                <a:ea typeface="맑은 고딕"/>
+              </a:rPr>
+              <a:t> "의존 규칙 위반: order → paymentadapter"</a:t>
+            </a:r>
+          </a:p>
+          <a:p>
+            <a:pPr lvl="3" marL="1077913" indent="-354013">
+              <a:spcBef>
+                <a:spcPts val="600"/>
+              </a:spcBef>
+              <a:spcAft>
+                <a:spcPts val="600"/>
+              </a:spcAft>
+              <a:buSzPct val="90000"/>
+              <a:buFont typeface="Wingdings" pitchFamily="2" charset="2"/>
+              <a:buChar char=""/>
+            </a:pPr>
+            <a:r>
+              <a:rPr sz="1600" b="0">
+                <a:solidFill>
+                  <a:srgbClr val="000000"/>
+                </a:solidFill>
+                <a:latin typeface="맑은 고딕"/>
+                <a:ea typeface="맑은 고딕"/>
+              </a:rPr>
+              <a:t>에이전트는 규칙을 </a:t>
+            </a:r>
+            <a:r>
+              <a:rPr sz="1600" b="1">
+                <a:solidFill>
+                  <a:srgbClr val="000000"/>
+                </a:solidFill>
+                <a:latin typeface="맑은 고딕"/>
+                <a:ea typeface="맑은 고딕"/>
+              </a:rPr>
+              <a:t>피할 길</a:t>
+            </a:r>
+            <a:r>
+              <a:rPr sz="1600" b="0">
+                <a:solidFill>
+                  <a:srgbClr val="000000"/>
+                </a:solidFill>
+                <a:latin typeface="맑은 고딕"/>
+                <a:ea typeface="맑은 고딕"/>
+              </a:rPr>
+              <a:t>을 찾고, 다음 시도에 다른 모양의 같은 위반이 나온다</a:t>
+            </a:r>
+          </a:p>
+          <a:p>
+            <a:pPr lvl="2" marL="723900" indent="-368300">
+              <a:spcBef>
+                <a:spcPts val="600"/>
+              </a:spcBef>
+              <a:spcAft>
+                <a:spcPts val="600"/>
+              </a:spcAft>
+              <a:buSzPct val="90000"/>
+              <a:buFont typeface="Wingdings" pitchFamily="2" charset="2"/>
+              <a:buChar char=""/>
+            </a:pPr>
+            <a:r>
+              <a:rPr sz="1800" b="1">
+                <a:solidFill>
+                  <a:srgbClr val="000000"/>
+                </a:solidFill>
+                <a:latin typeface="맑은 고딕"/>
+                <a:ea typeface="맑은 고딕"/>
+              </a:rPr>
+              <a:t>고치는 방법을 담은 메시지</a:t>
+            </a:r>
+            <a:r>
+              <a:rPr sz="1800" b="0">
+                <a:solidFill>
+                  <a:srgbClr val="000000"/>
+                </a:solidFill>
+                <a:latin typeface="맑은 고딕"/>
+                <a:ea typeface="맑은 고딕"/>
+              </a:rPr>
+              <a:t> —</a:t>
+            </a:r>
+            <a:r>
+              <a:rPr sz="1600" b="0">
+                <a:solidFill>
+                  <a:srgbClr val="000000"/>
+                </a:solidFill>
+                <a:latin typeface="맑은 고딕"/>
+                <a:ea typeface="맑은 고딕"/>
+              </a:rPr>
+              <a:t> "order는 payment.PaymentGateway에 의존하고, 연동 객체는 생성자로 받는다"</a:t>
+            </a:r>
+          </a:p>
+          <a:p>
+            <a:pPr lvl="3" marL="1077913" indent="-354013">
+              <a:spcBef>
+                <a:spcPts val="600"/>
+              </a:spcBef>
+              <a:spcAft>
+                <a:spcPts val="600"/>
+              </a:spcAft>
+              <a:buSzPct val="90000"/>
+              <a:buFont typeface="Wingdings" pitchFamily="2" charset="2"/>
+              <a:buChar char=""/>
+            </a:pPr>
+            <a:r>
+              <a:rPr sz="1600" b="0">
+                <a:solidFill>
+                  <a:srgbClr val="000000"/>
+                </a:solidFill>
+                <a:latin typeface="맑은 고딕"/>
+                <a:ea typeface="맑은 고딕"/>
+              </a:rPr>
+              <a:t>적힌 길이 </a:t>
+            </a:r>
+            <a:r>
+              <a:rPr sz="1600" b="1">
+                <a:solidFill>
+                  <a:srgbClr val="000000"/>
+                </a:solidFill>
+                <a:latin typeface="맑은 고딕"/>
+                <a:ea typeface="맑은 고딕"/>
+              </a:rPr>
+              <a:t>가장 쉬운 길</a:t>
+            </a:r>
+            <a:r>
+              <a:rPr sz="1600" b="0">
+                <a:solidFill>
+                  <a:srgbClr val="000000"/>
+                </a:solidFill>
+                <a:latin typeface="맑은 고딕"/>
+                <a:ea typeface="맑은 고딕"/>
+              </a:rPr>
+              <a:t>이므로 그대로 고치고, 다음 시도에 통과한다</a:t>
+            </a:r>
+          </a:p>
+          <a:p>
+            <a:pPr lvl="2" marL="723900" indent="-368300">
+              <a:spcBef>
+                <a:spcPts val="600"/>
+              </a:spcBef>
+              <a:spcAft>
+                <a:spcPts val="600"/>
+              </a:spcAft>
+              <a:buSzPct val="90000"/>
+              <a:buFont typeface="Wingdings" pitchFamily="2" charset="2"/>
+              <a:buChar char=""/>
+            </a:pPr>
+            <a:r>
+              <a:rPr sz="1800" b="0">
+                <a:solidFill>
+                  <a:srgbClr val="000000"/>
+                </a:solidFill>
+                <a:latin typeface="맑은 고딕"/>
+                <a:ea typeface="맑은 고딕"/>
+              </a:rPr>
+              <a:t>센서의 출력은 그대로 </a:t>
+            </a:r>
+            <a:r>
+              <a:rPr sz="1800" b="1">
+                <a:solidFill>
+                  <a:srgbClr val="000000"/>
+                </a:solidFill>
+                <a:latin typeface="맑은 고딕"/>
+                <a:ea typeface="맑은 고딕"/>
+              </a:rPr>
+              <a:t>에이전트의 맥락</a:t>
+            </a:r>
+            <a:r>
+              <a:rPr sz="1800" b="0">
+                <a:solidFill>
+                  <a:srgbClr val="000000"/>
+                </a:solidFill>
+                <a:latin typeface="맑은 고딕"/>
+                <a:ea typeface="맑은 고딕"/>
+              </a:rPr>
+              <a:t>이 된다. 메시지를 쓰는 일은 맥락을 쓰는 일이다.</a:t>
+            </a:r>
+          </a:p>
+          <a:p>
+            <a:pPr lvl="2" marL="723900" indent="-368300">
+              <a:spcBef>
+                <a:spcPts val="600"/>
+              </a:spcBef>
+              <a:spcAft>
+                <a:spcPts val="600"/>
+              </a:spcAft>
+              <a:buSzPct val="90000"/>
+              <a:buFont typeface="Wingdings" pitchFamily="2" charset="2"/>
+              <a:buChar char=""/>
+            </a:pPr>
+            <a:r>
+              <a:rPr sz="1800" b="0">
+                <a:solidFill>
+                  <a:srgbClr val="000000"/>
+                </a:solidFill>
+                <a:latin typeface="맑은 고딕"/>
+                <a:ea typeface="맑은 고딕"/>
+              </a:rPr>
+              <a:t>같은 메시지가 </a:t>
+            </a:r>
+            <a:r>
+              <a:rPr sz="1800" b="1">
+                <a:solidFill>
+                  <a:srgbClr val="000000"/>
+                </a:solidFill>
+                <a:latin typeface="맑은 고딕"/>
+                <a:ea typeface="맑은 고딕"/>
+              </a:rPr>
+              <a:t>사람에게도 이득</a:t>
+            </a:r>
+            <a:r>
+              <a:rPr sz="1800" b="0">
+                <a:solidFill>
+                  <a:srgbClr val="000000"/>
+                </a:solidFill>
+                <a:latin typeface="맑은 고딕"/>
+                <a:ea typeface="맑은 고딕"/>
+              </a:rPr>
+              <a:t>이다. 리뷰에서 "왜 막혔는지"를 다시 설명하지 않아도 된다.</a:t>
+            </a:r>
+          </a:p>
+        </p:txBody>
+      </p:sp>
+    </p:spTree>
+    <p:extLst>
+      <p:ext uri="{BB962C8B-B14F-4D97-AF65-F5344CB8AC3E}">
+        <p14:creationId xmlns:p14="http://schemas.microsoft.com/office/powerpoint/2010/main" val="3555436673"/>
+      </p:ext>
+    </p:extLst>
+  </p:cSld>
+  <p:clrMapOvr>
+    <a:masterClrMapping/>
+  </p:clrMapOvr>
+</p:sld>
+</file>
+
+<file path=ppt/slides/slide18.xml><?xml version="1.0" encoding="utf-8"?>
 <p:sld xmlns:a="http://schemas.openxmlformats.org/drawingml/2006/main" xmlns:r="http://schemas.openxmlformats.org/officeDocument/2006/relationships" xmlns:p="http://schemas.openxmlformats.org/presentationml/2006/main">
   <p:cSld>
     <p:spTree>
@@ -11623,7 +11894,7 @@
                 <a:ea typeface="맑은 고딕" panose="020B0503020000020004" pitchFamily="34" charset="-127"/>
                 <a:cs typeface="+mn-cs"/>
               </a:rPr>
-              <a:t>- 17 -</a:t>
+              <a:t>- 18 -</a:t>
             </a:r>
           </a:p>
         </p:txBody>
@@ -11848,7 +12119,7 @@
 </p:sld>
 </file>
 
-<file path=ppt/slides/slide18.xml><?xml version="1.0" encoding="utf-8"?>
+<file path=ppt/slides/slide19.xml><?xml version="1.0" encoding="utf-8"?>
 <p:sld xmlns:a="http://schemas.openxmlformats.org/drawingml/2006/main" xmlns:r="http://schemas.openxmlformats.org/officeDocument/2006/relationships" xmlns:p="http://schemas.openxmlformats.org/presentationml/2006/main">
   <p:cSld>
     <p:spTree>
@@ -12856,7 +13127,27 @@
                 <a:latin typeface="맑은 고딕"/>
                 <a:ea typeface="맑은 고딕"/>
               </a:rPr>
-              <a:t>"Neither catches reliably some of the higher-impact problems: Misdiagnosis of issues, overengineering and unnecessary features, misunderstood instructions.", [Böckeler 2026a]</a:t>
+              <a:t>"Neither catches reliably some of the higher-impact problems: Misdiagnosis of issues, overengineering and unnecessary features, misunderstood instructions."</a:t>
+            </a:r>
+            <a:r>
+              <a:rPr sz="1000" b="0">
+                <a:solidFill>
+                  <a:srgbClr val="000000"/>
+                </a:solidFill>
+                <a:latin typeface="맑은 고딕"/>
+                <a:ea typeface="맑은 고딕"/>
+              </a:rPr>
+              <a:t>, </a:t>
+            </a:r>
+            <a:r>
+              <a:rPr sz="1000" b="0">
+                <a:solidFill>
+                  <a:srgbClr val="000000"/>
+                </a:solidFill>
+                <a:latin typeface="맑은 고딕"/>
+                <a:ea typeface="맑은 고딕"/>
+              </a:rPr>
+              <a:t>[Böckeler 2026a]</a:t>
             </a:r>
           </a:p>
           <a:p>
@@ -13004,7 +13295,7 @@
                 <a:ea typeface="맑은 고딕" panose="020B0503020000020004" pitchFamily="34" charset="-127"/>
                 <a:cs typeface="+mn-cs"/>
               </a:rPr>
-              <a:t>- 18 -</a:t>
+              <a:t>- 19 -</a:t>
             </a:r>
           </a:p>
         </p:txBody>
@@ -13098,6 +13389,16 @@
               <a:buChar char=""/>
             </a:pPr>
             <a:r>
+              <a:rPr sz="1800" b="0">
+                <a:solidFill>
+                  <a:srgbClr val="000000"/>
+                </a:solidFill>
+                <a:latin typeface="맑은 고딕"/>
+                <a:ea typeface="맑은 고딕"/>
+              </a:rPr>
+              <a:t>리뷰는 </a:t>
+            </a:r>
+            <a:r>
               <a:rPr sz="1800" b="1">
                 <a:solidFill>
                   <a:srgbClr val="000000"/>
@@ -13105,7 +13406,7 @@
                 <a:latin typeface="맑은 고딕"/>
                 <a:ea typeface="맑은 고딕"/>
               </a:rPr>
-              <a:t>센서의 증거를 먼저 보고</a:t>
+              <a:t>센서의 증거를 먼저 읽고</a:t>
             </a:r>
             <a:r>
               <a:rPr sz="1800" b="0">
@@ -13115,7 +13416,7 @@
                 <a:latin typeface="맑은 고딕"/>
                 <a:ea typeface="맑은 고딕"/>
               </a:rPr>
-              <a:t> 못 보는 셋만 읽는다. 셋 중 하나가 보이면 고칠 곳은 </a:t>
+              <a:t> 센서가 못 보는 세 가지만 확인한다. 그중 하나가 보이면 고칠 곳은 </a:t>
             </a:r>
             <a:r>
               <a:rPr sz="1800" b="1">
@@ -13144,625 +13445,6 @@
     <p:extLst>
       <p:ext uri="{BB962C8B-B14F-4D97-AF65-F5344CB8AC3E}">
         <p14:creationId xmlns:p14="http://schemas.microsoft.com/office/powerpoint/2010/main" val="2789569477"/>
-      </p:ext>
-    </p:extLst>
-  </p:cSld>
-  <p:clrMapOvr>
-    <a:masterClrMapping/>
-  </p:clrMapOvr>
-</p:sld>
-</file>
-
-<file path=ppt/slides/slide19.xml><?xml version="1.0" encoding="utf-8"?>
-<p:sld xmlns:a="http://schemas.openxmlformats.org/drawingml/2006/main" xmlns:r="http://schemas.openxmlformats.org/officeDocument/2006/relationships" xmlns:p="http://schemas.openxmlformats.org/presentationml/2006/main">
-  <p:cSld>
-    <p:spTree>
-      <p:nvGrpSpPr>
-        <p:cNvPr id="1" name="">
-          <a:extLst>
-            <a:ext uri="{FF2B5EF4-FFF2-40B4-BE49-F238E27FC236}">
-              <a16:creationId xmlns:a16="http://schemas.microsoft.com/office/drawing/2014/main" id="{8E4F1F13-426B-086B-7D8C-9A58A0F879DB}"/>
-            </a:ext>
-          </a:extLst>
-        </p:cNvPr>
-        <p:cNvGrpSpPr/>
-        <p:nvPr/>
-      </p:nvGrpSpPr>
-      <p:grpSpPr>
-        <a:xfrm>
-          <a:off x="0" y="0"/>
-          <a:ext cx="0" cy="0"/>
-          <a:chOff x="0" y="0"/>
-          <a:chExt cx="0" cy="0"/>
-        </a:xfrm>
-      </p:grpSpPr>
-      <p:sp>
-        <p:nvSpPr>
-          <p:cNvPr id="2" name="제목 1">
-            <a:extLst>
-              <a:ext uri="{FF2B5EF4-FFF2-40B4-BE49-F238E27FC236}">
-                <a16:creationId xmlns:a16="http://schemas.microsoft.com/office/drawing/2014/main" id="{AA26A92D-924E-0575-9551-F8FD7BFD3FAD}"/>
-              </a:ext>
-            </a:extLst>
-          </p:cNvPr>
-          <p:cNvSpPr>
-            <a:spLocks noGrp="1"/>
-          </p:cNvSpPr>
-          <p:nvPr>
-            <p:ph type="title"/>
-          </p:nvPr>
-        </p:nvSpPr>
-        <p:spPr/>
-        <p:txBody>
-          <a:bodyPr/>
-          <a:lstStyle/>
-          <a:p>
-            <a:r>
-              <a:rPr sz="2400" b="1">
-                <a:solidFill>
-                  <a:srgbClr val="000000"/>
-                </a:solidFill>
-                <a:latin typeface="맑은 고딕"/>
-                <a:ea typeface="맑은 고딕"/>
-              </a:rPr>
-              <a:t>10. 하네스를 만들기 쉬운 코드</a:t>
-            </a:r>
-          </a:p>
-        </p:txBody>
-      </p:sp>
-      <p:sp>
-        <p:nvSpPr>
-          <p:cNvPr id="3" name="슬라이드 번호 개체 틀 2">
-            <a:extLst>
-              <a:ext uri="{FF2B5EF4-FFF2-40B4-BE49-F238E27FC236}">
-                <a16:creationId xmlns:a16="http://schemas.microsoft.com/office/drawing/2014/main" id="{12CF30EE-4DFD-8063-56B8-B8689E76DFCA}"/>
-              </a:ext>
-            </a:extLst>
-          </p:cNvPr>
-          <p:cNvSpPr>
-            <a:spLocks noGrp="1"/>
-          </p:cNvSpPr>
-          <p:nvPr>
-            <p:ph type="sldNum" sz="quarter" idx="10"/>
-          </p:nvPr>
-        </p:nvSpPr>
-        <p:spPr/>
-        <p:txBody>
-          <a:bodyPr/>
-          <a:lstStyle/>
-          <a:p>
-            <a:pPr>
-              <a:defRPr/>
-            </a:pPr>
-            <a:r>
-              <a:rPr lang="en-US" altLang="ko-KR">
-                <a:solidFill>
-                  <a:prstClr val="black"/>
-                </a:solidFill>
-              </a:rPr>
-              <a:t>- 19 -</a:t>
-            </a:r>
-          </a:p>
-        </p:txBody>
-      </p:sp>
-      <p:sp>
-        <p:nvSpPr>
-          <p:cNvPr id="5" name="텍스트 개체 틀 4">
-            <a:extLst>
-              <a:ext uri="{FF2B5EF4-FFF2-40B4-BE49-F238E27FC236}">
-                <a16:creationId xmlns:a16="http://schemas.microsoft.com/office/drawing/2014/main" id="{D66274C8-E16F-5AEB-614B-D8D32DA3E8C6}"/>
-              </a:ext>
-            </a:extLst>
-          </p:cNvPr>
-          <p:cNvSpPr>
-            <a:spLocks noGrp="1"/>
-          </p:cNvSpPr>
-          <p:nvPr>
-            <p:ph type="body" sz="quarter" idx="11"/>
-          </p:nvPr>
-        </p:nvSpPr>
-        <p:spPr/>
-        <p:txBody>
-          <a:bodyPr/>
-          <a:lstStyle/>
-          <a:p>
-            <a:r>
-              <a:rPr kumimoji="1" lang="en-US" altLang="ko-KR" sz="1400" dirty="0" err="1"/>
-              <a:t>09. 검증 하네스·결과 점검·피드백</a:t>
-            </a:r>
-          </a:p>
-        </p:txBody>
-      </p:sp>
-      <p:sp>
-        <p:nvSpPr>
-          <p:cNvPr id="6" name="텍스트 개체 틀 5">
-            <a:extLst>
-              <a:ext uri="{FF2B5EF4-FFF2-40B4-BE49-F238E27FC236}">
-                <a16:creationId xmlns:a16="http://schemas.microsoft.com/office/drawing/2014/main" id="{A24E58E1-194B-A320-AEEE-24D08685BB67}"/>
-              </a:ext>
-            </a:extLst>
-          </p:cNvPr>
-          <p:cNvSpPr>
-            <a:spLocks noGrp="1"/>
-          </p:cNvSpPr>
-          <p:nvPr>
-            <p:ph type="body" sz="quarter" idx="12"/>
-          </p:nvPr>
-        </p:nvSpPr>
-        <p:spPr/>
-        <p:txBody>
-          <a:bodyPr/>
-          <a:lstStyle/>
-          <a:p>
-            <a:endParaRPr kumimoji="1" lang="ko-KR" altLang="en-US" dirty="0"/>
-          </a:p>
-        </p:txBody>
-      </p:sp>
-      <p:sp>
-        <p:nvSpPr>
-          <p:cNvPr id="7" name="텍스트 개체 틀 6">
-            <a:extLst>
-              <a:ext uri="{FF2B5EF4-FFF2-40B4-BE49-F238E27FC236}">
-                <a16:creationId xmlns:a16="http://schemas.microsoft.com/office/drawing/2014/main" id="{A219F420-613B-6234-45F6-0955A9A4505F}"/>
-              </a:ext>
-            </a:extLst>
-          </p:cNvPr>
-          <p:cNvSpPr>
-            <a:spLocks noGrp="1"/>
-          </p:cNvSpPr>
-          <p:nvPr>
-            <p:ph type="body" sz="quarter" idx="13"/>
-          </p:nvPr>
-        </p:nvSpPr>
-        <p:spPr/>
-        <p:txBody>
-          <a:bodyPr/>
-          <a:lstStyle/>
-          <a:p>
-            <a:endParaRPr kumimoji="1" lang="en-US" altLang="ko-KR" dirty="0"/>
-          </a:p>
-        </p:txBody>
-      </p:sp>
-      <p:sp>
-        <p:nvSpPr>
-          <p:cNvPr id="8" name="내용 개체 틀 7">
-            <a:extLst>
-              <a:ext uri="{FF2B5EF4-FFF2-40B4-BE49-F238E27FC236}">
-                <a16:creationId xmlns:a16="http://schemas.microsoft.com/office/drawing/2014/main" id="{BEBA2C4A-B0BF-F2E4-EA6E-614C99CBA184}"/>
-              </a:ext>
-            </a:extLst>
-          </p:cNvPr>
-          <p:cNvSpPr>
-            <a:spLocks noGrp="1"/>
-          </p:cNvSpPr>
-          <p:nvPr>
-            <p:ph idx="1"/>
-          </p:nvPr>
-        </p:nvSpPr>
-        <p:spPr/>
-        <p:txBody>
-          <a:bodyPr>
-            <a:normAutofit/>
-          </a:bodyPr>
-          <a:lstStyle/>
-          <a:p>
-            <a:pPr marL="0" indent="0">
-              <a:spcBef>
-                <a:spcPts val="600"/>
-              </a:spcBef>
-              <a:spcAft>
-                <a:spcPts val="600"/>
-              </a:spcAft>
-              <a:buNone/>
-            </a:pPr>
-            <a:r>
-              <a:rPr sz="1800" b="0">
-                <a:solidFill>
-                  <a:srgbClr val="000000"/>
-                </a:solidFill>
-                <a:latin typeface="맑은 고딕"/>
-                <a:ea typeface="맑은 고딕"/>
-              </a:rPr>
-              <a:t>센서는 아무 코드에나 붙지 않고, </a:t>
-            </a:r>
-            <a:r>
-              <a:rPr sz="1800" b="1">
-                <a:solidFill>
-                  <a:srgbClr val="000000"/>
-                </a:solidFill>
-                <a:latin typeface="맑은 고딕"/>
-                <a:ea typeface="맑은 고딕"/>
-              </a:rPr>
-              <a:t>붙을 수 있게 설계된 코드</a:t>
-            </a:r>
-            <a:r>
-              <a:rPr sz="1800" b="0">
-                <a:solidFill>
-                  <a:srgbClr val="000000"/>
-                </a:solidFill>
-                <a:latin typeface="맑은 고딕"/>
-                <a:ea typeface="맑은 고딕"/>
-              </a:rPr>
-              <a:t>에만 붙는다.</a:t>
-            </a:r>
-          </a:p>
-          <a:p>
-            <a:pPr lvl="2" marL="723900" indent="-368300">
-              <a:spcBef>
-                <a:spcPts val="600"/>
-              </a:spcBef>
-              <a:spcAft>
-                <a:spcPts val="600"/>
-              </a:spcAft>
-              <a:buSzPct val="90000"/>
-              <a:buFont typeface="Wingdings" pitchFamily="2" charset="2"/>
-              <a:buChar char=""/>
-            </a:pPr>
-            <a:r>
-              <a:rPr sz="1800" b="0">
-                <a:solidFill>
-                  <a:srgbClr val="000000"/>
-                </a:solidFill>
-                <a:latin typeface="맑은 고딕"/>
-                <a:ea typeface="맑은 고딕"/>
-              </a:rPr>
-              <a:t>빈 저장소에서 시작하는 팀은 </a:t>
-            </a:r>
-            <a:r>
-              <a:rPr sz="1800" b="1">
-                <a:solidFill>
-                  <a:srgbClr val="000000"/>
-                </a:solidFill>
-                <a:latin typeface="맑은 고딕"/>
-                <a:ea typeface="맑은 고딕"/>
-              </a:rPr>
-              <a:t>첫날부터</a:t>
-            </a:r>
-            <a:r>
-              <a:rPr sz="1800" b="0">
-                <a:solidFill>
-                  <a:srgbClr val="000000"/>
-                </a:solidFill>
-                <a:latin typeface="맑은 고딕"/>
-                <a:ea typeface="맑은 고딕"/>
-              </a:rPr>
-              <a:t> 하네스를 만들기 쉽게</a:t>
-            </a:r>
-            <a:r>
-              <a:rPr sz="1400" b="0">
-                <a:solidFill>
-                  <a:srgbClr val="000000"/>
-                </a:solidFill>
-                <a:latin typeface="맑은 고딕"/>
-                <a:ea typeface="맑은 고딕"/>
-              </a:rPr>
-              <a:t>(harnessability)</a:t>
-            </a:r>
-            <a:r>
-              <a:rPr sz="1800" b="0">
-                <a:solidFill>
-                  <a:srgbClr val="000000"/>
-                </a:solidFill>
-                <a:latin typeface="맑은 고딕"/>
-                <a:ea typeface="맑은 고딕"/>
-              </a:rPr>
-              <a:t> 해 둘 수 있다 — 기술과 아키텍처의 선택이 그 코드베이스를 얼마나 조절할 수 있는지를 정한다</a:t>
-            </a:r>
-            <a:r>
-              <a:rPr sz="1000" b="0">
-                <a:solidFill>
-                  <a:srgbClr val="000000"/>
-                </a:solidFill>
-                <a:latin typeface="맑은 고딕"/>
-                <a:ea typeface="맑은 고딕"/>
-              </a:rPr>
-              <a:t>, </a:t>
-            </a:r>
-            <a:r>
-              <a:rPr sz="1000" b="0">
-                <a:solidFill>
-                  <a:srgbClr val="000000"/>
-                </a:solidFill>
-                <a:latin typeface="맑은 고딕"/>
-                <a:ea typeface="맑은 고딕"/>
-              </a:rPr>
-              <a:t>"Greenfield teams can bake harnessability in from day one - technology decisions and architecture choices determine how governable the codebase will be.", [Böckeler 2026a]</a:t>
-            </a:r>
-          </a:p>
-          <a:p>
-            <a:pPr lvl="2" marL="723900" indent="-368300">
-              <a:spcBef>
-                <a:spcPts val="600"/>
-              </a:spcBef>
-              <a:spcAft>
-                <a:spcPts val="600"/>
-              </a:spcAft>
-              <a:buSzPct val="90000"/>
-              <a:buFont typeface="Wingdings" pitchFamily="2" charset="2"/>
-              <a:buChar char=""/>
-            </a:pPr>
-            <a:r>
-              <a:rPr sz="1800" b="0">
-                <a:solidFill>
-                  <a:srgbClr val="000000"/>
-                </a:solidFill>
-                <a:latin typeface="맑은 고딕"/>
-                <a:ea typeface="맑은 고딕"/>
-              </a:rPr>
-              <a:t>업무와 연동·영속을 </a:t>
-            </a:r>
-            <a:r>
-              <a:rPr sz="1800" b="1">
-                <a:solidFill>
-                  <a:srgbClr val="000000"/>
-                </a:solidFill>
-                <a:latin typeface="맑은 고딕"/>
-                <a:ea typeface="맑은 고딕"/>
-              </a:rPr>
-              <a:t>패키지로 가름</a:t>
-            </a:r>
-            <a:r>
-              <a:rPr sz="1800" b="0">
-                <a:solidFill>
-                  <a:srgbClr val="000000"/>
-                </a:solidFill>
-                <a:latin typeface="맑은 고딕"/>
-                <a:ea typeface="맑은 고딕"/>
-              </a:rPr>
-              <a:t> → 의존 규칙 검사</a:t>
-            </a:r>
-          </a:p>
-          <a:p>
-            <a:pPr lvl="2" marL="723900" indent="-368300">
-              <a:spcBef>
-                <a:spcPts val="600"/>
-              </a:spcBef>
-              <a:spcAft>
-                <a:spcPts val="600"/>
-              </a:spcAft>
-              <a:buSzPct val="90000"/>
-              <a:buFont typeface="Wingdings" pitchFamily="2" charset="2"/>
-              <a:buChar char=""/>
-            </a:pPr>
-            <a:r>
-              <a:rPr sz="1800" b="0">
-                <a:solidFill>
-                  <a:srgbClr val="000000"/>
-                </a:solidFill>
-                <a:latin typeface="맑은 고딕"/>
-                <a:ea typeface="맑은 고딕"/>
-              </a:rPr>
-              <a:t>외부 시스템을 </a:t>
-            </a:r>
-            <a:r>
-              <a:rPr sz="1800" b="1">
-                <a:solidFill>
-                  <a:srgbClr val="000000"/>
-                </a:solidFill>
-                <a:latin typeface="맑은 고딕"/>
-                <a:ea typeface="맑은 고딕"/>
-              </a:rPr>
-              <a:t>인터페이스로</a:t>
-            </a:r>
-            <a:r>
-              <a:rPr sz="1800" b="0">
-                <a:solidFill>
-                  <a:srgbClr val="000000"/>
-                </a:solidFill>
-                <a:latin typeface="맑은 고딕"/>
-                <a:ea typeface="맑은 고딕"/>
-              </a:rPr>
-              <a:t> 둠 → 테스트 대역으로 도는 수용 테스트</a:t>
-            </a:r>
-          </a:p>
-          <a:p>
-            <a:pPr lvl="2" marL="723900" indent="-368300">
-              <a:spcBef>
-                <a:spcPts val="600"/>
-              </a:spcBef>
-              <a:spcAft>
-                <a:spcPts val="600"/>
-              </a:spcAft>
-              <a:buSzPct val="90000"/>
-              <a:buFont typeface="Wingdings" pitchFamily="2" charset="2"/>
-              <a:buChar char=""/>
-            </a:pPr>
-            <a:r>
-              <a:rPr sz="1800" b="0">
-                <a:solidFill>
-                  <a:srgbClr val="000000"/>
-                </a:solidFill>
-                <a:latin typeface="맑은 고딕"/>
-                <a:ea typeface="맑은 고딕"/>
-              </a:rPr>
-              <a:t>업무 규칙을 </a:t>
-            </a:r>
-            <a:r>
-              <a:rPr sz="1800" b="1">
-                <a:solidFill>
-                  <a:srgbClr val="000000"/>
-                </a:solidFill>
-                <a:latin typeface="맑은 고딕"/>
-                <a:ea typeface="맑은 고딕"/>
-              </a:rPr>
-              <a:t>허용·거절 예시로</a:t>
-            </a:r>
-            <a:r>
-              <a:rPr sz="1800" b="0">
-                <a:solidFill>
-                  <a:srgbClr val="000000"/>
-                </a:solidFill>
-                <a:latin typeface="맑은 고딕"/>
-                <a:ea typeface="맑은 고딕"/>
-              </a:rPr>
-              <a:t> 적음 → 수용 테스트의 기대값</a:t>
-            </a:r>
-          </a:p>
-          <a:p>
-            <a:pPr lvl="2" marL="723900" indent="-368300">
-              <a:spcBef>
-                <a:spcPts val="600"/>
-              </a:spcBef>
-              <a:spcAft>
-                <a:spcPts val="600"/>
-              </a:spcAft>
-              <a:buSzPct val="90000"/>
-              <a:buFont typeface="Wingdings" pitchFamily="2" charset="2"/>
-              <a:buChar char=""/>
-            </a:pPr>
-            <a:r>
-              <a:rPr sz="1800" b="1">
-                <a:solidFill>
-                  <a:srgbClr val="000000"/>
-                </a:solidFill>
-                <a:latin typeface="맑은 고딕"/>
-                <a:ea typeface="맑은 고딕"/>
-              </a:rPr>
-              <a:t>판매가와 단가</a:t>
-            </a:r>
-            <a:r>
-              <a:rPr sz="1800" b="0">
-                <a:solidFill>
-                  <a:srgbClr val="000000"/>
-                </a:solidFill>
-                <a:latin typeface="맑은 고딕"/>
-                <a:ea typeface="맑은 고딕"/>
-              </a:rPr>
-              <a:t>를 용어집에서 가름 → 금액 계산의 LLM 심사</a:t>
-            </a:r>
-          </a:p>
-          <a:p>
-            <a:pPr lvl="2" marL="723900" indent="-368300">
-              <a:spcBef>
-                <a:spcPts val="600"/>
-              </a:spcBef>
-              <a:spcAft>
-                <a:spcPts val="600"/>
-              </a:spcAft>
-              <a:buSzPct val="90000"/>
-              <a:buFont typeface="Wingdings" pitchFamily="2" charset="2"/>
-              <a:buChar char=""/>
-            </a:pPr>
-            <a:r>
-              <a:rPr sz="1800" b="0">
-                <a:solidFill>
-                  <a:srgbClr val="000000"/>
-                </a:solidFill>
-                <a:latin typeface="맑은 고딕"/>
-                <a:ea typeface="맑은 고딕"/>
-              </a:rPr>
-              <a:t>SW 엔지니어링 팀의 주된 일은 이제 코드를 쓰는 것이 아니라 </a:t>
-            </a:r>
-            <a:r>
-              <a:rPr sz="1800" b="1">
-                <a:solidFill>
-                  <a:srgbClr val="000000"/>
-                </a:solidFill>
-                <a:latin typeface="맑은 고딕"/>
-                <a:ea typeface="맑은 고딕"/>
-              </a:rPr>
-              <a:t>환경을 설계하고 의도를 명세하고 피드백 루프를 만드는 것</a:t>
-            </a:r>
-            <a:r>
-              <a:rPr sz="1800" b="0">
-                <a:solidFill>
-                  <a:srgbClr val="000000"/>
-                </a:solidFill>
-                <a:latin typeface="맑은 고딕"/>
-                <a:ea typeface="맑은 고딕"/>
-              </a:rPr>
-              <a:t>이다</a:t>
-            </a:r>
-            <a:r>
-              <a:rPr sz="1000" b="0">
-                <a:solidFill>
-                  <a:srgbClr val="000000"/>
-                </a:solidFill>
-                <a:latin typeface="맑은 고딕"/>
-                <a:ea typeface="맑은 고딕"/>
-              </a:rPr>
-              <a:t>, </a:t>
-            </a:r>
-            <a:r>
-              <a:rPr sz="1000" b="0">
-                <a:solidFill>
-                  <a:srgbClr val="000000"/>
-                </a:solidFill>
-                <a:latin typeface="맑은 고딕"/>
-                <a:ea typeface="맑은 고딕"/>
-              </a:rPr>
-              <a:t>"A software engineering team's primary job is no longer to write code, but to design environments, specify intent, and build feedback loops", [Lopopolo 2026]</a:t>
-            </a:r>
-          </a:p>
-          <a:p>
-            <a:pPr lvl="2" marL="723900" indent="-368300">
-              <a:spcBef>
-                <a:spcPts val="600"/>
-              </a:spcBef>
-              <a:spcAft>
-                <a:spcPts val="600"/>
-              </a:spcAft>
-              <a:buSzPct val="90000"/>
-              <a:buFont typeface="Wingdings" pitchFamily="2" charset="2"/>
-              <a:buChar char=""/>
-            </a:pPr>
-            <a:r>
-              <a:rPr sz="1800" b="0">
-                <a:solidFill>
-                  <a:srgbClr val="000000"/>
-                </a:solidFill>
-                <a:latin typeface="맑은 고딕"/>
-                <a:ea typeface="맑은 고딕"/>
-              </a:rPr>
-              <a:t>넷은 하네스를 위한 결정이 아니었다. 좋은 설계가 </a:t>
-            </a:r>
-            <a:r>
-              <a:rPr sz="1800" b="1">
-                <a:solidFill>
-                  <a:srgbClr val="000000"/>
-                </a:solidFill>
-                <a:latin typeface="맑은 고딕"/>
-                <a:ea typeface="맑은 고딕"/>
-              </a:rPr>
-              <a:t>판정할 수 있는 경계</a:t>
-            </a:r>
-            <a:r>
-              <a:rPr sz="1800" b="0">
-                <a:solidFill>
-                  <a:srgbClr val="000000"/>
-                </a:solidFill>
-                <a:latin typeface="맑은 고딕"/>
-                <a:ea typeface="맑은 고딕"/>
-              </a:rPr>
-              <a:t>를 남겼을 뿐이고, 경계가 없으면 </a:t>
-            </a:r>
-            <a:r>
-              <a:rPr sz="1800" b="1">
-                <a:solidFill>
-                  <a:srgbClr val="000000"/>
-                </a:solidFill>
-                <a:latin typeface="맑은 고딕"/>
-                <a:ea typeface="맑은 고딕"/>
-              </a:rPr>
-              <a:t>센서보다 경계를 먼저</a:t>
-            </a:r>
-            <a:r>
-              <a:rPr sz="1800" b="0">
-                <a:solidFill>
-                  <a:srgbClr val="000000"/>
-                </a:solidFill>
-                <a:latin typeface="맑은 고딕"/>
-                <a:ea typeface="맑은 고딕"/>
-              </a:rPr>
-              <a:t> 그린다.</a:t>
-            </a:r>
-          </a:p>
-        </p:txBody>
-      </p:sp>
-    </p:spTree>
-    <p:extLst>
-      <p:ext uri="{BB962C8B-B14F-4D97-AF65-F5344CB8AC3E}">
-        <p14:creationId xmlns:p14="http://schemas.microsoft.com/office/powerpoint/2010/main" val="3555436673"/>
       </p:ext>
     </p:extLst>
   </p:cSld>
@@ -14402,6 +14084,665 @@
 </file>
 
 <file path=ppt/slides/slide20.xml><?xml version="1.0" encoding="utf-8"?>
+<p:sld xmlns:a="http://schemas.openxmlformats.org/drawingml/2006/main" xmlns:r="http://schemas.openxmlformats.org/officeDocument/2006/relationships" xmlns:p="http://schemas.openxmlformats.org/presentationml/2006/main">
+  <p:cSld>
+    <p:spTree>
+      <p:nvGrpSpPr>
+        <p:cNvPr id="1" name="">
+          <a:extLst>
+            <a:ext uri="{FF2B5EF4-FFF2-40B4-BE49-F238E27FC236}">
+              <a16:creationId xmlns:a16="http://schemas.microsoft.com/office/drawing/2014/main" id="{8E4F1F13-426B-086B-7D8C-9A58A0F879DB}"/>
+            </a:ext>
+          </a:extLst>
+        </p:cNvPr>
+        <p:cNvGrpSpPr/>
+        <p:nvPr/>
+      </p:nvGrpSpPr>
+      <p:grpSpPr>
+        <a:xfrm>
+          <a:off x="0" y="0"/>
+          <a:ext cx="0" cy="0"/>
+          <a:chOff x="0" y="0"/>
+          <a:chExt cx="0" cy="0"/>
+        </a:xfrm>
+      </p:grpSpPr>
+      <p:sp>
+        <p:nvSpPr>
+          <p:cNvPr id="2" name="제목 1">
+            <a:extLst>
+              <a:ext uri="{FF2B5EF4-FFF2-40B4-BE49-F238E27FC236}">
+                <a16:creationId xmlns:a16="http://schemas.microsoft.com/office/drawing/2014/main" id="{AA26A92D-924E-0575-9551-F8FD7BFD3FAD}"/>
+              </a:ext>
+            </a:extLst>
+          </p:cNvPr>
+          <p:cNvSpPr>
+            <a:spLocks noGrp="1"/>
+          </p:cNvSpPr>
+          <p:nvPr>
+            <p:ph type="title"/>
+          </p:nvPr>
+        </p:nvSpPr>
+        <p:spPr/>
+        <p:txBody>
+          <a:bodyPr/>
+          <a:lstStyle/>
+          <a:p>
+            <a:r>
+              <a:rPr sz="2400" b="1">
+                <a:solidFill>
+                  <a:srgbClr val="000000"/>
+                </a:solidFill>
+                <a:latin typeface="맑은 고딕"/>
+                <a:ea typeface="맑은 고딕"/>
+              </a:rPr>
+              <a:t>10. 하네스를 만들기 쉬운 코드</a:t>
+            </a:r>
+          </a:p>
+        </p:txBody>
+      </p:sp>
+      <p:sp>
+        <p:nvSpPr>
+          <p:cNvPr id="3" name="슬라이드 번호 개체 틀 2">
+            <a:extLst>
+              <a:ext uri="{FF2B5EF4-FFF2-40B4-BE49-F238E27FC236}">
+                <a16:creationId xmlns:a16="http://schemas.microsoft.com/office/drawing/2014/main" id="{12CF30EE-4DFD-8063-56B8-B8689E76DFCA}"/>
+              </a:ext>
+            </a:extLst>
+          </p:cNvPr>
+          <p:cNvSpPr>
+            <a:spLocks noGrp="1"/>
+          </p:cNvSpPr>
+          <p:nvPr>
+            <p:ph type="sldNum" sz="quarter" idx="10"/>
+          </p:nvPr>
+        </p:nvSpPr>
+        <p:spPr/>
+        <p:txBody>
+          <a:bodyPr/>
+          <a:lstStyle/>
+          <a:p>
+            <a:pPr>
+              <a:defRPr/>
+            </a:pPr>
+            <a:r>
+              <a:rPr lang="en-US" altLang="ko-KR">
+                <a:solidFill>
+                  <a:prstClr val="black"/>
+                </a:solidFill>
+              </a:rPr>
+              <a:t>- 20 -</a:t>
+            </a:r>
+          </a:p>
+        </p:txBody>
+      </p:sp>
+      <p:sp>
+        <p:nvSpPr>
+          <p:cNvPr id="5" name="텍스트 개체 틀 4">
+            <a:extLst>
+              <a:ext uri="{FF2B5EF4-FFF2-40B4-BE49-F238E27FC236}">
+                <a16:creationId xmlns:a16="http://schemas.microsoft.com/office/drawing/2014/main" id="{D66274C8-E16F-5AEB-614B-D8D32DA3E8C6}"/>
+              </a:ext>
+            </a:extLst>
+          </p:cNvPr>
+          <p:cNvSpPr>
+            <a:spLocks noGrp="1"/>
+          </p:cNvSpPr>
+          <p:nvPr>
+            <p:ph type="body" sz="quarter" idx="11"/>
+          </p:nvPr>
+        </p:nvSpPr>
+        <p:spPr/>
+        <p:txBody>
+          <a:bodyPr/>
+          <a:lstStyle/>
+          <a:p>
+            <a:r>
+              <a:rPr kumimoji="1" lang="en-US" altLang="ko-KR" sz="1400" dirty="0" err="1"/>
+              <a:t>09. 검증 하네스·결과 점검·피드백</a:t>
+            </a:r>
+          </a:p>
+        </p:txBody>
+      </p:sp>
+      <p:sp>
+        <p:nvSpPr>
+          <p:cNvPr id="6" name="텍스트 개체 틀 5">
+            <a:extLst>
+              <a:ext uri="{FF2B5EF4-FFF2-40B4-BE49-F238E27FC236}">
+                <a16:creationId xmlns:a16="http://schemas.microsoft.com/office/drawing/2014/main" id="{A24E58E1-194B-A320-AEEE-24D08685BB67}"/>
+              </a:ext>
+            </a:extLst>
+          </p:cNvPr>
+          <p:cNvSpPr>
+            <a:spLocks noGrp="1"/>
+          </p:cNvSpPr>
+          <p:nvPr>
+            <p:ph type="body" sz="quarter" idx="12"/>
+          </p:nvPr>
+        </p:nvSpPr>
+        <p:spPr/>
+        <p:txBody>
+          <a:bodyPr/>
+          <a:lstStyle/>
+          <a:p>
+            <a:endParaRPr kumimoji="1" lang="ko-KR" altLang="en-US" dirty="0"/>
+          </a:p>
+        </p:txBody>
+      </p:sp>
+      <p:sp>
+        <p:nvSpPr>
+          <p:cNvPr id="7" name="텍스트 개체 틀 6">
+            <a:extLst>
+              <a:ext uri="{FF2B5EF4-FFF2-40B4-BE49-F238E27FC236}">
+                <a16:creationId xmlns:a16="http://schemas.microsoft.com/office/drawing/2014/main" id="{A219F420-613B-6234-45F6-0955A9A4505F}"/>
+              </a:ext>
+            </a:extLst>
+          </p:cNvPr>
+          <p:cNvSpPr>
+            <a:spLocks noGrp="1"/>
+          </p:cNvSpPr>
+          <p:nvPr>
+            <p:ph type="body" sz="quarter" idx="13"/>
+          </p:nvPr>
+        </p:nvSpPr>
+        <p:spPr/>
+        <p:txBody>
+          <a:bodyPr/>
+          <a:lstStyle/>
+          <a:p>
+            <a:endParaRPr kumimoji="1" lang="en-US" altLang="ko-KR" dirty="0"/>
+          </a:p>
+        </p:txBody>
+      </p:sp>
+      <p:sp>
+        <p:nvSpPr>
+          <p:cNvPr id="8" name="내용 개체 틀 7">
+            <a:extLst>
+              <a:ext uri="{FF2B5EF4-FFF2-40B4-BE49-F238E27FC236}">
+                <a16:creationId xmlns:a16="http://schemas.microsoft.com/office/drawing/2014/main" id="{BEBA2C4A-B0BF-F2E4-EA6E-614C99CBA184}"/>
+              </a:ext>
+            </a:extLst>
+          </p:cNvPr>
+          <p:cNvSpPr>
+            <a:spLocks noGrp="1"/>
+          </p:cNvSpPr>
+          <p:nvPr>
+            <p:ph idx="1"/>
+          </p:nvPr>
+        </p:nvSpPr>
+        <p:spPr/>
+        <p:txBody>
+          <a:bodyPr>
+            <a:normAutofit/>
+          </a:bodyPr>
+          <a:lstStyle/>
+          <a:p>
+            <a:pPr marL="0" indent="0">
+              <a:spcBef>
+                <a:spcPts val="600"/>
+              </a:spcBef>
+              <a:spcAft>
+                <a:spcPts val="600"/>
+              </a:spcAft>
+              <a:buNone/>
+            </a:pPr>
+            <a:r>
+              <a:rPr sz="1800" b="0">
+                <a:solidFill>
+                  <a:srgbClr val="000000"/>
+                </a:solidFill>
+                <a:latin typeface="맑은 고딕"/>
+                <a:ea typeface="맑은 고딕"/>
+              </a:rPr>
+              <a:t>센서는 어떤 코드에나 붙일 수 있는 것이 아니다. </a:t>
+            </a:r>
+            <a:r>
+              <a:rPr sz="1800" b="1">
+                <a:solidFill>
+                  <a:srgbClr val="000000"/>
+                </a:solidFill>
+                <a:latin typeface="맑은 고딕"/>
+                <a:ea typeface="맑은 고딕"/>
+              </a:rPr>
+              <a:t>판정할 경계가 있는 코드</a:t>
+            </a:r>
+            <a:r>
+              <a:rPr sz="1800" b="0">
+                <a:solidFill>
+                  <a:srgbClr val="000000"/>
+                </a:solidFill>
+                <a:latin typeface="맑은 고딕"/>
+                <a:ea typeface="맑은 고딕"/>
+              </a:rPr>
+              <a:t>에만 붙는다.</a:t>
+            </a:r>
+          </a:p>
+          <a:p>
+            <a:pPr lvl="2" marL="723900" indent="-368300">
+              <a:spcBef>
+                <a:spcPts val="600"/>
+              </a:spcBef>
+              <a:spcAft>
+                <a:spcPts val="600"/>
+              </a:spcAft>
+              <a:buSzPct val="90000"/>
+              <a:buFont typeface="Wingdings" pitchFamily="2" charset="2"/>
+              <a:buChar char=""/>
+            </a:pPr>
+            <a:r>
+              <a:rPr sz="1800" b="0">
+                <a:solidFill>
+                  <a:srgbClr val="000000"/>
+                </a:solidFill>
+                <a:latin typeface="맑은 고딕"/>
+                <a:ea typeface="맑은 고딕"/>
+              </a:rPr>
+              <a:t>빈 저장소에서 시작하는 팀은 </a:t>
+            </a:r>
+            <a:r>
+              <a:rPr sz="1800" b="1">
+                <a:solidFill>
+                  <a:srgbClr val="000000"/>
+                </a:solidFill>
+                <a:latin typeface="맑은 고딕"/>
+                <a:ea typeface="맑은 고딕"/>
+              </a:rPr>
+              <a:t>첫날부터</a:t>
+            </a:r>
+            <a:r>
+              <a:rPr sz="1800" b="0">
+                <a:solidFill>
+                  <a:srgbClr val="000000"/>
+                </a:solidFill>
+                <a:latin typeface="맑은 고딕"/>
+                <a:ea typeface="맑은 고딕"/>
+              </a:rPr>
+              <a:t> 하네스를 만들기 쉽게</a:t>
+            </a:r>
+            <a:r>
+              <a:rPr sz="1400" b="0">
+                <a:solidFill>
+                  <a:srgbClr val="000000"/>
+                </a:solidFill>
+                <a:latin typeface="맑은 고딕"/>
+                <a:ea typeface="맑은 고딕"/>
+              </a:rPr>
+              <a:t>(harnessability)</a:t>
+            </a:r>
+            <a:r>
+              <a:rPr sz="1800" b="0">
+                <a:solidFill>
+                  <a:srgbClr val="000000"/>
+                </a:solidFill>
+                <a:latin typeface="맑은 고딕"/>
+                <a:ea typeface="맑은 고딕"/>
+              </a:rPr>
+              <a:t> 해 둘 수 있다 — 기술과 아키텍처의 선택이 그 코드베이스를 얼마나 조절할 수 있는지를 정한다</a:t>
+            </a:r>
+            <a:r>
+              <a:rPr sz="1000" b="0">
+                <a:solidFill>
+                  <a:srgbClr val="000000"/>
+                </a:solidFill>
+                <a:latin typeface="맑은 고딕"/>
+                <a:ea typeface="맑은 고딕"/>
+              </a:rPr>
+              <a:t>, </a:t>
+            </a:r>
+            <a:r>
+              <a:rPr sz="1000" b="0">
+                <a:solidFill>
+                  <a:srgbClr val="000000"/>
+                </a:solidFill>
+                <a:latin typeface="맑은 고딕"/>
+                <a:ea typeface="맑은 고딕"/>
+              </a:rPr>
+              <a:t>"Greenfield teams can bake harnessability in from day one - technology decisions and architecture choices determine how governable the codebase will be."</a:t>
+            </a:r>
+            <a:r>
+              <a:rPr sz="1000" b="0">
+                <a:solidFill>
+                  <a:srgbClr val="000000"/>
+                </a:solidFill>
+                <a:latin typeface="맑은 고딕"/>
+                <a:ea typeface="맑은 고딕"/>
+              </a:rPr>
+              <a:t>, </a:t>
+            </a:r>
+            <a:r>
+              <a:rPr sz="1000" b="0">
+                <a:solidFill>
+                  <a:srgbClr val="000000"/>
+                </a:solidFill>
+                <a:latin typeface="맑은 고딕"/>
+                <a:ea typeface="맑은 고딕"/>
+              </a:rPr>
+              <a:t>[Böckeler 2026a]</a:t>
+            </a:r>
+          </a:p>
+          <a:p>
+            <a:pPr lvl="2" marL="723900" indent="-368300">
+              <a:spcBef>
+                <a:spcPts val="600"/>
+              </a:spcBef>
+              <a:spcAft>
+                <a:spcPts val="600"/>
+              </a:spcAft>
+              <a:buSzPct val="90000"/>
+              <a:buFont typeface="Wingdings" pitchFamily="2" charset="2"/>
+              <a:buChar char=""/>
+            </a:pPr>
+            <a:r>
+              <a:rPr sz="1800" b="0">
+                <a:solidFill>
+                  <a:srgbClr val="000000"/>
+                </a:solidFill>
+                <a:latin typeface="맑은 고딕"/>
+                <a:ea typeface="맑은 고딕"/>
+              </a:rPr>
+              <a:t>업무와 연동·영속을 </a:t>
+            </a:r>
+            <a:r>
+              <a:rPr sz="1800" b="1">
+                <a:solidFill>
+                  <a:srgbClr val="000000"/>
+                </a:solidFill>
+                <a:latin typeface="맑은 고딕"/>
+                <a:ea typeface="맑은 고딕"/>
+              </a:rPr>
+              <a:t>패키지로 가름</a:t>
+            </a:r>
+            <a:r>
+              <a:rPr sz="1800" b="0">
+                <a:solidFill>
+                  <a:srgbClr val="000000"/>
+                </a:solidFill>
+                <a:latin typeface="맑은 고딕"/>
+                <a:ea typeface="맑은 고딕"/>
+              </a:rPr>
+              <a:t> → 의존 규칙 검사</a:t>
+            </a:r>
+          </a:p>
+          <a:p>
+            <a:pPr lvl="2" marL="723900" indent="-368300">
+              <a:spcBef>
+                <a:spcPts val="600"/>
+              </a:spcBef>
+              <a:spcAft>
+                <a:spcPts val="600"/>
+              </a:spcAft>
+              <a:buSzPct val="90000"/>
+              <a:buFont typeface="Wingdings" pitchFamily="2" charset="2"/>
+              <a:buChar char=""/>
+            </a:pPr>
+            <a:r>
+              <a:rPr sz="1800" b="0">
+                <a:solidFill>
+                  <a:srgbClr val="000000"/>
+                </a:solidFill>
+                <a:latin typeface="맑은 고딕"/>
+                <a:ea typeface="맑은 고딕"/>
+              </a:rPr>
+              <a:t>외부 시스템을 </a:t>
+            </a:r>
+            <a:r>
+              <a:rPr sz="1800" b="1">
+                <a:solidFill>
+                  <a:srgbClr val="000000"/>
+                </a:solidFill>
+                <a:latin typeface="맑은 고딕"/>
+                <a:ea typeface="맑은 고딕"/>
+              </a:rPr>
+              <a:t>인터페이스로</a:t>
+            </a:r>
+            <a:r>
+              <a:rPr sz="1800" b="0">
+                <a:solidFill>
+                  <a:srgbClr val="000000"/>
+                </a:solidFill>
+                <a:latin typeface="맑은 고딕"/>
+                <a:ea typeface="맑은 고딕"/>
+              </a:rPr>
+              <a:t> 둠 → 테스트 대역으로 도는 수용 테스트</a:t>
+            </a:r>
+          </a:p>
+          <a:p>
+            <a:pPr lvl="2" marL="723900" indent="-368300">
+              <a:spcBef>
+                <a:spcPts val="600"/>
+              </a:spcBef>
+              <a:spcAft>
+                <a:spcPts val="600"/>
+              </a:spcAft>
+              <a:buSzPct val="90000"/>
+              <a:buFont typeface="Wingdings" pitchFamily="2" charset="2"/>
+              <a:buChar char=""/>
+            </a:pPr>
+            <a:r>
+              <a:rPr sz="1800" b="0">
+                <a:solidFill>
+                  <a:srgbClr val="000000"/>
+                </a:solidFill>
+                <a:latin typeface="맑은 고딕"/>
+                <a:ea typeface="맑은 고딕"/>
+              </a:rPr>
+              <a:t>업무 규칙을 </a:t>
+            </a:r>
+            <a:r>
+              <a:rPr sz="1800" b="1">
+                <a:solidFill>
+                  <a:srgbClr val="000000"/>
+                </a:solidFill>
+                <a:latin typeface="맑은 고딕"/>
+                <a:ea typeface="맑은 고딕"/>
+              </a:rPr>
+              <a:t>허용·거절 예시로</a:t>
+            </a:r>
+            <a:r>
+              <a:rPr sz="1800" b="0">
+                <a:solidFill>
+                  <a:srgbClr val="000000"/>
+                </a:solidFill>
+                <a:latin typeface="맑은 고딕"/>
+                <a:ea typeface="맑은 고딕"/>
+              </a:rPr>
+              <a:t> 적음 → 수용 테스트의 기대값</a:t>
+            </a:r>
+          </a:p>
+          <a:p>
+            <a:pPr lvl="2" marL="723900" indent="-368300">
+              <a:spcBef>
+                <a:spcPts val="600"/>
+              </a:spcBef>
+              <a:spcAft>
+                <a:spcPts val="600"/>
+              </a:spcAft>
+              <a:buSzPct val="90000"/>
+              <a:buFont typeface="Wingdings" pitchFamily="2" charset="2"/>
+              <a:buChar char=""/>
+            </a:pPr>
+            <a:r>
+              <a:rPr sz="1800" b="1">
+                <a:solidFill>
+                  <a:srgbClr val="000000"/>
+                </a:solidFill>
+                <a:latin typeface="맑은 고딕"/>
+                <a:ea typeface="맑은 고딕"/>
+              </a:rPr>
+              <a:t>판매가와 단가</a:t>
+            </a:r>
+            <a:r>
+              <a:rPr sz="1800" b="0">
+                <a:solidFill>
+                  <a:srgbClr val="000000"/>
+                </a:solidFill>
+                <a:latin typeface="맑은 고딕"/>
+                <a:ea typeface="맑은 고딕"/>
+              </a:rPr>
+              <a:t>를 용어집에서 가름 → 금액 계산의 LLM 심사</a:t>
+            </a:r>
+          </a:p>
+          <a:p>
+            <a:pPr lvl="2" marL="723900" indent="-368300">
+              <a:spcBef>
+                <a:spcPts val="600"/>
+              </a:spcBef>
+              <a:spcAft>
+                <a:spcPts val="600"/>
+              </a:spcAft>
+              <a:buSzPct val="90000"/>
+              <a:buFont typeface="Wingdings" pitchFamily="2" charset="2"/>
+              <a:buChar char=""/>
+            </a:pPr>
+            <a:r>
+              <a:rPr sz="1800" b="0">
+                <a:solidFill>
+                  <a:srgbClr val="000000"/>
+                </a:solidFill>
+                <a:latin typeface="맑은 고딕"/>
+                <a:ea typeface="맑은 고딕"/>
+              </a:rPr>
+              <a:t>SW 엔지니어링 팀의 주된 일은 이제 코드를 쓰는 것이 아니라 </a:t>
+            </a:r>
+            <a:r>
+              <a:rPr sz="1800" b="1">
+                <a:solidFill>
+                  <a:srgbClr val="000000"/>
+                </a:solidFill>
+                <a:latin typeface="맑은 고딕"/>
+                <a:ea typeface="맑은 고딕"/>
+              </a:rPr>
+              <a:t>환경을 설계하고 의도를 명세하고 피드백 루프를 만드는 것</a:t>
+            </a:r>
+            <a:r>
+              <a:rPr sz="1800" b="0">
+                <a:solidFill>
+                  <a:srgbClr val="000000"/>
+                </a:solidFill>
+                <a:latin typeface="맑은 고딕"/>
+                <a:ea typeface="맑은 고딕"/>
+              </a:rPr>
+              <a:t>이다</a:t>
+            </a:r>
+            <a:r>
+              <a:rPr sz="1000" b="0">
+                <a:solidFill>
+                  <a:srgbClr val="000000"/>
+                </a:solidFill>
+                <a:latin typeface="맑은 고딕"/>
+                <a:ea typeface="맑은 고딕"/>
+              </a:rPr>
+              <a:t>, </a:t>
+            </a:r>
+            <a:r>
+              <a:rPr sz="1000" b="0">
+                <a:solidFill>
+                  <a:srgbClr val="000000"/>
+                </a:solidFill>
+                <a:latin typeface="맑은 고딕"/>
+                <a:ea typeface="맑은 고딕"/>
+              </a:rPr>
+              <a:t>"A software engineering team's primary job is no longer to write code, but to design environments, specify intent, and build feedback loops"</a:t>
+            </a:r>
+            <a:r>
+              <a:rPr sz="1000" b="0">
+                <a:solidFill>
+                  <a:srgbClr val="000000"/>
+                </a:solidFill>
+                <a:latin typeface="맑은 고딕"/>
+                <a:ea typeface="맑은 고딕"/>
+              </a:rPr>
+              <a:t>, </a:t>
+            </a:r>
+            <a:r>
+              <a:rPr sz="1000" b="0">
+                <a:solidFill>
+                  <a:srgbClr val="000000"/>
+                </a:solidFill>
+                <a:latin typeface="맑은 고딕"/>
+                <a:ea typeface="맑은 고딕"/>
+              </a:rPr>
+              <a:t>[Lopopolo 2026]</a:t>
+            </a:r>
+          </a:p>
+          <a:p>
+            <a:pPr lvl="2" marL="723900" indent="-368300">
+              <a:spcBef>
+                <a:spcPts val="600"/>
+              </a:spcBef>
+              <a:spcAft>
+                <a:spcPts val="600"/>
+              </a:spcAft>
+              <a:buSzPct val="90000"/>
+              <a:buFont typeface="Wingdings" pitchFamily="2" charset="2"/>
+              <a:buChar char=""/>
+            </a:pPr>
+            <a:r>
+              <a:rPr sz="1800" b="0">
+                <a:solidFill>
+                  <a:srgbClr val="000000"/>
+                </a:solidFill>
+                <a:latin typeface="맑은 고딕"/>
+                <a:ea typeface="맑은 고딕"/>
+              </a:rPr>
+              <a:t>네 결정은 하네스를 염두에 두고 내린 것이 아니다. 좋은 설계가 </a:t>
+            </a:r>
+            <a:r>
+              <a:rPr sz="1800" b="1">
+                <a:solidFill>
+                  <a:srgbClr val="000000"/>
+                </a:solidFill>
+                <a:latin typeface="맑은 고딕"/>
+                <a:ea typeface="맑은 고딕"/>
+              </a:rPr>
+              <a:t>판정할 경계</a:t>
+            </a:r>
+            <a:r>
+              <a:rPr sz="1800" b="0">
+                <a:solidFill>
+                  <a:srgbClr val="000000"/>
+                </a:solidFill>
+                <a:latin typeface="맑은 고딕"/>
+                <a:ea typeface="맑은 고딕"/>
+              </a:rPr>
+              <a:t>를 남겼을 뿐이고, 경계가 없다면 </a:t>
+            </a:r>
+            <a:r>
+              <a:rPr sz="1800" b="1">
+                <a:solidFill>
+                  <a:srgbClr val="000000"/>
+                </a:solidFill>
+                <a:latin typeface="맑은 고딕"/>
+                <a:ea typeface="맑은 고딕"/>
+              </a:rPr>
+              <a:t>센서보다 경계를 먼저</a:t>
+            </a:r>
+            <a:r>
+              <a:rPr sz="1800" b="0">
+                <a:solidFill>
+                  <a:srgbClr val="000000"/>
+                </a:solidFill>
+                <a:latin typeface="맑은 고딕"/>
+                <a:ea typeface="맑은 고딕"/>
+              </a:rPr>
+              <a:t> 그린다.</a:t>
+            </a:r>
+          </a:p>
+        </p:txBody>
+      </p:sp>
+    </p:spTree>
+    <p:extLst>
+      <p:ext uri="{BB962C8B-B14F-4D97-AF65-F5344CB8AC3E}">
+        <p14:creationId xmlns:p14="http://schemas.microsoft.com/office/powerpoint/2010/main" val="3555436673"/>
+      </p:ext>
+    </p:extLst>
+  </p:cSld>
+  <p:clrMapOvr>
+    <a:masterClrMapping/>
+  </p:clrMapOvr>
+</p:sld>
+</file>
+
+<file path=ppt/slides/slide21.xml><?xml version="1.0" encoding="utf-8"?>
 <p:sld xmlns:a="http://schemas.openxmlformats.org/drawingml/2006/main" xmlns:r="http://schemas.openxmlformats.org/officeDocument/2006/relationships" xmlns:p="http://schemas.openxmlformats.org/presentationml/2006/main">
   <p:cSld>
     <p:spTree>
@@ -15562,7 +15903,7 @@
                 <a:ea typeface="맑은 고딕" panose="020B0503020000020004" pitchFamily="34" charset="-127"/>
                 <a:cs typeface="+mn-cs"/>
               </a:rPr>
-              <a:t>- 20 -</a:t>
+              <a:t>- 21 -</a:t>
             </a:r>
           </a:p>
         </p:txBody>
@@ -15629,7 +15970,7 @@
 </p:sld>
 </file>
 
-<file path=ppt/slides/slide21.xml><?xml version="1.0" encoding="utf-8"?>
+<file path=ppt/slides/slide22.xml><?xml version="1.0" encoding="utf-8"?>
 <p:sld xmlns:a="http://schemas.openxmlformats.org/drawingml/2006/main" xmlns:r="http://schemas.openxmlformats.org/officeDocument/2006/relationships" xmlns:p="http://schemas.openxmlformats.org/presentationml/2006/main">
   <p:cSld>
     <p:spTree>
@@ -16705,7 +17046,7 @@
                 <a:latin typeface="맑은 고딕"/>
                 <a:ea typeface="맑은 고딕"/>
               </a:rPr>
-              <a:t>품질을 왼쪽에는 </a:t>
+              <a:t>품질을 왼쪽에 두라는 말은 </a:t>
             </a:r>
             <a:r>
               <a:rPr sz="1800" b="1">
@@ -16715,7 +17056,7 @@
                 <a:latin typeface="맑은 고딕"/>
                 <a:ea typeface="맑은 고딕"/>
               </a:rPr>
-              <a:t>값이 싼 센서를 앞으로</a:t>
+              <a:t>빠르고 싼 검사를 앞으로 당기라는 뜻</a:t>
             </a:r>
             <a:r>
               <a:rPr sz="1800" b="0">
@@ -16725,7 +17066,7 @@
                 <a:latin typeface="맑은 고딕"/>
                 <a:ea typeface="맑은 고딕"/>
               </a:rPr>
-              <a:t>라는 뜻이다. 비싼 센서를 앞으로 당기는 말이 아니다.</a:t>
+              <a:t>이지, 모든 검사를 앞으로 옮기라는 말이 아니다.</a:t>
             </a:r>
           </a:p>
         </p:txBody>
@@ -16790,7 +17131,7 @@
                 <a:ea typeface="맑은 고딕" panose="020B0503020000020004" pitchFamily="34" charset="-127"/>
                 <a:cs typeface="+mn-cs"/>
               </a:rPr>
-              <a:t>- 21 -</a:t>
+              <a:t>- 22 -</a:t>
             </a:r>
           </a:p>
         </p:txBody>
@@ -16848,920 +17189,6 @@
     <p:extLst>
       <p:ext uri="{BB962C8B-B14F-4D97-AF65-F5344CB8AC3E}">
         <p14:creationId xmlns:p14="http://schemas.microsoft.com/office/powerpoint/2010/main" val="2789569477"/>
-      </p:ext>
-    </p:extLst>
-  </p:cSld>
-  <p:clrMapOvr>
-    <a:masterClrMapping/>
-  </p:clrMapOvr>
-</p:sld>
-</file>
-
-<file path=ppt/slides/slide22.xml><?xml version="1.0" encoding="utf-8"?>
-<p:sld xmlns:a="http://schemas.openxmlformats.org/drawingml/2006/main" xmlns:r="http://schemas.openxmlformats.org/officeDocument/2006/relationships" xmlns:p="http://schemas.openxmlformats.org/presentationml/2006/main">
-  <p:cSld>
-    <p:spTree>
-      <p:nvGrpSpPr>
-        <p:cNvPr id="1" name="">
-          <a:extLst>
-            <a:ext uri="{FF2B5EF4-FFF2-40B4-BE49-F238E27FC236}">
-              <a16:creationId xmlns:a16="http://schemas.microsoft.com/office/drawing/2014/main" id="{8E4F1F13-426B-086B-7D8C-9A58A0F879DB}"/>
-            </a:ext>
-          </a:extLst>
-        </p:cNvPr>
-        <p:cNvGrpSpPr/>
-        <p:nvPr/>
-      </p:nvGrpSpPr>
-      <p:grpSpPr>
-        <a:xfrm>
-          <a:off x="0" y="0"/>
-          <a:ext cx="0" cy="0"/>
-          <a:chOff x="0" y="0"/>
-          <a:chExt cx="0" cy="0"/>
-        </a:xfrm>
-      </p:grpSpPr>
-      <p:sp>
-        <p:nvSpPr>
-          <p:cNvPr id="2" name="제목 1">
-            <a:extLst>
-              <a:ext uri="{FF2B5EF4-FFF2-40B4-BE49-F238E27FC236}">
-                <a16:creationId xmlns:a16="http://schemas.microsoft.com/office/drawing/2014/main" id="{AA26A92D-924E-0575-9551-F8FD7BFD3FAD}"/>
-              </a:ext>
-            </a:extLst>
-          </p:cNvPr>
-          <p:cNvSpPr>
-            <a:spLocks noGrp="1"/>
-          </p:cNvSpPr>
-          <p:nvPr>
-            <p:ph type="title"/>
-          </p:nvPr>
-        </p:nvSpPr>
-        <p:spPr/>
-        <p:txBody>
-          <a:bodyPr/>
-          <a:lstStyle/>
-          <a:p>
-            <a:r>
-              <a:rPr sz="2400" b="1">
-                <a:solidFill>
-                  <a:srgbClr val="000000"/>
-                </a:solidFill>
-                <a:latin typeface="맑은 고딕"/>
-                <a:ea typeface="맑은 고딕"/>
-              </a:rPr>
-              <a:t>12. 실습 — 하네스 배치</a:t>
-            </a:r>
-          </a:p>
-        </p:txBody>
-      </p:sp>
-      <p:sp>
-        <p:nvSpPr>
-          <p:cNvPr id="3" name="슬라이드 번호 개체 틀 2">
-            <a:extLst>
-              <a:ext uri="{FF2B5EF4-FFF2-40B4-BE49-F238E27FC236}">
-                <a16:creationId xmlns:a16="http://schemas.microsoft.com/office/drawing/2014/main" id="{12CF30EE-4DFD-8063-56B8-B8689E76DFCA}"/>
-              </a:ext>
-            </a:extLst>
-          </p:cNvPr>
-          <p:cNvSpPr>
-            <a:spLocks noGrp="1"/>
-          </p:cNvSpPr>
-          <p:nvPr>
-            <p:ph type="sldNum" sz="quarter" idx="10"/>
-          </p:nvPr>
-        </p:nvSpPr>
-        <p:spPr/>
-        <p:txBody>
-          <a:bodyPr/>
-          <a:lstStyle/>
-          <a:p>
-            <a:pPr>
-              <a:defRPr/>
-            </a:pPr>
-            <a:r>
-              <a:rPr lang="en-US" altLang="ko-KR">
-                <a:solidFill>
-                  <a:prstClr val="black"/>
-                </a:solidFill>
-              </a:rPr>
-              <a:t>- 22 -</a:t>
-            </a:r>
-          </a:p>
-        </p:txBody>
-      </p:sp>
-      <p:sp>
-        <p:nvSpPr>
-          <p:cNvPr id="5" name="텍스트 개체 틀 4">
-            <a:extLst>
-              <a:ext uri="{FF2B5EF4-FFF2-40B4-BE49-F238E27FC236}">
-                <a16:creationId xmlns:a16="http://schemas.microsoft.com/office/drawing/2014/main" id="{D66274C8-E16F-5AEB-614B-D8D32DA3E8C6}"/>
-              </a:ext>
-            </a:extLst>
-          </p:cNvPr>
-          <p:cNvSpPr>
-            <a:spLocks noGrp="1"/>
-          </p:cNvSpPr>
-          <p:nvPr>
-            <p:ph type="body" sz="quarter" idx="11"/>
-          </p:nvPr>
-        </p:nvSpPr>
-        <p:spPr/>
-        <p:txBody>
-          <a:bodyPr/>
-          <a:lstStyle/>
-          <a:p>
-            <a:r>
-              <a:rPr kumimoji="1" lang="en-US" altLang="ko-KR" sz="1400" dirty="0" err="1"/>
-              <a:t>09. 검증 하네스·결과 점검·피드백</a:t>
-            </a:r>
-          </a:p>
-        </p:txBody>
-      </p:sp>
-      <p:sp>
-        <p:nvSpPr>
-          <p:cNvPr id="6" name="텍스트 개체 틀 5">
-            <a:extLst>
-              <a:ext uri="{FF2B5EF4-FFF2-40B4-BE49-F238E27FC236}">
-                <a16:creationId xmlns:a16="http://schemas.microsoft.com/office/drawing/2014/main" id="{A24E58E1-194B-A320-AEEE-24D08685BB67}"/>
-              </a:ext>
-            </a:extLst>
-          </p:cNvPr>
-          <p:cNvSpPr>
-            <a:spLocks noGrp="1"/>
-          </p:cNvSpPr>
-          <p:nvPr>
-            <p:ph type="body" sz="quarter" idx="12"/>
-          </p:nvPr>
-        </p:nvSpPr>
-        <p:spPr/>
-        <p:txBody>
-          <a:bodyPr/>
-          <a:lstStyle/>
-          <a:p>
-            <a:endParaRPr kumimoji="1" lang="ko-KR" altLang="en-US" dirty="0"/>
-          </a:p>
-        </p:txBody>
-      </p:sp>
-      <p:sp>
-        <p:nvSpPr>
-          <p:cNvPr id="7" name="텍스트 개체 틀 6">
-            <a:extLst>
-              <a:ext uri="{FF2B5EF4-FFF2-40B4-BE49-F238E27FC236}">
-                <a16:creationId xmlns:a16="http://schemas.microsoft.com/office/drawing/2014/main" id="{A219F420-613B-6234-45F6-0955A9A4505F}"/>
-              </a:ext>
-            </a:extLst>
-          </p:cNvPr>
-          <p:cNvSpPr>
-            <a:spLocks noGrp="1"/>
-          </p:cNvSpPr>
-          <p:nvPr>
-            <p:ph type="body" sz="quarter" idx="13"/>
-          </p:nvPr>
-        </p:nvSpPr>
-        <p:spPr/>
-        <p:txBody>
-          <a:bodyPr/>
-          <a:lstStyle/>
-          <a:p>
-            <a:endParaRPr kumimoji="1" lang="en-US" altLang="ko-KR" dirty="0"/>
-          </a:p>
-        </p:txBody>
-      </p:sp>
-      <p:sp>
-        <p:nvSpPr>
-          <p:cNvPr id="8" name="내용 개체 틀 7">
-            <a:extLst>
-              <a:ext uri="{FF2B5EF4-FFF2-40B4-BE49-F238E27FC236}">
-                <a16:creationId xmlns:a16="http://schemas.microsoft.com/office/drawing/2014/main" id="{BEBA2C4A-B0BF-F2E4-EA6E-614C99CBA184}"/>
-              </a:ext>
-            </a:extLst>
-          </p:cNvPr>
-          <p:cNvSpPr>
-            <a:spLocks noGrp="1"/>
-          </p:cNvSpPr>
-          <p:nvPr>
-            <p:ph idx="1"/>
-          </p:nvPr>
-        </p:nvSpPr>
-        <p:spPr>
-          <a:xfrm>
-            <a:off x="365760" y="960120"/>
-            <a:ext cx="8412480" cy="5257800"/>
-          </a:xfrm>
-        </p:spPr>
-        <p:txBody>
-          <a:bodyPr>
-            <a:normAutofit/>
-          </a:bodyPr>
-          <a:lstStyle/>
-          <a:p>
-            <a:pPr marL="0" indent="0">
-              <a:spcBef>
-                <a:spcPts val="300"/>
-              </a:spcBef>
-              <a:spcAft>
-                <a:spcPts val="300"/>
-              </a:spcAft>
-              <a:buNone/>
-            </a:pPr>
-            <a:r>
-              <a:rPr sz="1600" b="0">
-                <a:solidFill>
-                  <a:srgbClr val="000000"/>
-                </a:solidFill>
-                <a:latin typeface="맑은 고딕"/>
-                <a:ea typeface="맑은 고딕"/>
-              </a:rPr>
-              <a:t>실습 4의 수용 기준, 실습 5의 맥락 패키지, 실습 8의 가드레일 배치를 LLM에 제공하여 </a:t>
-            </a:r>
-            <a:r>
-              <a:rPr sz="1600" b="1">
-                <a:solidFill>
-                  <a:srgbClr val="000000"/>
-                </a:solidFill>
-                <a:latin typeface="맑은 고딕"/>
-                <a:ea typeface="맑은 고딕"/>
-              </a:rPr>
-              <a:t>"신청한다"의 하네스 배치</a:t>
-            </a:r>
-            <a:r>
-              <a:rPr sz="1600" b="0">
-                <a:solidFill>
-                  <a:srgbClr val="000000"/>
-                </a:solidFill>
-                <a:latin typeface="맑은 고딕"/>
-                <a:ea typeface="맑은 고딕"/>
-              </a:rPr>
-              <a:t>를 만들고, 점검 항목으로 피드백하여 완성하십시오.</a:t>
-            </a:r>
-          </a:p>
-          <a:p>
-            <a:pPr lvl="2" marL="723900" indent="-368300">
-              <a:spcBef>
-                <a:spcPts val="300"/>
-              </a:spcBef>
-              <a:spcAft>
-                <a:spcPts val="300"/>
-              </a:spcAft>
-              <a:buSzPct val="90000"/>
-              <a:buFont typeface="Wingdings" pitchFamily="2" charset="2"/>
-              <a:buChar char=""/>
-            </a:pPr>
-            <a:r>
-              <a:rPr sz="1600" b="1">
-                <a:solidFill>
-                  <a:srgbClr val="000000"/>
-                </a:solidFill>
-                <a:latin typeface="맑은 고딕"/>
-                <a:ea typeface="맑은 고딕"/>
-              </a:rPr>
-              <a:t>투입물</a:t>
-            </a:r>
-          </a:p>
-          <a:p>
-            <a:pPr lvl="3" marL="723900" indent="0">
-              <a:spcBef>
-                <a:spcPts val="300"/>
-              </a:spcBef>
-              <a:spcAft>
-                <a:spcPts val="300"/>
-              </a:spcAft>
-              <a:buNone/>
-            </a:pPr>
-            <a:r>
-              <a:rPr sz="1400" b="0">
-                <a:solidFill>
-                  <a:srgbClr val="000000"/>
-                </a:solidFill>
-                <a:latin typeface="맑은 고딕"/>
-                <a:ea typeface="맑은 고딕"/>
-              </a:rPr>
-              <a:t>실습 4의 </a:t>
-            </a:r>
-            <a:r>
-              <a:rPr sz="1400" b="1">
-                <a:solidFill>
-                  <a:srgbClr val="000000"/>
-                </a:solidFill>
-                <a:latin typeface="맑은 고딕"/>
-                <a:ea typeface="맑은 고딕"/>
-              </a:rPr>
-              <a:t>수용 기준</a:t>
-            </a:r>
-            <a:r>
-              <a:rPr sz="1400" b="0">
-                <a:solidFill>
-                  <a:srgbClr val="000000"/>
-                </a:solidFill>
-                <a:latin typeface="맑은 고딕"/>
-                <a:ea typeface="맑은 고딕"/>
-              </a:rPr>
-              <a:t>, 실습 5의 </a:t>
-            </a:r>
-            <a:r>
-              <a:rPr sz="1400" b="1">
-                <a:solidFill>
-                  <a:srgbClr val="000000"/>
-                </a:solidFill>
-                <a:latin typeface="맑은 고딕"/>
-                <a:ea typeface="맑은 고딕"/>
-              </a:rPr>
-              <a:t>맥락 패키지</a:t>
-            </a:r>
-            <a:r>
-              <a:rPr sz="1400" b="0">
-                <a:solidFill>
-                  <a:srgbClr val="000000"/>
-                </a:solidFill>
-                <a:latin typeface="맑은 고딕"/>
-                <a:ea typeface="맑은 고딕"/>
-              </a:rPr>
-              <a:t>, 실습 8의 </a:t>
-            </a:r>
-            <a:r>
-              <a:rPr sz="1400" b="1">
-                <a:solidFill>
-                  <a:srgbClr val="000000"/>
-                </a:solidFill>
-                <a:latin typeface="맑은 고딕"/>
-                <a:ea typeface="맑은 고딕"/>
-              </a:rPr>
-              <a:t>가드레일 배치</a:t>
-            </a:r>
-          </a:p>
-          <a:p>
-            <a:pPr lvl="2" marL="723900" indent="-368300">
-              <a:spcBef>
-                <a:spcPts val="300"/>
-              </a:spcBef>
-              <a:spcAft>
-                <a:spcPts val="300"/>
-              </a:spcAft>
-              <a:buSzPct val="90000"/>
-              <a:buFont typeface="Wingdings" pitchFamily="2" charset="2"/>
-              <a:buChar char=""/>
-            </a:pPr>
-            <a:r>
-              <a:rPr sz="1600" b="1">
-                <a:solidFill>
-                  <a:srgbClr val="000000"/>
-                </a:solidFill>
-                <a:latin typeface="맑은 고딕"/>
-                <a:ea typeface="맑은 고딕"/>
-              </a:rPr>
-              <a:t>프롬프트</a:t>
-            </a:r>
-          </a:p>
-          <a:p>
-            <a:pPr lvl="3" marL="723900" indent="0">
-              <a:spcBef>
-                <a:spcPts val="300"/>
-              </a:spcBef>
-              <a:spcAft>
-                <a:spcPts val="300"/>
-              </a:spcAft>
-              <a:buNone/>
-            </a:pPr>
-            <a:r>
-              <a:rPr sz="1400" b="0">
-                <a:solidFill>
-                  <a:srgbClr val="000000"/>
-                </a:solidFill>
-                <a:latin typeface="맑은 고딕"/>
-                <a:ea typeface="맑은 고딕"/>
-              </a:rPr>
-              <a:t>① "신청한다 과제의 하네스를 </a:t>
-            </a:r>
-            <a:r>
-              <a:rPr sz="1400" b="1">
-                <a:solidFill>
-                  <a:srgbClr val="000000"/>
-                </a:solidFill>
-                <a:latin typeface="맑은 고딕"/>
-                <a:ea typeface="맑은 고딕"/>
-              </a:rPr>
-              <a:t>가이드와 센서의 짝</a:t>
-            </a:r>
-            <a:r>
-              <a:rPr sz="1400" b="0">
-                <a:solidFill>
-                  <a:srgbClr val="000000"/>
-                </a:solidFill>
-                <a:latin typeface="맑은 고딕"/>
-                <a:ea typeface="맑은 고딕"/>
-              </a:rPr>
-              <a:t>으로 표로 만들어줘. 센서마다 판정하는 것, 계산적·추론적, 돌리는 자리를 적어줘."</a:t>
-            </a:r>
-          </a:p>
-          <a:p>
-            <a:pPr lvl="3" marL="723900" indent="0">
-              <a:spcBef>
-                <a:spcPts val="300"/>
-              </a:spcBef>
-              <a:spcAft>
-                <a:spcPts val="300"/>
-              </a:spcAft>
-              <a:buNone/>
-            </a:pPr>
-            <a:r>
-              <a:rPr sz="1400" b="0">
-                <a:solidFill>
-                  <a:srgbClr val="000000"/>
-                </a:solidFill>
-                <a:latin typeface="맑은 고딕"/>
-                <a:ea typeface="맑은 고딕"/>
-              </a:rPr>
-              <a:t>② "센서마다 </a:t>
-            </a:r>
-            <a:r>
-              <a:rPr sz="1400" b="1">
-                <a:solidFill>
-                  <a:srgbClr val="000000"/>
-                </a:solidFill>
-                <a:latin typeface="맑은 고딕"/>
-                <a:ea typeface="맑은 고딕"/>
-              </a:rPr>
-              <a:t>실패했을 때 되돌릴 결정</a:t>
-            </a:r>
-            <a:r>
-              <a:rPr sz="1000" b="0">
-                <a:solidFill>
-                  <a:srgbClr val="000000"/>
-                </a:solidFill>
-                <a:latin typeface="맑은 고딕"/>
-                <a:ea typeface="맑은 고딕"/>
-              </a:rPr>
-              <a:t>(명세·맥락·경계·하네스)</a:t>
-            </a:r>
-            <a:r>
-              <a:rPr sz="1400" b="0">
-                <a:solidFill>
-                  <a:srgbClr val="000000"/>
-                </a:solidFill>
-                <a:latin typeface="맑은 고딕"/>
-                <a:ea typeface="맑은 고딕"/>
-              </a:rPr>
-              <a:t>을 적고, 센서가 못 보는 것은 사람이 볼 것으로 나눠줘."</a:t>
-            </a:r>
-          </a:p>
-          <a:p>
-            <a:pPr lvl="2" marL="723900" indent="-368300">
-              <a:spcBef>
-                <a:spcPts val="300"/>
-              </a:spcBef>
-              <a:spcAft>
-                <a:spcPts val="300"/>
-              </a:spcAft>
-              <a:buSzPct val="90000"/>
-              <a:buFont typeface="Wingdings" pitchFamily="2" charset="2"/>
-              <a:buChar char=""/>
-            </a:pPr>
-            <a:r>
-              <a:rPr sz="1600" b="1">
-                <a:solidFill>
-                  <a:srgbClr val="000000"/>
-                </a:solidFill>
-                <a:latin typeface="맑은 고딕"/>
-                <a:ea typeface="맑은 고딕"/>
-              </a:rPr>
-              <a:t>점검 항목</a:t>
-            </a:r>
-          </a:p>
-          <a:p>
-            <a:pPr lvl="3" marL="947420" indent="-223520">
-              <a:spcBef>
-                <a:spcPts val="300"/>
-              </a:spcBef>
-              <a:spcAft>
-                <a:spcPts val="300"/>
-              </a:spcAft>
-              <a:buNone/>
-            </a:pPr>
-            <a:r>
-              <a:rPr sz="1400" b="0">
-                <a:solidFill>
-                  <a:srgbClr val="000000"/>
-                </a:solidFill>
-                <a:latin typeface="맑은 고딕"/>
-                <a:ea typeface="맑은 고딕"/>
-              </a:rPr>
-              <a:t>1. </a:t>
-            </a:r>
-            <a:r>
-              <a:rPr sz="1400" b="1">
-                <a:solidFill>
-                  <a:srgbClr val="000000"/>
-                </a:solidFill>
-                <a:latin typeface="맑은 고딕"/>
-                <a:ea typeface="맑은 고딕"/>
-              </a:rPr>
-              <a:t>짝</a:t>
-            </a:r>
-            <a:r>
-              <a:rPr sz="1400" b="0">
-                <a:solidFill>
-                  <a:srgbClr val="000000"/>
-                </a:solidFill>
-                <a:latin typeface="맑은 고딕"/>
-                <a:ea typeface="맑은 고딕"/>
-              </a:rPr>
-              <a:t> —</a:t>
-            </a:r>
-            <a:r>
-              <a:rPr sz="1200" b="0">
-                <a:solidFill>
-                  <a:srgbClr val="000000"/>
-                </a:solidFill>
-                <a:latin typeface="맑은 고딕"/>
-                <a:ea typeface="맑은 고딕"/>
-              </a:rPr>
-              <a:t> 가이드만 있거나 센서만 있는 줄이 없는가?</a:t>
-            </a:r>
-          </a:p>
-          <a:p>
-            <a:pPr lvl="3" marL="947420" indent="-223520">
-              <a:spcBef>
-                <a:spcPts val="300"/>
-              </a:spcBef>
-              <a:spcAft>
-                <a:spcPts val="300"/>
-              </a:spcAft>
-              <a:buNone/>
-            </a:pPr>
-            <a:r>
-              <a:rPr sz="1400" b="0">
-                <a:solidFill>
-                  <a:srgbClr val="000000"/>
-                </a:solidFill>
-                <a:latin typeface="맑은 고딕"/>
-                <a:ea typeface="맑은 고딕"/>
-              </a:rPr>
-              <a:t>2. </a:t>
-            </a:r>
-            <a:r>
-              <a:rPr sz="1400" b="1">
-                <a:solidFill>
-                  <a:srgbClr val="000000"/>
-                </a:solidFill>
-                <a:latin typeface="맑은 고딕"/>
-                <a:ea typeface="맑은 고딕"/>
-              </a:rPr>
-              <a:t>판정의 범위</a:t>
-            </a:r>
-            <a:r>
-              <a:rPr sz="1400" b="0">
-                <a:solidFill>
-                  <a:srgbClr val="000000"/>
-                </a:solidFill>
-                <a:latin typeface="맑은 고딕"/>
-                <a:ea typeface="맑은 고딕"/>
-              </a:rPr>
-              <a:t> —</a:t>
-            </a:r>
-            <a:r>
-              <a:rPr sz="1200" b="0">
-                <a:solidFill>
-                  <a:srgbClr val="000000"/>
-                </a:solidFill>
-                <a:latin typeface="맑은 고딕"/>
-                <a:ea typeface="맑은 고딕"/>
-              </a:rPr>
-              <a:t> 센서마다 </a:t>
-            </a:r>
-            <a:r>
-              <a:rPr sz="1200" b="1">
-                <a:solidFill>
-                  <a:srgbClr val="000000"/>
-                </a:solidFill>
-                <a:latin typeface="맑은 고딕"/>
-                <a:ea typeface="맑은 고딕"/>
-              </a:rPr>
-              <a:t>무엇을 판정하는지</a:t>
-            </a:r>
-            <a:r>
-              <a:rPr sz="1200" b="0">
-                <a:solidFill>
-                  <a:srgbClr val="000000"/>
-                </a:solidFill>
-                <a:latin typeface="맑은 고딕"/>
-                <a:ea typeface="맑은 고딕"/>
-              </a:rPr>
-              <a:t> 한 줄로 적었고, 통과가 보장하지 않는 것을 구분했는가?</a:t>
-            </a:r>
-          </a:p>
-          <a:p>
-            <a:pPr lvl="3" marL="947420" indent="-223520">
-              <a:spcBef>
-                <a:spcPts val="300"/>
-              </a:spcBef>
-              <a:spcAft>
-                <a:spcPts val="300"/>
-              </a:spcAft>
-              <a:buNone/>
-            </a:pPr>
-            <a:r>
-              <a:rPr sz="1400" b="0">
-                <a:solidFill>
-                  <a:srgbClr val="000000"/>
-                </a:solidFill>
-                <a:latin typeface="맑은 고딕"/>
-                <a:ea typeface="맑은 고딕"/>
-              </a:rPr>
-              <a:t>3. </a:t>
-            </a:r>
-            <a:r>
-              <a:rPr sz="1400" b="1">
-                <a:solidFill>
-                  <a:srgbClr val="000000"/>
-                </a:solidFill>
-                <a:latin typeface="맑은 고딕"/>
-                <a:ea typeface="맑은 고딕"/>
-              </a:rPr>
-              <a:t>갈래</a:t>
-            </a:r>
-            <a:r>
-              <a:rPr sz="1400" b="0">
-                <a:solidFill>
-                  <a:srgbClr val="000000"/>
-                </a:solidFill>
-                <a:latin typeface="맑은 고딕"/>
-                <a:ea typeface="맑은 고딕"/>
-              </a:rPr>
-              <a:t> —</a:t>
-            </a:r>
-            <a:r>
-              <a:rPr sz="1200" b="0">
-                <a:solidFill>
-                  <a:srgbClr val="000000"/>
-                </a:solidFill>
-                <a:latin typeface="맑은 고딕"/>
-                <a:ea typeface="맑은 고딕"/>
-              </a:rPr>
-              <a:t> 기계가 판정할 수 있는 것을 LLM 심사로 맡기지 않았는가?</a:t>
-            </a:r>
-          </a:p>
-          <a:p>
-            <a:pPr lvl="3" marL="947420" indent="-223520">
-              <a:spcBef>
-                <a:spcPts val="300"/>
-              </a:spcBef>
-              <a:spcAft>
-                <a:spcPts val="300"/>
-              </a:spcAft>
-              <a:buNone/>
-            </a:pPr>
-            <a:r>
-              <a:rPr sz="1400" b="0">
-                <a:solidFill>
-                  <a:srgbClr val="000000"/>
-                </a:solidFill>
-                <a:latin typeface="맑은 고딕"/>
-                <a:ea typeface="맑은 고딕"/>
-              </a:rPr>
-              <a:t>4. </a:t>
-            </a:r>
-            <a:r>
-              <a:rPr sz="1400" b="1">
-                <a:solidFill>
-                  <a:srgbClr val="000000"/>
-                </a:solidFill>
-                <a:latin typeface="맑은 고딕"/>
-                <a:ea typeface="맑은 고딕"/>
-              </a:rPr>
-              <a:t>자리</a:t>
-            </a:r>
-            <a:r>
-              <a:rPr sz="1400" b="0">
-                <a:solidFill>
-                  <a:srgbClr val="000000"/>
-                </a:solidFill>
-                <a:latin typeface="맑은 고딕"/>
-                <a:ea typeface="맑은 고딕"/>
-              </a:rPr>
-              <a:t> —</a:t>
-            </a:r>
-            <a:r>
-              <a:rPr sz="1200" b="0">
-                <a:solidFill>
-                  <a:srgbClr val="000000"/>
-                </a:solidFill>
-                <a:latin typeface="맑은 고딕"/>
-                <a:ea typeface="맑은 고딕"/>
-              </a:rPr>
-              <a:t> 값이 싼 센서를 루프 안에, 비싼 센서를 뒤에 두었는가?</a:t>
-            </a:r>
-          </a:p>
-          <a:p>
-            <a:pPr lvl="3" marL="947420" indent="-223520">
-              <a:spcBef>
-                <a:spcPts val="300"/>
-              </a:spcBef>
-              <a:spcAft>
-                <a:spcPts val="300"/>
-              </a:spcAft>
-              <a:buNone/>
-            </a:pPr>
-            <a:r>
-              <a:rPr sz="1400" b="0">
-                <a:solidFill>
-                  <a:srgbClr val="000000"/>
-                </a:solidFill>
-                <a:latin typeface="맑은 고딕"/>
-                <a:ea typeface="맑은 고딕"/>
-              </a:rPr>
-              <a:t>5. </a:t>
-            </a:r>
-            <a:r>
-              <a:rPr sz="1400" b="1">
-                <a:solidFill>
-                  <a:srgbClr val="000000"/>
-                </a:solidFill>
-                <a:latin typeface="맑은 고딕"/>
-                <a:ea typeface="맑은 고딕"/>
-              </a:rPr>
-              <a:t>메시지</a:t>
-            </a:r>
-            <a:r>
-              <a:rPr sz="1400" b="0">
-                <a:solidFill>
-                  <a:srgbClr val="000000"/>
-                </a:solidFill>
-                <a:latin typeface="맑은 고딕"/>
-                <a:ea typeface="맑은 고딕"/>
-              </a:rPr>
-              <a:t> —</a:t>
-            </a:r>
-            <a:r>
-              <a:rPr sz="1200" b="0">
-                <a:solidFill>
-                  <a:srgbClr val="000000"/>
-                </a:solidFill>
-                <a:latin typeface="맑은 고딕"/>
-                <a:ea typeface="맑은 고딕"/>
-              </a:rPr>
-              <a:t> 실패 메시지에 </a:t>
-            </a:r>
-            <a:r>
-              <a:rPr sz="1200" b="1">
-                <a:solidFill>
-                  <a:srgbClr val="000000"/>
-                </a:solidFill>
-                <a:latin typeface="맑은 고딕"/>
-                <a:ea typeface="맑은 고딕"/>
-              </a:rPr>
-              <a:t>고치는 방법</a:t>
-            </a:r>
-            <a:r>
-              <a:rPr sz="1200" b="0">
-                <a:solidFill>
-                  <a:srgbClr val="000000"/>
-                </a:solidFill>
-                <a:latin typeface="맑은 고딕"/>
-                <a:ea typeface="맑은 고딕"/>
-              </a:rPr>
-              <a:t>이 담겼는가?</a:t>
-            </a:r>
-          </a:p>
-          <a:p>
-            <a:pPr lvl="3" marL="947420" indent="-223520">
-              <a:spcBef>
-                <a:spcPts val="300"/>
-              </a:spcBef>
-              <a:spcAft>
-                <a:spcPts val="300"/>
-              </a:spcAft>
-              <a:buNone/>
-            </a:pPr>
-            <a:r>
-              <a:rPr sz="1400" b="0">
-                <a:solidFill>
-                  <a:srgbClr val="000000"/>
-                </a:solidFill>
-                <a:latin typeface="맑은 고딕"/>
-                <a:ea typeface="맑은 고딕"/>
-              </a:rPr>
-              <a:t>6. </a:t>
-            </a:r>
-            <a:r>
-              <a:rPr sz="1400" b="1">
-                <a:solidFill>
-                  <a:srgbClr val="000000"/>
-                </a:solidFill>
-                <a:latin typeface="맑은 고딕"/>
-                <a:ea typeface="맑은 고딕"/>
-              </a:rPr>
-              <a:t>되돌릴 결정</a:t>
-            </a:r>
-            <a:r>
-              <a:rPr sz="1400" b="0">
-                <a:solidFill>
-                  <a:srgbClr val="000000"/>
-                </a:solidFill>
-                <a:latin typeface="맑은 고딕"/>
-                <a:ea typeface="맑은 고딕"/>
-              </a:rPr>
-              <a:t> —</a:t>
-            </a:r>
-            <a:r>
-              <a:rPr sz="1200" b="0">
-                <a:solidFill>
-                  <a:srgbClr val="000000"/>
-                </a:solidFill>
-                <a:latin typeface="맑은 고딕"/>
-                <a:ea typeface="맑은 고딕"/>
-              </a:rPr>
-              <a:t> 실패를 재시도가 아니라 </a:t>
-            </a:r>
-            <a:r>
-              <a:rPr sz="1200" b="1">
-                <a:solidFill>
-                  <a:srgbClr val="000000"/>
-                </a:solidFill>
-                <a:latin typeface="맑은 고딕"/>
-                <a:ea typeface="맑은 고딕"/>
-              </a:rPr>
-              <a:t>원인이 된 결정</a:t>
-            </a:r>
-            <a:r>
-              <a:rPr sz="1200" b="0">
-                <a:solidFill>
-                  <a:srgbClr val="000000"/>
-                </a:solidFill>
-                <a:latin typeface="맑은 고딕"/>
-                <a:ea typeface="맑은 고딕"/>
-              </a:rPr>
-              <a:t>으로 보냈는가?</a:t>
-            </a:r>
-          </a:p>
-          <a:p>
-            <a:pPr lvl="2" marL="723900" indent="-368300">
-              <a:spcBef>
-                <a:spcPts val="300"/>
-              </a:spcBef>
-              <a:spcAft>
-                <a:spcPts val="300"/>
-              </a:spcAft>
-              <a:buSzPct val="90000"/>
-              <a:buFont typeface="Wingdings" pitchFamily="2" charset="2"/>
-              <a:buChar char=""/>
-            </a:pPr>
-            <a:r>
-              <a:rPr sz="1600" b="1">
-                <a:solidFill>
-                  <a:srgbClr val="000000"/>
-                </a:solidFill>
-                <a:latin typeface="맑은 고딕"/>
-                <a:ea typeface="맑은 고딕"/>
-              </a:rPr>
-              <a:t>결과물</a:t>
-            </a:r>
-            <a:r>
-              <a:rPr sz="1600" b="0">
-                <a:solidFill>
-                  <a:srgbClr val="000000"/>
-                </a:solidFill>
-                <a:latin typeface="맑은 고딕"/>
-                <a:ea typeface="맑은 고딕"/>
-              </a:rPr>
-              <a:t> —</a:t>
-            </a:r>
-            <a:r>
-              <a:rPr sz="1400" b="0">
-                <a:solidFill>
-                  <a:srgbClr val="000000"/>
-                </a:solidFill>
-                <a:latin typeface="맑은 고딕"/>
-                <a:ea typeface="맑은 고딕"/>
-              </a:rPr>
-              <a:t> "신청한다"의 하네스 배치</a:t>
-            </a:r>
-            <a:r>
-              <a:rPr sz="1200" b="0">
-                <a:solidFill>
-                  <a:srgbClr val="000000"/>
-                </a:solidFill>
-                <a:latin typeface="맑은 고딕"/>
-                <a:ea typeface="맑은 고딕"/>
-              </a:rPr>
-              <a:t>(가이드·센서의 짝, 센서 실패 시 대응)</a:t>
-            </a:r>
-            <a:r>
-              <a:rPr sz="1400" b="0">
-                <a:solidFill>
-                  <a:srgbClr val="000000"/>
-                </a:solidFill>
-                <a:latin typeface="맑은 고딕"/>
-                <a:ea typeface="맑은 고딕"/>
-              </a:rPr>
-              <a:t>. 실습 10의 입력이 됩니다.</a:t>
-            </a:r>
-          </a:p>
-        </p:txBody>
-      </p:sp>
-    </p:spTree>
-    <p:extLst>
-      <p:ext uri="{BB962C8B-B14F-4D97-AF65-F5344CB8AC3E}">
-        <p14:creationId xmlns:p14="http://schemas.microsoft.com/office/powerpoint/2010/main" val="3555436673"/>
       </p:ext>
     </p:extLst>
   </p:cSld>
@@ -17823,7 +17250,7 @@
                 <a:latin typeface="맑은 고딕"/>
                 <a:ea typeface="맑은 고딕"/>
               </a:rPr>
-              <a:t>13. 요약</a:t>
+              <a:t>12. 실습 — 하네스 배치</a:t>
             </a:r>
           </a:p>
         </p:txBody>
@@ -17859,6 +17286,920 @@
                 </a:solidFill>
               </a:rPr>
               <a:t>- 23 -</a:t>
+            </a:r>
+          </a:p>
+        </p:txBody>
+      </p:sp>
+      <p:sp>
+        <p:nvSpPr>
+          <p:cNvPr id="5" name="텍스트 개체 틀 4">
+            <a:extLst>
+              <a:ext uri="{FF2B5EF4-FFF2-40B4-BE49-F238E27FC236}">
+                <a16:creationId xmlns:a16="http://schemas.microsoft.com/office/drawing/2014/main" id="{D66274C8-E16F-5AEB-614B-D8D32DA3E8C6}"/>
+              </a:ext>
+            </a:extLst>
+          </p:cNvPr>
+          <p:cNvSpPr>
+            <a:spLocks noGrp="1"/>
+          </p:cNvSpPr>
+          <p:nvPr>
+            <p:ph type="body" sz="quarter" idx="11"/>
+          </p:nvPr>
+        </p:nvSpPr>
+        <p:spPr/>
+        <p:txBody>
+          <a:bodyPr/>
+          <a:lstStyle/>
+          <a:p>
+            <a:r>
+              <a:rPr kumimoji="1" lang="en-US" altLang="ko-KR" sz="1400" dirty="0" err="1"/>
+              <a:t>09. 검증 하네스·결과 점검·피드백</a:t>
+            </a:r>
+          </a:p>
+        </p:txBody>
+      </p:sp>
+      <p:sp>
+        <p:nvSpPr>
+          <p:cNvPr id="6" name="텍스트 개체 틀 5">
+            <a:extLst>
+              <a:ext uri="{FF2B5EF4-FFF2-40B4-BE49-F238E27FC236}">
+                <a16:creationId xmlns:a16="http://schemas.microsoft.com/office/drawing/2014/main" id="{A24E58E1-194B-A320-AEEE-24D08685BB67}"/>
+              </a:ext>
+            </a:extLst>
+          </p:cNvPr>
+          <p:cNvSpPr>
+            <a:spLocks noGrp="1"/>
+          </p:cNvSpPr>
+          <p:nvPr>
+            <p:ph type="body" sz="quarter" idx="12"/>
+          </p:nvPr>
+        </p:nvSpPr>
+        <p:spPr/>
+        <p:txBody>
+          <a:bodyPr/>
+          <a:lstStyle/>
+          <a:p>
+            <a:endParaRPr kumimoji="1" lang="ko-KR" altLang="en-US" dirty="0"/>
+          </a:p>
+        </p:txBody>
+      </p:sp>
+      <p:sp>
+        <p:nvSpPr>
+          <p:cNvPr id="7" name="텍스트 개체 틀 6">
+            <a:extLst>
+              <a:ext uri="{FF2B5EF4-FFF2-40B4-BE49-F238E27FC236}">
+                <a16:creationId xmlns:a16="http://schemas.microsoft.com/office/drawing/2014/main" id="{A219F420-613B-6234-45F6-0955A9A4505F}"/>
+              </a:ext>
+            </a:extLst>
+          </p:cNvPr>
+          <p:cNvSpPr>
+            <a:spLocks noGrp="1"/>
+          </p:cNvSpPr>
+          <p:nvPr>
+            <p:ph type="body" sz="quarter" idx="13"/>
+          </p:nvPr>
+        </p:nvSpPr>
+        <p:spPr/>
+        <p:txBody>
+          <a:bodyPr/>
+          <a:lstStyle/>
+          <a:p>
+            <a:endParaRPr kumimoji="1" lang="en-US" altLang="ko-KR" dirty="0"/>
+          </a:p>
+        </p:txBody>
+      </p:sp>
+      <p:sp>
+        <p:nvSpPr>
+          <p:cNvPr id="8" name="내용 개체 틀 7">
+            <a:extLst>
+              <a:ext uri="{FF2B5EF4-FFF2-40B4-BE49-F238E27FC236}">
+                <a16:creationId xmlns:a16="http://schemas.microsoft.com/office/drawing/2014/main" id="{BEBA2C4A-B0BF-F2E4-EA6E-614C99CBA184}"/>
+              </a:ext>
+            </a:extLst>
+          </p:cNvPr>
+          <p:cNvSpPr>
+            <a:spLocks noGrp="1"/>
+          </p:cNvSpPr>
+          <p:nvPr>
+            <p:ph idx="1"/>
+          </p:nvPr>
+        </p:nvSpPr>
+        <p:spPr>
+          <a:xfrm>
+            <a:off x="365760" y="960120"/>
+            <a:ext cx="8412480" cy="5257800"/>
+          </a:xfrm>
+        </p:spPr>
+        <p:txBody>
+          <a:bodyPr>
+            <a:normAutofit/>
+          </a:bodyPr>
+          <a:lstStyle/>
+          <a:p>
+            <a:pPr marL="0" indent="0">
+              <a:spcBef>
+                <a:spcPts val="300"/>
+              </a:spcBef>
+              <a:spcAft>
+                <a:spcPts val="300"/>
+              </a:spcAft>
+              <a:buNone/>
+            </a:pPr>
+            <a:r>
+              <a:rPr sz="1600" b="0">
+                <a:solidFill>
+                  <a:srgbClr val="000000"/>
+                </a:solidFill>
+                <a:latin typeface="맑은 고딕"/>
+                <a:ea typeface="맑은 고딕"/>
+              </a:rPr>
+              <a:t>실습 4의 수용 기준, 실습 5의 맥락 패키지, 실습 8의 가드레일 배치를 LLM에 제공하여 </a:t>
+            </a:r>
+            <a:r>
+              <a:rPr sz="1600" b="1">
+                <a:solidFill>
+                  <a:srgbClr val="000000"/>
+                </a:solidFill>
+                <a:latin typeface="맑은 고딕"/>
+                <a:ea typeface="맑은 고딕"/>
+              </a:rPr>
+              <a:t>"신청한다"의 하네스 배치</a:t>
+            </a:r>
+            <a:r>
+              <a:rPr sz="1600" b="0">
+                <a:solidFill>
+                  <a:srgbClr val="000000"/>
+                </a:solidFill>
+                <a:latin typeface="맑은 고딕"/>
+                <a:ea typeface="맑은 고딕"/>
+              </a:rPr>
+              <a:t>를 만들고, 점검 항목으로 피드백하여 완성하십시오.</a:t>
+            </a:r>
+          </a:p>
+          <a:p>
+            <a:pPr lvl="2" marL="723900" indent="-368300">
+              <a:spcBef>
+                <a:spcPts val="300"/>
+              </a:spcBef>
+              <a:spcAft>
+                <a:spcPts val="300"/>
+              </a:spcAft>
+              <a:buSzPct val="90000"/>
+              <a:buFont typeface="Wingdings" pitchFamily="2" charset="2"/>
+              <a:buChar char=""/>
+            </a:pPr>
+            <a:r>
+              <a:rPr sz="1600" b="1">
+                <a:solidFill>
+                  <a:srgbClr val="000000"/>
+                </a:solidFill>
+                <a:latin typeface="맑은 고딕"/>
+                <a:ea typeface="맑은 고딕"/>
+              </a:rPr>
+              <a:t>투입물</a:t>
+            </a:r>
+          </a:p>
+          <a:p>
+            <a:pPr lvl="3" marL="723900" indent="0">
+              <a:spcBef>
+                <a:spcPts val="300"/>
+              </a:spcBef>
+              <a:spcAft>
+                <a:spcPts val="300"/>
+              </a:spcAft>
+              <a:buNone/>
+            </a:pPr>
+            <a:r>
+              <a:rPr sz="1400" b="0">
+                <a:solidFill>
+                  <a:srgbClr val="000000"/>
+                </a:solidFill>
+                <a:latin typeface="맑은 고딕"/>
+                <a:ea typeface="맑은 고딕"/>
+              </a:rPr>
+              <a:t>실습 4의 </a:t>
+            </a:r>
+            <a:r>
+              <a:rPr sz="1400" b="1">
+                <a:solidFill>
+                  <a:srgbClr val="000000"/>
+                </a:solidFill>
+                <a:latin typeface="맑은 고딕"/>
+                <a:ea typeface="맑은 고딕"/>
+              </a:rPr>
+              <a:t>수용 기준</a:t>
+            </a:r>
+            <a:r>
+              <a:rPr sz="1400" b="0">
+                <a:solidFill>
+                  <a:srgbClr val="000000"/>
+                </a:solidFill>
+                <a:latin typeface="맑은 고딕"/>
+                <a:ea typeface="맑은 고딕"/>
+              </a:rPr>
+              <a:t>, 실습 5의 </a:t>
+            </a:r>
+            <a:r>
+              <a:rPr sz="1400" b="1">
+                <a:solidFill>
+                  <a:srgbClr val="000000"/>
+                </a:solidFill>
+                <a:latin typeface="맑은 고딕"/>
+                <a:ea typeface="맑은 고딕"/>
+              </a:rPr>
+              <a:t>맥락 패키지</a:t>
+            </a:r>
+            <a:r>
+              <a:rPr sz="1400" b="0">
+                <a:solidFill>
+                  <a:srgbClr val="000000"/>
+                </a:solidFill>
+                <a:latin typeface="맑은 고딕"/>
+                <a:ea typeface="맑은 고딕"/>
+              </a:rPr>
+              <a:t>, 실습 8의 </a:t>
+            </a:r>
+            <a:r>
+              <a:rPr sz="1400" b="1">
+                <a:solidFill>
+                  <a:srgbClr val="000000"/>
+                </a:solidFill>
+                <a:latin typeface="맑은 고딕"/>
+                <a:ea typeface="맑은 고딕"/>
+              </a:rPr>
+              <a:t>가드레일 배치</a:t>
+            </a:r>
+          </a:p>
+          <a:p>
+            <a:pPr lvl="2" marL="723900" indent="-368300">
+              <a:spcBef>
+                <a:spcPts val="300"/>
+              </a:spcBef>
+              <a:spcAft>
+                <a:spcPts val="300"/>
+              </a:spcAft>
+              <a:buSzPct val="90000"/>
+              <a:buFont typeface="Wingdings" pitchFamily="2" charset="2"/>
+              <a:buChar char=""/>
+            </a:pPr>
+            <a:r>
+              <a:rPr sz="1600" b="1">
+                <a:solidFill>
+                  <a:srgbClr val="000000"/>
+                </a:solidFill>
+                <a:latin typeface="맑은 고딕"/>
+                <a:ea typeface="맑은 고딕"/>
+              </a:rPr>
+              <a:t>프롬프트</a:t>
+            </a:r>
+          </a:p>
+          <a:p>
+            <a:pPr lvl="3" marL="723900" indent="0">
+              <a:spcBef>
+                <a:spcPts val="300"/>
+              </a:spcBef>
+              <a:spcAft>
+                <a:spcPts val="300"/>
+              </a:spcAft>
+              <a:buNone/>
+            </a:pPr>
+            <a:r>
+              <a:rPr sz="1400" b="0">
+                <a:solidFill>
+                  <a:srgbClr val="000000"/>
+                </a:solidFill>
+                <a:latin typeface="맑은 고딕"/>
+                <a:ea typeface="맑은 고딕"/>
+              </a:rPr>
+              <a:t>① "신청한다 과제의 하네스를 </a:t>
+            </a:r>
+            <a:r>
+              <a:rPr sz="1400" b="1">
+                <a:solidFill>
+                  <a:srgbClr val="000000"/>
+                </a:solidFill>
+                <a:latin typeface="맑은 고딕"/>
+                <a:ea typeface="맑은 고딕"/>
+              </a:rPr>
+              <a:t>가이드와 센서의 짝</a:t>
+            </a:r>
+            <a:r>
+              <a:rPr sz="1400" b="0">
+                <a:solidFill>
+                  <a:srgbClr val="000000"/>
+                </a:solidFill>
+                <a:latin typeface="맑은 고딕"/>
+                <a:ea typeface="맑은 고딕"/>
+              </a:rPr>
+              <a:t>으로 표로 만들어줘. 센서마다 판정하는 것, 계산적·추론적, 돌리는 자리를 적어줘."</a:t>
+            </a:r>
+          </a:p>
+          <a:p>
+            <a:pPr lvl="3" marL="723900" indent="0">
+              <a:spcBef>
+                <a:spcPts val="300"/>
+              </a:spcBef>
+              <a:spcAft>
+                <a:spcPts val="300"/>
+              </a:spcAft>
+              <a:buNone/>
+            </a:pPr>
+            <a:r>
+              <a:rPr sz="1400" b="0">
+                <a:solidFill>
+                  <a:srgbClr val="000000"/>
+                </a:solidFill>
+                <a:latin typeface="맑은 고딕"/>
+                <a:ea typeface="맑은 고딕"/>
+              </a:rPr>
+              <a:t>② "센서마다 </a:t>
+            </a:r>
+            <a:r>
+              <a:rPr sz="1400" b="1">
+                <a:solidFill>
+                  <a:srgbClr val="000000"/>
+                </a:solidFill>
+                <a:latin typeface="맑은 고딕"/>
+                <a:ea typeface="맑은 고딕"/>
+              </a:rPr>
+              <a:t>실패했을 때 되돌릴 결정</a:t>
+            </a:r>
+            <a:r>
+              <a:rPr sz="1000" b="0">
+                <a:solidFill>
+                  <a:srgbClr val="000000"/>
+                </a:solidFill>
+                <a:latin typeface="맑은 고딕"/>
+                <a:ea typeface="맑은 고딕"/>
+              </a:rPr>
+              <a:t>(명세·맥락·경계·하네스)</a:t>
+            </a:r>
+            <a:r>
+              <a:rPr sz="1400" b="0">
+                <a:solidFill>
+                  <a:srgbClr val="000000"/>
+                </a:solidFill>
+                <a:latin typeface="맑은 고딕"/>
+                <a:ea typeface="맑은 고딕"/>
+              </a:rPr>
+              <a:t>을 적고, 센서가 못 보는 것은 사람이 볼 것으로 나눠줘."</a:t>
+            </a:r>
+          </a:p>
+          <a:p>
+            <a:pPr lvl="2" marL="723900" indent="-368300">
+              <a:spcBef>
+                <a:spcPts val="300"/>
+              </a:spcBef>
+              <a:spcAft>
+                <a:spcPts val="300"/>
+              </a:spcAft>
+              <a:buSzPct val="90000"/>
+              <a:buFont typeface="Wingdings" pitchFamily="2" charset="2"/>
+              <a:buChar char=""/>
+            </a:pPr>
+            <a:r>
+              <a:rPr sz="1600" b="1">
+                <a:solidFill>
+                  <a:srgbClr val="000000"/>
+                </a:solidFill>
+                <a:latin typeface="맑은 고딕"/>
+                <a:ea typeface="맑은 고딕"/>
+              </a:rPr>
+              <a:t>점검 항목</a:t>
+            </a:r>
+          </a:p>
+          <a:p>
+            <a:pPr lvl="3" marL="947420" indent="-223520">
+              <a:spcBef>
+                <a:spcPts val="300"/>
+              </a:spcBef>
+              <a:spcAft>
+                <a:spcPts val="300"/>
+              </a:spcAft>
+              <a:buNone/>
+            </a:pPr>
+            <a:r>
+              <a:rPr sz="1400" b="0">
+                <a:solidFill>
+                  <a:srgbClr val="000000"/>
+                </a:solidFill>
+                <a:latin typeface="맑은 고딕"/>
+                <a:ea typeface="맑은 고딕"/>
+              </a:rPr>
+              <a:t>1. </a:t>
+            </a:r>
+            <a:r>
+              <a:rPr sz="1400" b="1">
+                <a:solidFill>
+                  <a:srgbClr val="000000"/>
+                </a:solidFill>
+                <a:latin typeface="맑은 고딕"/>
+                <a:ea typeface="맑은 고딕"/>
+              </a:rPr>
+              <a:t>짝</a:t>
+            </a:r>
+            <a:r>
+              <a:rPr sz="1400" b="0">
+                <a:solidFill>
+                  <a:srgbClr val="000000"/>
+                </a:solidFill>
+                <a:latin typeface="맑은 고딕"/>
+                <a:ea typeface="맑은 고딕"/>
+              </a:rPr>
+              <a:t> —</a:t>
+            </a:r>
+            <a:r>
+              <a:rPr sz="1200" b="0">
+                <a:solidFill>
+                  <a:srgbClr val="000000"/>
+                </a:solidFill>
+                <a:latin typeface="맑은 고딕"/>
+                <a:ea typeface="맑은 고딕"/>
+              </a:rPr>
+              <a:t> 가이드만 있거나 센서만 있는 줄이 없는가?</a:t>
+            </a:r>
+          </a:p>
+          <a:p>
+            <a:pPr lvl="3" marL="947420" indent="-223520">
+              <a:spcBef>
+                <a:spcPts val="300"/>
+              </a:spcBef>
+              <a:spcAft>
+                <a:spcPts val="300"/>
+              </a:spcAft>
+              <a:buNone/>
+            </a:pPr>
+            <a:r>
+              <a:rPr sz="1400" b="0">
+                <a:solidFill>
+                  <a:srgbClr val="000000"/>
+                </a:solidFill>
+                <a:latin typeface="맑은 고딕"/>
+                <a:ea typeface="맑은 고딕"/>
+              </a:rPr>
+              <a:t>2. </a:t>
+            </a:r>
+            <a:r>
+              <a:rPr sz="1400" b="1">
+                <a:solidFill>
+                  <a:srgbClr val="000000"/>
+                </a:solidFill>
+                <a:latin typeface="맑은 고딕"/>
+                <a:ea typeface="맑은 고딕"/>
+              </a:rPr>
+              <a:t>판정의 범위</a:t>
+            </a:r>
+            <a:r>
+              <a:rPr sz="1400" b="0">
+                <a:solidFill>
+                  <a:srgbClr val="000000"/>
+                </a:solidFill>
+                <a:latin typeface="맑은 고딕"/>
+                <a:ea typeface="맑은 고딕"/>
+              </a:rPr>
+              <a:t> —</a:t>
+            </a:r>
+            <a:r>
+              <a:rPr sz="1200" b="0">
+                <a:solidFill>
+                  <a:srgbClr val="000000"/>
+                </a:solidFill>
+                <a:latin typeface="맑은 고딕"/>
+                <a:ea typeface="맑은 고딕"/>
+              </a:rPr>
+              <a:t> 센서마다 </a:t>
+            </a:r>
+            <a:r>
+              <a:rPr sz="1200" b="1">
+                <a:solidFill>
+                  <a:srgbClr val="000000"/>
+                </a:solidFill>
+                <a:latin typeface="맑은 고딕"/>
+                <a:ea typeface="맑은 고딕"/>
+              </a:rPr>
+              <a:t>무엇을 판정하는지</a:t>
+            </a:r>
+            <a:r>
+              <a:rPr sz="1200" b="0">
+                <a:solidFill>
+                  <a:srgbClr val="000000"/>
+                </a:solidFill>
+                <a:latin typeface="맑은 고딕"/>
+                <a:ea typeface="맑은 고딕"/>
+              </a:rPr>
+              <a:t> 한 줄로 적었고, 통과가 보장하지 않는 것을 구분했는가?</a:t>
+            </a:r>
+          </a:p>
+          <a:p>
+            <a:pPr lvl="3" marL="947420" indent="-223520">
+              <a:spcBef>
+                <a:spcPts val="300"/>
+              </a:spcBef>
+              <a:spcAft>
+                <a:spcPts val="300"/>
+              </a:spcAft>
+              <a:buNone/>
+            </a:pPr>
+            <a:r>
+              <a:rPr sz="1400" b="0">
+                <a:solidFill>
+                  <a:srgbClr val="000000"/>
+                </a:solidFill>
+                <a:latin typeface="맑은 고딕"/>
+                <a:ea typeface="맑은 고딕"/>
+              </a:rPr>
+              <a:t>3. </a:t>
+            </a:r>
+            <a:r>
+              <a:rPr sz="1400" b="1">
+                <a:solidFill>
+                  <a:srgbClr val="000000"/>
+                </a:solidFill>
+                <a:latin typeface="맑은 고딕"/>
+                <a:ea typeface="맑은 고딕"/>
+              </a:rPr>
+              <a:t>갈래</a:t>
+            </a:r>
+            <a:r>
+              <a:rPr sz="1400" b="0">
+                <a:solidFill>
+                  <a:srgbClr val="000000"/>
+                </a:solidFill>
+                <a:latin typeface="맑은 고딕"/>
+                <a:ea typeface="맑은 고딕"/>
+              </a:rPr>
+              <a:t> —</a:t>
+            </a:r>
+            <a:r>
+              <a:rPr sz="1200" b="0">
+                <a:solidFill>
+                  <a:srgbClr val="000000"/>
+                </a:solidFill>
+                <a:latin typeface="맑은 고딕"/>
+                <a:ea typeface="맑은 고딕"/>
+              </a:rPr>
+              <a:t> 기계가 판정할 수 있는 것을 LLM 심사로 맡기지 않았는가?</a:t>
+            </a:r>
+          </a:p>
+          <a:p>
+            <a:pPr lvl="3" marL="947420" indent="-223520">
+              <a:spcBef>
+                <a:spcPts val="300"/>
+              </a:spcBef>
+              <a:spcAft>
+                <a:spcPts val="300"/>
+              </a:spcAft>
+              <a:buNone/>
+            </a:pPr>
+            <a:r>
+              <a:rPr sz="1400" b="0">
+                <a:solidFill>
+                  <a:srgbClr val="000000"/>
+                </a:solidFill>
+                <a:latin typeface="맑은 고딕"/>
+                <a:ea typeface="맑은 고딕"/>
+              </a:rPr>
+              <a:t>4. </a:t>
+            </a:r>
+            <a:r>
+              <a:rPr sz="1400" b="1">
+                <a:solidFill>
+                  <a:srgbClr val="000000"/>
+                </a:solidFill>
+                <a:latin typeface="맑은 고딕"/>
+                <a:ea typeface="맑은 고딕"/>
+              </a:rPr>
+              <a:t>실행 시점</a:t>
+            </a:r>
+            <a:r>
+              <a:rPr sz="1400" b="0">
+                <a:solidFill>
+                  <a:srgbClr val="000000"/>
+                </a:solidFill>
+                <a:latin typeface="맑은 고딕"/>
+                <a:ea typeface="맑은 고딕"/>
+              </a:rPr>
+              <a:t> —</a:t>
+            </a:r>
+            <a:r>
+              <a:rPr sz="1200" b="0">
+                <a:solidFill>
+                  <a:srgbClr val="000000"/>
+                </a:solidFill>
+                <a:latin typeface="맑은 고딕"/>
+                <a:ea typeface="맑은 고딕"/>
+              </a:rPr>
+              <a:t> 빠른 센서를 루프 안에 두고 느리고 비싼 센서는 뒤로 보냈는가?</a:t>
+            </a:r>
+          </a:p>
+          <a:p>
+            <a:pPr lvl="3" marL="947420" indent="-223520">
+              <a:spcBef>
+                <a:spcPts val="300"/>
+              </a:spcBef>
+              <a:spcAft>
+                <a:spcPts val="300"/>
+              </a:spcAft>
+              <a:buNone/>
+            </a:pPr>
+            <a:r>
+              <a:rPr sz="1400" b="0">
+                <a:solidFill>
+                  <a:srgbClr val="000000"/>
+                </a:solidFill>
+                <a:latin typeface="맑은 고딕"/>
+                <a:ea typeface="맑은 고딕"/>
+              </a:rPr>
+              <a:t>5. </a:t>
+            </a:r>
+            <a:r>
+              <a:rPr sz="1400" b="1">
+                <a:solidFill>
+                  <a:srgbClr val="000000"/>
+                </a:solidFill>
+                <a:latin typeface="맑은 고딕"/>
+                <a:ea typeface="맑은 고딕"/>
+              </a:rPr>
+              <a:t>메시지</a:t>
+            </a:r>
+            <a:r>
+              <a:rPr sz="1400" b="0">
+                <a:solidFill>
+                  <a:srgbClr val="000000"/>
+                </a:solidFill>
+                <a:latin typeface="맑은 고딕"/>
+                <a:ea typeface="맑은 고딕"/>
+              </a:rPr>
+              <a:t> —</a:t>
+            </a:r>
+            <a:r>
+              <a:rPr sz="1200" b="0">
+                <a:solidFill>
+                  <a:srgbClr val="000000"/>
+                </a:solidFill>
+                <a:latin typeface="맑은 고딕"/>
+                <a:ea typeface="맑은 고딕"/>
+              </a:rPr>
+              <a:t> 실패 메시지에 </a:t>
+            </a:r>
+            <a:r>
+              <a:rPr sz="1200" b="1">
+                <a:solidFill>
+                  <a:srgbClr val="000000"/>
+                </a:solidFill>
+                <a:latin typeface="맑은 고딕"/>
+                <a:ea typeface="맑은 고딕"/>
+              </a:rPr>
+              <a:t>고치는 방법</a:t>
+            </a:r>
+            <a:r>
+              <a:rPr sz="1200" b="0">
+                <a:solidFill>
+                  <a:srgbClr val="000000"/>
+                </a:solidFill>
+                <a:latin typeface="맑은 고딕"/>
+                <a:ea typeface="맑은 고딕"/>
+              </a:rPr>
+              <a:t>이 담겼는가?</a:t>
+            </a:r>
+          </a:p>
+          <a:p>
+            <a:pPr lvl="3" marL="947420" indent="-223520">
+              <a:spcBef>
+                <a:spcPts val="300"/>
+              </a:spcBef>
+              <a:spcAft>
+                <a:spcPts val="300"/>
+              </a:spcAft>
+              <a:buNone/>
+            </a:pPr>
+            <a:r>
+              <a:rPr sz="1400" b="0">
+                <a:solidFill>
+                  <a:srgbClr val="000000"/>
+                </a:solidFill>
+                <a:latin typeface="맑은 고딕"/>
+                <a:ea typeface="맑은 고딕"/>
+              </a:rPr>
+              <a:t>6. </a:t>
+            </a:r>
+            <a:r>
+              <a:rPr sz="1400" b="1">
+                <a:solidFill>
+                  <a:srgbClr val="000000"/>
+                </a:solidFill>
+                <a:latin typeface="맑은 고딕"/>
+                <a:ea typeface="맑은 고딕"/>
+              </a:rPr>
+              <a:t>되돌릴 결정</a:t>
+            </a:r>
+            <a:r>
+              <a:rPr sz="1400" b="0">
+                <a:solidFill>
+                  <a:srgbClr val="000000"/>
+                </a:solidFill>
+                <a:latin typeface="맑은 고딕"/>
+                <a:ea typeface="맑은 고딕"/>
+              </a:rPr>
+              <a:t> —</a:t>
+            </a:r>
+            <a:r>
+              <a:rPr sz="1200" b="0">
+                <a:solidFill>
+                  <a:srgbClr val="000000"/>
+                </a:solidFill>
+                <a:latin typeface="맑은 고딕"/>
+                <a:ea typeface="맑은 고딕"/>
+              </a:rPr>
+              <a:t> 실패를 재시도가 아니라 </a:t>
+            </a:r>
+            <a:r>
+              <a:rPr sz="1200" b="1">
+                <a:solidFill>
+                  <a:srgbClr val="000000"/>
+                </a:solidFill>
+                <a:latin typeface="맑은 고딕"/>
+                <a:ea typeface="맑은 고딕"/>
+              </a:rPr>
+              <a:t>원인이 된 결정</a:t>
+            </a:r>
+            <a:r>
+              <a:rPr sz="1200" b="0">
+                <a:solidFill>
+                  <a:srgbClr val="000000"/>
+                </a:solidFill>
+                <a:latin typeface="맑은 고딕"/>
+                <a:ea typeface="맑은 고딕"/>
+              </a:rPr>
+              <a:t>으로 보냈는가?</a:t>
+            </a:r>
+          </a:p>
+          <a:p>
+            <a:pPr lvl="2" marL="723900" indent="-368300">
+              <a:spcBef>
+                <a:spcPts val="300"/>
+              </a:spcBef>
+              <a:spcAft>
+                <a:spcPts val="300"/>
+              </a:spcAft>
+              <a:buSzPct val="90000"/>
+              <a:buFont typeface="Wingdings" pitchFamily="2" charset="2"/>
+              <a:buChar char=""/>
+            </a:pPr>
+            <a:r>
+              <a:rPr sz="1600" b="1">
+                <a:solidFill>
+                  <a:srgbClr val="000000"/>
+                </a:solidFill>
+                <a:latin typeface="맑은 고딕"/>
+                <a:ea typeface="맑은 고딕"/>
+              </a:rPr>
+              <a:t>결과물</a:t>
+            </a:r>
+            <a:r>
+              <a:rPr sz="1600" b="0">
+                <a:solidFill>
+                  <a:srgbClr val="000000"/>
+                </a:solidFill>
+                <a:latin typeface="맑은 고딕"/>
+                <a:ea typeface="맑은 고딕"/>
+              </a:rPr>
+              <a:t> —</a:t>
+            </a:r>
+            <a:r>
+              <a:rPr sz="1400" b="0">
+                <a:solidFill>
+                  <a:srgbClr val="000000"/>
+                </a:solidFill>
+                <a:latin typeface="맑은 고딕"/>
+                <a:ea typeface="맑은 고딕"/>
+              </a:rPr>
+              <a:t> "신청한다"의 하네스 배치</a:t>
+            </a:r>
+            <a:r>
+              <a:rPr sz="1200" b="0">
+                <a:solidFill>
+                  <a:srgbClr val="000000"/>
+                </a:solidFill>
+                <a:latin typeface="맑은 고딕"/>
+                <a:ea typeface="맑은 고딕"/>
+              </a:rPr>
+              <a:t>(가이드·센서의 짝, 센서 실패 시 대응)</a:t>
+            </a:r>
+            <a:r>
+              <a:rPr sz="1400" b="0">
+                <a:solidFill>
+                  <a:srgbClr val="000000"/>
+                </a:solidFill>
+                <a:latin typeface="맑은 고딕"/>
+                <a:ea typeface="맑은 고딕"/>
+              </a:rPr>
+              <a:t>. 실습 10의 입력이 됩니다.</a:t>
+            </a:r>
+          </a:p>
+        </p:txBody>
+      </p:sp>
+    </p:spTree>
+    <p:extLst>
+      <p:ext uri="{BB962C8B-B14F-4D97-AF65-F5344CB8AC3E}">
+        <p14:creationId xmlns:p14="http://schemas.microsoft.com/office/powerpoint/2010/main" val="3555436673"/>
+      </p:ext>
+    </p:extLst>
+  </p:cSld>
+  <p:clrMapOvr>
+    <a:masterClrMapping/>
+  </p:clrMapOvr>
+</p:sld>
+</file>
+
+<file path=ppt/slides/slide24.xml><?xml version="1.0" encoding="utf-8"?>
+<p:sld xmlns:a="http://schemas.openxmlformats.org/drawingml/2006/main" xmlns:r="http://schemas.openxmlformats.org/officeDocument/2006/relationships" xmlns:p="http://schemas.openxmlformats.org/presentationml/2006/main">
+  <p:cSld>
+    <p:spTree>
+      <p:nvGrpSpPr>
+        <p:cNvPr id="1" name="">
+          <a:extLst>
+            <a:ext uri="{FF2B5EF4-FFF2-40B4-BE49-F238E27FC236}">
+              <a16:creationId xmlns:a16="http://schemas.microsoft.com/office/drawing/2014/main" id="{8E4F1F13-426B-086B-7D8C-9A58A0F879DB}"/>
+            </a:ext>
+          </a:extLst>
+        </p:cNvPr>
+        <p:cNvGrpSpPr/>
+        <p:nvPr/>
+      </p:nvGrpSpPr>
+      <p:grpSpPr>
+        <a:xfrm>
+          <a:off x="0" y="0"/>
+          <a:ext cx="0" cy="0"/>
+          <a:chOff x="0" y="0"/>
+          <a:chExt cx="0" cy="0"/>
+        </a:xfrm>
+      </p:grpSpPr>
+      <p:sp>
+        <p:nvSpPr>
+          <p:cNvPr id="2" name="제목 1">
+            <a:extLst>
+              <a:ext uri="{FF2B5EF4-FFF2-40B4-BE49-F238E27FC236}">
+                <a16:creationId xmlns:a16="http://schemas.microsoft.com/office/drawing/2014/main" id="{AA26A92D-924E-0575-9551-F8FD7BFD3FAD}"/>
+              </a:ext>
+            </a:extLst>
+          </p:cNvPr>
+          <p:cNvSpPr>
+            <a:spLocks noGrp="1"/>
+          </p:cNvSpPr>
+          <p:nvPr>
+            <p:ph type="title"/>
+          </p:nvPr>
+        </p:nvSpPr>
+        <p:spPr/>
+        <p:txBody>
+          <a:bodyPr/>
+          <a:lstStyle/>
+          <a:p>
+            <a:r>
+              <a:rPr sz="2400" b="1">
+                <a:solidFill>
+                  <a:srgbClr val="000000"/>
+                </a:solidFill>
+                <a:latin typeface="맑은 고딕"/>
+                <a:ea typeface="맑은 고딕"/>
+              </a:rPr>
+              <a:t>13. 요약</a:t>
+            </a:r>
+          </a:p>
+        </p:txBody>
+      </p:sp>
+      <p:sp>
+        <p:nvSpPr>
+          <p:cNvPr id="3" name="슬라이드 번호 개체 틀 2">
+            <a:extLst>
+              <a:ext uri="{FF2B5EF4-FFF2-40B4-BE49-F238E27FC236}">
+                <a16:creationId xmlns:a16="http://schemas.microsoft.com/office/drawing/2014/main" id="{12CF30EE-4DFD-8063-56B8-B8689E76DFCA}"/>
+              </a:ext>
+            </a:extLst>
+          </p:cNvPr>
+          <p:cNvSpPr>
+            <a:spLocks noGrp="1"/>
+          </p:cNvSpPr>
+          <p:nvPr>
+            <p:ph type="sldNum" sz="quarter" idx="10"/>
+          </p:nvPr>
+        </p:nvSpPr>
+        <p:spPr/>
+        <p:txBody>
+          <a:bodyPr/>
+          <a:lstStyle/>
+          <a:p>
+            <a:pPr>
+              <a:defRPr/>
+            </a:pPr>
+            <a:r>
+              <a:rPr lang="en-US" altLang="ko-KR">
+                <a:solidFill>
+                  <a:prstClr val="black"/>
+                </a:solidFill>
+              </a:rPr>
+              <a:t>- 24 -</a:t>
             </a:r>
           </a:p>
         </p:txBody>
@@ -17981,7 +18322,7 @@
                 <a:latin typeface="맑은 고딕"/>
                 <a:ea typeface="맑은 고딕"/>
               </a:rPr>
-              <a:t>하네스는 가이드와 센서가 도는 </a:t>
+              <a:t>하네스는 방향을 주는 가이드와 결과를 판정하는 센서가 도는 </a:t>
             </a:r>
             <a:r>
               <a:rPr sz="1800" b="1">
@@ -18001,7 +18342,7 @@
                 <a:latin typeface="맑은 고딕"/>
                 <a:ea typeface="맑은 고딕"/>
               </a:rPr>
-              <a:t>이고, 완료는 그 증거로만 받아들인다.</a:t>
+              <a:t>이며, 완료는 그 증거로만 받아들인다.</a:t>
             </a:r>
           </a:p>
           <a:p>
@@ -18045,7 +18386,7 @@
                 <a:latin typeface="맑은 고딕"/>
                 <a:ea typeface="맑은 고딕"/>
               </a:rPr>
-              <a:t>두 방향</a:t>
+              <a:t>가이드와 센서</a:t>
             </a:r>
             <a:r>
               <a:rPr sz="1800" b="0">
@@ -18065,7 +18406,7 @@
                 <a:latin typeface="맑은 고딕"/>
                 <a:ea typeface="맑은 고딕"/>
               </a:rPr>
-              <a:t> 가이드는 행동 전에, 센서는 뒤에 작동한다. 하나만 두면 되풀이한다</a:t>
+              <a:t> 행동 전에 방향을 주고 뒤에 결과를 판정한다. 하나만 두면 실수가 되풀이된다</a:t>
             </a:r>
           </a:p>
           <a:p>
@@ -18088,7 +18429,7 @@
                 <a:latin typeface="맑은 고딕"/>
                 <a:ea typeface="맑은 고딕"/>
               </a:rPr>
-              <a:t>두 갈래</a:t>
+              <a:t>계산적·추론적</a:t>
             </a:r>
             <a:r>
               <a:rPr sz="1800" b="0">
@@ -18108,7 +18449,7 @@
                 <a:latin typeface="맑은 고딕"/>
                 <a:ea typeface="맑은 고딕"/>
               </a:rPr>
-              <a:t> 판정할 수 있으면 계산적 센서, 의미는 추론적 센서다</a:t>
+              <a:t> 적어 둘 수 있으면 기계가, 의미는 LLM이 판정한다</a:t>
             </a:r>
           </a:p>
           <a:p>
@@ -18174,7 +18515,7 @@
                 <a:latin typeface="맑은 고딕"/>
                 <a:ea typeface="맑은 고딕"/>
               </a:rPr>
-              <a:t>자리</a:t>
+              <a:t>실행 시점</a:t>
             </a:r>
             <a:r>
               <a:rPr sz="1800" b="0">
@@ -18194,7 +18535,7 @@
                 <a:latin typeface="맑은 고딕"/>
                 <a:ea typeface="맑은 고딕"/>
               </a:rPr>
-              <a:t> 값이 싼 센서를 앞으로 당겨 스스로 고치게 한다</a:t>
+              <a:t> 빠른 센서를 루프 안에 두어 스스로 고치게 한다</a:t>
             </a:r>
           </a:p>
           <a:p>
@@ -18406,1884 +18747,6 @@
     <p:extLst>
       <p:ext uri="{BB962C8B-B14F-4D97-AF65-F5344CB8AC3E}">
         <p14:creationId xmlns:p14="http://schemas.microsoft.com/office/powerpoint/2010/main" val="3555436673"/>
-      </p:ext>
-    </p:extLst>
-  </p:cSld>
-  <p:clrMapOvr>
-    <a:masterClrMapping/>
-  </p:clrMapOvr>
-</p:sld>
-</file>
-
-<file path=ppt/slides/slide24.xml><?xml version="1.0" encoding="utf-8"?>
-<p:sld xmlns:a="http://schemas.openxmlformats.org/drawingml/2006/main" xmlns:r="http://schemas.openxmlformats.org/officeDocument/2006/relationships" xmlns:p="http://schemas.openxmlformats.org/presentationml/2006/main">
-  <p:cSld>
-    <p:spTree>
-      <p:nvGrpSpPr>
-        <p:cNvPr id="1" name="">
-          <a:extLst>
-            <a:ext uri="{FF2B5EF4-FFF2-40B4-BE49-F238E27FC236}">
-              <a16:creationId xmlns:a16="http://schemas.microsoft.com/office/drawing/2014/main" id="{60B87152-D004-1569-E429-90A42420A65C}"/>
-            </a:ext>
-          </a:extLst>
-        </p:cNvPr>
-        <p:cNvGrpSpPr/>
-        <p:nvPr/>
-      </p:nvGrpSpPr>
-      <p:grpSpPr>
-        <a:xfrm>
-          <a:off x="0" y="0"/>
-          <a:ext cx="0" cy="0"/>
-          <a:chOff x="0" y="0"/>
-          <a:chExt cx="0" cy="0"/>
-        </a:xfrm>
-      </p:grpSpPr>
-      <p:sp>
-        <p:nvSpPr>
-          <p:cNvPr id="2" name="제목 1">
-            <a:extLst>
-              <a:ext uri="{FF2B5EF4-FFF2-40B4-BE49-F238E27FC236}">
-                <a16:creationId xmlns:a16="http://schemas.microsoft.com/office/drawing/2014/main" id="{F2E2AB02-3ADE-69B8-887E-7981AD15EF24}"/>
-              </a:ext>
-            </a:extLst>
-          </p:cNvPr>
-          <p:cNvSpPr>
-            <a:spLocks noGrp="1"/>
-          </p:cNvSpPr>
-          <p:nvPr>
-            <p:ph type="title"/>
-          </p:nvPr>
-        </p:nvSpPr>
-        <p:spPr/>
-        <p:txBody>
-          <a:bodyPr/>
-          <a:lstStyle/>
-          <a:p>
-            <a:r>
-              <a:rPr sz="2400" b="1">
-                <a:solidFill>
-                  <a:srgbClr val="000000"/>
-                </a:solidFill>
-                <a:latin typeface="맑은 고딕"/>
-                <a:ea typeface="맑은 고딕"/>
-              </a:rPr>
-              <a:t>하네스 배치 </a:t>
-            </a:r>
-            <a:r>
-              <a:rPr sz="1800" b="1">
-                <a:solidFill>
-                  <a:srgbClr val="000000"/>
-                </a:solidFill>
-                <a:latin typeface="맑은 고딕"/>
-                <a:ea typeface="맑은 고딕"/>
-              </a:rPr>
-              <a:t>(안)</a:t>
-            </a:r>
-          </a:p>
-          <a:p>
-            <a:r>
-              <a:rPr sz="1100" b="1">
-                <a:solidFill>
-                  <a:srgbClr val="000000"/>
-                </a:solidFill>
-                <a:latin typeface="맑은 고딕"/>
-                <a:ea typeface="맑은 고딕"/>
-              </a:rPr>
-              <a:t>별첨. 실습 답</a:t>
-            </a:r>
-          </a:p>
-        </p:txBody>
-      </p:sp>
-      <p:sp>
-        <p:nvSpPr>
-          <p:cNvPr id="5" name="텍스트 개체 틀 4">
-            <a:extLst>
-              <a:ext uri="{FF2B5EF4-FFF2-40B4-BE49-F238E27FC236}">
-                <a16:creationId xmlns:a16="http://schemas.microsoft.com/office/drawing/2014/main" id="{F0895985-68EF-30BA-2165-4B3D90ECD41C}"/>
-              </a:ext>
-            </a:extLst>
-          </p:cNvPr>
-          <p:cNvSpPr>
-            <a:spLocks noGrp="1"/>
-          </p:cNvSpPr>
-          <p:nvPr>
-            <p:ph type="body" sz="quarter" idx="11"/>
-          </p:nvPr>
-        </p:nvSpPr>
-        <p:spPr/>
-        <p:txBody>
-          <a:bodyPr/>
-          <a:lstStyle/>
-          <a:p>
-            <a:r>
-              <a:rPr kumimoji="1" lang="en-US" altLang="ko-KR" sz="1400" dirty="0" err="1"/>
-              <a:t>별첨: 09. 검증 하네스·결과 점검·피드백</a:t>
-            </a:r>
-          </a:p>
-        </p:txBody>
-      </p:sp>
-      <p:sp>
-        <p:nvSpPr>
-          <p:cNvPr id="6" name="텍스트 개체 틀 5">
-            <a:extLst>
-              <a:ext uri="{FF2B5EF4-FFF2-40B4-BE49-F238E27FC236}">
-                <a16:creationId xmlns:a16="http://schemas.microsoft.com/office/drawing/2014/main" id="{D985C1FD-84C4-10F9-372D-6A84E1680E07}"/>
-              </a:ext>
-            </a:extLst>
-          </p:cNvPr>
-          <p:cNvSpPr>
-            <a:spLocks noGrp="1"/>
-          </p:cNvSpPr>
-          <p:nvPr>
-            <p:ph type="body" sz="quarter" idx="12"/>
-          </p:nvPr>
-        </p:nvSpPr>
-        <p:spPr/>
-        <p:txBody>
-          <a:bodyPr/>
-          <a:lstStyle/>
-          <a:p>
-            <a:endParaRPr kumimoji="1" lang="ko-KR" altLang="en-US" dirty="0"/>
-          </a:p>
-        </p:txBody>
-      </p:sp>
-      <p:sp>
-        <p:nvSpPr>
-          <p:cNvPr id="7" name="텍스트 개체 틀 6">
-            <a:extLst>
-              <a:ext uri="{FF2B5EF4-FFF2-40B4-BE49-F238E27FC236}">
-                <a16:creationId xmlns:a16="http://schemas.microsoft.com/office/drawing/2014/main" id="{E26A8878-48FF-5E3A-5D05-0F900C22011B}"/>
-              </a:ext>
-            </a:extLst>
-          </p:cNvPr>
-          <p:cNvSpPr>
-            <a:spLocks noGrp="1"/>
-          </p:cNvSpPr>
-          <p:nvPr>
-            <p:ph type="body" sz="quarter" idx="13"/>
-          </p:nvPr>
-        </p:nvSpPr>
-        <p:spPr/>
-        <p:txBody>
-          <a:bodyPr/>
-          <a:lstStyle/>
-          <a:p>
-            <a:endParaRPr lang="en-US" altLang="ko-KR" dirty="0"/>
-          </a:p>
-        </p:txBody>
-      </p:sp>
-      <p:graphicFrame>
-        <p:nvGraphicFramePr>
-          <p:cNvPr id="11" name="표 10">
-            <a:extLst>
-              <a:ext uri="{FF2B5EF4-FFF2-40B4-BE49-F238E27FC236}">
-                <a16:creationId xmlns:a16="http://schemas.microsoft.com/office/drawing/2014/main" id="{93753AB9-526C-CE2D-446D-7615D9B6D6D2}"/>
-              </a:ext>
-            </a:extLst>
-          </p:cNvPr>
-          <p:cNvGraphicFramePr>
-            <a:graphicFrameLocks noGrp="1"/>
-          </p:cNvGraphicFramePr>
-          <p:nvPr>
-            <p:extLst>
-              <p:ext uri="{D42A27DB-BD31-4B8C-83A1-F6EECF244321}">
-                <p14:modId xmlns:p14="http://schemas.microsoft.com/office/powerpoint/2010/main" val="1761827855"/>
-              </p:ext>
-            </p:extLst>
-          </p:nvPr>
-        </p:nvGraphicFramePr>
-        <p:xfrm>
-          <a:off x="1399096" y="2112010"/>
-          <a:ext cx="6332220" cy="3873500"/>
-        </p:xfrm>
-        <a:graphic>
-          <a:graphicData uri="http://schemas.openxmlformats.org/drawingml/2006/table">
-            <a:tbl>
-              <a:tblPr/>
-              <a:tblGrid>
-                <a:gridCol w="1450340"/>
-                <a:gridCol w="1813560"/>
-                <a:gridCol w="1310640"/>
-                <a:gridCol w="1757680"/>
-              </a:tblGrid>
-              <a:tr h="288000">
-                <a:tc>
-                  <a:txBody>
-                    <a:bodyPr/>
-                    <a:lstStyle/>
-                    <a:p>
-                      <a:pPr algn="ctr" fontAlgn="ctr">
-                        <a:buNone/>
-                      </a:pPr>
-                      <a:r>
-                        <a:rPr lang="ko-KR" altLang="en-US" sz="1000" b="1" i="0" u="none" strike="noStrike" dirty="0">
-                          <a:solidFill>
-                            <a:schemeClr val="bg1"/>
-                          </a:solidFill>
-                          <a:effectLst/>
-                          <a:latin typeface="맑은 고딕" panose="020B0503020000020004" pitchFamily="34" charset="-127"/>
-                          <a:ea typeface="맑은 고딕" panose="020B0503020000020004" pitchFamily="34" charset="-127"/>
-                          <a:cs typeface="맑은 고딕"/>
-                        </a:rPr>
-                        <a:t>지키려는 것</a:t>
-                      </a:r>
-                    </a:p>
-                  </a:txBody>
-                  <a:tcPr marL="6750" marR="6750" marT="6750" marB="0" anchor="ctr">
-                    <a:lnL>
-                      <a:noFill/>
-                    </a:lnL>
-                    <a:lnR w="9525" cap="flat" cmpd="sng" algn="ctr">
-                      <a:solidFill>
-                        <a:schemeClr val="bg1">
-                          <a:lumMod val="50000"/>
-                        </a:schemeClr>
-                      </a:solidFill>
-                      <a:prstDash val="solid"/>
-                      <a:round/>
-                      <a:headEnd type="none" w="med" len="med"/>
-                      <a:tailEnd type="none" w="med" len="med"/>
-                    </a:lnR>
-                    <a:lnT w="9525" cap="flat" cmpd="sng" algn="ctr">
-                      <a:solidFill>
-                        <a:schemeClr val="tx1"/>
-                      </a:solidFill>
-                      <a:prstDash val="solid"/>
-                      <a:round/>
-                      <a:headEnd type="none" w="med" len="med"/>
-                      <a:tailEnd type="none" w="med" len="med"/>
-                    </a:lnT>
-                    <a:lnB w="9525" cap="flat" cmpd="sng" algn="ctr">
-                      <a:solidFill>
-                        <a:schemeClr val="bg1">
-                          <a:lumMod val="50000"/>
-                        </a:schemeClr>
-                      </a:solidFill>
-                      <a:prstDash val="solid"/>
-                      <a:round/>
-                      <a:headEnd type="none" w="med" len="med"/>
-                      <a:tailEnd type="none" w="med" len="med"/>
-                    </a:lnB>
-                    <a:solidFill>
-                      <a:srgbClr val="002060"/>
-                    </a:solidFill>
-                  </a:tcPr>
-                </a:tc>
-                <a:tc>
-                  <a:txBody>
-                    <a:bodyPr/>
-                    <a:lstStyle/>
-                    <a:p>
-                      <a:pPr algn="ctr" fontAlgn="ctr">
-                        <a:buNone/>
-                      </a:pPr>
-                      <a:r>
-                        <a:rPr lang="ko-KR" altLang="en-US" sz="1000" b="1" i="0" u="none" strike="noStrike" dirty="0">
-                          <a:solidFill>
-                            <a:schemeClr val="bg1"/>
-                          </a:solidFill>
-                          <a:effectLst/>
-                          <a:latin typeface="맑은 고딕" panose="020B0503020000020004" pitchFamily="34" charset="-127"/>
-                          <a:ea typeface="맑은 고딕" panose="020B0503020000020004" pitchFamily="34" charset="-127"/>
-                          <a:cs typeface="맑은 고딕"/>
-                        </a:rPr>
-                        <a:t>가이드</a:t>
-                      </a:r>
-                    </a:p>
-                  </a:txBody>
-                  <a:tcPr marL="6750" marR="6750" marT="6750" marB="0" anchor="ctr">
-                    <a:lnL w="9525" cap="flat" cmpd="sng" algn="ctr">
-                      <a:solidFill>
-                        <a:schemeClr val="bg1">
-                          <a:lumMod val="50000"/>
-                        </a:schemeClr>
-                      </a:solidFill>
-                      <a:prstDash val="solid"/>
-                      <a:round/>
-                      <a:headEnd type="none" w="med" len="med"/>
-                      <a:tailEnd type="none" w="med" len="med"/>
-                    </a:lnL>
-                    <a:lnR w="9525" cap="flat" cmpd="sng" algn="ctr">
-                      <a:solidFill>
-                        <a:schemeClr val="bg1">
-                          <a:lumMod val="50000"/>
-                        </a:schemeClr>
-                      </a:solidFill>
-                      <a:prstDash val="solid"/>
-                      <a:round/>
-                      <a:headEnd type="none" w="med" len="med"/>
-                      <a:tailEnd type="none" w="med" len="med"/>
-                    </a:lnR>
-                    <a:lnT w="9525" cap="flat" cmpd="sng" algn="ctr">
-                      <a:solidFill>
-                        <a:schemeClr val="tx1"/>
-                      </a:solidFill>
-                      <a:prstDash val="solid"/>
-                      <a:round/>
-                      <a:headEnd type="none" w="med" len="med"/>
-                      <a:tailEnd type="none" w="med" len="med"/>
-                    </a:lnT>
-                    <a:lnB w="9525" cap="flat" cmpd="sng" algn="ctr">
-                      <a:solidFill>
-                        <a:schemeClr val="bg1">
-                          <a:lumMod val="50000"/>
-                        </a:schemeClr>
-                      </a:solidFill>
-                      <a:prstDash val="solid"/>
-                      <a:round/>
-                      <a:headEnd type="none" w="med" len="med"/>
-                      <a:tailEnd type="none" w="med" len="med"/>
-                    </a:lnB>
-                    <a:solidFill>
-                      <a:srgbClr val="002060"/>
-                    </a:solidFill>
-                  </a:tcPr>
-                </a:tc>
-                <a:tc>
-                  <a:txBody>
-                    <a:bodyPr/>
-                    <a:lstStyle/>
-                    <a:p>
-                      <a:pPr algn="ctr" fontAlgn="ctr">
-                        <a:buNone/>
-                      </a:pPr>
-                      <a:r>
-                        <a:rPr lang="ko-KR" altLang="en-US" sz="1000" b="1" i="0" u="none" strike="noStrike" dirty="0" err="1">
-                          <a:solidFill>
-                            <a:schemeClr val="bg1"/>
-                          </a:solidFill>
-                          <a:effectLst/>
-                          <a:latin typeface="맑은 고딕" panose="020B0503020000020004" pitchFamily="34" charset="-127"/>
-                          <a:ea typeface="맑은 고딕" panose="020B0503020000020004" pitchFamily="34" charset="-127"/>
-                          <a:cs typeface="맑은 고딕"/>
-                        </a:rPr>
-                        <a:t>센서</a:t>
-                      </a:r>
-                    </a:p>
-                  </a:txBody>
-                  <a:tcPr marL="6750" marR="6750" marT="6750" marB="0" anchor="ctr">
-                    <a:lnL w="9525" cap="flat" cmpd="sng" algn="ctr">
-                      <a:solidFill>
-                        <a:schemeClr val="bg1">
-                          <a:lumMod val="50000"/>
-                        </a:schemeClr>
-                      </a:solidFill>
-                      <a:prstDash val="solid"/>
-                      <a:round/>
-                      <a:headEnd type="none" w="med" len="med"/>
-                      <a:tailEnd type="none" w="med" len="med"/>
-                    </a:lnL>
-                    <a:lnR w="9525" cap="flat" cmpd="sng" algn="ctr">
-                      <a:solidFill>
-                        <a:schemeClr val="bg1">
-                          <a:lumMod val="50000"/>
-                        </a:schemeClr>
-                      </a:solidFill>
-                      <a:prstDash val="solid"/>
-                      <a:round/>
-                      <a:headEnd type="none" w="med" len="med"/>
-                      <a:tailEnd type="none" w="med" len="med"/>
-                    </a:lnR>
-                    <a:lnT w="9525" cap="flat" cmpd="sng" algn="ctr">
-                      <a:solidFill>
-                        <a:schemeClr val="tx1"/>
-                      </a:solidFill>
-                      <a:prstDash val="solid"/>
-                      <a:round/>
-                      <a:headEnd type="none" w="med" len="med"/>
-                      <a:tailEnd type="none" w="med" len="med"/>
-                    </a:lnT>
-                    <a:lnB w="9525" cap="flat" cmpd="sng" algn="ctr">
-                      <a:solidFill>
-                        <a:schemeClr val="bg1">
-                          <a:lumMod val="50000"/>
-                        </a:schemeClr>
-                      </a:solidFill>
-                      <a:prstDash val="solid"/>
-                      <a:round/>
-                      <a:headEnd type="none" w="med" len="med"/>
-                      <a:tailEnd type="none" w="med" len="med"/>
-                    </a:lnB>
-                    <a:solidFill>
-                      <a:srgbClr val="002060"/>
-                    </a:solidFill>
-                  </a:tcPr>
-                </a:tc>
-                <a:tc>
-                  <a:txBody>
-                    <a:bodyPr/>
-                    <a:lstStyle/>
-                    <a:p>
-                      <a:pPr algn="ctr" fontAlgn="ctr">
-                        <a:buNone/>
-                      </a:pPr>
-                      <a:r>
-                        <a:rPr lang="ko-KR" altLang="en-US" sz="1000" b="1" i="0" u="none" strike="noStrike" dirty="0" err="1">
-                          <a:solidFill>
-                            <a:schemeClr val="bg1"/>
-                          </a:solidFill>
-                          <a:effectLst/>
-                          <a:latin typeface="맑은 고딕" panose="020B0503020000020004" pitchFamily="34" charset="-127"/>
-                          <a:ea typeface="맑은 고딕" panose="020B0503020000020004" pitchFamily="34" charset="-127"/>
-                          <a:cs typeface="맑은 고딕"/>
-                        </a:rPr>
-                        <a:t>판정</a:t>
-                      </a:r>
-                    </a:p>
-                  </a:txBody>
-                  <a:tcPr marL="6750" marR="6750" marT="6750" marB="0" anchor="ctr">
-                    <a:lnL w="9525" cap="flat" cmpd="sng" algn="ctr">
-                      <a:solidFill>
-                        <a:schemeClr val="bg1">
-                          <a:lumMod val="50000"/>
-                        </a:schemeClr>
-                      </a:solidFill>
-                      <a:prstDash val="solid"/>
-                      <a:round/>
-                      <a:headEnd type="none" w="med" len="med"/>
-                      <a:tailEnd type="none" w="med" len="med"/>
-                    </a:lnL>
-                    <a:lnR w="9525" cap="flat" cmpd="sng" algn="ctr">
-                      <a:solidFill>
-                        <a:schemeClr val="bg1">
-                          <a:lumMod val="50000"/>
-                        </a:schemeClr>
-                      </a:solidFill>
-                      <a:prstDash val="solid"/>
-                      <a:round/>
-                      <a:headEnd type="none" w="med" len="med"/>
-                      <a:tailEnd type="none" w="med" len="med"/>
-                    </a:lnR>
-                    <a:lnT w="9525" cap="flat" cmpd="sng" algn="ctr">
-                      <a:solidFill>
-                        <a:schemeClr val="tx1"/>
-                      </a:solidFill>
-                      <a:prstDash val="solid"/>
-                      <a:round/>
-                      <a:headEnd type="none" w="med" len="med"/>
-                      <a:tailEnd type="none" w="med" len="med"/>
-                    </a:lnT>
-                    <a:lnB w="9525" cap="flat" cmpd="sng" algn="ctr">
-                      <a:solidFill>
-                        <a:schemeClr val="bg1">
-                          <a:lumMod val="50000"/>
-                        </a:schemeClr>
-                      </a:solidFill>
-                      <a:prstDash val="solid"/>
-                      <a:round/>
-                      <a:headEnd type="none" w="med" len="med"/>
-                      <a:tailEnd type="none" w="med" len="med"/>
-                    </a:lnB>
-                    <a:solidFill>
-                      <a:srgbClr val="002060"/>
-                    </a:solidFill>
-                  </a:tcPr>
-                </a:tc>
-              </a:tr>
-              <a:tr h="288000">
-                <a:tc>
-                  <a:txBody>
-                    <a:bodyPr/>
-                    <a:lstStyle/>
-                    <a:p>
-                      <a:pPr algn="l" fontAlgn="ctr">
-                        <a:buNone/>
-                      </a:pPr>
-                      <a:r>
-                        <a:rPr lang="en" sz="1000" b="1" i="0" u="none" strike="noStrike" dirty="0">
-                          <a:solidFill>
-                            <a:schemeClr val="tx1"/>
-                          </a:solidFill>
-                          <a:effectLst/>
-                          <a:latin typeface="맑은 고딕" panose="020B0503020000020004" pitchFamily="34" charset="-127"/>
-                          <a:ea typeface="맑은 고딕" panose="020B0503020000020004" pitchFamily="34" charset="-127"/>
-                          <a:cs typeface="맑은 고딕"/>
-                        </a:rPr>
-                        <a:t>회차와 금액</a:t>
-                      </a:r>
-                    </a:p>
-                  </a:txBody>
-                  <a:tcPr marL="81005" marR="6750" marT="6750" marB="0" anchor="ctr">
-                    <a:lnL>
-                      <a:noFill/>
-                    </a:lnL>
-                    <a:lnR>
-                      <a:noFill/>
-                    </a:lnR>
-                    <a:lnT w="9525" cap="flat" cmpd="sng" algn="ctr">
-                      <a:solidFill>
-                        <a:schemeClr val="bg1">
-                          <a:lumMod val="50000"/>
-                        </a:schemeClr>
-                      </a:solidFill>
-                      <a:prstDash val="solid"/>
-                      <a:round/>
-                      <a:headEnd type="none" w="med" len="med"/>
-                      <a:tailEnd type="none" w="med" len="med"/>
-                    </a:lnT>
-                    <a:lnB w="9525" cap="flat" cmpd="sng" algn="ctr">
-                      <a:solidFill>
-                        <a:schemeClr val="bg1">
-                          <a:lumMod val="50000"/>
-                        </a:schemeClr>
-                      </a:solidFill>
-                      <a:prstDash val="solid"/>
-                      <a:round/>
-                      <a:headEnd type="none" w="med" len="med"/>
-                      <a:tailEnd type="none" w="med" len="med"/>
-                    </a:lnB>
-                    <a:noFill/>
-                  </a:tcPr>
-                </a:tc>
-                <a:tc>
-                  <a:txBody>
-                    <a:bodyPr/>
-                    <a:lstStyle/>
-                    <a:p>
-                      <a:pPr algn="l" fontAlgn="ctr">
-                        <a:buNone/>
-                      </a:pPr>
-                      <a:r>
-                        <a:rPr lang="ko-KR" altLang="en-US" sz="1000" b="0" i="0" u="none" strike="noStrike" dirty="0">
-                          <a:solidFill>
-                            <a:srgbClr val="000000"/>
-                          </a:solidFill>
-                          <a:effectLst/>
-                          <a:latin typeface="맑은 고딕" panose="020B0503020000020004" pitchFamily="34" charset="-127"/>
-                          <a:ea typeface="맑은 고딕" panose="020B0503020000020004" pitchFamily="34" charset="-127"/>
-                          <a:cs typeface="맑은 고딕"/>
-                        </a:rPr>
-                        <a:t>작업 명세서의 예</a:t>
-                      </a:r>
-                    </a:p>
-                  </a:txBody>
-                  <a:tcPr marL="81005" marR="6750" marT="6750" marB="0" anchor="ctr">
-                    <a:lnL>
-                      <a:noFill/>
-                    </a:lnL>
-                    <a:lnR>
-                      <a:noFill/>
-                    </a:lnR>
-                    <a:lnT w="9525" cap="flat" cmpd="sng" algn="ctr">
-                      <a:solidFill>
-                        <a:schemeClr val="bg1">
-                          <a:lumMod val="50000"/>
-                        </a:schemeClr>
-                      </a:solidFill>
-                      <a:prstDash val="solid"/>
-                      <a:round/>
-                      <a:headEnd type="none" w="med" len="med"/>
-                      <a:tailEnd type="none" w="med" len="med"/>
-                    </a:lnT>
-                    <a:lnB w="9525" cap="flat" cmpd="sng" algn="ctr">
-                      <a:solidFill>
-                        <a:schemeClr val="bg1">
-                          <a:lumMod val="50000"/>
-                        </a:schemeClr>
-                      </a:solidFill>
-                      <a:prstDash val="solid"/>
-                      <a:round/>
-                      <a:headEnd type="none" w="med" len="med"/>
-                      <a:tailEnd type="none" w="med" len="med"/>
-                    </a:lnB>
-                    <a:solidFill>
-                      <a:srgbClr val="FFFFFF"/>
-                    </a:solidFill>
-                  </a:tcPr>
-                </a:tc>
-                <a:tc>
-                  <a:txBody>
-                    <a:bodyPr/>
-                    <a:lstStyle/>
-                    <a:p>
-                      <a:pPr algn="l" fontAlgn="ctr">
-                        <a:buNone/>
-                      </a:pPr>
-                      <a:r>
-                        <a:rPr lang="ko-KR" altLang="en-US" sz="1000" b="0" i="0" u="none" strike="noStrike" dirty="0">
-                          <a:solidFill>
-                            <a:srgbClr val="000000"/>
-                          </a:solidFill>
-                          <a:effectLst/>
-                          <a:latin typeface="맑은 고딕" panose="020B0503020000020004" pitchFamily="34" charset="-127"/>
-                          <a:ea typeface="맑은 고딕" panose="020B0503020000020004" pitchFamily="34" charset="-127"/>
-                          <a:cs typeface="맑은 고딕"/>
-                        </a:rPr>
-                        <a:t>수용 테스트</a:t>
-                      </a:r>
-                    </a:p>
-                  </a:txBody>
-                  <a:tcPr marL="81005" marR="6750" marT="6750" marB="0" anchor="ctr">
-                    <a:lnL>
-                      <a:noFill/>
-                    </a:lnL>
-                    <a:lnR>
-                      <a:noFill/>
-                    </a:lnR>
-                    <a:lnT w="9525" cap="flat" cmpd="sng" algn="ctr">
-                      <a:solidFill>
-                        <a:schemeClr val="bg1">
-                          <a:lumMod val="50000"/>
-                        </a:schemeClr>
-                      </a:solidFill>
-                      <a:prstDash val="solid"/>
-                      <a:round/>
-                      <a:headEnd type="none" w="med" len="med"/>
-                      <a:tailEnd type="none" w="med" len="med"/>
-                    </a:lnT>
-                    <a:lnB w="9525" cap="flat" cmpd="sng" algn="ctr">
-                      <a:solidFill>
-                        <a:schemeClr val="bg1">
-                          <a:lumMod val="50000"/>
-                        </a:schemeClr>
-                      </a:solidFill>
-                      <a:prstDash val="solid"/>
-                      <a:round/>
-                      <a:headEnd type="none" w="med" len="med"/>
-                      <a:tailEnd type="none" w="med" len="med"/>
-                    </a:lnB>
-                    <a:solidFill>
-                      <a:srgbClr val="FFFFFF"/>
-                    </a:solidFill>
-                  </a:tcPr>
-                </a:tc>
-                <a:tc>
-                  <a:txBody>
-                    <a:bodyPr/>
-                    <a:lstStyle/>
-                    <a:p>
-                      <a:pPr algn="l" fontAlgn="ctr">
-                        <a:buNone/>
-                      </a:pPr>
-                      <a:r>
-                        <a:rPr lang="ko-KR" altLang="en-US" sz="1000" b="0" i="0" u="none" strike="noStrike" dirty="0">
-                          <a:solidFill>
-                            <a:srgbClr val="000000"/>
-                          </a:solidFill>
-                          <a:effectLst/>
-                          <a:latin typeface="맑은 고딕" panose="020B0503020000020004" pitchFamily="34" charset="-127"/>
-                          <a:ea typeface="맑은 고딕" panose="020B0503020000020004" pitchFamily="34" charset="-127"/>
-                          <a:cs typeface="맑은 고딕"/>
-                        </a:rPr>
-                        <a:t>회차 7개·2월 2일?</a:t>
-                      </a:r>
-                    </a:p>
-                  </a:txBody>
-                  <a:tcPr marL="81005" marR="6750" marT="6750" marB="0" anchor="ctr">
-                    <a:lnL>
-                      <a:noFill/>
-                    </a:lnL>
-                    <a:lnR>
-                      <a:noFill/>
-                    </a:lnR>
-                    <a:lnT w="9525" cap="flat" cmpd="sng" algn="ctr">
-                      <a:solidFill>
-                        <a:schemeClr val="bg1">
-                          <a:lumMod val="50000"/>
-                        </a:schemeClr>
-                      </a:solidFill>
-                      <a:prstDash val="solid"/>
-                      <a:round/>
-                      <a:headEnd type="none" w="med" len="med"/>
-                      <a:tailEnd type="none" w="med" len="med"/>
-                    </a:lnT>
-                    <a:lnB w="9525" cap="flat" cmpd="sng" algn="ctr">
-                      <a:solidFill>
-                        <a:schemeClr val="bg1">
-                          <a:lumMod val="50000"/>
-                        </a:schemeClr>
-                      </a:solidFill>
-                      <a:prstDash val="solid"/>
-                      <a:round/>
-                      <a:headEnd type="none" w="med" len="med"/>
-                      <a:tailEnd type="none" w="med" len="med"/>
-                    </a:lnB>
-                    <a:solidFill>
-                      <a:srgbClr val="FFFFFF"/>
-                    </a:solidFill>
-                  </a:tcPr>
-                </a:tc>
-              </a:tr>
-              <a:tr h="288000">
-                <a:tc>
-                  <a:txBody>
-                    <a:bodyPr/>
-                    <a:lstStyle/>
-                    <a:p>
-                      <a:pPr algn="l" fontAlgn="ctr">
-                        <a:buNone/>
-                      </a:pPr>
-                      <a:r>
-                        <a:rPr lang="en" sz="1000" b="1" i="0" u="none" strike="noStrike" dirty="0">
-                          <a:solidFill>
-                            <a:schemeClr val="tx1"/>
-                          </a:solidFill>
-                          <a:effectLst/>
-                          <a:latin typeface="맑은 고딕" panose="020B0503020000020004" pitchFamily="34" charset="-127"/>
-                          <a:ea typeface="맑은 고딕" panose="020B0503020000020004" pitchFamily="34" charset="-127"/>
-                          <a:cs typeface="맑은 고딕"/>
-                        </a:rPr>
-                        <a:t>결제 거절</a:t>
-                      </a:r>
-                    </a:p>
-                  </a:txBody>
-                  <a:tcPr marL="81005" marR="6750" marT="6750" marB="0" anchor="ctr">
-                    <a:lnL>
-                      <a:noFill/>
-                    </a:lnL>
-                    <a:lnR>
-                      <a:noFill/>
-                    </a:lnR>
-                    <a:lnT w="9525" cap="flat" cmpd="sng" algn="ctr">
-                      <a:solidFill>
-                        <a:schemeClr val="bg1">
-                          <a:lumMod val="50000"/>
-                        </a:schemeClr>
-                      </a:solidFill>
-                      <a:prstDash val="solid"/>
-                      <a:round/>
-                      <a:headEnd type="none" w="med" len="med"/>
-                      <a:tailEnd type="none" w="med" len="med"/>
-                    </a:lnT>
-                    <a:lnB w="9525" cap="flat" cmpd="sng" algn="ctr">
-                      <a:solidFill>
-                        <a:schemeClr val="bg1">
-                          <a:lumMod val="50000"/>
-                        </a:schemeClr>
-                      </a:solidFill>
-                      <a:prstDash val="solid"/>
-                      <a:round/>
-                      <a:headEnd type="none" w="med" len="med"/>
-                      <a:tailEnd type="none" w="med" len="med"/>
-                    </a:lnB>
-                    <a:noFill/>
-                  </a:tcPr>
-                </a:tc>
-                <a:tc>
-                  <a:txBody>
-                    <a:bodyPr/>
-                    <a:lstStyle/>
-                    <a:p>
-                      <a:pPr algn="l" fontAlgn="ctr">
-                        <a:buNone/>
-                      </a:pPr>
-                      <a:r>
-                        <a:rPr lang="ko-KR" altLang="en-US" sz="1000" b="0" i="0" u="none" strike="noStrike" dirty="0">
-                          <a:solidFill>
-                            <a:srgbClr val="000000"/>
-                          </a:solidFill>
-                          <a:effectLst/>
-                          <a:latin typeface="맑은 고딕" panose="020B0503020000020004" pitchFamily="34" charset="-127"/>
-                          <a:ea typeface="맑은 고딕" panose="020B0503020000020004" pitchFamily="34" charset="-127"/>
-                          <a:cs typeface="맑은 고딕"/>
-                        </a:rPr>
-                        <a:t>수용 기준의 거절 예시</a:t>
-                      </a:r>
-                    </a:p>
-                  </a:txBody>
-                  <a:tcPr marL="81005" marR="6750" marT="6750" marB="0" anchor="ctr">
-                    <a:lnL>
-                      <a:noFill/>
-                    </a:lnL>
-                    <a:lnR>
-                      <a:noFill/>
-                    </a:lnR>
-                    <a:lnT w="9525" cap="flat" cmpd="sng" algn="ctr">
-                      <a:solidFill>
-                        <a:schemeClr val="bg1">
-                          <a:lumMod val="50000"/>
-                        </a:schemeClr>
-                      </a:solidFill>
-                      <a:prstDash val="solid"/>
-                      <a:round/>
-                      <a:headEnd type="none" w="med" len="med"/>
-                      <a:tailEnd type="none" w="med" len="med"/>
-                    </a:lnT>
-                    <a:lnB w="9525" cap="flat" cmpd="sng" algn="ctr">
-                      <a:solidFill>
-                        <a:schemeClr val="bg1">
-                          <a:lumMod val="50000"/>
-                        </a:schemeClr>
-                      </a:solidFill>
-                      <a:prstDash val="solid"/>
-                      <a:round/>
-                      <a:headEnd type="none" w="med" len="med"/>
-                      <a:tailEnd type="none" w="med" len="med"/>
-                    </a:lnB>
-                    <a:solidFill>
-                      <a:srgbClr val="FFFFFF"/>
-                    </a:solidFill>
-                  </a:tcPr>
-                </a:tc>
-                <a:tc>
-                  <a:txBody>
-                    <a:bodyPr/>
-                    <a:lstStyle/>
-                    <a:p>
-                      <a:pPr algn="l" fontAlgn="ctr">
-                        <a:buNone/>
-                      </a:pPr>
-                      <a:r>
-                        <a:rPr lang="ko-KR" altLang="en-US" sz="1000" b="0" i="0" u="none" strike="noStrike" dirty="0">
-                          <a:solidFill>
-                            <a:srgbClr val="000000"/>
-                          </a:solidFill>
-                          <a:effectLst/>
-                          <a:latin typeface="맑은 고딕" panose="020B0503020000020004" pitchFamily="34" charset="-127"/>
-                          <a:ea typeface="맑은 고딕" panose="020B0503020000020004" pitchFamily="34" charset="-127"/>
-                          <a:cs typeface="맑은 고딕"/>
-                        </a:rPr>
-                        <a:t>수용 테스트</a:t>
-                      </a:r>
-                    </a:p>
-                  </a:txBody>
-                  <a:tcPr marL="81005" marR="6750" marT="6750" marB="0" anchor="ctr">
-                    <a:lnL>
-                      <a:noFill/>
-                    </a:lnL>
-                    <a:lnR>
-                      <a:noFill/>
-                    </a:lnR>
-                    <a:lnT w="9525" cap="flat" cmpd="sng" algn="ctr">
-                      <a:solidFill>
-                        <a:schemeClr val="bg1">
-                          <a:lumMod val="50000"/>
-                        </a:schemeClr>
-                      </a:solidFill>
-                      <a:prstDash val="solid"/>
-                      <a:round/>
-                      <a:headEnd type="none" w="med" len="med"/>
-                      <a:tailEnd type="none" w="med" len="med"/>
-                    </a:lnT>
-                    <a:lnB w="9525" cap="flat" cmpd="sng" algn="ctr">
-                      <a:solidFill>
-                        <a:schemeClr val="bg1">
-                          <a:lumMod val="50000"/>
-                        </a:schemeClr>
-                      </a:solidFill>
-                      <a:prstDash val="solid"/>
-                      <a:round/>
-                      <a:headEnd type="none" w="med" len="med"/>
-                      <a:tailEnd type="none" w="med" len="med"/>
-                    </a:lnB>
-                    <a:solidFill>
-                      <a:srgbClr val="FFFFFF"/>
-                    </a:solidFill>
-                  </a:tcPr>
-                </a:tc>
-                <a:tc>
-                  <a:txBody>
-                    <a:bodyPr/>
-                    <a:lstStyle/>
-                    <a:p>
-                      <a:pPr algn="l" fontAlgn="ctr">
-                        <a:buNone/>
-                      </a:pPr>
-                      <a:r>
-                        <a:rPr lang="ko-KR" altLang="en-US" sz="1000" b="0" i="0" u="none" strike="noStrike" dirty="0">
-                          <a:solidFill>
-                            <a:srgbClr val="000000"/>
-                          </a:solidFill>
-                          <a:effectLst/>
-                          <a:latin typeface="맑은 고딕" panose="020B0503020000020004" pitchFamily="34" charset="-127"/>
-                          <a:ea typeface="맑은 고딕" panose="020B0503020000020004" pitchFamily="34" charset="-127"/>
-                          <a:cs typeface="맑은 고딕"/>
-                        </a:rPr>
-                        <a:t>결제 대기 유지?</a:t>
-                      </a:r>
-                    </a:p>
-                  </a:txBody>
-                  <a:tcPr marL="81005" marR="6750" marT="6750" marB="0" anchor="ctr">
-                    <a:lnL>
-                      <a:noFill/>
-                    </a:lnL>
-                    <a:lnR>
-                      <a:noFill/>
-                    </a:lnR>
-                    <a:lnT w="9525" cap="flat" cmpd="sng" algn="ctr">
-                      <a:solidFill>
-                        <a:schemeClr val="bg1">
-                          <a:lumMod val="50000"/>
-                        </a:schemeClr>
-                      </a:solidFill>
-                      <a:prstDash val="solid"/>
-                      <a:round/>
-                      <a:headEnd type="none" w="med" len="med"/>
-                      <a:tailEnd type="none" w="med" len="med"/>
-                    </a:lnT>
-                    <a:lnB w="9525" cap="flat" cmpd="sng" algn="ctr">
-                      <a:solidFill>
-                        <a:schemeClr val="bg1">
-                          <a:lumMod val="50000"/>
-                        </a:schemeClr>
-                      </a:solidFill>
-                      <a:prstDash val="solid"/>
-                      <a:round/>
-                      <a:headEnd type="none" w="med" len="med"/>
-                      <a:tailEnd type="none" w="med" len="med"/>
-                    </a:lnB>
-                    <a:solidFill>
-                      <a:srgbClr val="FFFFFF"/>
-                    </a:solidFill>
-                  </a:tcPr>
-                </a:tc>
-              </a:tr>
-              <a:tr h="288000">
-                <a:tc>
-                  <a:txBody>
-                    <a:bodyPr/>
-                    <a:lstStyle/>
-                    <a:p>
-                      <a:pPr algn="l" fontAlgn="ctr">
-                        <a:buNone/>
-                      </a:pPr>
-                      <a:r>
-                        <a:rPr lang="en" sz="1000" b="1" i="0" u="none" strike="noStrike" dirty="0">
-                          <a:solidFill>
-                            <a:schemeClr val="tx1"/>
-                          </a:solidFill>
-                          <a:effectLst/>
-                          <a:latin typeface="맑은 고딕" panose="020B0503020000020004" pitchFamily="34" charset="-127"/>
-                          <a:ea typeface="맑은 고딕" panose="020B0503020000020004" pitchFamily="34" charset="-127"/>
-                          <a:cs typeface="맑은 고딕"/>
-                        </a:rPr>
-                        <a:t>설계의 경계</a:t>
-                      </a:r>
-                    </a:p>
-                  </a:txBody>
-                  <a:tcPr marL="81005" marR="6750" marT="6750" marB="0" anchor="ctr">
-                    <a:lnL>
-                      <a:noFill/>
-                    </a:lnL>
-                    <a:lnR>
-                      <a:noFill/>
-                    </a:lnR>
-                    <a:lnT w="9525" cap="flat" cmpd="sng" algn="ctr">
-                      <a:solidFill>
-                        <a:schemeClr val="bg1">
-                          <a:lumMod val="50000"/>
-                        </a:schemeClr>
-                      </a:solidFill>
-                      <a:prstDash val="solid"/>
-                      <a:round/>
-                      <a:headEnd type="none" w="med" len="med"/>
-                      <a:tailEnd type="none" w="med" len="med"/>
-                    </a:lnT>
-                    <a:lnB w="9525" cap="flat" cmpd="sng" algn="ctr">
-                      <a:solidFill>
-                        <a:schemeClr val="bg1">
-                          <a:lumMod val="50000"/>
-                        </a:schemeClr>
-                      </a:solidFill>
-                      <a:prstDash val="solid"/>
-                      <a:round/>
-                      <a:headEnd type="none" w="med" len="med"/>
-                      <a:tailEnd type="none" w="med" len="med"/>
-                    </a:lnB>
-                    <a:noFill/>
-                  </a:tcPr>
-                </a:tc>
-                <a:tc>
-                  <a:txBody>
-                    <a:bodyPr/>
-                    <a:lstStyle/>
-                    <a:p>
-                      <a:pPr algn="l" fontAlgn="ctr">
-                        <a:buNone/>
-                      </a:pPr>
-                      <a:r>
-                        <a:rPr lang="ko-KR" altLang="en-US" sz="1000" b="0" i="0" u="none" strike="noStrike" dirty="0">
-                          <a:solidFill>
-                            <a:srgbClr val="000000"/>
-                          </a:solidFill>
-                          <a:effectLst/>
-                          <a:latin typeface="맑은 고딕" panose="020B0503020000020004" pitchFamily="34" charset="-127"/>
-                          <a:ea typeface="맑은 고딕" panose="020B0503020000020004" pitchFamily="34" charset="-127"/>
-                          <a:cs typeface="맑은 고딕"/>
-                        </a:rPr>
-                        <a:t>맥락 파일의 의존 규칙</a:t>
-                      </a:r>
-                    </a:p>
-                  </a:txBody>
-                  <a:tcPr marL="81005" marR="6750" marT="6750" marB="0" anchor="ctr">
-                    <a:lnL>
-                      <a:noFill/>
-                    </a:lnL>
-                    <a:lnR>
-                      <a:noFill/>
-                    </a:lnR>
-                    <a:lnT w="9525" cap="flat" cmpd="sng" algn="ctr">
-                      <a:solidFill>
-                        <a:schemeClr val="bg1">
-                          <a:lumMod val="50000"/>
-                        </a:schemeClr>
-                      </a:solidFill>
-                      <a:prstDash val="solid"/>
-                      <a:round/>
-                      <a:headEnd type="none" w="med" len="med"/>
-                      <a:tailEnd type="none" w="med" len="med"/>
-                    </a:lnT>
-                    <a:lnB w="9525" cap="flat" cmpd="sng" algn="ctr">
-                      <a:solidFill>
-                        <a:schemeClr val="bg1">
-                          <a:lumMod val="50000"/>
-                        </a:schemeClr>
-                      </a:solidFill>
-                      <a:prstDash val="solid"/>
-                      <a:round/>
-                      <a:headEnd type="none" w="med" len="med"/>
-                      <a:tailEnd type="none" w="med" len="med"/>
-                    </a:lnB>
-                    <a:solidFill>
-                      <a:srgbClr val="FFFFFF"/>
-                    </a:solidFill>
-                  </a:tcPr>
-                </a:tc>
-                <a:tc>
-                  <a:txBody>
-                    <a:bodyPr/>
-                    <a:lstStyle/>
-                    <a:p>
-                      <a:pPr algn="l" fontAlgn="ctr">
-                        <a:buNone/>
-                      </a:pPr>
-                      <a:r>
-                        <a:rPr lang="ko-KR" altLang="en-US" sz="1000" b="0" i="0" u="none" strike="noStrike" dirty="0">
-                          <a:solidFill>
-                            <a:srgbClr val="000000"/>
-                          </a:solidFill>
-                          <a:effectLst/>
-                          <a:latin typeface="맑은 고딕" panose="020B0503020000020004" pitchFamily="34" charset="-127"/>
-                          <a:ea typeface="맑은 고딕" panose="020B0503020000020004" pitchFamily="34" charset="-127"/>
-                          <a:cs typeface="맑은 고딕"/>
-                        </a:rPr>
-                        <a:t>의존 규칙 검사</a:t>
-                      </a:r>
-                    </a:p>
-                  </a:txBody>
-                  <a:tcPr marL="81005" marR="6750" marT="6750" marB="0" anchor="ctr">
-                    <a:lnL>
-                      <a:noFill/>
-                    </a:lnL>
-                    <a:lnR>
-                      <a:noFill/>
-                    </a:lnR>
-                    <a:lnT w="9525" cap="flat" cmpd="sng" algn="ctr">
-                      <a:solidFill>
-                        <a:schemeClr val="bg1">
-                          <a:lumMod val="50000"/>
-                        </a:schemeClr>
-                      </a:solidFill>
-                      <a:prstDash val="solid"/>
-                      <a:round/>
-                      <a:headEnd type="none" w="med" len="med"/>
-                      <a:tailEnd type="none" w="med" len="med"/>
-                    </a:lnT>
-                    <a:lnB w="9525" cap="flat" cmpd="sng" algn="ctr">
-                      <a:solidFill>
-                        <a:schemeClr val="bg1">
-                          <a:lumMod val="50000"/>
-                        </a:schemeClr>
-                      </a:solidFill>
-                      <a:prstDash val="solid"/>
-                      <a:round/>
-                      <a:headEnd type="none" w="med" len="med"/>
-                      <a:tailEnd type="none" w="med" len="med"/>
-                    </a:lnB>
-                    <a:solidFill>
-                      <a:srgbClr val="FFFFFF"/>
-                    </a:solidFill>
-                  </a:tcPr>
-                </a:tc>
-                <a:tc>
-                  <a:txBody>
-                    <a:bodyPr/>
-                    <a:lstStyle/>
-                    <a:p>
-                      <a:pPr algn="l" fontAlgn="ctr">
-                        <a:buNone/>
-                      </a:pPr>
-                      <a:r>
-                        <a:rPr lang="ko-KR" altLang="en-US" sz="1000" b="0" i="0" u="none" strike="noStrike" dirty="0">
-                          <a:solidFill>
-                            <a:srgbClr val="000000"/>
-                          </a:solidFill>
-                          <a:effectLst/>
-                          <a:latin typeface="맑은 고딕" panose="020B0503020000020004" pitchFamily="34" charset="-127"/>
-                          <a:ea typeface="맑은 고딕" panose="020B0503020000020004" pitchFamily="34" charset="-127"/>
-                          <a:cs typeface="맑은 고딕"/>
-                        </a:rPr>
-                        <a:t>연동·영속 import?</a:t>
-                      </a:r>
-                    </a:p>
-                  </a:txBody>
-                  <a:tcPr marL="81005" marR="6750" marT="6750" marB="0" anchor="ctr">
-                    <a:lnL>
-                      <a:noFill/>
-                    </a:lnL>
-                    <a:lnR>
-                      <a:noFill/>
-                    </a:lnR>
-                    <a:lnT w="9525" cap="flat" cmpd="sng" algn="ctr">
-                      <a:solidFill>
-                        <a:schemeClr val="bg1">
-                          <a:lumMod val="50000"/>
-                        </a:schemeClr>
-                      </a:solidFill>
-                      <a:prstDash val="solid"/>
-                      <a:round/>
-                      <a:headEnd type="none" w="med" len="med"/>
-                      <a:tailEnd type="none" w="med" len="med"/>
-                    </a:lnT>
-                    <a:lnB w="9525" cap="flat" cmpd="sng" algn="ctr">
-                      <a:solidFill>
-                        <a:schemeClr val="bg1">
-                          <a:lumMod val="50000"/>
-                        </a:schemeClr>
-                      </a:solidFill>
-                      <a:prstDash val="solid"/>
-                      <a:round/>
-                      <a:headEnd type="none" w="med" len="med"/>
-                      <a:tailEnd type="none" w="med" len="med"/>
-                    </a:lnB>
-                    <a:solidFill>
-                      <a:srgbClr val="FFFFFF"/>
-                    </a:solidFill>
-                  </a:tcPr>
-                </a:tc>
-              </a:tr>
-              <a:tr h="288000">
-                <a:tc>
-                  <a:txBody>
-                    <a:bodyPr/>
-                    <a:lstStyle/>
-                    <a:p>
-                      <a:pPr algn="l" fontAlgn="ctr">
-                        <a:buNone/>
-                      </a:pPr>
-                      <a:r>
-                        <a:rPr lang="en" sz="1000" b="1" i="0" u="none" strike="noStrike" dirty="0">
-                          <a:solidFill>
-                            <a:schemeClr val="tx1"/>
-                          </a:solidFill>
-                          <a:effectLst/>
-                          <a:latin typeface="맑은 고딕" panose="020B0503020000020004" pitchFamily="34" charset="-127"/>
-                          <a:ea typeface="맑은 고딕" panose="020B0503020000020004" pitchFamily="34" charset="-127"/>
-                          <a:cs typeface="맑은 고딕"/>
-                        </a:rPr>
-                        <a:t>코드가 말이 됨</a:t>
-                      </a:r>
-                    </a:p>
-                  </a:txBody>
-                  <a:tcPr marL="81005" marR="6750" marT="6750" marB="0" anchor="ctr">
-                    <a:lnL>
-                      <a:noFill/>
-                    </a:lnL>
-                    <a:lnR>
-                      <a:noFill/>
-                    </a:lnR>
-                    <a:lnT w="9525" cap="flat" cmpd="sng" algn="ctr">
-                      <a:solidFill>
-                        <a:schemeClr val="bg1">
-                          <a:lumMod val="50000"/>
-                        </a:schemeClr>
-                      </a:solidFill>
-                      <a:prstDash val="solid"/>
-                      <a:round/>
-                      <a:headEnd type="none" w="med" len="med"/>
-                      <a:tailEnd type="none" w="med" len="med"/>
-                    </a:lnT>
-                    <a:lnB w="9525" cap="flat" cmpd="sng" algn="ctr">
-                      <a:solidFill>
-                        <a:schemeClr val="bg1">
-                          <a:lumMod val="50000"/>
-                        </a:schemeClr>
-                      </a:solidFill>
-                      <a:prstDash val="solid"/>
-                      <a:round/>
-                      <a:headEnd type="none" w="med" len="med"/>
-                      <a:tailEnd type="none" w="med" len="med"/>
-                    </a:lnB>
-                    <a:noFill/>
-                  </a:tcPr>
-                </a:tc>
-                <a:tc>
-                  <a:txBody>
-                    <a:bodyPr/>
-                    <a:lstStyle/>
-                    <a:p>
-                      <a:pPr algn="l" fontAlgn="ctr">
-                        <a:buNone/>
-                      </a:pPr>
-                      <a:r>
-                        <a:rPr lang="ko-KR" altLang="en-US" sz="1000" b="0" i="0" u="none" strike="noStrike" dirty="0">
-                          <a:solidFill>
-                            <a:srgbClr val="000000"/>
-                          </a:solidFill>
-                          <a:effectLst/>
-                          <a:latin typeface="맑은 고딕" panose="020B0503020000020004" pitchFamily="34" charset="-127"/>
-                          <a:ea typeface="맑은 고딕" panose="020B0503020000020004" pitchFamily="34" charset="-127"/>
-                          <a:cs typeface="맑은 고딕"/>
-                        </a:rPr>
-                        <a:t>—</a:t>
-                      </a:r>
-                    </a:p>
-                  </a:txBody>
-                  <a:tcPr marL="81005" marR="6750" marT="6750" marB="0" anchor="ctr">
-                    <a:lnL>
-                      <a:noFill/>
-                    </a:lnL>
-                    <a:lnR>
-                      <a:noFill/>
-                    </a:lnR>
-                    <a:lnT w="9525" cap="flat" cmpd="sng" algn="ctr">
-                      <a:solidFill>
-                        <a:schemeClr val="bg1">
-                          <a:lumMod val="50000"/>
-                        </a:schemeClr>
-                      </a:solidFill>
-                      <a:prstDash val="solid"/>
-                      <a:round/>
-                      <a:headEnd type="none" w="med" len="med"/>
-                      <a:tailEnd type="none" w="med" len="med"/>
-                    </a:lnT>
-                    <a:lnB w="9525" cap="flat" cmpd="sng" algn="ctr">
-                      <a:solidFill>
-                        <a:schemeClr val="bg1">
-                          <a:lumMod val="50000"/>
-                        </a:schemeClr>
-                      </a:solidFill>
-                      <a:prstDash val="solid"/>
-                      <a:round/>
-                      <a:headEnd type="none" w="med" len="med"/>
-                      <a:tailEnd type="none" w="med" len="med"/>
-                    </a:lnB>
-                    <a:solidFill>
-                      <a:srgbClr val="FFFFFF"/>
-                    </a:solidFill>
-                  </a:tcPr>
-                </a:tc>
-                <a:tc>
-                  <a:txBody>
-                    <a:bodyPr/>
-                    <a:lstStyle/>
-                    <a:p>
-                      <a:pPr algn="l" fontAlgn="ctr">
-                        <a:buNone/>
-                      </a:pPr>
-                      <a:r>
-                        <a:rPr lang="ko-KR" altLang="en-US" sz="1000" b="0" i="0" u="none" strike="noStrike" dirty="0">
-                          <a:solidFill>
-                            <a:srgbClr val="000000"/>
-                          </a:solidFill>
-                          <a:effectLst/>
-                          <a:latin typeface="맑은 고딕" panose="020B0503020000020004" pitchFamily="34" charset="-127"/>
-                          <a:ea typeface="맑은 고딕" panose="020B0503020000020004" pitchFamily="34" charset="-127"/>
-                          <a:cs typeface="맑은 고딕"/>
-                        </a:rPr>
-                        <a:t>컴파일</a:t>
-                      </a:r>
-                    </a:p>
-                  </a:txBody>
-                  <a:tcPr marL="81005" marR="6750" marT="6750" marB="0" anchor="ctr">
-                    <a:lnL>
-                      <a:noFill/>
-                    </a:lnL>
-                    <a:lnR>
-                      <a:noFill/>
-                    </a:lnR>
-                    <a:lnT w="9525" cap="flat" cmpd="sng" algn="ctr">
-                      <a:solidFill>
-                        <a:schemeClr val="bg1">
-                          <a:lumMod val="50000"/>
-                        </a:schemeClr>
-                      </a:solidFill>
-                      <a:prstDash val="solid"/>
-                      <a:round/>
-                      <a:headEnd type="none" w="med" len="med"/>
-                      <a:tailEnd type="none" w="med" len="med"/>
-                    </a:lnT>
-                    <a:lnB w="9525" cap="flat" cmpd="sng" algn="ctr">
-                      <a:solidFill>
-                        <a:schemeClr val="bg1">
-                          <a:lumMod val="50000"/>
-                        </a:schemeClr>
-                      </a:solidFill>
-                      <a:prstDash val="solid"/>
-                      <a:round/>
-                      <a:headEnd type="none" w="med" len="med"/>
-                      <a:tailEnd type="none" w="med" len="med"/>
-                    </a:lnB>
-                    <a:solidFill>
-                      <a:srgbClr val="FFFFFF"/>
-                    </a:solidFill>
-                  </a:tcPr>
-                </a:tc>
-                <a:tc>
-                  <a:txBody>
-                    <a:bodyPr/>
-                    <a:lstStyle/>
-                    <a:p>
-                      <a:pPr algn="l" fontAlgn="ctr">
-                        <a:buNone/>
-                      </a:pPr>
-                      <a:r>
-                        <a:rPr lang="ko-KR" altLang="en-US" sz="1000" b="0" i="0" u="none" strike="noStrike" dirty="0">
-                          <a:solidFill>
-                            <a:srgbClr val="000000"/>
-                          </a:solidFill>
-                          <a:effectLst/>
-                          <a:latin typeface="맑은 고딕" panose="020B0503020000020004" pitchFamily="34" charset="-127"/>
-                          <a:ea typeface="맑은 고딕" panose="020B0503020000020004" pitchFamily="34" charset="-127"/>
-                          <a:cs typeface="맑은 고딕"/>
-                        </a:rPr>
-                        <a:t>이름·타입?</a:t>
-                      </a:r>
-                    </a:p>
-                  </a:txBody>
-                  <a:tcPr marL="81005" marR="6750" marT="6750" marB="0" anchor="ctr">
-                    <a:lnL>
-                      <a:noFill/>
-                    </a:lnL>
-                    <a:lnR>
-                      <a:noFill/>
-                    </a:lnR>
-                    <a:lnT w="9525" cap="flat" cmpd="sng" algn="ctr">
-                      <a:solidFill>
-                        <a:schemeClr val="bg1">
-                          <a:lumMod val="50000"/>
-                        </a:schemeClr>
-                      </a:solidFill>
-                      <a:prstDash val="solid"/>
-                      <a:round/>
-                      <a:headEnd type="none" w="med" len="med"/>
-                      <a:tailEnd type="none" w="med" len="med"/>
-                    </a:lnT>
-                    <a:lnB w="9525" cap="flat" cmpd="sng" algn="ctr">
-                      <a:solidFill>
-                        <a:schemeClr val="bg1">
-                          <a:lumMod val="50000"/>
-                        </a:schemeClr>
-                      </a:solidFill>
-                      <a:prstDash val="solid"/>
-                      <a:round/>
-                      <a:headEnd type="none" w="med" len="med"/>
-                      <a:tailEnd type="none" w="med" len="med"/>
-                    </a:lnB>
-                    <a:solidFill>
-                      <a:srgbClr val="FFFFFF"/>
-                    </a:solidFill>
-                  </a:tcPr>
-                </a:tc>
-              </a:tr>
-              <a:tr h="288000">
-                <a:tc>
-                  <a:txBody>
-                    <a:bodyPr/>
-                    <a:lstStyle/>
-                    <a:p>
-                      <a:pPr algn="l" fontAlgn="ctr">
-                        <a:buNone/>
-                      </a:pPr>
-                      <a:r>
-                        <a:rPr lang="en" sz="1000" b="1" i="0" u="none" strike="noStrike" dirty="0">
-                          <a:solidFill>
-                            <a:schemeClr val="tx1"/>
-                          </a:solidFill>
-                          <a:effectLst/>
-                          <a:latin typeface="맑은 고딕" panose="020B0503020000020004" pitchFamily="34" charset="-127"/>
-                          <a:ea typeface="맑은 고딕" panose="020B0503020000020004" pitchFamily="34" charset="-127"/>
-                          <a:cs typeface="맑은 고딕"/>
-                        </a:rPr>
-                        <a:t>회차 생성의 의미</a:t>
-                      </a:r>
-                    </a:p>
-                  </a:txBody>
-                  <a:tcPr marL="81005" marR="6750" marT="6750" marB="0" anchor="ctr">
-                    <a:lnL>
-                      <a:noFill/>
-                    </a:lnL>
-                    <a:lnR>
-                      <a:noFill/>
-                    </a:lnR>
-                    <a:lnT w="9525" cap="flat" cmpd="sng" algn="ctr">
-                      <a:solidFill>
-                        <a:schemeClr val="bg1">
-                          <a:lumMod val="50000"/>
-                        </a:schemeClr>
-                      </a:solidFill>
-                      <a:prstDash val="solid"/>
-                      <a:round/>
-                      <a:headEnd type="none" w="med" len="med"/>
-                      <a:tailEnd type="none" w="med" len="med"/>
-                    </a:lnT>
-                    <a:lnB w="9525" cap="flat" cmpd="sng" algn="ctr">
-                      <a:solidFill>
-                        <a:schemeClr val="bg1">
-                          <a:lumMod val="50000"/>
-                        </a:schemeClr>
-                      </a:solidFill>
-                      <a:prstDash val="solid"/>
-                      <a:round/>
-                      <a:headEnd type="none" w="med" len="med"/>
-                      <a:tailEnd type="none" w="med" len="med"/>
-                    </a:lnB>
-                    <a:noFill/>
-                  </a:tcPr>
-                </a:tc>
-                <a:tc>
-                  <a:txBody>
-                    <a:bodyPr/>
-                    <a:lstStyle/>
-                    <a:p>
-                      <a:pPr algn="l" fontAlgn="ctr">
-                        <a:buNone/>
-                      </a:pPr>
-                      <a:r>
-                        <a:rPr lang="ko-KR" altLang="en-US" sz="1000" b="0" i="0" u="none" strike="noStrike" dirty="0">
-                          <a:solidFill>
-                            <a:srgbClr val="000000"/>
-                          </a:solidFill>
-                          <a:effectLst/>
-                          <a:latin typeface="맑은 고딕" panose="020B0503020000020004" pitchFamily="34" charset="-127"/>
-                          <a:ea typeface="맑은 고딕" panose="020B0503020000020004" pitchFamily="34" charset="-127"/>
-                          <a:cs typeface="맑은 고딕"/>
-                        </a:rPr>
-                        <a:t>용어집의 배송 주기</a:t>
-                      </a:r>
-                    </a:p>
-                  </a:txBody>
-                  <a:tcPr marL="81005" marR="6750" marT="6750" marB="0" anchor="ctr">
-                    <a:lnL>
-                      <a:noFill/>
-                    </a:lnL>
-                    <a:lnR>
-                      <a:noFill/>
-                    </a:lnR>
-                    <a:lnT w="9525" cap="flat" cmpd="sng" algn="ctr">
-                      <a:solidFill>
-                        <a:schemeClr val="bg1">
-                          <a:lumMod val="50000"/>
-                        </a:schemeClr>
-                      </a:solidFill>
-                      <a:prstDash val="solid"/>
-                      <a:round/>
-                      <a:headEnd type="none" w="med" len="med"/>
-                      <a:tailEnd type="none" w="med" len="med"/>
-                    </a:lnT>
-                    <a:lnB w="9525" cap="flat" cmpd="sng" algn="ctr">
-                      <a:solidFill>
-                        <a:schemeClr val="bg1">
-                          <a:lumMod val="50000"/>
-                        </a:schemeClr>
-                      </a:solidFill>
-                      <a:prstDash val="solid"/>
-                      <a:round/>
-                      <a:headEnd type="none" w="med" len="med"/>
-                      <a:tailEnd type="none" w="med" len="med"/>
-                    </a:lnB>
-                    <a:solidFill>
-                      <a:srgbClr val="FFFFFF"/>
-                    </a:solidFill>
-                  </a:tcPr>
-                </a:tc>
-                <a:tc>
-                  <a:txBody>
-                    <a:bodyPr/>
-                    <a:lstStyle/>
-                    <a:p>
-                      <a:pPr algn="l" fontAlgn="ctr">
-                        <a:buNone/>
-                      </a:pPr>
-                      <a:r>
-                        <a:rPr lang="ko-KR" altLang="en-US" sz="1000" b="0" i="0" u="none" strike="noStrike" dirty="0">
-                          <a:solidFill>
-                            <a:srgbClr val="000000"/>
-                          </a:solidFill>
-                          <a:effectLst/>
-                          <a:latin typeface="맑은 고딕" panose="020B0503020000020004" pitchFamily="34" charset="-127"/>
-                          <a:ea typeface="맑은 고딕" panose="020B0503020000020004" pitchFamily="34" charset="-127"/>
-                          <a:cs typeface="맑은 고딕"/>
-                        </a:rPr>
-                        <a:t>LLM 심사</a:t>
-                      </a:r>
-                    </a:p>
-                  </a:txBody>
-                  <a:tcPr marL="81005" marR="6750" marT="6750" marB="0" anchor="ctr">
-                    <a:lnL>
-                      <a:noFill/>
-                    </a:lnL>
-                    <a:lnR>
-                      <a:noFill/>
-                    </a:lnR>
-                    <a:lnT w="9525" cap="flat" cmpd="sng" algn="ctr">
-                      <a:solidFill>
-                        <a:schemeClr val="bg1">
-                          <a:lumMod val="50000"/>
-                        </a:schemeClr>
-                      </a:solidFill>
-                      <a:prstDash val="solid"/>
-                      <a:round/>
-                      <a:headEnd type="none" w="med" len="med"/>
-                      <a:tailEnd type="none" w="med" len="med"/>
-                    </a:lnT>
-                    <a:lnB w="9525" cap="flat" cmpd="sng" algn="ctr">
-                      <a:solidFill>
-                        <a:schemeClr val="bg1">
-                          <a:lumMod val="50000"/>
-                        </a:schemeClr>
-                      </a:solidFill>
-                      <a:prstDash val="solid"/>
-                      <a:round/>
-                      <a:headEnd type="none" w="med" len="med"/>
-                      <a:tailEnd type="none" w="med" len="med"/>
-                    </a:lnB>
-                    <a:solidFill>
-                      <a:srgbClr val="FFFFFF"/>
-                    </a:solidFill>
-                  </a:tcPr>
-                </a:tc>
-                <a:tc>
-                  <a:txBody>
-                    <a:bodyPr/>
-                    <a:lstStyle/>
-                    <a:p>
-                      <a:pPr algn="l" fontAlgn="ctr">
-                        <a:buNone/>
-                      </a:pPr>
-                      <a:r>
-                        <a:rPr lang="ko-KR" altLang="en-US" sz="1000" b="0" i="0" u="none" strike="noStrike" dirty="0">
-                          <a:solidFill>
-                            <a:srgbClr val="000000"/>
-                          </a:solidFill>
-                          <a:effectLst/>
-                          <a:latin typeface="맑은 고딕" panose="020B0503020000020004" pitchFamily="34" charset="-127"/>
-                          <a:ea typeface="맑은 고딕" panose="020B0503020000020004" pitchFamily="34" charset="-127"/>
-                          <a:cs typeface="맑은 고딕"/>
-                        </a:rPr>
-                        <a:t>예정일 결정이 한 곳?</a:t>
-                      </a:r>
-                    </a:p>
-                  </a:txBody>
-                  <a:tcPr marL="81005" marR="6750" marT="6750" marB="0" anchor="ctr">
-                    <a:lnL>
-                      <a:noFill/>
-                    </a:lnL>
-                    <a:lnR>
-                      <a:noFill/>
-                    </a:lnR>
-                    <a:lnT w="9525" cap="flat" cmpd="sng" algn="ctr">
-                      <a:solidFill>
-                        <a:schemeClr val="bg1">
-                          <a:lumMod val="50000"/>
-                        </a:schemeClr>
-                      </a:solidFill>
-                      <a:prstDash val="solid"/>
-                      <a:round/>
-                      <a:headEnd type="none" w="med" len="med"/>
-                      <a:tailEnd type="none" w="med" len="med"/>
-                    </a:lnT>
-                    <a:lnB w="9525" cap="flat" cmpd="sng" algn="ctr">
-                      <a:solidFill>
-                        <a:schemeClr val="bg1">
-                          <a:lumMod val="50000"/>
-                        </a:schemeClr>
-                      </a:solidFill>
-                      <a:prstDash val="solid"/>
-                      <a:round/>
-                      <a:headEnd type="none" w="med" len="med"/>
-                      <a:tailEnd type="none" w="med" len="med"/>
-                    </a:lnB>
-                    <a:solidFill>
-                      <a:srgbClr val="FFFFFF"/>
-                    </a:solidFill>
-                  </a:tcPr>
-                </a:tc>
-              </a:tr>
-            </a:tbl>
-          </a:graphicData>
-        </a:graphic>
-      </p:graphicFrame>
-      <p:sp>
-        <p:nvSpPr>
-          <p:cNvPr id="13" name="TextBox 12">
-            <a:extLst>
-              <a:ext uri="{FF2B5EF4-FFF2-40B4-BE49-F238E27FC236}">
-                <a16:creationId xmlns:a16="http://schemas.microsoft.com/office/drawing/2014/main" id="{654EDDB4-901F-3D48-A715-17D163E8A7AC}"/>
-              </a:ext>
-            </a:extLst>
-          </p:cNvPr>
-          <p:cNvSpPr txBox="1"/>
-          <p:nvPr/>
-        </p:nvSpPr>
-        <p:spPr>
-          <a:xfrm>
-            <a:off x="365760" y="960120"/>
-            <a:ext cx="8412480" cy="781278"/>
-          </a:xfrm>
-          <a:prstGeom prst="rect">
-            <a:avLst/>
-          </a:prstGeom>
-          <a:noFill/>
-        </p:spPr>
-        <p:txBody>
-          <a:bodyPr wrap="square">
-            <a:spAutoFit/>
-          </a:bodyPr>
-          <a:lstStyle/>
-          <a:p>
-            <a:pPr marL="0" indent="0">
-              <a:spcBef>
-                <a:spcPts val="600"/>
-              </a:spcBef>
-              <a:spcAft>
-                <a:spcPts val="600"/>
-              </a:spcAft>
-              <a:buNone/>
-            </a:pPr>
-            <a:r>
-              <a:rPr sz="1800" b="0">
-                <a:solidFill>
-                  <a:srgbClr val="000000"/>
-                </a:solidFill>
-                <a:latin typeface="맑은 고딕"/>
-                <a:ea typeface="맑은 고딕"/>
-              </a:rPr>
-              <a:t>"신청한다"의 하네스도 가이드 셋과 센서 다섯이다. 센서 넷은 기계가 판정하고, </a:t>
-            </a:r>
-            <a:r>
-              <a:rPr sz="1800" b="1">
-                <a:solidFill>
-                  <a:srgbClr val="000000"/>
-                </a:solidFill>
-                <a:latin typeface="맑은 고딕"/>
-                <a:ea typeface="맑은 고딕"/>
-              </a:rPr>
-              <a:t>회차 생성의 LLM 심사</a:t>
-            </a:r>
-            <a:r>
-              <a:rPr sz="1800" b="0">
-                <a:solidFill>
-                  <a:srgbClr val="000000"/>
-                </a:solidFill>
-                <a:latin typeface="맑은 고딕"/>
-                <a:ea typeface="맑은 고딕"/>
-              </a:rPr>
-              <a:t> 하나만 추론적이다.</a:t>
-            </a:r>
-          </a:p>
-        </p:txBody>
-      </p:sp>
-      <p:sp>
-        <p:nvSpPr>
-          <p:cNvPr id="8" name="슬라이드 번호 개체 틀 2">
-            <a:extLst>
-              <a:ext uri="{FF2B5EF4-FFF2-40B4-BE49-F238E27FC236}">
-                <a16:creationId xmlns:a16="http://schemas.microsoft.com/office/drawing/2014/main" id="{741B75C6-7ED3-AA4C-41B6-F69C599EA447}"/>
-              </a:ext>
-            </a:extLst>
-          </p:cNvPr>
-          <p:cNvSpPr>
-            <a:spLocks noGrp="1"/>
-          </p:cNvSpPr>
-          <p:nvPr>
-            <p:ph type="sldNum" sz="quarter" idx="10"/>
-          </p:nvPr>
-        </p:nvSpPr>
-        <p:spPr>
-          <a:xfrm>
-            <a:off x="3508472" y="6449625"/>
-            <a:ext cx="2133600" cy="238277"/>
-          </a:xfrm>
-        </p:spPr>
-        <p:txBody>
-          <a:bodyPr>
-            <a:normAutofit/>
-          </a:bodyPr>
-          <a:lstStyle/>
-          <a:p>
-            <a:pPr marL="0" marR="0" lvl="0" indent="0" algn="ctr" defTabSz="457200" rtl="0" eaLnBrk="1" fontAlgn="auto" latinLnBrk="0" hangingPunct="1">
-              <a:lnSpc>
-                <a:spcPct val="100000"/>
-              </a:lnSpc>
-              <a:spcBef>
-                <a:spcPts val="0"/>
-              </a:spcBef>
-              <a:spcAft>
-                <a:spcPts val="600"/>
-              </a:spcAft>
-              <a:buClrTx/>
-              <a:buSzTx/>
-              <a:buFontTx/>
-              <a:buNone/>
-              <a:tabLst/>
-              <a:defRPr/>
-            </a:pPr>
-            <a:r>
-              <a:rPr kumimoji="0" lang="en-US" altLang="ko-KR" sz="800" b="0" i="0" u="none" strike="noStrike" kern="1200" cap="none" spc="0" normalizeH="0" baseline="0" noProof="0">
-                <a:ln>
-                  <a:noFill/>
-                </a:ln>
-                <a:solidFill>
-                  <a:prstClr val="black"/>
-                </a:solidFill>
-                <a:effectLst/>
-                <a:uLnTx/>
-                <a:uFillTx/>
-                <a:latin typeface="맑은 고딕" panose="020B0503020000020004" pitchFamily="34" charset="-127"/>
-                <a:ea typeface="맑은 고딕" panose="020B0503020000020004" pitchFamily="34" charset="-127"/>
-                <a:cs typeface="+mn-cs"/>
-              </a:rPr>
-              <a:t>- 24 -</a:t>
-            </a:r>
-          </a:p>
-        </p:txBody>
-      </p:sp>
-      <p:sp>
-        <p:nvSpPr>
-          <p:cNvPr id="14" name="TextBox 12">
-            <a:extLst>
-              <a:ext uri="{FF2B5EF4-FFF2-40B4-BE49-F238E27FC236}">
-                <a16:creationId xmlns:a16="http://schemas.microsoft.com/office/drawing/2014/main" id="{654EDDB4-901F-3D48-A715-17D163E8A7AC}"/>
-              </a:ext>
-            </a:extLst>
-          </p:cNvPr>
-          <p:cNvSpPr txBox="1"/>
-          <p:nvPr/>
-        </p:nvSpPr>
-        <p:spPr>
-          <a:xfrm>
-            <a:off x="365760" y="1813560"/>
-            <a:ext cx="8412480" cy="222250"/>
-          </a:xfrm>
-          <a:prstGeom prst="rect">
-            <a:avLst/>
-          </a:prstGeom>
-          <a:noFill/>
-        </p:spPr>
-        <p:txBody>
-          <a:bodyPr wrap="square" tIns="0" bIns="0">
-            <a:spAutoFit/>
-          </a:bodyPr>
-          <a:lstStyle/>
-          <a:p>
-            <a:pPr algn="ctr">
-              <a:spcBef>
-                <a:spcPts val="0"/>
-              </a:spcBef>
-              <a:spcAft>
-                <a:spcPts val="0"/>
-              </a:spcAft>
-            </a:pPr>
-            <a:r>
-              <a:rPr sz="1400" b="1">
-                <a:solidFill>
-                  <a:srgbClr val="000000"/>
-                </a:solidFill>
-                <a:latin typeface="맑은 고딕"/>
-                <a:ea typeface="맑은 고딕"/>
-              </a:rPr>
-              <a:t>"신청한다"의 가이드와 센서</a:t>
-            </a:r>
-          </a:p>
-        </p:txBody>
-      </p:sp>
-      <p:sp>
-        <p:nvSpPr>
-          <p:cNvPr id="15" name="TextBox 12">
-            <a:extLst>
-              <a:ext uri="{FF2B5EF4-FFF2-40B4-BE49-F238E27FC236}">
-                <a16:creationId xmlns:a16="http://schemas.microsoft.com/office/drawing/2014/main" id="{654EDDB4-901F-3D48-A715-17D163E8A7AC}"/>
-              </a:ext>
-            </a:extLst>
-          </p:cNvPr>
-          <p:cNvSpPr txBox="1"/>
-          <p:nvPr/>
-        </p:nvSpPr>
-        <p:spPr>
-          <a:xfrm>
-            <a:off x="365760" y="4068610"/>
-            <a:ext cx="8412480" cy="524240"/>
-          </a:xfrm>
-          <a:prstGeom prst="rect">
-            <a:avLst/>
-          </a:prstGeom>
-          <a:noFill/>
-        </p:spPr>
-        <p:txBody>
-          <a:bodyPr wrap="square">
-            <a:spAutoFit/>
-          </a:bodyPr>
-          <a:lstStyle/>
-          <a:p>
-            <a:pPr lvl="2" marL="723900" indent="-368300">
-              <a:spcBef>
-                <a:spcPts val="600"/>
-              </a:spcBef>
-              <a:spcAft>
-                <a:spcPts val="600"/>
-              </a:spcAft>
-              <a:buSzPct val="90000"/>
-              <a:buFont typeface="Wingdings" pitchFamily="2" charset="2"/>
-              <a:buChar char=""/>
-            </a:pPr>
-            <a:r>
-              <a:rPr sz="1800" b="1">
-                <a:solidFill>
-                  <a:srgbClr val="000000"/>
-                </a:solidFill>
-                <a:latin typeface="맑은 고딕"/>
-                <a:ea typeface="맑은 고딕"/>
-              </a:rPr>
-              <a:t>자리</a:t>
-            </a:r>
-            <a:r>
-              <a:rPr sz="1800" b="0">
-                <a:solidFill>
-                  <a:srgbClr val="000000"/>
-                </a:solidFill>
-                <a:latin typeface="맑은 고딕"/>
-                <a:ea typeface="맑은 고딕"/>
-              </a:rPr>
-              <a:t> —</a:t>
-            </a:r>
-            <a:r>
-              <a:rPr sz="1600" b="0">
-                <a:solidFill>
-                  <a:srgbClr val="000000"/>
-                </a:solidFill>
-                <a:latin typeface="맑은 고딕"/>
-                <a:ea typeface="맑은 고딕"/>
-              </a:rPr>
-              <a:t> 앞의 넷은 루프 안에서 돌리고, LLM 심사만 </a:t>
-            </a:r>
-            <a:r>
-              <a:rPr sz="1600" b="1">
-                <a:solidFill>
-                  <a:srgbClr val="000000"/>
-                </a:solidFill>
-                <a:latin typeface="맑은 고딕"/>
-                <a:ea typeface="맑은 고딕"/>
-              </a:rPr>
-              <a:t>병합 뒤</a:t>
-            </a:r>
-            <a:r>
-              <a:rPr sz="1600" b="0">
-                <a:solidFill>
-                  <a:srgbClr val="000000"/>
-                </a:solidFill>
-                <a:latin typeface="맑은 고딕"/>
-                <a:ea typeface="맑은 고딕"/>
-              </a:rPr>
-              <a:t>에 돌린다.</a:t>
-            </a:r>
-          </a:p>
-        </p:txBody>
-      </p:sp>
-    </p:spTree>
-    <p:extLst>
-      <p:ext uri="{BB962C8B-B14F-4D97-AF65-F5344CB8AC3E}">
-        <p14:creationId xmlns:p14="http://schemas.microsoft.com/office/powerpoint/2010/main" val="2789569477"/>
       </p:ext>
     </p:extLst>
   </p:cSld>
@@ -20345,7 +18808,7 @@
                 <a:latin typeface="맑은 고딕"/>
                 <a:ea typeface="맑은 고딕"/>
               </a:rPr>
-              <a:t>센서 실패 시 대응 </a:t>
+              <a:t>하네스 배치 </a:t>
             </a:r>
             <a:r>
               <a:rPr sz="1800" b="1">
@@ -20471,7 +18934,1885 @@
           </p:nvPr>
         </p:nvGraphicFramePr>
         <p:xfrm>
-          <a:off x="1076516" y="2112010"/>
+          <a:off x="1399096" y="2386330"/>
+          <a:ext cx="6332220" cy="3873500"/>
+        </p:xfrm>
+        <a:graphic>
+          <a:graphicData uri="http://schemas.openxmlformats.org/drawingml/2006/table">
+            <a:tbl>
+              <a:tblPr/>
+              <a:tblGrid>
+                <a:gridCol w="1450340"/>
+                <a:gridCol w="1813560"/>
+                <a:gridCol w="1310640"/>
+                <a:gridCol w="1757680"/>
+              </a:tblGrid>
+              <a:tr h="288000">
+                <a:tc>
+                  <a:txBody>
+                    <a:bodyPr/>
+                    <a:lstStyle/>
+                    <a:p>
+                      <a:pPr algn="ctr" fontAlgn="ctr">
+                        <a:buNone/>
+                      </a:pPr>
+                      <a:r>
+                        <a:rPr lang="ko-KR" altLang="en-US" sz="1000" b="1" i="0" u="none" strike="noStrike" dirty="0">
+                          <a:solidFill>
+                            <a:schemeClr val="bg1"/>
+                          </a:solidFill>
+                          <a:effectLst/>
+                          <a:latin typeface="맑은 고딕" panose="020B0503020000020004" pitchFamily="34" charset="-127"/>
+                          <a:ea typeface="맑은 고딕" panose="020B0503020000020004" pitchFamily="34" charset="-127"/>
+                          <a:cs typeface="맑은 고딕"/>
+                        </a:rPr>
+                        <a:t>지키려는 것</a:t>
+                      </a:r>
+                    </a:p>
+                  </a:txBody>
+                  <a:tcPr marL="6750" marR="6750" marT="6750" marB="0" anchor="ctr">
+                    <a:lnL>
+                      <a:noFill/>
+                    </a:lnL>
+                    <a:lnR w="9525" cap="flat" cmpd="sng" algn="ctr">
+                      <a:solidFill>
+                        <a:schemeClr val="bg1">
+                          <a:lumMod val="50000"/>
+                        </a:schemeClr>
+                      </a:solidFill>
+                      <a:prstDash val="solid"/>
+                      <a:round/>
+                      <a:headEnd type="none" w="med" len="med"/>
+                      <a:tailEnd type="none" w="med" len="med"/>
+                    </a:lnR>
+                    <a:lnT w="9525" cap="flat" cmpd="sng" algn="ctr">
+                      <a:solidFill>
+                        <a:schemeClr val="tx1"/>
+                      </a:solidFill>
+                      <a:prstDash val="solid"/>
+                      <a:round/>
+                      <a:headEnd type="none" w="med" len="med"/>
+                      <a:tailEnd type="none" w="med" len="med"/>
+                    </a:lnT>
+                    <a:lnB w="9525" cap="flat" cmpd="sng" algn="ctr">
+                      <a:solidFill>
+                        <a:schemeClr val="bg1">
+                          <a:lumMod val="50000"/>
+                        </a:schemeClr>
+                      </a:solidFill>
+                      <a:prstDash val="solid"/>
+                      <a:round/>
+                      <a:headEnd type="none" w="med" len="med"/>
+                      <a:tailEnd type="none" w="med" len="med"/>
+                    </a:lnB>
+                    <a:solidFill>
+                      <a:srgbClr val="002060"/>
+                    </a:solidFill>
+                  </a:tcPr>
+                </a:tc>
+                <a:tc>
+                  <a:txBody>
+                    <a:bodyPr/>
+                    <a:lstStyle/>
+                    <a:p>
+                      <a:pPr algn="ctr" fontAlgn="ctr">
+                        <a:buNone/>
+                      </a:pPr>
+                      <a:r>
+                        <a:rPr lang="ko-KR" altLang="en-US" sz="1000" b="1" i="0" u="none" strike="noStrike" dirty="0">
+                          <a:solidFill>
+                            <a:schemeClr val="bg1"/>
+                          </a:solidFill>
+                          <a:effectLst/>
+                          <a:latin typeface="맑은 고딕" panose="020B0503020000020004" pitchFamily="34" charset="-127"/>
+                          <a:ea typeface="맑은 고딕" panose="020B0503020000020004" pitchFamily="34" charset="-127"/>
+                          <a:cs typeface="맑은 고딕"/>
+                        </a:rPr>
+                        <a:t>가이드</a:t>
+                      </a:r>
+                    </a:p>
+                  </a:txBody>
+                  <a:tcPr marL="6750" marR="6750" marT="6750" marB="0" anchor="ctr">
+                    <a:lnL w="9525" cap="flat" cmpd="sng" algn="ctr">
+                      <a:solidFill>
+                        <a:schemeClr val="bg1">
+                          <a:lumMod val="50000"/>
+                        </a:schemeClr>
+                      </a:solidFill>
+                      <a:prstDash val="solid"/>
+                      <a:round/>
+                      <a:headEnd type="none" w="med" len="med"/>
+                      <a:tailEnd type="none" w="med" len="med"/>
+                    </a:lnL>
+                    <a:lnR w="9525" cap="flat" cmpd="sng" algn="ctr">
+                      <a:solidFill>
+                        <a:schemeClr val="bg1">
+                          <a:lumMod val="50000"/>
+                        </a:schemeClr>
+                      </a:solidFill>
+                      <a:prstDash val="solid"/>
+                      <a:round/>
+                      <a:headEnd type="none" w="med" len="med"/>
+                      <a:tailEnd type="none" w="med" len="med"/>
+                    </a:lnR>
+                    <a:lnT w="9525" cap="flat" cmpd="sng" algn="ctr">
+                      <a:solidFill>
+                        <a:schemeClr val="tx1"/>
+                      </a:solidFill>
+                      <a:prstDash val="solid"/>
+                      <a:round/>
+                      <a:headEnd type="none" w="med" len="med"/>
+                      <a:tailEnd type="none" w="med" len="med"/>
+                    </a:lnT>
+                    <a:lnB w="9525" cap="flat" cmpd="sng" algn="ctr">
+                      <a:solidFill>
+                        <a:schemeClr val="bg1">
+                          <a:lumMod val="50000"/>
+                        </a:schemeClr>
+                      </a:solidFill>
+                      <a:prstDash val="solid"/>
+                      <a:round/>
+                      <a:headEnd type="none" w="med" len="med"/>
+                      <a:tailEnd type="none" w="med" len="med"/>
+                    </a:lnB>
+                    <a:solidFill>
+                      <a:srgbClr val="002060"/>
+                    </a:solidFill>
+                  </a:tcPr>
+                </a:tc>
+                <a:tc>
+                  <a:txBody>
+                    <a:bodyPr/>
+                    <a:lstStyle/>
+                    <a:p>
+                      <a:pPr algn="ctr" fontAlgn="ctr">
+                        <a:buNone/>
+                      </a:pPr>
+                      <a:r>
+                        <a:rPr lang="ko-KR" altLang="en-US" sz="1000" b="1" i="0" u="none" strike="noStrike" dirty="0" err="1">
+                          <a:solidFill>
+                            <a:schemeClr val="bg1"/>
+                          </a:solidFill>
+                          <a:effectLst/>
+                          <a:latin typeface="맑은 고딕" panose="020B0503020000020004" pitchFamily="34" charset="-127"/>
+                          <a:ea typeface="맑은 고딕" panose="020B0503020000020004" pitchFamily="34" charset="-127"/>
+                          <a:cs typeface="맑은 고딕"/>
+                        </a:rPr>
+                        <a:t>센서</a:t>
+                      </a:r>
+                    </a:p>
+                  </a:txBody>
+                  <a:tcPr marL="6750" marR="6750" marT="6750" marB="0" anchor="ctr">
+                    <a:lnL w="9525" cap="flat" cmpd="sng" algn="ctr">
+                      <a:solidFill>
+                        <a:schemeClr val="bg1">
+                          <a:lumMod val="50000"/>
+                        </a:schemeClr>
+                      </a:solidFill>
+                      <a:prstDash val="solid"/>
+                      <a:round/>
+                      <a:headEnd type="none" w="med" len="med"/>
+                      <a:tailEnd type="none" w="med" len="med"/>
+                    </a:lnL>
+                    <a:lnR w="9525" cap="flat" cmpd="sng" algn="ctr">
+                      <a:solidFill>
+                        <a:schemeClr val="bg1">
+                          <a:lumMod val="50000"/>
+                        </a:schemeClr>
+                      </a:solidFill>
+                      <a:prstDash val="solid"/>
+                      <a:round/>
+                      <a:headEnd type="none" w="med" len="med"/>
+                      <a:tailEnd type="none" w="med" len="med"/>
+                    </a:lnR>
+                    <a:lnT w="9525" cap="flat" cmpd="sng" algn="ctr">
+                      <a:solidFill>
+                        <a:schemeClr val="tx1"/>
+                      </a:solidFill>
+                      <a:prstDash val="solid"/>
+                      <a:round/>
+                      <a:headEnd type="none" w="med" len="med"/>
+                      <a:tailEnd type="none" w="med" len="med"/>
+                    </a:lnT>
+                    <a:lnB w="9525" cap="flat" cmpd="sng" algn="ctr">
+                      <a:solidFill>
+                        <a:schemeClr val="bg1">
+                          <a:lumMod val="50000"/>
+                        </a:schemeClr>
+                      </a:solidFill>
+                      <a:prstDash val="solid"/>
+                      <a:round/>
+                      <a:headEnd type="none" w="med" len="med"/>
+                      <a:tailEnd type="none" w="med" len="med"/>
+                    </a:lnB>
+                    <a:solidFill>
+                      <a:srgbClr val="002060"/>
+                    </a:solidFill>
+                  </a:tcPr>
+                </a:tc>
+                <a:tc>
+                  <a:txBody>
+                    <a:bodyPr/>
+                    <a:lstStyle/>
+                    <a:p>
+                      <a:pPr algn="ctr" fontAlgn="ctr">
+                        <a:buNone/>
+                      </a:pPr>
+                      <a:r>
+                        <a:rPr lang="ko-KR" altLang="en-US" sz="1000" b="1" i="0" u="none" strike="noStrike" dirty="0" err="1">
+                          <a:solidFill>
+                            <a:schemeClr val="bg1"/>
+                          </a:solidFill>
+                          <a:effectLst/>
+                          <a:latin typeface="맑은 고딕" panose="020B0503020000020004" pitchFamily="34" charset="-127"/>
+                          <a:ea typeface="맑은 고딕" panose="020B0503020000020004" pitchFamily="34" charset="-127"/>
+                          <a:cs typeface="맑은 고딕"/>
+                        </a:rPr>
+                        <a:t>판정</a:t>
+                      </a:r>
+                    </a:p>
+                  </a:txBody>
+                  <a:tcPr marL="6750" marR="6750" marT="6750" marB="0" anchor="ctr">
+                    <a:lnL w="9525" cap="flat" cmpd="sng" algn="ctr">
+                      <a:solidFill>
+                        <a:schemeClr val="bg1">
+                          <a:lumMod val="50000"/>
+                        </a:schemeClr>
+                      </a:solidFill>
+                      <a:prstDash val="solid"/>
+                      <a:round/>
+                      <a:headEnd type="none" w="med" len="med"/>
+                      <a:tailEnd type="none" w="med" len="med"/>
+                    </a:lnL>
+                    <a:lnR w="9525" cap="flat" cmpd="sng" algn="ctr">
+                      <a:solidFill>
+                        <a:schemeClr val="bg1">
+                          <a:lumMod val="50000"/>
+                        </a:schemeClr>
+                      </a:solidFill>
+                      <a:prstDash val="solid"/>
+                      <a:round/>
+                      <a:headEnd type="none" w="med" len="med"/>
+                      <a:tailEnd type="none" w="med" len="med"/>
+                    </a:lnR>
+                    <a:lnT w="9525" cap="flat" cmpd="sng" algn="ctr">
+                      <a:solidFill>
+                        <a:schemeClr val="tx1"/>
+                      </a:solidFill>
+                      <a:prstDash val="solid"/>
+                      <a:round/>
+                      <a:headEnd type="none" w="med" len="med"/>
+                      <a:tailEnd type="none" w="med" len="med"/>
+                    </a:lnT>
+                    <a:lnB w="9525" cap="flat" cmpd="sng" algn="ctr">
+                      <a:solidFill>
+                        <a:schemeClr val="bg1">
+                          <a:lumMod val="50000"/>
+                        </a:schemeClr>
+                      </a:solidFill>
+                      <a:prstDash val="solid"/>
+                      <a:round/>
+                      <a:headEnd type="none" w="med" len="med"/>
+                      <a:tailEnd type="none" w="med" len="med"/>
+                    </a:lnB>
+                    <a:solidFill>
+                      <a:srgbClr val="002060"/>
+                    </a:solidFill>
+                  </a:tcPr>
+                </a:tc>
+              </a:tr>
+              <a:tr h="288000">
+                <a:tc>
+                  <a:txBody>
+                    <a:bodyPr/>
+                    <a:lstStyle/>
+                    <a:p>
+                      <a:pPr algn="l" fontAlgn="ctr">
+                        <a:buNone/>
+                      </a:pPr>
+                      <a:r>
+                        <a:rPr lang="en" sz="1000" b="1" i="0" u="none" strike="noStrike" dirty="0">
+                          <a:solidFill>
+                            <a:schemeClr val="tx1"/>
+                          </a:solidFill>
+                          <a:effectLst/>
+                          <a:latin typeface="맑은 고딕" panose="020B0503020000020004" pitchFamily="34" charset="-127"/>
+                          <a:ea typeface="맑은 고딕" panose="020B0503020000020004" pitchFamily="34" charset="-127"/>
+                          <a:cs typeface="맑은 고딕"/>
+                        </a:rPr>
+                        <a:t>회차와 금액</a:t>
+                      </a:r>
+                    </a:p>
+                  </a:txBody>
+                  <a:tcPr marL="81005" marR="6750" marT="6750" marB="0" anchor="ctr">
+                    <a:lnL>
+                      <a:noFill/>
+                    </a:lnL>
+                    <a:lnR>
+                      <a:noFill/>
+                    </a:lnR>
+                    <a:lnT w="9525" cap="flat" cmpd="sng" algn="ctr">
+                      <a:solidFill>
+                        <a:schemeClr val="bg1">
+                          <a:lumMod val="50000"/>
+                        </a:schemeClr>
+                      </a:solidFill>
+                      <a:prstDash val="solid"/>
+                      <a:round/>
+                      <a:headEnd type="none" w="med" len="med"/>
+                      <a:tailEnd type="none" w="med" len="med"/>
+                    </a:lnT>
+                    <a:lnB w="9525" cap="flat" cmpd="sng" algn="ctr">
+                      <a:solidFill>
+                        <a:schemeClr val="bg1">
+                          <a:lumMod val="50000"/>
+                        </a:schemeClr>
+                      </a:solidFill>
+                      <a:prstDash val="solid"/>
+                      <a:round/>
+                      <a:headEnd type="none" w="med" len="med"/>
+                      <a:tailEnd type="none" w="med" len="med"/>
+                    </a:lnB>
+                    <a:noFill/>
+                  </a:tcPr>
+                </a:tc>
+                <a:tc>
+                  <a:txBody>
+                    <a:bodyPr/>
+                    <a:lstStyle/>
+                    <a:p>
+                      <a:pPr algn="l" fontAlgn="ctr">
+                        <a:buNone/>
+                      </a:pPr>
+                      <a:r>
+                        <a:rPr lang="ko-KR" altLang="en-US" sz="1000" b="0" i="0" u="none" strike="noStrike" dirty="0">
+                          <a:solidFill>
+                            <a:srgbClr val="000000"/>
+                          </a:solidFill>
+                          <a:effectLst/>
+                          <a:latin typeface="맑은 고딕" panose="020B0503020000020004" pitchFamily="34" charset="-127"/>
+                          <a:ea typeface="맑은 고딕" panose="020B0503020000020004" pitchFamily="34" charset="-127"/>
+                          <a:cs typeface="맑은 고딕"/>
+                        </a:rPr>
+                        <a:t>작업 명세서의 예</a:t>
+                      </a:r>
+                    </a:p>
+                  </a:txBody>
+                  <a:tcPr marL="81005" marR="6750" marT="6750" marB="0" anchor="ctr">
+                    <a:lnL>
+                      <a:noFill/>
+                    </a:lnL>
+                    <a:lnR>
+                      <a:noFill/>
+                    </a:lnR>
+                    <a:lnT w="9525" cap="flat" cmpd="sng" algn="ctr">
+                      <a:solidFill>
+                        <a:schemeClr val="bg1">
+                          <a:lumMod val="50000"/>
+                        </a:schemeClr>
+                      </a:solidFill>
+                      <a:prstDash val="solid"/>
+                      <a:round/>
+                      <a:headEnd type="none" w="med" len="med"/>
+                      <a:tailEnd type="none" w="med" len="med"/>
+                    </a:lnT>
+                    <a:lnB w="9525" cap="flat" cmpd="sng" algn="ctr">
+                      <a:solidFill>
+                        <a:schemeClr val="bg1">
+                          <a:lumMod val="50000"/>
+                        </a:schemeClr>
+                      </a:solidFill>
+                      <a:prstDash val="solid"/>
+                      <a:round/>
+                      <a:headEnd type="none" w="med" len="med"/>
+                      <a:tailEnd type="none" w="med" len="med"/>
+                    </a:lnB>
+                    <a:solidFill>
+                      <a:srgbClr val="FFFFFF"/>
+                    </a:solidFill>
+                  </a:tcPr>
+                </a:tc>
+                <a:tc>
+                  <a:txBody>
+                    <a:bodyPr/>
+                    <a:lstStyle/>
+                    <a:p>
+                      <a:pPr algn="l" fontAlgn="ctr">
+                        <a:buNone/>
+                      </a:pPr>
+                      <a:r>
+                        <a:rPr lang="ko-KR" altLang="en-US" sz="1000" b="0" i="0" u="none" strike="noStrike" dirty="0">
+                          <a:solidFill>
+                            <a:srgbClr val="000000"/>
+                          </a:solidFill>
+                          <a:effectLst/>
+                          <a:latin typeface="맑은 고딕" panose="020B0503020000020004" pitchFamily="34" charset="-127"/>
+                          <a:ea typeface="맑은 고딕" panose="020B0503020000020004" pitchFamily="34" charset="-127"/>
+                          <a:cs typeface="맑은 고딕"/>
+                        </a:rPr>
+                        <a:t>수용 테스트</a:t>
+                      </a:r>
+                    </a:p>
+                  </a:txBody>
+                  <a:tcPr marL="81005" marR="6750" marT="6750" marB="0" anchor="ctr">
+                    <a:lnL>
+                      <a:noFill/>
+                    </a:lnL>
+                    <a:lnR>
+                      <a:noFill/>
+                    </a:lnR>
+                    <a:lnT w="9525" cap="flat" cmpd="sng" algn="ctr">
+                      <a:solidFill>
+                        <a:schemeClr val="bg1">
+                          <a:lumMod val="50000"/>
+                        </a:schemeClr>
+                      </a:solidFill>
+                      <a:prstDash val="solid"/>
+                      <a:round/>
+                      <a:headEnd type="none" w="med" len="med"/>
+                      <a:tailEnd type="none" w="med" len="med"/>
+                    </a:lnT>
+                    <a:lnB w="9525" cap="flat" cmpd="sng" algn="ctr">
+                      <a:solidFill>
+                        <a:schemeClr val="bg1">
+                          <a:lumMod val="50000"/>
+                        </a:schemeClr>
+                      </a:solidFill>
+                      <a:prstDash val="solid"/>
+                      <a:round/>
+                      <a:headEnd type="none" w="med" len="med"/>
+                      <a:tailEnd type="none" w="med" len="med"/>
+                    </a:lnB>
+                    <a:solidFill>
+                      <a:srgbClr val="FFFFFF"/>
+                    </a:solidFill>
+                  </a:tcPr>
+                </a:tc>
+                <a:tc>
+                  <a:txBody>
+                    <a:bodyPr/>
+                    <a:lstStyle/>
+                    <a:p>
+                      <a:pPr algn="l" fontAlgn="ctr">
+                        <a:buNone/>
+                      </a:pPr>
+                      <a:r>
+                        <a:rPr lang="ko-KR" altLang="en-US" sz="1000" b="0" i="0" u="none" strike="noStrike" dirty="0">
+                          <a:solidFill>
+                            <a:srgbClr val="000000"/>
+                          </a:solidFill>
+                          <a:effectLst/>
+                          <a:latin typeface="맑은 고딕" panose="020B0503020000020004" pitchFamily="34" charset="-127"/>
+                          <a:ea typeface="맑은 고딕" panose="020B0503020000020004" pitchFamily="34" charset="-127"/>
+                          <a:cs typeface="맑은 고딕"/>
+                        </a:rPr>
+                        <a:t>회차 7개·2월 2일?</a:t>
+                      </a:r>
+                    </a:p>
+                  </a:txBody>
+                  <a:tcPr marL="81005" marR="6750" marT="6750" marB="0" anchor="ctr">
+                    <a:lnL>
+                      <a:noFill/>
+                    </a:lnL>
+                    <a:lnR>
+                      <a:noFill/>
+                    </a:lnR>
+                    <a:lnT w="9525" cap="flat" cmpd="sng" algn="ctr">
+                      <a:solidFill>
+                        <a:schemeClr val="bg1">
+                          <a:lumMod val="50000"/>
+                        </a:schemeClr>
+                      </a:solidFill>
+                      <a:prstDash val="solid"/>
+                      <a:round/>
+                      <a:headEnd type="none" w="med" len="med"/>
+                      <a:tailEnd type="none" w="med" len="med"/>
+                    </a:lnT>
+                    <a:lnB w="9525" cap="flat" cmpd="sng" algn="ctr">
+                      <a:solidFill>
+                        <a:schemeClr val="bg1">
+                          <a:lumMod val="50000"/>
+                        </a:schemeClr>
+                      </a:solidFill>
+                      <a:prstDash val="solid"/>
+                      <a:round/>
+                      <a:headEnd type="none" w="med" len="med"/>
+                      <a:tailEnd type="none" w="med" len="med"/>
+                    </a:lnB>
+                    <a:solidFill>
+                      <a:srgbClr val="FFFFFF"/>
+                    </a:solidFill>
+                  </a:tcPr>
+                </a:tc>
+              </a:tr>
+              <a:tr h="288000">
+                <a:tc>
+                  <a:txBody>
+                    <a:bodyPr/>
+                    <a:lstStyle/>
+                    <a:p>
+                      <a:pPr algn="l" fontAlgn="ctr">
+                        <a:buNone/>
+                      </a:pPr>
+                      <a:r>
+                        <a:rPr lang="en" sz="1000" b="1" i="0" u="none" strike="noStrike" dirty="0">
+                          <a:solidFill>
+                            <a:schemeClr val="tx1"/>
+                          </a:solidFill>
+                          <a:effectLst/>
+                          <a:latin typeface="맑은 고딕" panose="020B0503020000020004" pitchFamily="34" charset="-127"/>
+                          <a:ea typeface="맑은 고딕" panose="020B0503020000020004" pitchFamily="34" charset="-127"/>
+                          <a:cs typeface="맑은 고딕"/>
+                        </a:rPr>
+                        <a:t>결제 거절</a:t>
+                      </a:r>
+                    </a:p>
+                  </a:txBody>
+                  <a:tcPr marL="81005" marR="6750" marT="6750" marB="0" anchor="ctr">
+                    <a:lnL>
+                      <a:noFill/>
+                    </a:lnL>
+                    <a:lnR>
+                      <a:noFill/>
+                    </a:lnR>
+                    <a:lnT w="9525" cap="flat" cmpd="sng" algn="ctr">
+                      <a:solidFill>
+                        <a:schemeClr val="bg1">
+                          <a:lumMod val="50000"/>
+                        </a:schemeClr>
+                      </a:solidFill>
+                      <a:prstDash val="solid"/>
+                      <a:round/>
+                      <a:headEnd type="none" w="med" len="med"/>
+                      <a:tailEnd type="none" w="med" len="med"/>
+                    </a:lnT>
+                    <a:lnB w="9525" cap="flat" cmpd="sng" algn="ctr">
+                      <a:solidFill>
+                        <a:schemeClr val="bg1">
+                          <a:lumMod val="50000"/>
+                        </a:schemeClr>
+                      </a:solidFill>
+                      <a:prstDash val="solid"/>
+                      <a:round/>
+                      <a:headEnd type="none" w="med" len="med"/>
+                      <a:tailEnd type="none" w="med" len="med"/>
+                    </a:lnB>
+                    <a:noFill/>
+                  </a:tcPr>
+                </a:tc>
+                <a:tc>
+                  <a:txBody>
+                    <a:bodyPr/>
+                    <a:lstStyle/>
+                    <a:p>
+                      <a:pPr algn="l" fontAlgn="ctr">
+                        <a:buNone/>
+                      </a:pPr>
+                      <a:r>
+                        <a:rPr lang="ko-KR" altLang="en-US" sz="1000" b="0" i="0" u="none" strike="noStrike" dirty="0">
+                          <a:solidFill>
+                            <a:srgbClr val="000000"/>
+                          </a:solidFill>
+                          <a:effectLst/>
+                          <a:latin typeface="맑은 고딕" panose="020B0503020000020004" pitchFamily="34" charset="-127"/>
+                          <a:ea typeface="맑은 고딕" panose="020B0503020000020004" pitchFamily="34" charset="-127"/>
+                          <a:cs typeface="맑은 고딕"/>
+                        </a:rPr>
+                        <a:t>수용 기준의 거절 예시</a:t>
+                      </a:r>
+                    </a:p>
+                  </a:txBody>
+                  <a:tcPr marL="81005" marR="6750" marT="6750" marB="0" anchor="ctr">
+                    <a:lnL>
+                      <a:noFill/>
+                    </a:lnL>
+                    <a:lnR>
+                      <a:noFill/>
+                    </a:lnR>
+                    <a:lnT w="9525" cap="flat" cmpd="sng" algn="ctr">
+                      <a:solidFill>
+                        <a:schemeClr val="bg1">
+                          <a:lumMod val="50000"/>
+                        </a:schemeClr>
+                      </a:solidFill>
+                      <a:prstDash val="solid"/>
+                      <a:round/>
+                      <a:headEnd type="none" w="med" len="med"/>
+                      <a:tailEnd type="none" w="med" len="med"/>
+                    </a:lnT>
+                    <a:lnB w="9525" cap="flat" cmpd="sng" algn="ctr">
+                      <a:solidFill>
+                        <a:schemeClr val="bg1">
+                          <a:lumMod val="50000"/>
+                        </a:schemeClr>
+                      </a:solidFill>
+                      <a:prstDash val="solid"/>
+                      <a:round/>
+                      <a:headEnd type="none" w="med" len="med"/>
+                      <a:tailEnd type="none" w="med" len="med"/>
+                    </a:lnB>
+                    <a:solidFill>
+                      <a:srgbClr val="FFFFFF"/>
+                    </a:solidFill>
+                  </a:tcPr>
+                </a:tc>
+                <a:tc>
+                  <a:txBody>
+                    <a:bodyPr/>
+                    <a:lstStyle/>
+                    <a:p>
+                      <a:pPr algn="l" fontAlgn="ctr">
+                        <a:buNone/>
+                      </a:pPr>
+                      <a:r>
+                        <a:rPr lang="ko-KR" altLang="en-US" sz="1000" b="0" i="0" u="none" strike="noStrike" dirty="0">
+                          <a:solidFill>
+                            <a:srgbClr val="000000"/>
+                          </a:solidFill>
+                          <a:effectLst/>
+                          <a:latin typeface="맑은 고딕" panose="020B0503020000020004" pitchFamily="34" charset="-127"/>
+                          <a:ea typeface="맑은 고딕" panose="020B0503020000020004" pitchFamily="34" charset="-127"/>
+                          <a:cs typeface="맑은 고딕"/>
+                        </a:rPr>
+                        <a:t>수용 테스트</a:t>
+                      </a:r>
+                    </a:p>
+                  </a:txBody>
+                  <a:tcPr marL="81005" marR="6750" marT="6750" marB="0" anchor="ctr">
+                    <a:lnL>
+                      <a:noFill/>
+                    </a:lnL>
+                    <a:lnR>
+                      <a:noFill/>
+                    </a:lnR>
+                    <a:lnT w="9525" cap="flat" cmpd="sng" algn="ctr">
+                      <a:solidFill>
+                        <a:schemeClr val="bg1">
+                          <a:lumMod val="50000"/>
+                        </a:schemeClr>
+                      </a:solidFill>
+                      <a:prstDash val="solid"/>
+                      <a:round/>
+                      <a:headEnd type="none" w="med" len="med"/>
+                      <a:tailEnd type="none" w="med" len="med"/>
+                    </a:lnT>
+                    <a:lnB w="9525" cap="flat" cmpd="sng" algn="ctr">
+                      <a:solidFill>
+                        <a:schemeClr val="bg1">
+                          <a:lumMod val="50000"/>
+                        </a:schemeClr>
+                      </a:solidFill>
+                      <a:prstDash val="solid"/>
+                      <a:round/>
+                      <a:headEnd type="none" w="med" len="med"/>
+                      <a:tailEnd type="none" w="med" len="med"/>
+                    </a:lnB>
+                    <a:solidFill>
+                      <a:srgbClr val="FFFFFF"/>
+                    </a:solidFill>
+                  </a:tcPr>
+                </a:tc>
+                <a:tc>
+                  <a:txBody>
+                    <a:bodyPr/>
+                    <a:lstStyle/>
+                    <a:p>
+                      <a:pPr algn="l" fontAlgn="ctr">
+                        <a:buNone/>
+                      </a:pPr>
+                      <a:r>
+                        <a:rPr lang="ko-KR" altLang="en-US" sz="1000" b="0" i="0" u="none" strike="noStrike" dirty="0">
+                          <a:solidFill>
+                            <a:srgbClr val="000000"/>
+                          </a:solidFill>
+                          <a:effectLst/>
+                          <a:latin typeface="맑은 고딕" panose="020B0503020000020004" pitchFamily="34" charset="-127"/>
+                          <a:ea typeface="맑은 고딕" panose="020B0503020000020004" pitchFamily="34" charset="-127"/>
+                          <a:cs typeface="맑은 고딕"/>
+                        </a:rPr>
+                        <a:t>결제 대기 유지?</a:t>
+                      </a:r>
+                    </a:p>
+                  </a:txBody>
+                  <a:tcPr marL="81005" marR="6750" marT="6750" marB="0" anchor="ctr">
+                    <a:lnL>
+                      <a:noFill/>
+                    </a:lnL>
+                    <a:lnR>
+                      <a:noFill/>
+                    </a:lnR>
+                    <a:lnT w="9525" cap="flat" cmpd="sng" algn="ctr">
+                      <a:solidFill>
+                        <a:schemeClr val="bg1">
+                          <a:lumMod val="50000"/>
+                        </a:schemeClr>
+                      </a:solidFill>
+                      <a:prstDash val="solid"/>
+                      <a:round/>
+                      <a:headEnd type="none" w="med" len="med"/>
+                      <a:tailEnd type="none" w="med" len="med"/>
+                    </a:lnT>
+                    <a:lnB w="9525" cap="flat" cmpd="sng" algn="ctr">
+                      <a:solidFill>
+                        <a:schemeClr val="bg1">
+                          <a:lumMod val="50000"/>
+                        </a:schemeClr>
+                      </a:solidFill>
+                      <a:prstDash val="solid"/>
+                      <a:round/>
+                      <a:headEnd type="none" w="med" len="med"/>
+                      <a:tailEnd type="none" w="med" len="med"/>
+                    </a:lnB>
+                    <a:solidFill>
+                      <a:srgbClr val="FFFFFF"/>
+                    </a:solidFill>
+                  </a:tcPr>
+                </a:tc>
+              </a:tr>
+              <a:tr h="288000">
+                <a:tc>
+                  <a:txBody>
+                    <a:bodyPr/>
+                    <a:lstStyle/>
+                    <a:p>
+                      <a:pPr algn="l" fontAlgn="ctr">
+                        <a:buNone/>
+                      </a:pPr>
+                      <a:r>
+                        <a:rPr lang="en" sz="1000" b="1" i="0" u="none" strike="noStrike" dirty="0">
+                          <a:solidFill>
+                            <a:schemeClr val="tx1"/>
+                          </a:solidFill>
+                          <a:effectLst/>
+                          <a:latin typeface="맑은 고딕" panose="020B0503020000020004" pitchFamily="34" charset="-127"/>
+                          <a:ea typeface="맑은 고딕" panose="020B0503020000020004" pitchFamily="34" charset="-127"/>
+                          <a:cs typeface="맑은 고딕"/>
+                        </a:rPr>
+                        <a:t>설계의 경계</a:t>
+                      </a:r>
+                    </a:p>
+                  </a:txBody>
+                  <a:tcPr marL="81005" marR="6750" marT="6750" marB="0" anchor="ctr">
+                    <a:lnL>
+                      <a:noFill/>
+                    </a:lnL>
+                    <a:lnR>
+                      <a:noFill/>
+                    </a:lnR>
+                    <a:lnT w="9525" cap="flat" cmpd="sng" algn="ctr">
+                      <a:solidFill>
+                        <a:schemeClr val="bg1">
+                          <a:lumMod val="50000"/>
+                        </a:schemeClr>
+                      </a:solidFill>
+                      <a:prstDash val="solid"/>
+                      <a:round/>
+                      <a:headEnd type="none" w="med" len="med"/>
+                      <a:tailEnd type="none" w="med" len="med"/>
+                    </a:lnT>
+                    <a:lnB w="9525" cap="flat" cmpd="sng" algn="ctr">
+                      <a:solidFill>
+                        <a:schemeClr val="bg1">
+                          <a:lumMod val="50000"/>
+                        </a:schemeClr>
+                      </a:solidFill>
+                      <a:prstDash val="solid"/>
+                      <a:round/>
+                      <a:headEnd type="none" w="med" len="med"/>
+                      <a:tailEnd type="none" w="med" len="med"/>
+                    </a:lnB>
+                    <a:noFill/>
+                  </a:tcPr>
+                </a:tc>
+                <a:tc>
+                  <a:txBody>
+                    <a:bodyPr/>
+                    <a:lstStyle/>
+                    <a:p>
+                      <a:pPr algn="l" fontAlgn="ctr">
+                        <a:buNone/>
+                      </a:pPr>
+                      <a:r>
+                        <a:rPr lang="ko-KR" altLang="en-US" sz="1000" b="0" i="0" u="none" strike="noStrike" dirty="0">
+                          <a:solidFill>
+                            <a:srgbClr val="000000"/>
+                          </a:solidFill>
+                          <a:effectLst/>
+                          <a:latin typeface="맑은 고딕" panose="020B0503020000020004" pitchFamily="34" charset="-127"/>
+                          <a:ea typeface="맑은 고딕" panose="020B0503020000020004" pitchFamily="34" charset="-127"/>
+                          <a:cs typeface="맑은 고딕"/>
+                        </a:rPr>
+                        <a:t>맥락 파일의 의존 규칙</a:t>
+                      </a:r>
+                    </a:p>
+                  </a:txBody>
+                  <a:tcPr marL="81005" marR="6750" marT="6750" marB="0" anchor="ctr">
+                    <a:lnL>
+                      <a:noFill/>
+                    </a:lnL>
+                    <a:lnR>
+                      <a:noFill/>
+                    </a:lnR>
+                    <a:lnT w="9525" cap="flat" cmpd="sng" algn="ctr">
+                      <a:solidFill>
+                        <a:schemeClr val="bg1">
+                          <a:lumMod val="50000"/>
+                        </a:schemeClr>
+                      </a:solidFill>
+                      <a:prstDash val="solid"/>
+                      <a:round/>
+                      <a:headEnd type="none" w="med" len="med"/>
+                      <a:tailEnd type="none" w="med" len="med"/>
+                    </a:lnT>
+                    <a:lnB w="9525" cap="flat" cmpd="sng" algn="ctr">
+                      <a:solidFill>
+                        <a:schemeClr val="bg1">
+                          <a:lumMod val="50000"/>
+                        </a:schemeClr>
+                      </a:solidFill>
+                      <a:prstDash val="solid"/>
+                      <a:round/>
+                      <a:headEnd type="none" w="med" len="med"/>
+                      <a:tailEnd type="none" w="med" len="med"/>
+                    </a:lnB>
+                    <a:solidFill>
+                      <a:srgbClr val="FFFFFF"/>
+                    </a:solidFill>
+                  </a:tcPr>
+                </a:tc>
+                <a:tc>
+                  <a:txBody>
+                    <a:bodyPr/>
+                    <a:lstStyle/>
+                    <a:p>
+                      <a:pPr algn="l" fontAlgn="ctr">
+                        <a:buNone/>
+                      </a:pPr>
+                      <a:r>
+                        <a:rPr lang="ko-KR" altLang="en-US" sz="1000" b="0" i="0" u="none" strike="noStrike" dirty="0">
+                          <a:solidFill>
+                            <a:srgbClr val="000000"/>
+                          </a:solidFill>
+                          <a:effectLst/>
+                          <a:latin typeface="맑은 고딕" panose="020B0503020000020004" pitchFamily="34" charset="-127"/>
+                          <a:ea typeface="맑은 고딕" panose="020B0503020000020004" pitchFamily="34" charset="-127"/>
+                          <a:cs typeface="맑은 고딕"/>
+                        </a:rPr>
+                        <a:t>의존 규칙 검사</a:t>
+                      </a:r>
+                    </a:p>
+                  </a:txBody>
+                  <a:tcPr marL="81005" marR="6750" marT="6750" marB="0" anchor="ctr">
+                    <a:lnL>
+                      <a:noFill/>
+                    </a:lnL>
+                    <a:lnR>
+                      <a:noFill/>
+                    </a:lnR>
+                    <a:lnT w="9525" cap="flat" cmpd="sng" algn="ctr">
+                      <a:solidFill>
+                        <a:schemeClr val="bg1">
+                          <a:lumMod val="50000"/>
+                        </a:schemeClr>
+                      </a:solidFill>
+                      <a:prstDash val="solid"/>
+                      <a:round/>
+                      <a:headEnd type="none" w="med" len="med"/>
+                      <a:tailEnd type="none" w="med" len="med"/>
+                    </a:lnT>
+                    <a:lnB w="9525" cap="flat" cmpd="sng" algn="ctr">
+                      <a:solidFill>
+                        <a:schemeClr val="bg1">
+                          <a:lumMod val="50000"/>
+                        </a:schemeClr>
+                      </a:solidFill>
+                      <a:prstDash val="solid"/>
+                      <a:round/>
+                      <a:headEnd type="none" w="med" len="med"/>
+                      <a:tailEnd type="none" w="med" len="med"/>
+                    </a:lnB>
+                    <a:solidFill>
+                      <a:srgbClr val="FFFFFF"/>
+                    </a:solidFill>
+                  </a:tcPr>
+                </a:tc>
+                <a:tc>
+                  <a:txBody>
+                    <a:bodyPr/>
+                    <a:lstStyle/>
+                    <a:p>
+                      <a:pPr algn="l" fontAlgn="ctr">
+                        <a:buNone/>
+                      </a:pPr>
+                      <a:r>
+                        <a:rPr lang="ko-KR" altLang="en-US" sz="1000" b="0" i="0" u="none" strike="noStrike" dirty="0">
+                          <a:solidFill>
+                            <a:srgbClr val="000000"/>
+                          </a:solidFill>
+                          <a:effectLst/>
+                          <a:latin typeface="맑은 고딕" panose="020B0503020000020004" pitchFamily="34" charset="-127"/>
+                          <a:ea typeface="맑은 고딕" panose="020B0503020000020004" pitchFamily="34" charset="-127"/>
+                          <a:cs typeface="맑은 고딕"/>
+                        </a:rPr>
+                        <a:t>연동·영속 import?</a:t>
+                      </a:r>
+                    </a:p>
+                  </a:txBody>
+                  <a:tcPr marL="81005" marR="6750" marT="6750" marB="0" anchor="ctr">
+                    <a:lnL>
+                      <a:noFill/>
+                    </a:lnL>
+                    <a:lnR>
+                      <a:noFill/>
+                    </a:lnR>
+                    <a:lnT w="9525" cap="flat" cmpd="sng" algn="ctr">
+                      <a:solidFill>
+                        <a:schemeClr val="bg1">
+                          <a:lumMod val="50000"/>
+                        </a:schemeClr>
+                      </a:solidFill>
+                      <a:prstDash val="solid"/>
+                      <a:round/>
+                      <a:headEnd type="none" w="med" len="med"/>
+                      <a:tailEnd type="none" w="med" len="med"/>
+                    </a:lnT>
+                    <a:lnB w="9525" cap="flat" cmpd="sng" algn="ctr">
+                      <a:solidFill>
+                        <a:schemeClr val="bg1">
+                          <a:lumMod val="50000"/>
+                        </a:schemeClr>
+                      </a:solidFill>
+                      <a:prstDash val="solid"/>
+                      <a:round/>
+                      <a:headEnd type="none" w="med" len="med"/>
+                      <a:tailEnd type="none" w="med" len="med"/>
+                    </a:lnB>
+                    <a:solidFill>
+                      <a:srgbClr val="FFFFFF"/>
+                    </a:solidFill>
+                  </a:tcPr>
+                </a:tc>
+              </a:tr>
+              <a:tr h="288000">
+                <a:tc>
+                  <a:txBody>
+                    <a:bodyPr/>
+                    <a:lstStyle/>
+                    <a:p>
+                      <a:pPr algn="l" fontAlgn="ctr">
+                        <a:buNone/>
+                      </a:pPr>
+                      <a:r>
+                        <a:rPr lang="en" sz="1000" b="1" i="0" u="none" strike="noStrike" dirty="0">
+                          <a:solidFill>
+                            <a:schemeClr val="tx1"/>
+                          </a:solidFill>
+                          <a:effectLst/>
+                          <a:latin typeface="맑은 고딕" panose="020B0503020000020004" pitchFamily="34" charset="-127"/>
+                          <a:ea typeface="맑은 고딕" panose="020B0503020000020004" pitchFamily="34" charset="-127"/>
+                          <a:cs typeface="맑은 고딕"/>
+                        </a:rPr>
+                        <a:t>코드가 말이 됨</a:t>
+                      </a:r>
+                    </a:p>
+                  </a:txBody>
+                  <a:tcPr marL="81005" marR="6750" marT="6750" marB="0" anchor="ctr">
+                    <a:lnL>
+                      <a:noFill/>
+                    </a:lnL>
+                    <a:lnR>
+                      <a:noFill/>
+                    </a:lnR>
+                    <a:lnT w="9525" cap="flat" cmpd="sng" algn="ctr">
+                      <a:solidFill>
+                        <a:schemeClr val="bg1">
+                          <a:lumMod val="50000"/>
+                        </a:schemeClr>
+                      </a:solidFill>
+                      <a:prstDash val="solid"/>
+                      <a:round/>
+                      <a:headEnd type="none" w="med" len="med"/>
+                      <a:tailEnd type="none" w="med" len="med"/>
+                    </a:lnT>
+                    <a:lnB w="9525" cap="flat" cmpd="sng" algn="ctr">
+                      <a:solidFill>
+                        <a:schemeClr val="bg1">
+                          <a:lumMod val="50000"/>
+                        </a:schemeClr>
+                      </a:solidFill>
+                      <a:prstDash val="solid"/>
+                      <a:round/>
+                      <a:headEnd type="none" w="med" len="med"/>
+                      <a:tailEnd type="none" w="med" len="med"/>
+                    </a:lnB>
+                    <a:noFill/>
+                  </a:tcPr>
+                </a:tc>
+                <a:tc>
+                  <a:txBody>
+                    <a:bodyPr/>
+                    <a:lstStyle/>
+                    <a:p>
+                      <a:pPr algn="l" fontAlgn="ctr">
+                        <a:buNone/>
+                      </a:pPr>
+                      <a:r>
+                        <a:rPr lang="ko-KR" altLang="en-US" sz="1000" b="0" i="0" u="none" strike="noStrike" dirty="0">
+                          <a:solidFill>
+                            <a:srgbClr val="000000"/>
+                          </a:solidFill>
+                          <a:effectLst/>
+                          <a:latin typeface="맑은 고딕" panose="020B0503020000020004" pitchFamily="34" charset="-127"/>
+                          <a:ea typeface="맑은 고딕" panose="020B0503020000020004" pitchFamily="34" charset="-127"/>
+                          <a:cs typeface="맑은 고딕"/>
+                        </a:rPr>
+                        <a:t>—</a:t>
+                      </a:r>
+                    </a:p>
+                  </a:txBody>
+                  <a:tcPr marL="81005" marR="6750" marT="6750" marB="0" anchor="ctr">
+                    <a:lnL>
+                      <a:noFill/>
+                    </a:lnL>
+                    <a:lnR>
+                      <a:noFill/>
+                    </a:lnR>
+                    <a:lnT w="9525" cap="flat" cmpd="sng" algn="ctr">
+                      <a:solidFill>
+                        <a:schemeClr val="bg1">
+                          <a:lumMod val="50000"/>
+                        </a:schemeClr>
+                      </a:solidFill>
+                      <a:prstDash val="solid"/>
+                      <a:round/>
+                      <a:headEnd type="none" w="med" len="med"/>
+                      <a:tailEnd type="none" w="med" len="med"/>
+                    </a:lnT>
+                    <a:lnB w="9525" cap="flat" cmpd="sng" algn="ctr">
+                      <a:solidFill>
+                        <a:schemeClr val="bg1">
+                          <a:lumMod val="50000"/>
+                        </a:schemeClr>
+                      </a:solidFill>
+                      <a:prstDash val="solid"/>
+                      <a:round/>
+                      <a:headEnd type="none" w="med" len="med"/>
+                      <a:tailEnd type="none" w="med" len="med"/>
+                    </a:lnB>
+                    <a:solidFill>
+                      <a:srgbClr val="FFFFFF"/>
+                    </a:solidFill>
+                  </a:tcPr>
+                </a:tc>
+                <a:tc>
+                  <a:txBody>
+                    <a:bodyPr/>
+                    <a:lstStyle/>
+                    <a:p>
+                      <a:pPr algn="l" fontAlgn="ctr">
+                        <a:buNone/>
+                      </a:pPr>
+                      <a:r>
+                        <a:rPr lang="ko-KR" altLang="en-US" sz="1000" b="0" i="0" u="none" strike="noStrike" dirty="0">
+                          <a:solidFill>
+                            <a:srgbClr val="000000"/>
+                          </a:solidFill>
+                          <a:effectLst/>
+                          <a:latin typeface="맑은 고딕" panose="020B0503020000020004" pitchFamily="34" charset="-127"/>
+                          <a:ea typeface="맑은 고딕" panose="020B0503020000020004" pitchFamily="34" charset="-127"/>
+                          <a:cs typeface="맑은 고딕"/>
+                        </a:rPr>
+                        <a:t>컴파일</a:t>
+                      </a:r>
+                    </a:p>
+                  </a:txBody>
+                  <a:tcPr marL="81005" marR="6750" marT="6750" marB="0" anchor="ctr">
+                    <a:lnL>
+                      <a:noFill/>
+                    </a:lnL>
+                    <a:lnR>
+                      <a:noFill/>
+                    </a:lnR>
+                    <a:lnT w="9525" cap="flat" cmpd="sng" algn="ctr">
+                      <a:solidFill>
+                        <a:schemeClr val="bg1">
+                          <a:lumMod val="50000"/>
+                        </a:schemeClr>
+                      </a:solidFill>
+                      <a:prstDash val="solid"/>
+                      <a:round/>
+                      <a:headEnd type="none" w="med" len="med"/>
+                      <a:tailEnd type="none" w="med" len="med"/>
+                    </a:lnT>
+                    <a:lnB w="9525" cap="flat" cmpd="sng" algn="ctr">
+                      <a:solidFill>
+                        <a:schemeClr val="bg1">
+                          <a:lumMod val="50000"/>
+                        </a:schemeClr>
+                      </a:solidFill>
+                      <a:prstDash val="solid"/>
+                      <a:round/>
+                      <a:headEnd type="none" w="med" len="med"/>
+                      <a:tailEnd type="none" w="med" len="med"/>
+                    </a:lnB>
+                    <a:solidFill>
+                      <a:srgbClr val="FFFFFF"/>
+                    </a:solidFill>
+                  </a:tcPr>
+                </a:tc>
+                <a:tc>
+                  <a:txBody>
+                    <a:bodyPr/>
+                    <a:lstStyle/>
+                    <a:p>
+                      <a:pPr algn="l" fontAlgn="ctr">
+                        <a:buNone/>
+                      </a:pPr>
+                      <a:r>
+                        <a:rPr lang="ko-KR" altLang="en-US" sz="1000" b="0" i="0" u="none" strike="noStrike" dirty="0">
+                          <a:solidFill>
+                            <a:srgbClr val="000000"/>
+                          </a:solidFill>
+                          <a:effectLst/>
+                          <a:latin typeface="맑은 고딕" panose="020B0503020000020004" pitchFamily="34" charset="-127"/>
+                          <a:ea typeface="맑은 고딕" panose="020B0503020000020004" pitchFamily="34" charset="-127"/>
+                          <a:cs typeface="맑은 고딕"/>
+                        </a:rPr>
+                        <a:t>이름·타입?</a:t>
+                      </a:r>
+                    </a:p>
+                  </a:txBody>
+                  <a:tcPr marL="81005" marR="6750" marT="6750" marB="0" anchor="ctr">
+                    <a:lnL>
+                      <a:noFill/>
+                    </a:lnL>
+                    <a:lnR>
+                      <a:noFill/>
+                    </a:lnR>
+                    <a:lnT w="9525" cap="flat" cmpd="sng" algn="ctr">
+                      <a:solidFill>
+                        <a:schemeClr val="bg1">
+                          <a:lumMod val="50000"/>
+                        </a:schemeClr>
+                      </a:solidFill>
+                      <a:prstDash val="solid"/>
+                      <a:round/>
+                      <a:headEnd type="none" w="med" len="med"/>
+                      <a:tailEnd type="none" w="med" len="med"/>
+                    </a:lnT>
+                    <a:lnB w="9525" cap="flat" cmpd="sng" algn="ctr">
+                      <a:solidFill>
+                        <a:schemeClr val="bg1">
+                          <a:lumMod val="50000"/>
+                        </a:schemeClr>
+                      </a:solidFill>
+                      <a:prstDash val="solid"/>
+                      <a:round/>
+                      <a:headEnd type="none" w="med" len="med"/>
+                      <a:tailEnd type="none" w="med" len="med"/>
+                    </a:lnB>
+                    <a:solidFill>
+                      <a:srgbClr val="FFFFFF"/>
+                    </a:solidFill>
+                  </a:tcPr>
+                </a:tc>
+              </a:tr>
+              <a:tr h="288000">
+                <a:tc>
+                  <a:txBody>
+                    <a:bodyPr/>
+                    <a:lstStyle/>
+                    <a:p>
+                      <a:pPr algn="l" fontAlgn="ctr">
+                        <a:buNone/>
+                      </a:pPr>
+                      <a:r>
+                        <a:rPr lang="en" sz="1000" b="1" i="0" u="none" strike="noStrike" dirty="0">
+                          <a:solidFill>
+                            <a:schemeClr val="tx1"/>
+                          </a:solidFill>
+                          <a:effectLst/>
+                          <a:latin typeface="맑은 고딕" panose="020B0503020000020004" pitchFamily="34" charset="-127"/>
+                          <a:ea typeface="맑은 고딕" panose="020B0503020000020004" pitchFamily="34" charset="-127"/>
+                          <a:cs typeface="맑은 고딕"/>
+                        </a:rPr>
+                        <a:t>회차 생성의 의미</a:t>
+                      </a:r>
+                    </a:p>
+                  </a:txBody>
+                  <a:tcPr marL="81005" marR="6750" marT="6750" marB="0" anchor="ctr">
+                    <a:lnL>
+                      <a:noFill/>
+                    </a:lnL>
+                    <a:lnR>
+                      <a:noFill/>
+                    </a:lnR>
+                    <a:lnT w="9525" cap="flat" cmpd="sng" algn="ctr">
+                      <a:solidFill>
+                        <a:schemeClr val="bg1">
+                          <a:lumMod val="50000"/>
+                        </a:schemeClr>
+                      </a:solidFill>
+                      <a:prstDash val="solid"/>
+                      <a:round/>
+                      <a:headEnd type="none" w="med" len="med"/>
+                      <a:tailEnd type="none" w="med" len="med"/>
+                    </a:lnT>
+                    <a:lnB w="9525" cap="flat" cmpd="sng" algn="ctr">
+                      <a:solidFill>
+                        <a:schemeClr val="bg1">
+                          <a:lumMod val="50000"/>
+                        </a:schemeClr>
+                      </a:solidFill>
+                      <a:prstDash val="solid"/>
+                      <a:round/>
+                      <a:headEnd type="none" w="med" len="med"/>
+                      <a:tailEnd type="none" w="med" len="med"/>
+                    </a:lnB>
+                    <a:noFill/>
+                  </a:tcPr>
+                </a:tc>
+                <a:tc>
+                  <a:txBody>
+                    <a:bodyPr/>
+                    <a:lstStyle/>
+                    <a:p>
+                      <a:pPr algn="l" fontAlgn="ctr">
+                        <a:buNone/>
+                      </a:pPr>
+                      <a:r>
+                        <a:rPr lang="ko-KR" altLang="en-US" sz="1000" b="0" i="0" u="none" strike="noStrike" dirty="0">
+                          <a:solidFill>
+                            <a:srgbClr val="000000"/>
+                          </a:solidFill>
+                          <a:effectLst/>
+                          <a:latin typeface="맑은 고딕" panose="020B0503020000020004" pitchFamily="34" charset="-127"/>
+                          <a:ea typeface="맑은 고딕" panose="020B0503020000020004" pitchFamily="34" charset="-127"/>
+                          <a:cs typeface="맑은 고딕"/>
+                        </a:rPr>
+                        <a:t>용어집의 배송 주기</a:t>
+                      </a:r>
+                    </a:p>
+                  </a:txBody>
+                  <a:tcPr marL="81005" marR="6750" marT="6750" marB="0" anchor="ctr">
+                    <a:lnL>
+                      <a:noFill/>
+                    </a:lnL>
+                    <a:lnR>
+                      <a:noFill/>
+                    </a:lnR>
+                    <a:lnT w="9525" cap="flat" cmpd="sng" algn="ctr">
+                      <a:solidFill>
+                        <a:schemeClr val="bg1">
+                          <a:lumMod val="50000"/>
+                        </a:schemeClr>
+                      </a:solidFill>
+                      <a:prstDash val="solid"/>
+                      <a:round/>
+                      <a:headEnd type="none" w="med" len="med"/>
+                      <a:tailEnd type="none" w="med" len="med"/>
+                    </a:lnT>
+                    <a:lnB w="9525" cap="flat" cmpd="sng" algn="ctr">
+                      <a:solidFill>
+                        <a:schemeClr val="bg1">
+                          <a:lumMod val="50000"/>
+                        </a:schemeClr>
+                      </a:solidFill>
+                      <a:prstDash val="solid"/>
+                      <a:round/>
+                      <a:headEnd type="none" w="med" len="med"/>
+                      <a:tailEnd type="none" w="med" len="med"/>
+                    </a:lnB>
+                    <a:solidFill>
+                      <a:srgbClr val="FFFFFF"/>
+                    </a:solidFill>
+                  </a:tcPr>
+                </a:tc>
+                <a:tc>
+                  <a:txBody>
+                    <a:bodyPr/>
+                    <a:lstStyle/>
+                    <a:p>
+                      <a:pPr algn="l" fontAlgn="ctr">
+                        <a:buNone/>
+                      </a:pPr>
+                      <a:r>
+                        <a:rPr lang="ko-KR" altLang="en-US" sz="1000" b="0" i="0" u="none" strike="noStrike" dirty="0">
+                          <a:solidFill>
+                            <a:srgbClr val="000000"/>
+                          </a:solidFill>
+                          <a:effectLst/>
+                          <a:latin typeface="맑은 고딕" panose="020B0503020000020004" pitchFamily="34" charset="-127"/>
+                          <a:ea typeface="맑은 고딕" panose="020B0503020000020004" pitchFamily="34" charset="-127"/>
+                          <a:cs typeface="맑은 고딕"/>
+                        </a:rPr>
+                        <a:t>LLM 심사</a:t>
+                      </a:r>
+                    </a:p>
+                  </a:txBody>
+                  <a:tcPr marL="81005" marR="6750" marT="6750" marB="0" anchor="ctr">
+                    <a:lnL>
+                      <a:noFill/>
+                    </a:lnL>
+                    <a:lnR>
+                      <a:noFill/>
+                    </a:lnR>
+                    <a:lnT w="9525" cap="flat" cmpd="sng" algn="ctr">
+                      <a:solidFill>
+                        <a:schemeClr val="bg1">
+                          <a:lumMod val="50000"/>
+                        </a:schemeClr>
+                      </a:solidFill>
+                      <a:prstDash val="solid"/>
+                      <a:round/>
+                      <a:headEnd type="none" w="med" len="med"/>
+                      <a:tailEnd type="none" w="med" len="med"/>
+                    </a:lnT>
+                    <a:lnB w="9525" cap="flat" cmpd="sng" algn="ctr">
+                      <a:solidFill>
+                        <a:schemeClr val="bg1">
+                          <a:lumMod val="50000"/>
+                        </a:schemeClr>
+                      </a:solidFill>
+                      <a:prstDash val="solid"/>
+                      <a:round/>
+                      <a:headEnd type="none" w="med" len="med"/>
+                      <a:tailEnd type="none" w="med" len="med"/>
+                    </a:lnB>
+                    <a:solidFill>
+                      <a:srgbClr val="FFFFFF"/>
+                    </a:solidFill>
+                  </a:tcPr>
+                </a:tc>
+                <a:tc>
+                  <a:txBody>
+                    <a:bodyPr/>
+                    <a:lstStyle/>
+                    <a:p>
+                      <a:pPr algn="l" fontAlgn="ctr">
+                        <a:buNone/>
+                      </a:pPr>
+                      <a:r>
+                        <a:rPr lang="ko-KR" altLang="en-US" sz="1000" b="0" i="0" u="none" strike="noStrike" dirty="0">
+                          <a:solidFill>
+                            <a:srgbClr val="000000"/>
+                          </a:solidFill>
+                          <a:effectLst/>
+                          <a:latin typeface="맑은 고딕" panose="020B0503020000020004" pitchFamily="34" charset="-127"/>
+                          <a:ea typeface="맑은 고딕" panose="020B0503020000020004" pitchFamily="34" charset="-127"/>
+                          <a:cs typeface="맑은 고딕"/>
+                        </a:rPr>
+                        <a:t>예정일 결정이 한 곳?</a:t>
+                      </a:r>
+                    </a:p>
+                  </a:txBody>
+                  <a:tcPr marL="81005" marR="6750" marT="6750" marB="0" anchor="ctr">
+                    <a:lnL>
+                      <a:noFill/>
+                    </a:lnL>
+                    <a:lnR>
+                      <a:noFill/>
+                    </a:lnR>
+                    <a:lnT w="9525" cap="flat" cmpd="sng" algn="ctr">
+                      <a:solidFill>
+                        <a:schemeClr val="bg1">
+                          <a:lumMod val="50000"/>
+                        </a:schemeClr>
+                      </a:solidFill>
+                      <a:prstDash val="solid"/>
+                      <a:round/>
+                      <a:headEnd type="none" w="med" len="med"/>
+                      <a:tailEnd type="none" w="med" len="med"/>
+                    </a:lnT>
+                    <a:lnB w="9525" cap="flat" cmpd="sng" algn="ctr">
+                      <a:solidFill>
+                        <a:schemeClr val="bg1">
+                          <a:lumMod val="50000"/>
+                        </a:schemeClr>
+                      </a:solidFill>
+                      <a:prstDash val="solid"/>
+                      <a:round/>
+                      <a:headEnd type="none" w="med" len="med"/>
+                      <a:tailEnd type="none" w="med" len="med"/>
+                    </a:lnB>
+                    <a:solidFill>
+                      <a:srgbClr val="FFFFFF"/>
+                    </a:solidFill>
+                  </a:tcPr>
+                </a:tc>
+              </a:tr>
+            </a:tbl>
+          </a:graphicData>
+        </a:graphic>
+      </p:graphicFrame>
+      <p:sp>
+        <p:nvSpPr>
+          <p:cNvPr id="13" name="TextBox 12">
+            <a:extLst>
+              <a:ext uri="{FF2B5EF4-FFF2-40B4-BE49-F238E27FC236}">
+                <a16:creationId xmlns:a16="http://schemas.microsoft.com/office/drawing/2014/main" id="{654EDDB4-901F-3D48-A715-17D163E8A7AC}"/>
+              </a:ext>
+            </a:extLst>
+          </p:cNvPr>
+          <p:cNvSpPr txBox="1"/>
+          <p:nvPr/>
+        </p:nvSpPr>
+        <p:spPr>
+          <a:xfrm>
+            <a:off x="365760" y="960120"/>
+            <a:ext cx="8412480" cy="1038316"/>
+          </a:xfrm>
+          <a:prstGeom prst="rect">
+            <a:avLst/>
+          </a:prstGeom>
+          <a:noFill/>
+        </p:spPr>
+        <p:txBody>
+          <a:bodyPr wrap="square">
+            <a:spAutoFit/>
+          </a:bodyPr>
+          <a:lstStyle/>
+          <a:p>
+            <a:pPr marL="0" indent="0">
+              <a:spcBef>
+                <a:spcPts val="600"/>
+              </a:spcBef>
+              <a:spcAft>
+                <a:spcPts val="600"/>
+              </a:spcAft>
+              <a:buNone/>
+            </a:pPr>
+            <a:r>
+              <a:rPr sz="1800" b="0">
+                <a:solidFill>
+                  <a:srgbClr val="000000"/>
+                </a:solidFill>
+                <a:latin typeface="맑은 고딕"/>
+                <a:ea typeface="맑은 고딕"/>
+              </a:rPr>
+              <a:t>"신청한다"에도 같은 구성을 쓴다. 가이드는 앞 실습에서 만든 산출물이고, 센서는 다섯이다. 그중 넷은 기계가 판정하고 </a:t>
+            </a:r>
+            <a:r>
+              <a:rPr sz="1800" b="1">
+                <a:solidFill>
+                  <a:srgbClr val="000000"/>
+                </a:solidFill>
+                <a:latin typeface="맑은 고딕"/>
+                <a:ea typeface="맑은 고딕"/>
+              </a:rPr>
+              <a:t>회차 생성의 LLM 심사</a:t>
+            </a:r>
+            <a:r>
+              <a:rPr sz="1800" b="0">
+                <a:solidFill>
+                  <a:srgbClr val="000000"/>
+                </a:solidFill>
+                <a:latin typeface="맑은 고딕"/>
+                <a:ea typeface="맑은 고딕"/>
+              </a:rPr>
+              <a:t> 하나만 LLM이 판단한다.</a:t>
+            </a:r>
+          </a:p>
+        </p:txBody>
+      </p:sp>
+      <p:sp>
+        <p:nvSpPr>
+          <p:cNvPr id="8" name="슬라이드 번호 개체 틀 2">
+            <a:extLst>
+              <a:ext uri="{FF2B5EF4-FFF2-40B4-BE49-F238E27FC236}">
+                <a16:creationId xmlns:a16="http://schemas.microsoft.com/office/drawing/2014/main" id="{741B75C6-7ED3-AA4C-41B6-F69C599EA447}"/>
+              </a:ext>
+            </a:extLst>
+          </p:cNvPr>
+          <p:cNvSpPr>
+            <a:spLocks noGrp="1"/>
+          </p:cNvSpPr>
+          <p:nvPr>
+            <p:ph type="sldNum" sz="quarter" idx="10"/>
+          </p:nvPr>
+        </p:nvSpPr>
+        <p:spPr>
+          <a:xfrm>
+            <a:off x="3508472" y="6449625"/>
+            <a:ext cx="2133600" cy="238277"/>
+          </a:xfrm>
+        </p:spPr>
+        <p:txBody>
+          <a:bodyPr>
+            <a:normAutofit/>
+          </a:bodyPr>
+          <a:lstStyle/>
+          <a:p>
+            <a:pPr marL="0" marR="0" lvl="0" indent="0" algn="ctr" defTabSz="457200" rtl="0" eaLnBrk="1" fontAlgn="auto" latinLnBrk="0" hangingPunct="1">
+              <a:lnSpc>
+                <a:spcPct val="100000"/>
+              </a:lnSpc>
+              <a:spcBef>
+                <a:spcPts val="0"/>
+              </a:spcBef>
+              <a:spcAft>
+                <a:spcPts val="600"/>
+              </a:spcAft>
+              <a:buClrTx/>
+              <a:buSzTx/>
+              <a:buFontTx/>
+              <a:buNone/>
+              <a:tabLst/>
+              <a:defRPr/>
+            </a:pPr>
+            <a:r>
+              <a:rPr kumimoji="0" lang="en-US" altLang="ko-KR" sz="800" b="0" i="0" u="none" strike="noStrike" kern="1200" cap="none" spc="0" normalizeH="0" baseline="0" noProof="0">
+                <a:ln>
+                  <a:noFill/>
+                </a:ln>
+                <a:solidFill>
+                  <a:prstClr val="black"/>
+                </a:solidFill>
+                <a:effectLst/>
+                <a:uLnTx/>
+                <a:uFillTx/>
+                <a:latin typeface="맑은 고딕" panose="020B0503020000020004" pitchFamily="34" charset="-127"/>
+                <a:ea typeface="맑은 고딕" panose="020B0503020000020004" pitchFamily="34" charset="-127"/>
+                <a:cs typeface="+mn-cs"/>
+              </a:rPr>
+              <a:t>- 25 -</a:t>
+            </a:r>
+          </a:p>
+        </p:txBody>
+      </p:sp>
+      <p:sp>
+        <p:nvSpPr>
+          <p:cNvPr id="14" name="TextBox 12">
+            <a:extLst>
+              <a:ext uri="{FF2B5EF4-FFF2-40B4-BE49-F238E27FC236}">
+                <a16:creationId xmlns:a16="http://schemas.microsoft.com/office/drawing/2014/main" id="{654EDDB4-901F-3D48-A715-17D163E8A7AC}"/>
+              </a:ext>
+            </a:extLst>
+          </p:cNvPr>
+          <p:cNvSpPr txBox="1"/>
+          <p:nvPr/>
+        </p:nvSpPr>
+        <p:spPr>
+          <a:xfrm>
+            <a:off x="365760" y="2087880"/>
+            <a:ext cx="8412480" cy="222250"/>
+          </a:xfrm>
+          <a:prstGeom prst="rect">
+            <a:avLst/>
+          </a:prstGeom>
+          <a:noFill/>
+        </p:spPr>
+        <p:txBody>
+          <a:bodyPr wrap="square" tIns="0" bIns="0">
+            <a:spAutoFit/>
+          </a:bodyPr>
+          <a:lstStyle/>
+          <a:p>
+            <a:pPr algn="ctr">
+              <a:spcBef>
+                <a:spcPts val="0"/>
+              </a:spcBef>
+              <a:spcAft>
+                <a:spcPts val="0"/>
+              </a:spcAft>
+            </a:pPr>
+            <a:r>
+              <a:rPr sz="1400" b="1">
+                <a:solidFill>
+                  <a:srgbClr val="000000"/>
+                </a:solidFill>
+                <a:latin typeface="맑은 고딕"/>
+                <a:ea typeface="맑은 고딕"/>
+              </a:rPr>
+              <a:t>"신청한다"의 가이드와 센서</a:t>
+            </a:r>
+          </a:p>
+        </p:txBody>
+      </p:sp>
+      <p:sp>
+        <p:nvSpPr>
+          <p:cNvPr id="15" name="TextBox 12">
+            <a:extLst>
+              <a:ext uri="{FF2B5EF4-FFF2-40B4-BE49-F238E27FC236}">
+                <a16:creationId xmlns:a16="http://schemas.microsoft.com/office/drawing/2014/main" id="{654EDDB4-901F-3D48-A715-17D163E8A7AC}"/>
+              </a:ext>
+            </a:extLst>
+          </p:cNvPr>
+          <p:cNvSpPr txBox="1"/>
+          <p:nvPr/>
+        </p:nvSpPr>
+        <p:spPr>
+          <a:xfrm>
+            <a:off x="365760" y="4342930"/>
+            <a:ext cx="8412480" cy="781278"/>
+          </a:xfrm>
+          <a:prstGeom prst="rect">
+            <a:avLst/>
+          </a:prstGeom>
+          <a:noFill/>
+        </p:spPr>
+        <p:txBody>
+          <a:bodyPr wrap="square">
+            <a:spAutoFit/>
+          </a:bodyPr>
+          <a:lstStyle/>
+          <a:p>
+            <a:pPr lvl="2" marL="723900" indent="-368300">
+              <a:spcBef>
+                <a:spcPts val="600"/>
+              </a:spcBef>
+              <a:spcAft>
+                <a:spcPts val="600"/>
+              </a:spcAft>
+              <a:buSzPct val="90000"/>
+              <a:buFont typeface="Wingdings" pitchFamily="2" charset="2"/>
+              <a:buChar char=""/>
+            </a:pPr>
+            <a:r>
+              <a:rPr sz="1800" b="1">
+                <a:solidFill>
+                  <a:srgbClr val="000000"/>
+                </a:solidFill>
+                <a:latin typeface="맑은 고딕"/>
+                <a:ea typeface="맑은 고딕"/>
+              </a:rPr>
+              <a:t>실행 시점</a:t>
+            </a:r>
+            <a:r>
+              <a:rPr sz="1800" b="0">
+                <a:solidFill>
+                  <a:srgbClr val="000000"/>
+                </a:solidFill>
+                <a:latin typeface="맑은 고딕"/>
+                <a:ea typeface="맑은 고딕"/>
+              </a:rPr>
+              <a:t> —</a:t>
+            </a:r>
+            <a:r>
+              <a:rPr sz="1600" b="0">
+                <a:solidFill>
+                  <a:srgbClr val="000000"/>
+                </a:solidFill>
+                <a:latin typeface="맑은 고딕"/>
+                <a:ea typeface="맑은 고딕"/>
+              </a:rPr>
+              <a:t> 앞의 넷은 에이전트 루프 안에서 돌리고, LLM 심사만 </a:t>
+            </a:r>
+            <a:r>
+              <a:rPr sz="1600" b="1">
+                <a:solidFill>
+                  <a:srgbClr val="000000"/>
+                </a:solidFill>
+                <a:latin typeface="맑은 고딕"/>
+                <a:ea typeface="맑은 고딕"/>
+              </a:rPr>
+              <a:t>병합 뒤</a:t>
+            </a:r>
+            <a:r>
+              <a:rPr sz="1600" b="0">
+                <a:solidFill>
+                  <a:srgbClr val="000000"/>
+                </a:solidFill>
+                <a:latin typeface="맑은 고딕"/>
+                <a:ea typeface="맑은 고딕"/>
+              </a:rPr>
+              <a:t>에 돌린다.</a:t>
+            </a:r>
+          </a:p>
+        </p:txBody>
+      </p:sp>
+    </p:spTree>
+    <p:extLst>
+      <p:ext uri="{BB962C8B-B14F-4D97-AF65-F5344CB8AC3E}">
+        <p14:creationId xmlns:p14="http://schemas.microsoft.com/office/powerpoint/2010/main" val="2789569477"/>
+      </p:ext>
+    </p:extLst>
+  </p:cSld>
+  <p:clrMapOvr>
+    <a:masterClrMapping/>
+  </p:clrMapOvr>
+</p:sld>
+</file>
+
+<file path=ppt/slides/slide26.xml><?xml version="1.0" encoding="utf-8"?>
+<p:sld xmlns:a="http://schemas.openxmlformats.org/drawingml/2006/main" xmlns:r="http://schemas.openxmlformats.org/officeDocument/2006/relationships" xmlns:p="http://schemas.openxmlformats.org/presentationml/2006/main">
+  <p:cSld>
+    <p:spTree>
+      <p:nvGrpSpPr>
+        <p:cNvPr id="1" name="">
+          <a:extLst>
+            <a:ext uri="{FF2B5EF4-FFF2-40B4-BE49-F238E27FC236}">
+              <a16:creationId xmlns:a16="http://schemas.microsoft.com/office/drawing/2014/main" id="{60B87152-D004-1569-E429-90A42420A65C}"/>
+            </a:ext>
+          </a:extLst>
+        </p:cNvPr>
+        <p:cNvGrpSpPr/>
+        <p:nvPr/>
+      </p:nvGrpSpPr>
+      <p:grpSpPr>
+        <a:xfrm>
+          <a:off x="0" y="0"/>
+          <a:ext cx="0" cy="0"/>
+          <a:chOff x="0" y="0"/>
+          <a:chExt cx="0" cy="0"/>
+        </a:xfrm>
+      </p:grpSpPr>
+      <p:sp>
+        <p:nvSpPr>
+          <p:cNvPr id="2" name="제목 1">
+            <a:extLst>
+              <a:ext uri="{FF2B5EF4-FFF2-40B4-BE49-F238E27FC236}">
+                <a16:creationId xmlns:a16="http://schemas.microsoft.com/office/drawing/2014/main" id="{F2E2AB02-3ADE-69B8-887E-7981AD15EF24}"/>
+              </a:ext>
+            </a:extLst>
+          </p:cNvPr>
+          <p:cNvSpPr>
+            <a:spLocks noGrp="1"/>
+          </p:cNvSpPr>
+          <p:nvPr>
+            <p:ph type="title"/>
+          </p:nvPr>
+        </p:nvSpPr>
+        <p:spPr/>
+        <p:txBody>
+          <a:bodyPr/>
+          <a:lstStyle/>
+          <a:p>
+            <a:r>
+              <a:rPr sz="2400" b="1">
+                <a:solidFill>
+                  <a:srgbClr val="000000"/>
+                </a:solidFill>
+                <a:latin typeface="맑은 고딕"/>
+                <a:ea typeface="맑은 고딕"/>
+              </a:rPr>
+              <a:t>센서 실패 시 대응 </a:t>
+            </a:r>
+            <a:r>
+              <a:rPr sz="1800" b="1">
+                <a:solidFill>
+                  <a:srgbClr val="000000"/>
+                </a:solidFill>
+                <a:latin typeface="맑은 고딕"/>
+                <a:ea typeface="맑은 고딕"/>
+              </a:rPr>
+              <a:t>(안)</a:t>
+            </a:r>
+          </a:p>
+          <a:p>
+            <a:r>
+              <a:rPr sz="1100" b="1">
+                <a:solidFill>
+                  <a:srgbClr val="000000"/>
+                </a:solidFill>
+                <a:latin typeface="맑은 고딕"/>
+                <a:ea typeface="맑은 고딕"/>
+              </a:rPr>
+              <a:t>별첨. 실습 답</a:t>
+            </a:r>
+          </a:p>
+        </p:txBody>
+      </p:sp>
+      <p:sp>
+        <p:nvSpPr>
+          <p:cNvPr id="5" name="텍스트 개체 틀 4">
+            <a:extLst>
+              <a:ext uri="{FF2B5EF4-FFF2-40B4-BE49-F238E27FC236}">
+                <a16:creationId xmlns:a16="http://schemas.microsoft.com/office/drawing/2014/main" id="{F0895985-68EF-30BA-2165-4B3D90ECD41C}"/>
+              </a:ext>
+            </a:extLst>
+          </p:cNvPr>
+          <p:cNvSpPr>
+            <a:spLocks noGrp="1"/>
+          </p:cNvSpPr>
+          <p:nvPr>
+            <p:ph type="body" sz="quarter" idx="11"/>
+          </p:nvPr>
+        </p:nvSpPr>
+        <p:spPr/>
+        <p:txBody>
+          <a:bodyPr/>
+          <a:lstStyle/>
+          <a:p>
+            <a:r>
+              <a:rPr kumimoji="1" lang="en-US" altLang="ko-KR" sz="1400" dirty="0" err="1"/>
+              <a:t>별첨: 09. 검증 하네스·결과 점검·피드백</a:t>
+            </a:r>
+          </a:p>
+        </p:txBody>
+      </p:sp>
+      <p:sp>
+        <p:nvSpPr>
+          <p:cNvPr id="6" name="텍스트 개체 틀 5">
+            <a:extLst>
+              <a:ext uri="{FF2B5EF4-FFF2-40B4-BE49-F238E27FC236}">
+                <a16:creationId xmlns:a16="http://schemas.microsoft.com/office/drawing/2014/main" id="{D985C1FD-84C4-10F9-372D-6A84E1680E07}"/>
+              </a:ext>
+            </a:extLst>
+          </p:cNvPr>
+          <p:cNvSpPr>
+            <a:spLocks noGrp="1"/>
+          </p:cNvSpPr>
+          <p:nvPr>
+            <p:ph type="body" sz="quarter" idx="12"/>
+          </p:nvPr>
+        </p:nvSpPr>
+        <p:spPr/>
+        <p:txBody>
+          <a:bodyPr/>
+          <a:lstStyle/>
+          <a:p>
+            <a:endParaRPr kumimoji="1" lang="ko-KR" altLang="en-US" dirty="0"/>
+          </a:p>
+        </p:txBody>
+      </p:sp>
+      <p:sp>
+        <p:nvSpPr>
+          <p:cNvPr id="7" name="텍스트 개체 틀 6">
+            <a:extLst>
+              <a:ext uri="{FF2B5EF4-FFF2-40B4-BE49-F238E27FC236}">
+                <a16:creationId xmlns:a16="http://schemas.microsoft.com/office/drawing/2014/main" id="{E26A8878-48FF-5E3A-5D05-0F900C22011B}"/>
+              </a:ext>
+            </a:extLst>
+          </p:cNvPr>
+          <p:cNvSpPr>
+            <a:spLocks noGrp="1"/>
+          </p:cNvSpPr>
+          <p:nvPr>
+            <p:ph type="body" sz="quarter" idx="13"/>
+          </p:nvPr>
+        </p:nvSpPr>
+        <p:spPr/>
+        <p:txBody>
+          <a:bodyPr/>
+          <a:lstStyle/>
+          <a:p>
+            <a:endParaRPr lang="en-US" altLang="ko-KR" dirty="0"/>
+          </a:p>
+        </p:txBody>
+      </p:sp>
+      <p:graphicFrame>
+        <p:nvGraphicFramePr>
+          <p:cNvPr id="11" name="표 10">
+            <a:extLst>
+              <a:ext uri="{FF2B5EF4-FFF2-40B4-BE49-F238E27FC236}">
+                <a16:creationId xmlns:a16="http://schemas.microsoft.com/office/drawing/2014/main" id="{93753AB9-526C-CE2D-446D-7615D9B6D6D2}"/>
+              </a:ext>
+            </a:extLst>
+          </p:cNvPr>
+          <p:cNvGraphicFramePr>
+            <a:graphicFrameLocks noGrp="1"/>
+          </p:cNvGraphicFramePr>
+          <p:nvPr>
+            <p:extLst>
+              <p:ext uri="{D42A27DB-BD31-4B8C-83A1-F6EECF244321}">
+                <p14:modId xmlns:p14="http://schemas.microsoft.com/office/powerpoint/2010/main" val="1761827855"/>
+              </p:ext>
+            </p:extLst>
+          </p:nvPr>
+        </p:nvGraphicFramePr>
+        <p:xfrm>
+          <a:off x="1076516" y="2386330"/>
           <a:ext cx="6977380" cy="3873500"/>
         </p:xfrm>
         <a:graphic>
@@ -21210,7 +21551,7 @@
         <p:spPr>
           <a:xfrm>
             <a:off x="365760" y="960120"/>
-            <a:ext cx="8412480" cy="781278"/>
+            <a:ext cx="8412480" cy="1038316"/>
           </a:xfrm>
           <a:prstGeom prst="rect">
             <a:avLst/>
@@ -21240,7 +21581,7 @@
                 <a:latin typeface="맑은 고딕"/>
                 <a:ea typeface="맑은 고딕"/>
               </a:rPr>
-              <a:t>센서의 실패는 재시도가 아니라 </a:t>
+              <a:t>센서가 실패하면 같은 입력으로 다시 돌리지 않고 </a:t>
             </a:r>
             <a:r>
               <a:rPr sz="1800" b="1">
@@ -21260,7 +21601,7 @@
                 <a:latin typeface="맑은 고딕"/>
                 <a:ea typeface="맑은 고딕"/>
               </a:rPr>
-              <a:t>으로 되돌린다. 셋 중 둘은 가이드로, 하나는 센서의 자리로 돌아간다.</a:t>
+              <a:t>을 고친다. 아래 세 실패 중 둘은 가이드를 고쳐야 하고, 하나는 센서를 더해야 한다.</a:t>
             </a:r>
           </a:p>
         </p:txBody>
@@ -21325,7 +21666,7 @@
                 <a:ea typeface="맑은 고딕" panose="020B0503020000020004" pitchFamily="34" charset="-127"/>
                 <a:cs typeface="+mn-cs"/>
               </a:rPr>
-              <a:t>- 25 -</a:t>
+              <a:t>- 26 -</a:t>
             </a:r>
           </a:p>
         </p:txBody>
@@ -21344,7 +21685,7 @@
         </p:nvSpPr>
         <p:spPr>
           <a:xfrm>
-            <a:off x="365760" y="1813560"/>
+            <a:off x="365760" y="2087880"/>
             <a:ext cx="8412480" cy="222250"/>
           </a:xfrm>
           <a:prstGeom prst="rect">
@@ -21393,7 +21734,7 @@
         </p:nvSpPr>
         <p:spPr>
           <a:xfrm>
-            <a:off x="365760" y="3492610"/>
+            <a:off x="365760" y="3766930"/>
             <a:ext cx="8412480" cy="1178518"/>
           </a:xfrm>
           <a:prstGeom prst="rect">
@@ -21507,7 +21848,7 @@
 </p:sld>
 </file>
 
-<file path=ppt/slides/slide26.xml><?xml version="1.0" encoding="utf-8"?>
+<file path=ppt/slides/slide27.xml><?xml version="1.0" encoding="utf-8"?>
 <p:sld xmlns:a="http://schemas.openxmlformats.org/drawingml/2006/main" xmlns:r="http://schemas.openxmlformats.org/officeDocument/2006/relationships" xmlns:p="http://schemas.openxmlformats.org/presentationml/2006/main">
   <p:cSld>
     <p:spTree>
@@ -21616,7 +21957,7 @@
                   <a:prstClr val="black"/>
                 </a:solidFill>
               </a:rPr>
-              <a:t>- 26 -</a:t>
+              <a:t>- 27 -</a:t>
             </a:r>
           </a:p>
         </p:txBody>
@@ -22470,7 +22811,7 @@
                 <a:latin typeface="맑은 고딕"/>
                 <a:ea typeface="맑은 고딕"/>
               </a:rPr>
-              <a:t>가드레일이 금지한 행동을 다 막아도, 결과가 </a:t>
+              <a:t>가드레일은 해서는 안 되는 행동을 막을 뿐이다. 에이전트가 만든 결과가 업무 규칙대로인지는 </a:t>
             </a:r>
             <a:r>
               <a:rPr sz="1800" b="1">
@@ -22480,7 +22821,7 @@
                 <a:latin typeface="맑은 고딕"/>
                 <a:ea typeface="맑은 고딕"/>
               </a:rPr>
-              <a:t>맞는지는 아무도 보지 않았다</a:t>
+              <a:t>아직 아무도 확인하지 않았다</a:t>
             </a:r>
             <a:r>
               <a:rPr sz="1800" b="0">
@@ -22573,7 +22914,27 @@
                 <a:latin typeface="맑은 고딕"/>
                 <a:ea typeface="맑은 고딕"/>
               </a:rPr>
-              <a:t>"To harness a coding agent we both anticipate unwanted outputs and try to prevent them, and we put sensors in place to allow the agent to self-correct", [Böckeler 2026a]</a:t>
+              <a:t>"To harness a coding agent we both anticipate unwanted outputs and try to prevent them, and we put sensors in place to allow the agent to self-correct"</a:t>
+            </a:r>
+            <a:r>
+              <a:rPr sz="1000" b="0">
+                <a:solidFill>
+                  <a:srgbClr val="000000"/>
+                </a:solidFill>
+                <a:latin typeface="맑은 고딕"/>
+                <a:ea typeface="맑은 고딕"/>
+              </a:rPr>
+              <a:t>, </a:t>
+            </a:r>
+            <a:r>
+              <a:rPr sz="1000" b="0">
+                <a:solidFill>
+                  <a:srgbClr val="000000"/>
+                </a:solidFill>
+                <a:latin typeface="맑은 고딕"/>
+                <a:ea typeface="맑은 고딕"/>
+              </a:rPr>
+              <a:t>[Böckeler 2026a]</a:t>
             </a:r>
           </a:p>
           <a:p>
@@ -23823,57 +24184,47 @@
                 <a:latin typeface="맑은 고딕"/>
                 <a:ea typeface="맑은 고딕"/>
               </a:rPr>
-              <a:t>하네스의 수단은 둘이다 —</a:t>
-            </a:r>
-            <a:r>
-              <a:rPr sz="1600" b="0">
-                <a:solidFill>
-                  <a:srgbClr val="000000"/>
-                </a:solidFill>
-                <a:latin typeface="맑은 고딕"/>
-                <a:ea typeface="맑은 고딕"/>
-              </a:rPr>
-              <a:t> </a:t>
-            </a:r>
-            <a:r>
-              <a:rPr sz="1600" b="1">
-                <a:solidFill>
-                  <a:srgbClr val="000000"/>
-                </a:solidFill>
-                <a:latin typeface="맑은 고딕"/>
-                <a:ea typeface="맑은 고딕"/>
-              </a:rPr>
-              <a:t>행동하기 전에 방향을 주는 것</a:t>
-            </a:r>
-            <a:r>
-              <a:rPr sz="1600" b="0">
-                <a:solidFill>
-                  <a:srgbClr val="000000"/>
-                </a:solidFill>
-                <a:latin typeface="맑은 고딕"/>
-                <a:ea typeface="맑은 고딕"/>
-              </a:rPr>
-              <a:t>과 </a:t>
-            </a:r>
-            <a:r>
-              <a:rPr sz="1600" b="1">
-                <a:solidFill>
-                  <a:srgbClr val="000000"/>
-                </a:solidFill>
-                <a:latin typeface="맑은 고딕"/>
-                <a:ea typeface="맑은 고딕"/>
-              </a:rPr>
-              <a:t>행동한 뒤에 증거를 내는 것</a:t>
-            </a:r>
-            <a:r>
-              <a:rPr sz="1600" b="0">
-                <a:solidFill>
-                  <a:srgbClr val="000000"/>
-                </a:solidFill>
-                <a:latin typeface="맑은 고딕"/>
-                <a:ea typeface="맑은 고딕"/>
-              </a:rPr>
-              <a:t>.</a:t>
+              <a:t>하네스에 두는 것은 두 가지다. 에이전트가 </a:t>
+            </a:r>
+            <a:r>
+              <a:rPr sz="1800" b="1">
+                <a:solidFill>
+                  <a:srgbClr val="000000"/>
+                </a:solidFill>
+                <a:latin typeface="맑은 고딕"/>
+                <a:ea typeface="맑은 고딕"/>
+              </a:rPr>
+              <a:t>행동하기 전에 방향을 주는 가이드</a:t>
+            </a:r>
+            <a:r>
+              <a:rPr sz="1800" b="0">
+                <a:solidFill>
+                  <a:srgbClr val="000000"/>
+                </a:solidFill>
+                <a:latin typeface="맑은 고딕"/>
+                <a:ea typeface="맑은 고딕"/>
+              </a:rPr>
+              <a:t>와, 행동한 </a:t>
+            </a:r>
+            <a:r>
+              <a:rPr sz="1800" b="1">
+                <a:solidFill>
+                  <a:srgbClr val="000000"/>
+                </a:solidFill>
+                <a:latin typeface="맑은 고딕"/>
+                <a:ea typeface="맑은 고딕"/>
+              </a:rPr>
+              <a:t>뒤에 결과를 판정해 증거를 내는 센서</a:t>
+            </a:r>
+            <a:r>
+              <a:rPr sz="1800" b="0">
+                <a:solidFill>
+                  <a:srgbClr val="000000"/>
+                </a:solidFill>
+                <a:latin typeface="맑은 고딕"/>
+                <a:ea typeface="맑은 고딕"/>
+              </a:rPr>
+              <a:t>다.</a:t>
             </a:r>
           </a:p>
           <a:p>
@@ -23956,7 +24307,27 @@
                 <a:latin typeface="맑은 고딕"/>
                 <a:ea typeface="맑은 고딕"/>
               </a:rPr>
-              <a:t>"Guides (feedforward controls) - anticipate the agent's behaviour and aim to steer it before it acts. Guides increase the probability that the agent creates good results in the first attempt", [Böckeler 2026a]</a:t>
+              <a:t>"Guides (feedforward controls) - anticipate the agent's behaviour and aim to steer it before it acts. Guides increase the probability that the agent creates good results in the first attempt"</a:t>
+            </a:r>
+            <a:r>
+              <a:rPr sz="1000" b="0">
+                <a:solidFill>
+                  <a:srgbClr val="000000"/>
+                </a:solidFill>
+                <a:latin typeface="맑은 고딕"/>
+                <a:ea typeface="맑은 고딕"/>
+              </a:rPr>
+              <a:t>, </a:t>
+            </a:r>
+            <a:r>
+              <a:rPr sz="1000" b="0">
+                <a:solidFill>
+                  <a:srgbClr val="000000"/>
+                </a:solidFill>
+                <a:latin typeface="맑은 고딕"/>
+                <a:ea typeface="맑은 고딕"/>
+              </a:rPr>
+              <a:t>[Böckeler 2026a]</a:t>
             </a:r>
           </a:p>
           <a:p>
@@ -25240,7 +25611,7 @@
                 <a:latin typeface="맑은 고딕"/>
                 <a:ea typeface="맑은 고딕"/>
               </a:rPr>
-              <a:t> 둔다. 하나만 두면 에이전트는 두 가지 중 하나가 된다.</a:t>
+              <a:t> 두어야 한다. 하나만 두면 에이전트는 다음 두 모습 가운데 하나가 된다.</a:t>
             </a:r>
           </a:p>
           <a:p>
@@ -25363,7 +25734,27 @@
                 <a:latin typeface="맑은 고딕"/>
                 <a:ea typeface="맑은 고딕"/>
               </a:rPr>
-              <a:t>"Separately, you get either an agent that keeps repeating the same mistakes (feedback-only) or an agent that encodes rules but never finds out whether they worked (feed-forward-only)", [Böckeler 2026a]</a:t>
+              <a:t>"Separately, you get either an agent that keeps repeating the same mistakes (feedback-only) or an agent that encodes rules but never finds out whether they worked (feed-forward-only)"</a:t>
+            </a:r>
+            <a:r>
+              <a:rPr sz="1000" b="0">
+                <a:solidFill>
+                  <a:srgbClr val="000000"/>
+                </a:solidFill>
+                <a:latin typeface="맑은 고딕"/>
+                <a:ea typeface="맑은 고딕"/>
+              </a:rPr>
+              <a:t>, </a:t>
+            </a:r>
+            <a:r>
+              <a:rPr sz="1000" b="0">
+                <a:solidFill>
+                  <a:srgbClr val="000000"/>
+                </a:solidFill>
+                <a:latin typeface="맑은 고딕"/>
+                <a:ea typeface="맑은 고딕"/>
+              </a:rPr>
+              <a:t>[Böckeler 2026a]</a:t>
             </a:r>
           </a:p>
         </p:txBody>
@@ -26547,7 +26938,7 @@
                 <a:latin typeface="맑은 고딕"/>
                 <a:ea typeface="맑은 고딕"/>
               </a:rPr>
-              <a:t>센서와 가이드는 </a:t>
+              <a:t>가이드와 센서는 </a:t>
             </a:r>
             <a:r>
               <a:rPr sz="1800" b="1">
@@ -26557,7 +26948,7 @@
                 <a:latin typeface="맑은 고딕"/>
                 <a:ea typeface="맑은 고딕"/>
               </a:rPr>
-              <a:t>누가 판정하는가</a:t>
+              <a:t>누가 판정하느냐</a:t>
             </a:r>
             <a:r>
               <a:rPr sz="1800" b="0">
@@ -26567,7 +26958,7 @@
                 <a:latin typeface="맑은 고딕"/>
                 <a:ea typeface="맑은 고딕"/>
               </a:rPr>
-              <a:t>로 두 갈래다. 기계가 판정하는 것과 LLM이 판단하는 것이다.</a:t>
+              <a:t>에 따라 둘로 나뉜다. 기계가 정해진 규칙으로 판정하는 것과, LLM이 읽고 판단하는 것이다.</a:t>
             </a:r>
           </a:p>
           <a:p>
@@ -26630,7 +27021,27 @@
                 <a:latin typeface="맑은 고딕"/>
                 <a:ea typeface="맑은 고딕"/>
               </a:rPr>
-              <a:t>"Computational - deterministic and fast, run by the CPU. Tests, linters, type checkers, structural analysis", [Böckeler 2026a]</a:t>
+              <a:t>"Computational - deterministic and fast, run by the CPU. Tests, linters, type checkers, structural analysis"</a:t>
+            </a:r>
+            <a:r>
+              <a:rPr sz="1000" b="0">
+                <a:solidFill>
+                  <a:srgbClr val="000000"/>
+                </a:solidFill>
+                <a:latin typeface="맑은 고딕"/>
+                <a:ea typeface="맑은 고딕"/>
+              </a:rPr>
+              <a:t>, </a:t>
+            </a:r>
+            <a:r>
+              <a:rPr sz="1000" b="0">
+                <a:solidFill>
+                  <a:srgbClr val="000000"/>
+                </a:solidFill>
+                <a:latin typeface="맑은 고딕"/>
+                <a:ea typeface="맑은 고딕"/>
+              </a:rPr>
+              <a:t>[Böckeler 2026a]</a:t>
             </a:r>
           </a:p>
           <a:p>
@@ -27128,7 +27539,7 @@
         <p:spPr>
           <a:xfrm>
             <a:off x="365760" y="960120"/>
-            <a:ext cx="8412480" cy="3174076"/>
+            <a:ext cx="8412480" cy="3448396"/>
           </a:xfrm>
         </p:spPr>
         <p:txBody>
@@ -27154,7 +27565,7 @@
                 <a:latin typeface="맑은 고딕"/>
                 <a:ea typeface="맑은 고딕"/>
               </a:rPr>
-              <a:t>가이드가 방향을 주고 센서가 어긋남을 되돌려 </a:t>
+              <a:t>에이전트는 </a:t>
             </a:r>
             <a:r>
               <a:rPr sz="1800" b="1">
@@ -27164,7 +27575,7 @@
                 <a:latin typeface="맑은 고딕"/>
                 <a:ea typeface="맑은 고딕"/>
               </a:rPr>
-              <a:t>하나의 루프</a:t>
+              <a:t>가이드가 준 방향</a:t>
             </a:r>
             <a:r>
               <a:rPr sz="1800" b="0">
@@ -27174,7 +27585,7 @@
                 <a:latin typeface="맑은 고딕"/>
                 <a:ea typeface="맑은 고딕"/>
               </a:rPr>
-              <a:t>가 된다.</a:t>
+              <a:t>으로 코드를 만들고, 센서의 실패 메시지를 읽어 고친 뒤 다시 검사를 받는다.</a:t>
             </a:r>
           </a:p>
           <a:p>
@@ -27237,7 +27648,27 @@
                 <a:latin typeface="맑은 고딕"/>
                 <a:ea typeface="맑은 고딕"/>
               </a:rPr>
-              <a:t>"The agent harness acts like a cybernetic governor, combining feed-forward and feedback to regulate the codebase towards its desired state.", [Böckeler 2026a]</a:t>
+              <a:t>"The agent harness acts like a cybernetic governor, combining feed-forward and feedback to regulate the codebase towards its desired state."</a:t>
+            </a:r>
+            <a:r>
+              <a:rPr sz="1000" b="0">
+                <a:solidFill>
+                  <a:srgbClr val="000000"/>
+                </a:solidFill>
+                <a:latin typeface="맑은 고딕"/>
+                <a:ea typeface="맑은 고딕"/>
+              </a:rPr>
+              <a:t>, </a:t>
+            </a:r>
+            <a:r>
+              <a:rPr sz="1000" b="0">
+                <a:solidFill>
+                  <a:srgbClr val="000000"/>
+                </a:solidFill>
+                <a:latin typeface="맑은 고딕"/>
+                <a:ea typeface="맑은 고딕"/>
+              </a:rPr>
+              <a:t>[Böckeler 2026a]</a:t>
             </a:r>
           </a:p>
           <a:p>
@@ -27425,7 +27856,7 @@
         </p:nvSpPr>
         <p:spPr>
           <a:xfrm>
-            <a:off x="365760" y="4435948"/>
+            <a:off x="365760" y="4710268"/>
             <a:ext cx="8412480" cy="201168"/>
           </a:xfrm>
           <a:prstGeom prst="rect">
@@ -27469,8 +27900,8 @@
         </p:blipFill>
         <p:spPr>
           <a:xfrm>
-            <a:off x="1565288" y="4673692"/>
-            <a:ext cx="6013424" cy="1702781"/>
+            <a:off x="2049673" y="4948012"/>
+            <a:ext cx="5044654" cy="1428461"/>
           </a:xfrm>
           <a:prstGeom prst="rect">
             <a:avLst/>
@@ -28437,7 +28868,7 @@
                 <a:latin typeface="맑은 고딕"/>
                 <a:ea typeface="맑은 고딕"/>
               </a:rPr>
-              <a:t>어디서 돌리는가</a:t>
+              <a:t>언제 돌리는가</a:t>
             </a:r>
             <a:r>
               <a:rPr sz="1800" b="0">
@@ -28447,7 +28878,7 @@
                 <a:latin typeface="맑은 고딕"/>
                 <a:ea typeface="맑은 고딕"/>
               </a:rPr>
-              <a:t>로 값이 달라진다. 앞쪽에서 돌릴수록 고치는 비용이 싸다.</a:t>
+              <a:t>에 따라 문제를 알게 되는 시점이 달라진다. 늦게 알수록 고치는 비용이 커진다.</a:t>
             </a:r>
           </a:p>
           <a:p>
@@ -28510,7 +28941,27 @@
                 <a:latin typeface="맑은 고딕"/>
                 <a:ea typeface="맑은 고딕"/>
               </a:rPr>
-              <a:t>"You want to have checks as far left in the path to production as possible, since the earlier you find issues, the cheaper they are to fix.", [Böckeler 2026a]</a:t>
+              <a:t>"You want to have checks as far left in the path to production as possible, since the earlier you find issues, the cheaper they are to fix."</a:t>
+            </a:r>
+            <a:r>
+              <a:rPr sz="1000" b="0">
+                <a:solidFill>
+                  <a:srgbClr val="000000"/>
+                </a:solidFill>
+                <a:latin typeface="맑은 고딕"/>
+                <a:ea typeface="맑은 고딕"/>
+              </a:rPr>
+              <a:t>, </a:t>
+            </a:r>
+            <a:r>
+              <a:rPr sz="1000" b="0">
+                <a:solidFill>
+                  <a:srgbClr val="000000"/>
+                </a:solidFill>
+                <a:latin typeface="맑은 고딕"/>
+                <a:ea typeface="맑은 고딕"/>
+              </a:rPr>
+              <a:t>[Böckeler 2026a]</a:t>
             </a:r>
           </a:p>
         </p:txBody>
@@ -28676,7 +29127,7 @@
                 <a:latin typeface="맑은 고딕"/>
                 <a:ea typeface="맑은 고딕"/>
               </a:rPr>
-              <a:t>앞쪽으로 당기는 기준은 </a:t>
+              <a:t>앞으로 당길지는 </a:t>
             </a:r>
             <a:r>
               <a:rPr sz="1800" b="1">
@@ -28686,7 +29137,7 @@
                 <a:latin typeface="맑은 고딕"/>
                 <a:ea typeface="맑은 고딕"/>
               </a:rPr>
-              <a:t>값과 속도</a:t>
+              <a:t>그 검사에 드는 시간과 비용</a:t>
             </a:r>
             <a:r>
               <a:rPr sz="1800" b="0">
@@ -28696,17 +29147,7 @@
                 <a:latin typeface="맑은 고딕"/>
                 <a:ea typeface="맑은 고딕"/>
               </a:rPr>
-              <a:t>다 —</a:t>
-            </a:r>
-            <a:r>
-              <a:rPr sz="1600" b="0">
-                <a:solidFill>
-                  <a:srgbClr val="000000"/>
-                </a:solidFill>
-                <a:latin typeface="맑은 고딕"/>
-                <a:ea typeface="맑은 고딕"/>
-              </a:rPr>
-              <a:t> 여러 번 돌릴 센서는 몇 초 안에 끝나야 한다.</a:t>
+              <a:t>으로 정한다. 에이전트가 한 과제에서 여러 번 돌릴 센서라면 몇 초 안에 끝나야 한다.</a:t>
             </a:r>
           </a:p>
           <a:p>
@@ -29941,7 +30382,7 @@
                 <a:latin typeface="맑은 고딕"/>
                 <a:ea typeface="맑은 고딕"/>
               </a:rPr>
-              <a:t>무엇을 조절하는가</a:t>
+              <a:t>무엇을 지키려는 것인지</a:t>
             </a:r>
             <a:r>
               <a:rPr sz="1800" b="0">
@@ -29951,7 +30392,7 @@
                 <a:latin typeface="맑은 고딕"/>
                 <a:ea typeface="맑은 고딕"/>
               </a:rPr>
-              <a:t>로 나누면, 센서를 두지 않은 자리가 보인다.</a:t>
+              <a:t>로 나누어 보면, 아직 센서를 두지 않은 범주가 드러난다.</a:t>
             </a:r>
           </a:p>
           <a:p>
@@ -30014,7 +30455,27 @@
                 <a:latin typeface="맑은 고딕"/>
                 <a:ea typeface="맑은 고딕"/>
               </a:rPr>
-              <a:t>"The following are three categories that seem useful to me as of now", [Böckeler 2026a]</a:t>
+              <a:t>"The following are three categories that seem useful to me as of now"</a:t>
+            </a:r>
+            <a:r>
+              <a:rPr sz="1000" b="0">
+                <a:solidFill>
+                  <a:srgbClr val="000000"/>
+                </a:solidFill>
+                <a:latin typeface="맑은 고딕"/>
+                <a:ea typeface="맑은 고딕"/>
+              </a:rPr>
+              <a:t>, </a:t>
+            </a:r>
+            <a:r>
+              <a:rPr sz="1000" b="0">
+                <a:solidFill>
+                  <a:srgbClr val="000000"/>
+                </a:solidFill>
+                <a:latin typeface="맑은 고딕"/>
+                <a:ea typeface="맑은 고딕"/>
+              </a:rPr>
+              <a:t>[Böckeler 2026a]</a:t>
             </a:r>
           </a:p>
           <a:p>

--- a/courses/ai-native/sessions/s09.pptx
+++ b/courses/ai-native/sessions/s09.pptx
@@ -785,7 +785,7 @@
             <a:pPr lvl="0"/>
             <a:r>
               <a:rPr lang="ko-KR" sz="1200"/>
-              <a:t>결합도를 합격선으로 쓰지 않는 이유 — [Böckeler 2026b]의 실험에서 결합도 데이터는 사람에게 유용했지만 그 자체로 통과·실패를 가르는 기준은 되지 못했다.</a:t>
+              <a:t>결합도를 합격선으로 쓰지 않는 이유 — [Böckeler 2026b]의 실험에서 결합도 데이터는 사람에게 유용했지만 그 자체로 통과·실패를 구분하는 기준은 되지 못했다.</a:t>
             </a:r>
           </a:p>
           <a:p>
@@ -1589,6 +1589,13 @@
             <a:pPr lvl="0"/>
             <a:r>
               <a:rPr lang="ko-KR" sz="1200"/>
+              <a:t>실제로 실행한 프롬프트 — 이 별첨은 LLM에 맡겨 받은 것이 아니라 강사가 저장소에서 직접 만든 결과다. 이 세션에서 LLM을 실제로 돌린 것은 금액 계산의 심사 하나뿐이고, 보낸 프롬프트 전문이 code/s09/pipeline/examples/amount-review-prompt.txt, 받은 응답이 같은 폴더의 amount-review-output.md다.</a:t>
+            </a:r>
+          </a:p>
+          <a:p>
+            <a:pPr lvl="0"/>
+            <a:r>
+              <a:rPr lang="ko-KR" sz="1200"/>
               <a:t>금액 계산의 심사는 Claude Opus 5.5로 2026-10-27에 1턴 실행했다. 세 항목을 통과시키면서 PricedOrderItem 주석이 단가를 "sale price"로 설명한다는 점을 지적했다 — 컴파일과 테스트가 잡지 못하는 종류의 지적이다.</a:t>
             </a:r>
           </a:p>
@@ -2032,7 +2039,7 @@
             <a:pPr lvl="0"/>
             <a:r>
               <a:rPr lang="ko-KR" sz="1200"/>
-              <a:t>셋의 묶음은 이 과정의 정리다. 세 가지가 각각 뒤 세 topic의 주제가 된다 — 독자는 「고치는 방법을 담은 메시지」, 위치와 빈도는 「루프 안과 CI를 가르는 기준」이다.</a:t>
+              <a:t>셋의 묶음은 이 과정의 정리다. 세 가지가 각각 뒤 세 topic의 주제가 된다 — 독자는 「고치는 방법을 담은 메시지」, 위치와 빈도는 「루프 안과 CI를 구분하는 기준」이다.</a:t>
             </a:r>
           </a:p>
         </p:txBody>
@@ -3612,7 +3619,7 @@
                 <a:latin typeface="맑은 고딕"/>
                 <a:ea typeface="맑은 고딕"/>
               </a:rPr>
-              <a:t>12. 실습 —</a:t>
+              <a:t>12. 실습 9 —</a:t>
             </a:r>
             <a:r>
               <a:rPr sz="1400" b="0">
@@ -3818,7 +3825,7 @@
                 <a:latin typeface="맑은 고딕"/>
                 <a:ea typeface="맑은 고딕"/>
               </a:rPr>
-              <a:t>루프 안과 CI를 가르는 기준</a:t>
+              <a:t>루프 안과 CI를 구분하는 기준</a:t>
             </a:r>
           </a:p>
           <a:p>
@@ -4723,7 +4730,7 @@
                 <a:latin typeface="맑은 고딕"/>
                 <a:ea typeface="맑은 고딕"/>
               </a:rPr>
-              <a:t>으로 가른다.</a:t>
+              <a:t>으로 구분한다.</a:t>
             </a:r>
           </a:p>
           <a:p>
@@ -9090,7 +9097,7 @@
                 <a:latin typeface="맑은 고딕"/>
                 <a:ea typeface="맑은 고딕"/>
               </a:rPr>
-              <a:t> 클래스가 아는 것의 수를 신호로 볼 뿐 통과·실패를 가르지 않는다.</a:t>
+              <a:t> 클래스가 아는 것의 수를 신호로 볼 뿐 통과·실패를 구분하지 않는다.</a:t>
             </a:r>
           </a:p>
         </p:txBody>
@@ -9456,7 +9463,7 @@
                 <a:latin typeface="맑은 고딕"/>
                 <a:ea typeface="맑은 고딕"/>
               </a:rPr>
-              <a:t>경계가 있어 의존을 잰다</a:t>
+              <a:t>경계가 있어 의존을 측정한다</a:t>
             </a:r>
             <a:r>
               <a:rPr sz="1800" b="0">
@@ -9476,7 +9483,7 @@
                 <a:latin typeface="맑은 고딕"/>
                 <a:ea typeface="맑은 고딕"/>
               </a:rPr>
-              <a:t> "세션 06. 아키텍처"가 패키지를 가르지 않았다면 의존 규칙 검사를 쓸 수 없다.</a:t>
+              <a:t> "세션 06. 아키텍처"가 패키지를 나누지 않았다면 의존 규칙 검사를 쓸 수 없다.</a:t>
             </a:r>
           </a:p>
           <a:p>
@@ -15320,7 +15327,7 @@
                 <a:latin typeface="맑은 고딕"/>
                 <a:ea typeface="맑은 고딕"/>
               </a:rPr>
-              <a:t> 가른다.</a:t>
+              <a:t> 구분한다.</a:t>
             </a:r>
           </a:p>
           <a:p>
@@ -15459,7 +15466,7 @@
                 <a:latin typeface="맑은 고딕"/>
                 <a:ea typeface="맑은 고딕"/>
               </a:rPr>
-              <a:t>로 모으고, 루프 안에서 돌 것과 CI에 남길 것을 가른다.</a:t>
+              <a:t>로 모으고, 루프 안에서 돌 것과 CI에 남길 것을 구분한다.</a:t>
             </a:r>
           </a:p>
           <a:p>
@@ -16570,7 +16577,7 @@
                 <a:latin typeface="맑은 고딕"/>
                 <a:ea typeface="맑은 고딕"/>
               </a:rPr>
-              <a:t>12. 실습 — 검사 붙이기</a:t>
+              <a:t>12. 실습 9 — 검사 붙이기</a:t>
             </a:r>
           </a:p>
         </p:txBody>
@@ -16706,8 +16713,8 @@
         </p:nvSpPr>
         <p:spPr>
           <a:xfrm>
-            <a:off x="365760" y="1399442"/>
-            <a:ext cx="4069080" cy="4818478"/>
+            <a:off x="365760" y="1409700"/>
+            <a:ext cx="4069080" cy="4808220"/>
           </a:xfrm>
         </p:spPr>
         <p:txBody>
@@ -17047,7 +17054,7 @@
                 <a:latin typeface="맑은 고딕"/>
                 <a:ea typeface="맑은 고딕"/>
               </a:rPr>
-              <a:t>으로 갈라 적고, 검사 파일과 규칙 파일을 네가 고치지 못하도록 권한을 설정해라.</a:t>
+              <a:t>으로 나누어 적고, 검사 파일과 규칙 파일을 네가 고치지 못하도록 권한을 설정해라.</a:t>
             </a:r>
           </a:p>
         </p:txBody>
@@ -17071,7 +17078,7 @@
         <p:spPr>
           <a:xfrm>
             <a:off x="365760" y="960120"/>
-            <a:ext cx="8412480" cy="439322"/>
+            <a:ext cx="8412480" cy="449580"/>
           </a:xfrm>
         </p:spPr>
         <p:txBody>
@@ -17130,8 +17137,8 @@
         </p:nvSpPr>
         <p:spPr>
           <a:xfrm>
-            <a:off x="4709160" y="1399442"/>
-            <a:ext cx="4069080" cy="4818478"/>
+            <a:off x="4709160" y="1409700"/>
+            <a:ext cx="4069080" cy="4808220"/>
           </a:xfrm>
         </p:spPr>
         <p:txBody>
@@ -22954,7 +22961,7 @@
                 <a:latin typeface="맑은 고딕"/>
                 <a:ea typeface="맑은 고딕"/>
               </a:rPr>
-              <a:t>가르는 기준은 속도와 되돌림이다</a:t>
+              <a:t>구분하는 기준은 속도와 되돌림이다</a:t>
             </a:r>
             <a:r>
               <a:rPr sz="1800" b="0">
@@ -25139,7 +25146,7 @@
                 <a:latin typeface="맑은 고딕"/>
                 <a:ea typeface="맑은 고딕"/>
               </a:rPr>
-              <a:t> 결과를 잰다.</a:t>
+              <a:t> 결과를 측정한다.</a:t>
             </a:r>
           </a:p>
           <a:p>
@@ -26405,7 +26412,7 @@
                 <a:latin typeface="맑은 고딕"/>
                 <a:ea typeface="맑은 고딕"/>
               </a:rPr>
-              <a:t>로 갈린다. 기계가 판정할 수 있는 것은 기계로 옮긴다.</a:t>
+              <a:t>로 나뉜다. 기계가 판정할 수 있는 것은 기계로 옮긴다.</a:t>
             </a:r>
           </a:p>
           <a:p>

--- a/courses/ai-native/sessions/s09.pptx
+++ b/courses/ai-native/sessions/s09.pptx
@@ -635,7 +635,7 @@
             <a:pPr lvl="0"/>
             <a:r>
               <a:rPr lang="ko-KR" sz="1200"/>
-              <a:t>네 줄 중 의존 규칙만 완전히 계산적이다. 이름과 불변 조건은 일부만 기계가 본다 — 나머지가 「10. 사람의 리뷰가 볼 것」으로 간다.</a:t>
+              <a:t>4줄 중 의존 규칙만 완전히 계산적이다. 이름과 불변 조건은 일부만 기계가 본다 — 나머지가 「10. 사람의 리뷰가 볼 것」으로 간다.</a:t>
             </a:r>
           </a:p>
           <a:p>
@@ -703,7 +703,7 @@
             <a:pPr lvl="0"/>
             <a:r>
               <a:rPr lang="ko-KR" sz="1200"/>
-              <a:t>전체 구성은 code/s09/pipeline/build.gradle.kts다. 슬라이드는 검사를 매다는 세 곳만 발췌했다.</a:t>
+              <a:t>전체 구성은 code/s09/pipeline/build.gradle.kts다. 슬라이드는 검사를 매다는 3곳만 발췌했다.</a:t>
             </a:r>
           </a:p>
           <a:p>
@@ -778,7 +778,7 @@
             <a:pPr lvl="0"/>
             <a:r>
               <a:rPr lang="ko-KR" sz="1200"/>
-              <a:t>인용 근거: [Böckeler 2026a] 원문 확인. 세 범주의 이름이 원문의 것이고, 표의 오른쪽 두 열은 이 과정의 적용이다.</a:t>
+              <a:t>인용 근거: [Böckeler 2026a] 원문 확인. 세 범주의 이름이 원문의 것이고, 표의 오른쪽 2열은 이 과정의 적용이다.</a:t>
             </a:r>
           </a:p>
           <a:p>
@@ -860,7 +860,7 @@
             <a:pPr lvl="0"/>
             <a:r>
               <a:rPr lang="ko-KR" sz="1200"/>
-              <a:t>앞의 다섯 세션이 왜 필요했는지가 여기서 닫힌다 — 결정이 없으면 검사가 없고, 검사가 없으면 맡길 수 없다.</a:t>
+              <a:t>앞의 5세션이 왜 필요했는지가 여기서 닫힌다 — 결정이 없으면 검사가 없고, 검사가 없으면 맡길 수 없다.</a:t>
             </a:r>
           </a:p>
         </p:txBody>
@@ -1071,7 +1071,7 @@
             <a:pPr lvl="0"/>
             <a:r>
               <a:rPr lang="ko-KR" sz="1200"/>
-              <a:t>표의 다섯 줄은 「06. 명령 하나로 모으기」의 「주문한다의 검사 다섯」과 순서가 같다. 검사를 세우는 일과 실패를 읽는 일이 한 줄씩 이어진다.</a:t>
+              <a:t>표의 5줄은 「06. 명령 하나로 모으기」의 「주문한다의 검사 5가지」과 순서가 같다. 검사를 세우는 일과 실패를 읽는 일이 한 줄씩 이어진다.</a:t>
             </a:r>
           </a:p>
           <a:p>
@@ -1146,7 +1146,7 @@
             <a:pPr lvl="0"/>
             <a:r>
               <a:rPr lang="ko-KR" sz="1200"/>
-              <a:t>인용 근거: [Böckeler 2026a] 원문 확인. 세 가지 문제의 이름이 원문의 것이고, 오른쪽 열은 이 과정의 적용이다.</a:t>
+              <a:t>인용 근거: [Böckeler 2026a] 원문 확인. 3가지 문제의 이름이 원문의 것이고, 오른쪽 열은 이 과정의 적용이다.</a:t>
             </a:r>
           </a:p>
           <a:p>
@@ -1821,7 +1821,7 @@
             <a:pPr lvl="0"/>
             <a:r>
               <a:rPr lang="ko-KR" sz="1200"/>
-              <a:t>다섯 줄이 모두 검사를 갖는 것은 아니다. 「06. 명령 하나로 모으기」의 「주문한다의 검사 다섯」이 실제로 붙인 것을 보인다.</a:t>
+              <a:t>5줄이 모두 검사를 갖는 것은 아니다. 「06. 명령 하나로 모으기」의 「주문한다의 검사 5가지」이 실제로 붙인 것을 보인다.</a:t>
             </a:r>
           </a:p>
         </p:txBody>
@@ -2039,7 +2039,7 @@
             <a:pPr lvl="0"/>
             <a:r>
               <a:rPr lang="ko-KR" sz="1200"/>
-              <a:t>셋의 묶음은 이 과정의 정리다. 세 가지가 각각 뒤 세 topic의 주제가 된다 — 독자는 「고치는 방법을 담은 메시지」, 위치와 빈도는 「루프 안과 CI를 구분하는 기준」이다.</a:t>
+              <a:t>셋의 묶음은 이 과정의 정리다. 3가지가 각각 뒤 세 topic의 주제가 된다 — 독자는 「고치는 방법을 담은 메시지」, 위치와 빈도는 「루프 안과 CI를 구분하는 기준」이다.</a:t>
             </a:r>
           </a:p>
         </p:txBody>
@@ -3441,7 +3441,7 @@
                 <a:latin typeface="맑은 고딕"/>
                 <a:ea typeface="맑은 고딕"/>
               </a:rPr>
-              <a:t>04. 달라지는 것 셋</a:t>
+              <a:t>04. 달라지는 것 3가지</a:t>
             </a:r>
           </a:p>
           <a:p>
@@ -3837,7 +3837,7 @@
                 <a:latin typeface="맑은 고딕"/>
                 <a:ea typeface="맑은 고딕"/>
               </a:rPr>
-              <a:t>04. 달라지는 것 셋</a:t>
+              <a:t>04. 달라지는 것 3가지</a:t>
             </a:r>
           </a:p>
         </p:txBody>
@@ -3976,7 +3976,7 @@
                       </a:r>
                     </a:p>
                   </a:txBody>
-                  <a:tcPr marL="6750" marR="6750" marT="6750" marB="0" anchor="ctr">
+                  <a:tcPr marL="6750" marR="6750" marT="6750" marB="6750" anchor="ctr">
                     <a:lnL>
                       <a:noFill/>
                     </a:lnL>
@@ -4038,7 +4038,7 @@
                       </a:r>
                     </a:p>
                   </a:txBody>
-                  <a:tcPr marL="6750" marR="6750" marT="6750" marB="0" anchor="ctr">
+                  <a:tcPr marL="6750" marR="6750" marT="6750" marB="6750" anchor="ctr">
                     <a:lnL w="9525" cap="flat" cmpd="sng" algn="ctr">
                       <a:solidFill>
                         <a:schemeClr val="bg1">
@@ -4108,7 +4108,7 @@
                       </a:r>
                     </a:p>
                   </a:txBody>
-                  <a:tcPr marL="6750" marR="6750" marT="6750" marB="0" anchor="ctr">
+                  <a:tcPr marL="6750" marR="6750" marT="6750" marB="6750" anchor="ctr">
                     <a:lnL w="9525" cap="flat" cmpd="sng" algn="ctr">
                       <a:solidFill>
                         <a:schemeClr val="bg1">
@@ -4180,7 +4180,7 @@
                       </a:r>
                     </a:p>
                   </a:txBody>
-                  <a:tcPr marL="81005" marR="6750" marT="6750" marB="0" anchor="ctr">
+                  <a:tcPr marL="81005" marR="6750" marT="6750" marB="6750" anchor="ctr">
                     <a:lnL>
                       <a:noFill/>
                     </a:lnL>
@@ -4234,7 +4234,7 @@
                       </a:r>
                     </a:p>
                   </a:txBody>
-                  <a:tcPr marL="81005" marR="6750" marT="6750" marB="0" anchor="ctr">
+                  <a:tcPr marL="81005" marR="6750" marT="6750" marB="6750" anchor="ctr">
                     <a:lnL>
                       <a:noFill/>
                     </a:lnL>
@@ -4290,7 +4290,7 @@
                       </a:r>
                     </a:p>
                   </a:txBody>
-                  <a:tcPr marL="81005" marR="6750" marT="6750" marB="0" anchor="ctr">
+                  <a:tcPr marL="81005" marR="6750" marT="6750" marB="6750" anchor="ctr">
                     <a:lnL>
                       <a:noFill/>
                     </a:lnL>
@@ -4348,7 +4348,7 @@
                       </a:r>
                     </a:p>
                   </a:txBody>
-                  <a:tcPr marL="81005" marR="6750" marT="6750" marB="0" anchor="ctr">
+                  <a:tcPr marL="81005" marR="6750" marT="6750" marB="6750" anchor="ctr">
                     <a:lnL>
                       <a:noFill/>
                     </a:lnL>
@@ -4402,7 +4402,7 @@
                       </a:r>
                     </a:p>
                   </a:txBody>
-                  <a:tcPr marL="81005" marR="6750" marT="6750" marB="0" anchor="ctr">
+                  <a:tcPr marL="81005" marR="6750" marT="6750" marB="6750" anchor="ctr">
                     <a:lnL>
                       <a:noFill/>
                     </a:lnL>
@@ -4458,7 +4458,7 @@
                       </a:r>
                     </a:p>
                   </a:txBody>
-                  <a:tcPr marL="81005" marR="6750" marT="6750" marB="0" anchor="ctr">
+                  <a:tcPr marL="81005" marR="6750" marT="6750" marB="6750" anchor="ctr">
                     <a:lnL>
                       <a:noFill/>
                     </a:lnL>
@@ -4516,7 +4516,7 @@
                       </a:r>
                     </a:p>
                   </a:txBody>
-                  <a:tcPr marL="81005" marR="6750" marT="6750" marB="0" anchor="ctr">
+                  <a:tcPr marL="81005" marR="6750" marT="6750" marB="6750" anchor="ctr">
                     <a:lnL>
                       <a:noFill/>
                     </a:lnL>
@@ -4570,7 +4570,7 @@
                       </a:r>
                     </a:p>
                   </a:txBody>
-                  <a:tcPr marL="81005" marR="6750" marT="6750" marB="0" anchor="ctr">
+                  <a:tcPr marL="81005" marR="6750" marT="6750" marB="6750" anchor="ctr">
                     <a:lnL>
                       <a:noFill/>
                     </a:lnL>
@@ -4626,7 +4626,7 @@
                       </a:r>
                     </a:p>
                   </a:txBody>
-                  <a:tcPr marL="81005" marR="6750" marT="6750" marB="0" anchor="ctr">
+                  <a:tcPr marL="81005" marR="6750" marT="6750" marB="6750" anchor="ctr">
                     <a:lnL>
                       <a:noFill/>
                     </a:lnL>
@@ -5241,7 +5241,7 @@
                       </a:r>
                     </a:p>
                   </a:txBody>
-                  <a:tcPr marL="6750" marR="6750" marT="6750" marB="0" anchor="ctr">
+                  <a:tcPr marL="6750" marR="6750" marT="6750" marB="6750" anchor="ctr">
                     <a:lnL>
                       <a:noFill/>
                     </a:lnL>
@@ -5303,7 +5303,7 @@
                       </a:r>
                     </a:p>
                   </a:txBody>
-                  <a:tcPr marL="6750" marR="6750" marT="6750" marB="0" anchor="ctr">
+                  <a:tcPr marL="6750" marR="6750" marT="6750" marB="6750" anchor="ctr">
                     <a:lnL w="9525" cap="flat" cmpd="sng" algn="ctr">
                       <a:solidFill>
                         <a:schemeClr val="bg1">
@@ -5373,7 +5373,7 @@
                       </a:r>
                     </a:p>
                   </a:txBody>
-                  <a:tcPr marL="6750" marR="6750" marT="6750" marB="0" anchor="ctr">
+                  <a:tcPr marL="6750" marR="6750" marT="6750" marB="6750" anchor="ctr">
                     <a:lnL w="9525" cap="flat" cmpd="sng" algn="ctr">
                       <a:solidFill>
                         <a:schemeClr val="bg1">
@@ -5445,7 +5445,7 @@
                       </a:r>
                     </a:p>
                   </a:txBody>
-                  <a:tcPr marL="81005" marR="6750" marT="6750" marB="0" anchor="ctr">
+                  <a:tcPr marL="81005" marR="6750" marT="6750" marB="6750" anchor="ctr">
                     <a:lnL>
                       <a:noFill/>
                     </a:lnL>
@@ -5499,7 +5499,7 @@
                       </a:r>
                     </a:p>
                   </a:txBody>
-                  <a:tcPr marL="81005" marR="6750" marT="6750" marB="0" anchor="ctr">
+                  <a:tcPr marL="81005" marR="6750" marT="6750" marB="6750" anchor="ctr">
                     <a:lnL>
                       <a:noFill/>
                     </a:lnL>
@@ -5555,7 +5555,7 @@
                       </a:r>
                     </a:p>
                   </a:txBody>
-                  <a:tcPr marL="81005" marR="6750" marT="6750" marB="0" anchor="ctr">
+                  <a:tcPr marL="81005" marR="6750" marT="6750" marB="6750" anchor="ctr">
                     <a:lnL>
                       <a:noFill/>
                     </a:lnL>
@@ -5613,7 +5613,7 @@
                       </a:r>
                     </a:p>
                   </a:txBody>
-                  <a:tcPr marL="81005" marR="6750" marT="6750" marB="0" anchor="ctr">
+                  <a:tcPr marL="81005" marR="6750" marT="6750" marB="6750" anchor="ctr">
                     <a:lnL>
                       <a:noFill/>
                     </a:lnL>
@@ -5667,7 +5667,7 @@
                       </a:r>
                     </a:p>
                   </a:txBody>
-                  <a:tcPr marL="81005" marR="6750" marT="6750" marB="0" anchor="ctr">
+                  <a:tcPr marL="81005" marR="6750" marT="6750" marB="6750" anchor="ctr">
                     <a:lnL>
                       <a:noFill/>
                     </a:lnL>
@@ -5723,7 +5723,7 @@
                       </a:r>
                     </a:p>
                   </a:txBody>
-                  <a:tcPr marL="81005" marR="6750" marT="6750" marB="0" anchor="ctr">
+                  <a:tcPr marL="81005" marR="6750" marT="6750" marB="6750" anchor="ctr">
                     <a:lnL>
                       <a:noFill/>
                     </a:lnL>
@@ -5781,7 +5781,7 @@
                       </a:r>
                     </a:p>
                   </a:txBody>
-                  <a:tcPr marL="81005" marR="6750" marT="6750" marB="0" anchor="ctr">
+                  <a:tcPr marL="81005" marR="6750" marT="6750" marB="6750" anchor="ctr">
                     <a:lnL>
                       <a:noFill/>
                     </a:lnL>
@@ -5835,7 +5835,7 @@
                       </a:r>
                     </a:p>
                   </a:txBody>
-                  <a:tcPr marL="81005" marR="6750" marT="6750" marB="0" anchor="ctr">
+                  <a:tcPr marL="81005" marR="6750" marT="6750" marB="6750" anchor="ctr">
                     <a:lnL>
                       <a:noFill/>
                     </a:lnL>
@@ -5891,7 +5891,7 @@
                       </a:r>
                     </a:p>
                   </a:txBody>
-                  <a:tcPr marL="81005" marR="6750" marT="6750" marB="0" anchor="ctr">
+                  <a:tcPr marL="81005" marR="6750" marT="6750" marB="6750" anchor="ctr">
                     <a:lnL>
                       <a:noFill/>
                     </a:lnL>
@@ -5949,7 +5949,7 @@
                       </a:r>
                     </a:p>
                   </a:txBody>
-                  <a:tcPr marL="81005" marR="6750" marT="6750" marB="0" anchor="ctr">
+                  <a:tcPr marL="81005" marR="6750" marT="6750" marB="6750" anchor="ctr">
                     <a:lnL>
                       <a:noFill/>
                     </a:lnL>
@@ -6003,7 +6003,7 @@
                       </a:r>
                     </a:p>
                   </a:txBody>
-                  <a:tcPr marL="81005" marR="6750" marT="6750" marB="0" anchor="ctr">
+                  <a:tcPr marL="81005" marR="6750" marT="6750" marB="6750" anchor="ctr">
                     <a:lnL>
                       <a:noFill/>
                     </a:lnL>
@@ -6059,7 +6059,7 @@
                       </a:r>
                     </a:p>
                   </a:txBody>
-                  <a:tcPr marL="81005" marR="6750" marT="6750" marB="0" anchor="ctr">
+                  <a:tcPr marL="81005" marR="6750" marT="6750" marB="6750" anchor="ctr">
                     <a:lnL>
                       <a:noFill/>
                     </a:lnL>
@@ -7193,7 +7193,7 @@
                 <a:latin typeface="맑은 고딕"/>
                 <a:ea typeface="맑은 고딕"/>
               </a:rPr>
-              <a:t>주문한다의 검사 다섯</a:t>
+              <a:t>주문한다의 검사 5가지</a:t>
             </a:r>
           </a:p>
           <a:p>
@@ -7345,7 +7345,7 @@
                       </a:r>
                     </a:p>
                   </a:txBody>
-                  <a:tcPr marL="6750" marR="6750" marT="6750" marB="0" anchor="ctr">
+                  <a:tcPr marL="6750" marR="6750" marT="6750" marB="6750" anchor="ctr">
                     <a:lnL>
                       <a:noFill/>
                     </a:lnL>
@@ -7407,7 +7407,7 @@
                       </a:r>
                     </a:p>
                   </a:txBody>
-                  <a:tcPr marL="6750" marR="6750" marT="6750" marB="0" anchor="ctr">
+                  <a:tcPr marL="6750" marR="6750" marT="6750" marB="6750" anchor="ctr">
                     <a:lnL w="9525" cap="flat" cmpd="sng" algn="ctr">
                       <a:solidFill>
                         <a:schemeClr val="bg1">
@@ -7477,7 +7477,7 @@
                       </a:r>
                     </a:p>
                   </a:txBody>
-                  <a:tcPr marL="6750" marR="6750" marT="6750" marB="0" anchor="ctr">
+                  <a:tcPr marL="6750" marR="6750" marT="6750" marB="6750" anchor="ctr">
                     <a:lnL w="9525" cap="flat" cmpd="sng" algn="ctr">
                       <a:solidFill>
                         <a:schemeClr val="bg1">
@@ -7547,7 +7547,7 @@
                       </a:r>
                     </a:p>
                   </a:txBody>
-                  <a:tcPr marL="6750" marR="6750" marT="6750" marB="0" anchor="ctr">
+                  <a:tcPr marL="6750" marR="6750" marT="6750" marB="6750" anchor="ctr">
                     <a:lnL w="9525" cap="flat" cmpd="sng" algn="ctr">
                       <a:solidFill>
                         <a:schemeClr val="bg1">
@@ -7619,7 +7619,7 @@
                       </a:r>
                     </a:p>
                   </a:txBody>
-                  <a:tcPr marL="81005" marR="6750" marT="6750" marB="0" anchor="ctr">
+                  <a:tcPr marL="81005" marR="6750" marT="6750" marB="6750" anchor="ctr">
                     <a:lnL>
                       <a:noFill/>
                     </a:lnL>
@@ -7673,7 +7673,7 @@
                       </a:r>
                     </a:p>
                   </a:txBody>
-                  <a:tcPr marL="81005" marR="6750" marT="6750" marB="0" anchor="ctr">
+                  <a:tcPr marL="81005" marR="6750" marT="6750" marB="6750" anchor="ctr">
                     <a:lnL>
                       <a:noFill/>
                     </a:lnL>
@@ -7729,7 +7729,7 @@
                       </a:r>
                     </a:p>
                   </a:txBody>
-                  <a:tcPr marL="81005" marR="6750" marT="6750" marB="0" anchor="ctr">
+                  <a:tcPr marL="81005" marR="6750" marT="6750" marB="6750" anchor="ctr">
                     <a:lnL>
                       <a:noFill/>
                     </a:lnL>
@@ -7785,7 +7785,7 @@
                       </a:r>
                     </a:p>
                   </a:txBody>
-                  <a:tcPr marL="81005" marR="6750" marT="6750" marB="0" anchor="ctr">
+                  <a:tcPr marL="81005" marR="6750" marT="6750" marB="6750" anchor="ctr">
                     <a:lnL>
                       <a:noFill/>
                     </a:lnL>
@@ -7843,7 +7843,7 @@
                       </a:r>
                     </a:p>
                   </a:txBody>
-                  <a:tcPr marL="81005" marR="6750" marT="6750" marB="0" anchor="ctr">
+                  <a:tcPr marL="81005" marR="6750" marT="6750" marB="6750" anchor="ctr">
                     <a:lnL>
                       <a:noFill/>
                     </a:lnL>
@@ -7897,7 +7897,7 @@
                       </a:r>
                     </a:p>
                   </a:txBody>
-                  <a:tcPr marL="81005" marR="6750" marT="6750" marB="0" anchor="ctr">
+                  <a:tcPr marL="81005" marR="6750" marT="6750" marB="6750" anchor="ctr">
                     <a:lnL>
                       <a:noFill/>
                     </a:lnL>
@@ -7953,7 +7953,7 @@
                       </a:r>
                     </a:p>
                   </a:txBody>
-                  <a:tcPr marL="81005" marR="6750" marT="6750" marB="0" anchor="ctr">
+                  <a:tcPr marL="81005" marR="6750" marT="6750" marB="6750" anchor="ctr">
                     <a:lnL>
                       <a:noFill/>
                     </a:lnL>
@@ -8009,7 +8009,7 @@
                       </a:r>
                     </a:p>
                   </a:txBody>
-                  <a:tcPr marL="81005" marR="6750" marT="6750" marB="0" anchor="ctr">
+                  <a:tcPr marL="81005" marR="6750" marT="6750" marB="6750" anchor="ctr">
                     <a:lnL>
                       <a:noFill/>
                     </a:lnL>
@@ -8067,7 +8067,7 @@
                       </a:r>
                     </a:p>
                   </a:txBody>
-                  <a:tcPr marL="81005" marR="6750" marT="6750" marB="0" anchor="ctr">
+                  <a:tcPr marL="81005" marR="6750" marT="6750" marB="6750" anchor="ctr">
                     <a:lnL>
                       <a:noFill/>
                     </a:lnL>
@@ -8121,7 +8121,7 @@
                       </a:r>
                     </a:p>
                   </a:txBody>
-                  <a:tcPr marL="81005" marR="6750" marT="6750" marB="0" anchor="ctr">
+                  <a:tcPr marL="81005" marR="6750" marT="6750" marB="6750" anchor="ctr">
                     <a:lnL>
                       <a:noFill/>
                     </a:lnL>
@@ -8177,7 +8177,7 @@
                       </a:r>
                     </a:p>
                   </a:txBody>
-                  <a:tcPr marL="81005" marR="6750" marT="6750" marB="0" anchor="ctr">
+                  <a:tcPr marL="81005" marR="6750" marT="6750" marB="6750" anchor="ctr">
                     <a:lnL>
                       <a:noFill/>
                     </a:lnL>
@@ -8233,7 +8233,7 @@
                       </a:r>
                     </a:p>
                   </a:txBody>
-                  <a:tcPr marL="81005" marR="6750" marT="6750" marB="0" anchor="ctr">
+                  <a:tcPr marL="81005" marR="6750" marT="6750" marB="6750" anchor="ctr">
                     <a:lnL>
                       <a:noFill/>
                     </a:lnL>
@@ -8291,7 +8291,7 @@
                       </a:r>
                     </a:p>
                   </a:txBody>
-                  <a:tcPr marL="81005" marR="6750" marT="6750" marB="0" anchor="ctr">
+                  <a:tcPr marL="81005" marR="6750" marT="6750" marB="6750" anchor="ctr">
                     <a:lnL>
                       <a:noFill/>
                     </a:lnL>
@@ -8345,7 +8345,7 @@
                       </a:r>
                     </a:p>
                   </a:txBody>
-                  <a:tcPr marL="81005" marR="6750" marT="6750" marB="0" anchor="ctr">
+                  <a:tcPr marL="81005" marR="6750" marT="6750" marB="6750" anchor="ctr">
                     <a:lnL>
                       <a:noFill/>
                     </a:lnL>
@@ -8401,7 +8401,7 @@
                       </a:r>
                     </a:p>
                   </a:txBody>
-                  <a:tcPr marL="81005" marR="6750" marT="6750" marB="0" anchor="ctr">
+                  <a:tcPr marL="81005" marR="6750" marT="6750" marB="6750" anchor="ctr">
                     <a:lnL>
                       <a:noFill/>
                     </a:lnL>
@@ -8457,7 +8457,7 @@
                       </a:r>
                     </a:p>
                   </a:txBody>
-                  <a:tcPr marL="81005" marR="6750" marT="6750" marB="0" anchor="ctr">
+                  <a:tcPr marL="81005" marR="6750" marT="6750" marB="6750" anchor="ctr">
                     <a:lnL>
                       <a:noFill/>
                     </a:lnL>
@@ -8515,7 +8515,7 @@
                       </a:r>
                     </a:p>
                   </a:txBody>
-                  <a:tcPr marL="81005" marR="6750" marT="6750" marB="0" anchor="ctr">
+                  <a:tcPr marL="81005" marR="6750" marT="6750" marB="6750" anchor="ctr">
                     <a:lnL>
                       <a:noFill/>
                     </a:lnL>
@@ -8569,7 +8569,7 @@
                       </a:r>
                     </a:p>
                   </a:txBody>
-                  <a:tcPr marL="81005" marR="6750" marT="6750" marB="0" anchor="ctr">
+                  <a:tcPr marL="81005" marR="6750" marT="6750" marB="6750" anchor="ctr">
                     <a:lnL>
                       <a:noFill/>
                     </a:lnL>
@@ -8625,7 +8625,7 @@
                       </a:r>
                     </a:p>
                   </a:txBody>
-                  <a:tcPr marL="81005" marR="6750" marT="6750" marB="0" anchor="ctr">
+                  <a:tcPr marL="81005" marR="6750" marT="6750" marB="6750" anchor="ctr">
                     <a:lnL>
                       <a:noFill/>
                     </a:lnL>
@@ -8681,7 +8681,7 @@
                       </a:r>
                     </a:p>
                   </a:txBody>
-                  <a:tcPr marL="81005" marR="6750" marT="6750" marB="0" anchor="ctr">
+                  <a:tcPr marL="81005" marR="6750" marT="6750" marB="6750" anchor="ctr">
                     <a:lnL>
                       <a:noFill/>
                     </a:lnL>
@@ -9506,7 +9506,7 @@
                 <a:latin typeface="맑은 고딕"/>
                 <a:ea typeface="맑은 고딕"/>
               </a:rPr>
-              <a:t>계약이 있어 테스트를 쓴다</a:t>
+              <a:t>계약이 있어 테스트를 작성한다</a:t>
             </a:r>
             <a:r>
               <a:rPr sz="1800" b="0">
@@ -10647,7 +10647,7 @@
                       </a:r>
                     </a:p>
                   </a:txBody>
-                  <a:tcPr marL="6750" marR="6750" marT="6750" marB="0" anchor="ctr">
+                  <a:tcPr marL="6750" marR="6750" marT="6750" marB="6750" anchor="ctr">
                     <a:lnL>
                       <a:noFill/>
                     </a:lnL>
@@ -10709,7 +10709,7 @@
                       </a:r>
                     </a:p>
                   </a:txBody>
-                  <a:tcPr marL="6750" marR="6750" marT="6750" marB="0" anchor="ctr">
+                  <a:tcPr marL="6750" marR="6750" marT="6750" marB="6750" anchor="ctr">
                     <a:lnL w="9525" cap="flat" cmpd="sng" algn="ctr">
                       <a:solidFill>
                         <a:schemeClr val="bg1">
@@ -10777,11 +10777,11 @@
                           <a:ea typeface="맑은 고딕" panose="020B0503020000020004" pitchFamily="34" charset="-127"/>
                           <a:cs typeface="맑은 고딕"/>
                         </a:rPr>
-                        <a:t>쓴 수용 예가 통과했다</a:t>
+                        <a:t>작성한 수용 예가 통과했다</a:t>
                       </a:r>
                     </a:p>
                   </a:txBody>
-                  <a:tcPr marL="81005" marR="6750" marT="6750" marB="0" anchor="ctr">
+                  <a:tcPr marL="81005" marR="6750" marT="6750" marB="6750" anchor="ctr">
                     <a:lnL>
                       <a:noFill/>
                     </a:lnL>
@@ -10831,11 +10831,11 @@
                           <a:ea typeface="맑은 고딕" panose="020B0503020000020004" pitchFamily="34" charset="-127"/>
                           <a:cs typeface="맑은 고딕"/>
                         </a:rPr>
-                        <a:t>쓰지 않은 경로는 모른다</a:t>
+                        <a:t>작성하지 않은 경로는 모른다</a:t>
                       </a:r>
                     </a:p>
                   </a:txBody>
-                  <a:tcPr marL="81005" marR="6750" marT="6750" marB="0" anchor="ctr">
+                  <a:tcPr marL="81005" marR="6750" marT="6750" marB="6750" anchor="ctr">
                     <a:lnL>
                       <a:noFill/>
                     </a:lnL>
@@ -10893,7 +10893,7 @@
                       </a:r>
                     </a:p>
                   </a:txBody>
-                  <a:tcPr marL="81005" marR="6750" marT="6750" marB="0" anchor="ctr">
+                  <a:tcPr marL="81005" marR="6750" marT="6750" marB="6750" anchor="ctr">
                     <a:lnL>
                       <a:noFill/>
                     </a:lnL>
@@ -10947,7 +10947,7 @@
                       </a:r>
                     </a:p>
                   </a:txBody>
-                  <a:tcPr marL="81005" marR="6750" marT="6750" marB="0" anchor="ctr">
+                  <a:tcPr marL="81005" marR="6750" marT="6750" marB="6750" anchor="ctr">
                     <a:lnL>
                       <a:noFill/>
                     </a:lnL>
@@ -11005,7 +11005,7 @@
                       </a:r>
                     </a:p>
                   </a:txBody>
-                  <a:tcPr marL="81005" marR="6750" marT="6750" marB="0" anchor="ctr">
+                  <a:tcPr marL="81005" marR="6750" marT="6750" marB="6750" anchor="ctr">
                     <a:lnL>
                       <a:noFill/>
                     </a:lnL>
@@ -11059,7 +11059,7 @@
                       </a:r>
                     </a:p>
                   </a:txBody>
-                  <a:tcPr marL="81005" marR="6750" marT="6750" marB="0" anchor="ctr">
+                  <a:tcPr marL="81005" marR="6750" marT="6750" marB="6750" anchor="ctr">
                     <a:lnL>
                       <a:noFill/>
                     </a:lnL>
@@ -11117,7 +11117,7 @@
                       </a:r>
                     </a:p>
                   </a:txBody>
-                  <a:tcPr marL="81005" marR="6750" marT="6750" marB="0" anchor="ctr">
+                  <a:tcPr marL="81005" marR="6750" marT="6750" marB="6750" anchor="ctr">
                     <a:lnL>
                       <a:noFill/>
                     </a:lnL>
@@ -11171,7 +11171,7 @@
                       </a:r>
                     </a:p>
                   </a:txBody>
-                  <a:tcPr marL="81005" marR="6750" marT="6750" marB="0" anchor="ctr">
+                  <a:tcPr marL="81005" marR="6750" marT="6750" marB="6750" anchor="ctr">
                     <a:lnL>
                       <a:noFill/>
                     </a:lnL>
@@ -11504,7 +11504,7 @@
                 <a:latin typeface="맑은 고딕"/>
                 <a:ea typeface="맑은 고딕"/>
               </a:rPr>
-              <a:t> 무엇을 보장하고 싶은지 정하고 그만큼 쓴다.</a:t>
+              <a:t> 무엇을 보장하고 싶은지 정하고 그만큼 작성한다.</a:t>
             </a:r>
           </a:p>
         </p:txBody>
@@ -11713,7 +11713,7 @@
                       </a:r>
                     </a:p>
                   </a:txBody>
-                  <a:tcPr marL="6750" marR="6750" marT="6750" marB="0" anchor="ctr">
+                  <a:tcPr marL="6750" marR="6750" marT="6750" marB="6750" anchor="ctr">
                     <a:lnL>
                       <a:noFill/>
                     </a:lnL>
@@ -11775,7 +11775,7 @@
                       </a:r>
                     </a:p>
                   </a:txBody>
-                  <a:tcPr marL="6750" marR="6750" marT="6750" marB="0" anchor="ctr">
+                  <a:tcPr marL="6750" marR="6750" marT="6750" marB="6750" anchor="ctr">
                     <a:lnL w="9525" cap="flat" cmpd="sng" algn="ctr">
                       <a:solidFill>
                         <a:schemeClr val="bg1">
@@ -11845,7 +11845,7 @@
                       </a:r>
                     </a:p>
                   </a:txBody>
-                  <a:tcPr marL="6750" marR="6750" marT="6750" marB="0" anchor="ctr">
+                  <a:tcPr marL="6750" marR="6750" marT="6750" marB="6750" anchor="ctr">
                     <a:lnL w="9525" cap="flat" cmpd="sng" algn="ctr">
                       <a:solidFill>
                         <a:schemeClr val="bg1">
@@ -11917,7 +11917,7 @@
                       </a:r>
                     </a:p>
                   </a:txBody>
-                  <a:tcPr marL="81005" marR="6750" marT="6750" marB="0" anchor="ctr">
+                  <a:tcPr marL="81005" marR="6750" marT="6750" marB="6750" anchor="ctr">
                     <a:lnL>
                       <a:noFill/>
                     </a:lnL>
@@ -11971,7 +11971,7 @@
                       </a:r>
                     </a:p>
                   </a:txBody>
-                  <a:tcPr marL="81005" marR="6750" marT="6750" marB="0" anchor="ctr">
+                  <a:tcPr marL="81005" marR="6750" marT="6750" marB="6750" anchor="ctr">
                     <a:lnL>
                       <a:noFill/>
                     </a:lnL>
@@ -12027,7 +12027,7 @@
                       </a:r>
                     </a:p>
                   </a:txBody>
-                  <a:tcPr marL="81005" marR="6750" marT="6750" marB="0" anchor="ctr">
+                  <a:tcPr marL="81005" marR="6750" marT="6750" marB="6750" anchor="ctr">
                     <a:lnL>
                       <a:noFill/>
                     </a:lnL>
@@ -12085,7 +12085,7 @@
                       </a:r>
                     </a:p>
                   </a:txBody>
-                  <a:tcPr marL="81005" marR="6750" marT="6750" marB="0" anchor="ctr">
+                  <a:tcPr marL="81005" marR="6750" marT="6750" marB="6750" anchor="ctr">
                     <a:lnL>
                       <a:noFill/>
                     </a:lnL>
@@ -12139,7 +12139,7 @@
                       </a:r>
                     </a:p>
                   </a:txBody>
-                  <a:tcPr marL="81005" marR="6750" marT="6750" marB="0" anchor="ctr">
+                  <a:tcPr marL="81005" marR="6750" marT="6750" marB="6750" anchor="ctr">
                     <a:lnL>
                       <a:noFill/>
                     </a:lnL>
@@ -12195,7 +12195,7 @@
                       </a:r>
                     </a:p>
                   </a:txBody>
-                  <a:tcPr marL="81005" marR="6750" marT="6750" marB="0" anchor="ctr">
+                  <a:tcPr marL="81005" marR="6750" marT="6750" marB="6750" anchor="ctr">
                     <a:lnL>
                       <a:noFill/>
                     </a:lnL>
@@ -12253,7 +12253,7 @@
                       </a:r>
                     </a:p>
                   </a:txBody>
-                  <a:tcPr marL="81005" marR="6750" marT="6750" marB="0" anchor="ctr">
+                  <a:tcPr marL="81005" marR="6750" marT="6750" marB="6750" anchor="ctr">
                     <a:lnL>
                       <a:noFill/>
                     </a:lnL>
@@ -12307,7 +12307,7 @@
                       </a:r>
                     </a:p>
                   </a:txBody>
-                  <a:tcPr marL="81005" marR="6750" marT="6750" marB="0" anchor="ctr">
+                  <a:tcPr marL="81005" marR="6750" marT="6750" marB="6750" anchor="ctr">
                     <a:lnL>
                       <a:noFill/>
                     </a:lnL>
@@ -12363,7 +12363,7 @@
                       </a:r>
                     </a:p>
                   </a:txBody>
-                  <a:tcPr marL="81005" marR="6750" marT="6750" marB="0" anchor="ctr">
+                  <a:tcPr marL="81005" marR="6750" marT="6750" marB="6750" anchor="ctr">
                     <a:lnL>
                       <a:noFill/>
                     </a:lnL>
@@ -12421,7 +12421,7 @@
                       </a:r>
                     </a:p>
                   </a:txBody>
-                  <a:tcPr marL="81005" marR="6750" marT="6750" marB="0" anchor="ctr">
+                  <a:tcPr marL="81005" marR="6750" marT="6750" marB="6750" anchor="ctr">
                     <a:lnL>
                       <a:noFill/>
                     </a:lnL>
@@ -12475,7 +12475,7 @@
                       </a:r>
                     </a:p>
                   </a:txBody>
-                  <a:tcPr marL="81005" marR="6750" marT="6750" marB="0" anchor="ctr">
+                  <a:tcPr marL="81005" marR="6750" marT="6750" marB="6750" anchor="ctr">
                     <a:lnL>
                       <a:noFill/>
                     </a:lnL>
@@ -12531,7 +12531,7 @@
                       </a:r>
                     </a:p>
                   </a:txBody>
-                  <a:tcPr marL="81005" marR="6750" marT="6750" marB="0" anchor="ctr">
+                  <a:tcPr marL="81005" marR="6750" marT="6750" marB="6750" anchor="ctr">
                     <a:lnL>
                       <a:noFill/>
                     </a:lnL>
@@ -12589,7 +12589,7 @@
                       </a:r>
                     </a:p>
                   </a:txBody>
-                  <a:tcPr marL="81005" marR="6750" marT="6750" marB="0" anchor="ctr">
+                  <a:tcPr marL="81005" marR="6750" marT="6750" marB="6750" anchor="ctr">
                     <a:lnL>
                       <a:noFill/>
                     </a:lnL>
@@ -12643,7 +12643,7 @@
                       </a:r>
                     </a:p>
                   </a:txBody>
-                  <a:tcPr marL="81005" marR="6750" marT="6750" marB="0" anchor="ctr">
+                  <a:tcPr marL="81005" marR="6750" marT="6750" marB="6750" anchor="ctr">
                     <a:lnL>
                       <a:noFill/>
                     </a:lnL>
@@ -12699,7 +12699,7 @@
                       </a:r>
                     </a:p>
                   </a:txBody>
-                  <a:tcPr marL="81005" marR="6750" marT="6750" marB="0" anchor="ctr">
+                  <a:tcPr marL="81005" marR="6750" marT="6750" marB="6750" anchor="ctr">
                     <a:lnL>
                       <a:noFill/>
                     </a:lnL>
@@ -13263,7 +13263,7 @@
                       </a:r>
                     </a:p>
                   </a:txBody>
-                  <a:tcPr marL="6750" marR="6750" marT="6750" marB="0" anchor="ctr">
+                  <a:tcPr marL="6750" marR="6750" marT="6750" marB="6750" anchor="ctr">
                     <a:lnL>
                       <a:noFill/>
                     </a:lnL>
@@ -13325,7 +13325,7 @@
                       </a:r>
                     </a:p>
                   </a:txBody>
-                  <a:tcPr marL="6750" marR="6750" marT="6750" marB="0" anchor="ctr">
+                  <a:tcPr marL="6750" marR="6750" marT="6750" marB="6750" anchor="ctr">
                     <a:lnL w="9525" cap="flat" cmpd="sng" algn="ctr">
                       <a:solidFill>
                         <a:schemeClr val="bg1">
@@ -13397,7 +13397,7 @@
                       </a:r>
                     </a:p>
                   </a:txBody>
-                  <a:tcPr marL="81005" marR="6750" marT="6750" marB="0" anchor="ctr">
+                  <a:tcPr marL="81005" marR="6750" marT="6750" marB="6750" anchor="ctr">
                     <a:lnL>
                       <a:noFill/>
                     </a:lnL>
@@ -13451,7 +13451,7 @@
                       </a:r>
                     </a:p>
                   </a:txBody>
-                  <a:tcPr marL="81005" marR="6750" marT="6750" marB="0" anchor="ctr">
+                  <a:tcPr marL="81005" marR="6750" marT="6750" marB="6750" anchor="ctr">
                     <a:lnL>
                       <a:noFill/>
                     </a:lnL>
@@ -13509,7 +13509,7 @@
                       </a:r>
                     </a:p>
                   </a:txBody>
-                  <a:tcPr marL="81005" marR="6750" marT="6750" marB="0" anchor="ctr">
+                  <a:tcPr marL="81005" marR="6750" marT="6750" marB="6750" anchor="ctr">
                     <a:lnL>
                       <a:noFill/>
                     </a:lnL>
@@ -13563,7 +13563,7 @@
                       </a:r>
                     </a:p>
                   </a:txBody>
-                  <a:tcPr marL="81005" marR="6750" marT="6750" marB="0" anchor="ctr">
+                  <a:tcPr marL="81005" marR="6750" marT="6750" marB="6750" anchor="ctr">
                     <a:lnL>
                       <a:noFill/>
                     </a:lnL>
@@ -13621,7 +13621,7 @@
                       </a:r>
                     </a:p>
                   </a:txBody>
-                  <a:tcPr marL="81005" marR="6750" marT="6750" marB="0" anchor="ctr">
+                  <a:tcPr marL="81005" marR="6750" marT="6750" marB="6750" anchor="ctr">
                     <a:lnL>
                       <a:noFill/>
                     </a:lnL>
@@ -13675,7 +13675,7 @@
                       </a:r>
                     </a:p>
                   </a:txBody>
-                  <a:tcPr marL="81005" marR="6750" marT="6750" marB="0" anchor="ctr">
+                  <a:tcPr marL="81005" marR="6750" marT="6750" marB="6750" anchor="ctr">
                     <a:lnL>
                       <a:noFill/>
                     </a:lnL>
@@ -14301,7 +14301,7 @@
                       </a:r>
                     </a:p>
                   </a:txBody>
-                  <a:tcPr marL="6750" marR="6750" marT="6750" marB="0" anchor="ctr">
+                  <a:tcPr marL="6750" marR="6750" marT="6750" marB="6750" anchor="ctr">
                     <a:lnL>
                       <a:noFill/>
                     </a:lnL>
@@ -14363,7 +14363,7 @@
                       </a:r>
                     </a:p>
                   </a:txBody>
-                  <a:tcPr marL="6750" marR="6750" marT="6750" marB="0" anchor="ctr">
+                  <a:tcPr marL="6750" marR="6750" marT="6750" marB="6750" anchor="ctr">
                     <a:lnL w="9525" cap="flat" cmpd="sng" algn="ctr">
                       <a:solidFill>
                         <a:schemeClr val="bg1">
@@ -14435,7 +14435,7 @@
                       </a:r>
                     </a:p>
                   </a:txBody>
-                  <a:tcPr marL="81005" marR="6750" marT="6750" marB="0" anchor="ctr">
+                  <a:tcPr marL="81005" marR="6750" marT="6750" marB="6750" anchor="ctr">
                     <a:lnL>
                       <a:noFill/>
                     </a:lnL>
@@ -14489,7 +14489,7 @@
                       </a:r>
                     </a:p>
                   </a:txBody>
-                  <a:tcPr marL="81005" marR="6750" marT="6750" marB="0" anchor="ctr">
+                  <a:tcPr marL="81005" marR="6750" marT="6750" marB="6750" anchor="ctr">
                     <a:lnL>
                       <a:noFill/>
                     </a:lnL>
@@ -14547,7 +14547,7 @@
                       </a:r>
                     </a:p>
                   </a:txBody>
-                  <a:tcPr marL="81005" marR="6750" marT="6750" marB="0" anchor="ctr">
+                  <a:tcPr marL="81005" marR="6750" marT="6750" marB="6750" anchor="ctr">
                     <a:lnL>
                       <a:noFill/>
                     </a:lnL>
@@ -14601,7 +14601,7 @@
                       </a:r>
                     </a:p>
                   </a:txBody>
-                  <a:tcPr marL="81005" marR="6750" marT="6750" marB="0" anchor="ctr">
+                  <a:tcPr marL="81005" marR="6750" marT="6750" marB="6750" anchor="ctr">
                     <a:lnL>
                       <a:noFill/>
                     </a:lnL>
@@ -14659,7 +14659,7 @@
                       </a:r>
                     </a:p>
                   </a:txBody>
-                  <a:tcPr marL="81005" marR="6750" marT="6750" marB="0" anchor="ctr">
+                  <a:tcPr marL="81005" marR="6750" marT="6750" marB="6750" anchor="ctr">
                     <a:lnL>
                       <a:noFill/>
                     </a:lnL>
@@ -14713,7 +14713,7 @@
                       </a:r>
                     </a:p>
                   </a:txBody>
-                  <a:tcPr marL="81005" marR="6750" marT="6750" marB="0" anchor="ctr">
+                  <a:tcPr marL="81005" marR="6750" marT="6750" marB="6750" anchor="ctr">
                     <a:lnL>
                       <a:noFill/>
                     </a:lnL>
@@ -15772,7 +15772,7 @@
                       </a:r>
                     </a:p>
                   </a:txBody>
-                  <a:tcPr marL="6750" marR="6750" marT="6750" marB="0" anchor="ctr">
+                  <a:tcPr marL="6750" marR="6750" marT="6750" marB="6750" anchor="ctr">
                     <a:lnL>
                       <a:noFill/>
                     </a:lnL>
@@ -15834,7 +15834,7 @@
                       </a:r>
                     </a:p>
                   </a:txBody>
-                  <a:tcPr marL="6750" marR="6750" marT="6750" marB="0" anchor="ctr">
+                  <a:tcPr marL="6750" marR="6750" marT="6750" marB="6750" anchor="ctr">
                     <a:lnL w="9525" cap="flat" cmpd="sng" algn="ctr">
                       <a:solidFill>
                         <a:schemeClr val="bg1">
@@ -15906,7 +15906,7 @@
                       </a:r>
                     </a:p>
                   </a:txBody>
-                  <a:tcPr marL="81005" marR="6750" marT="6750" marB="0" anchor="ctr">
+                  <a:tcPr marL="81005" marR="6750" marT="6750" marB="6750" anchor="ctr">
                     <a:lnL>
                       <a:noFill/>
                     </a:lnL>
@@ -15960,7 +15960,7 @@
                       </a:r>
                     </a:p>
                   </a:txBody>
-                  <a:tcPr marL="81005" marR="6750" marT="6750" marB="0" anchor="ctr">
+                  <a:tcPr marL="81005" marR="6750" marT="6750" marB="6750" anchor="ctr">
                     <a:lnL>
                       <a:noFill/>
                     </a:lnL>
@@ -16018,7 +16018,7 @@
                       </a:r>
                     </a:p>
                   </a:txBody>
-                  <a:tcPr marL="81005" marR="6750" marT="6750" marB="0" anchor="ctr">
+                  <a:tcPr marL="81005" marR="6750" marT="6750" marB="6750" anchor="ctr">
                     <a:lnL>
                       <a:noFill/>
                     </a:lnL>
@@ -16072,7 +16072,7 @@
                       </a:r>
                     </a:p>
                   </a:txBody>
-                  <a:tcPr marL="81005" marR="6750" marT="6750" marB="0" anchor="ctr">
+                  <a:tcPr marL="81005" marR="6750" marT="6750" marB="6750" anchor="ctr">
                     <a:lnL>
                       <a:noFill/>
                     </a:lnL>
@@ -16130,7 +16130,7 @@
                       </a:r>
                     </a:p>
                   </a:txBody>
-                  <a:tcPr marL="81005" marR="6750" marT="6750" marB="0" anchor="ctr">
+                  <a:tcPr marL="81005" marR="6750" marT="6750" marB="6750" anchor="ctr">
                     <a:lnL>
                       <a:noFill/>
                     </a:lnL>
@@ -16184,7 +16184,7 @@
                       </a:r>
                     </a:p>
                   </a:txBody>
-                  <a:tcPr marL="81005" marR="6750" marT="6750" marB="0" anchor="ctr">
+                  <a:tcPr marL="81005" marR="6750" marT="6750" marB="6750" anchor="ctr">
                     <a:lnL>
                       <a:noFill/>
                     </a:lnL>
@@ -17185,7 +17185,7 @@
                 <a:latin typeface="맑은 고딕"/>
                 <a:ea typeface="맑은 고딕"/>
               </a:rPr>
-              <a:t>, 명령, 실패 메시지의 예, 루프 안과 CI의 구분으로 구성하고 새 결정을 추가하지 마라. 다섯 장을 넘지 않게 핵심만 남겨라.</a:t>
+              <a:t>, 명령, 실패 메시지의 예, 루프 안과 CI의 구분으로 구성하고 새 결정을 추가하지 마라. 5장을 넘지 않게 핵심만 남겨라.</a:t>
             </a:r>
           </a:p>
           <a:p>
@@ -18056,7 +18056,7 @@
                 <a:latin typeface="맑은 고딕"/>
                 <a:ea typeface="맑은 고딕"/>
               </a:rPr>
-              <a:t>녹색은 쓴 검사만큼만</a:t>
+              <a:t>녹색은 작성한 검사만큼만</a:t>
             </a:r>
             <a:r>
               <a:rPr sz="1800" b="0">
@@ -18612,7 +18612,7 @@
                       </a:r>
                     </a:p>
                   </a:txBody>
-                  <a:tcPr marL="6750" marR="6750" marT="6750" marB="0" anchor="ctr">
+                  <a:tcPr marL="6750" marR="6750" marT="6750" marB="6750" anchor="ctr">
                     <a:lnL>
                       <a:noFill/>
                     </a:lnL>
@@ -18674,7 +18674,7 @@
                       </a:r>
                     </a:p>
                   </a:txBody>
-                  <a:tcPr marL="6750" marR="6750" marT="6750" marB="0" anchor="ctr">
+                  <a:tcPr marL="6750" marR="6750" marT="6750" marB="6750" anchor="ctr">
                     <a:lnL w="9525" cap="flat" cmpd="sng" algn="ctr">
                       <a:solidFill>
                         <a:schemeClr val="bg1">
@@ -18744,7 +18744,7 @@
                       </a:r>
                     </a:p>
                   </a:txBody>
-                  <a:tcPr marL="6750" marR="6750" marT="6750" marB="0" anchor="ctr">
+                  <a:tcPr marL="6750" marR="6750" marT="6750" marB="6750" anchor="ctr">
                     <a:lnL w="9525" cap="flat" cmpd="sng" algn="ctr">
                       <a:solidFill>
                         <a:schemeClr val="bg1">
@@ -18816,7 +18816,7 @@
                       </a:r>
                     </a:p>
                   </a:txBody>
-                  <a:tcPr marL="81005" marR="6750" marT="6750" marB="0" anchor="ctr">
+                  <a:tcPr marL="81005" marR="6750" marT="6750" marB="6750" anchor="ctr">
                     <a:lnL>
                       <a:noFill/>
                     </a:lnL>
@@ -18870,7 +18870,7 @@
                       </a:r>
                     </a:p>
                   </a:txBody>
-                  <a:tcPr marL="81005" marR="6750" marT="6750" marB="0" anchor="ctr">
+                  <a:tcPr marL="81005" marR="6750" marT="6750" marB="6750" anchor="ctr">
                     <a:lnL>
                       <a:noFill/>
                     </a:lnL>
@@ -18926,7 +18926,7 @@
                       </a:r>
                     </a:p>
                   </a:txBody>
-                  <a:tcPr marL="81005" marR="6750" marT="6750" marB="0" anchor="ctr">
+                  <a:tcPr marL="81005" marR="6750" marT="6750" marB="6750" anchor="ctr">
                     <a:lnL>
                       <a:noFill/>
                     </a:lnL>
@@ -18984,7 +18984,7 @@
                       </a:r>
                     </a:p>
                   </a:txBody>
-                  <a:tcPr marL="81005" marR="6750" marT="6750" marB="0" anchor="ctr">
+                  <a:tcPr marL="81005" marR="6750" marT="6750" marB="6750" anchor="ctr">
                     <a:lnL>
                       <a:noFill/>
                     </a:lnL>
@@ -19038,7 +19038,7 @@
                       </a:r>
                     </a:p>
                   </a:txBody>
-                  <a:tcPr marL="81005" marR="6750" marT="6750" marB="0" anchor="ctr">
+                  <a:tcPr marL="81005" marR="6750" marT="6750" marB="6750" anchor="ctr">
                     <a:lnL>
                       <a:noFill/>
                     </a:lnL>
@@ -19094,7 +19094,7 @@
                       </a:r>
                     </a:p>
                   </a:txBody>
-                  <a:tcPr marL="81005" marR="6750" marT="6750" marB="0" anchor="ctr">
+                  <a:tcPr marL="81005" marR="6750" marT="6750" marB="6750" anchor="ctr">
                     <a:lnL>
                       <a:noFill/>
                     </a:lnL>
@@ -19152,7 +19152,7 @@
                       </a:r>
                     </a:p>
                   </a:txBody>
-                  <a:tcPr marL="81005" marR="6750" marT="6750" marB="0" anchor="ctr">
+                  <a:tcPr marL="81005" marR="6750" marT="6750" marB="6750" anchor="ctr">
                     <a:lnL>
                       <a:noFill/>
                     </a:lnL>
@@ -19206,7 +19206,7 @@
                       </a:r>
                     </a:p>
                   </a:txBody>
-                  <a:tcPr marL="81005" marR="6750" marT="6750" marB="0" anchor="ctr">
+                  <a:tcPr marL="81005" marR="6750" marT="6750" marB="6750" anchor="ctr">
                     <a:lnL>
                       <a:noFill/>
                     </a:lnL>
@@ -19262,7 +19262,7 @@
                       </a:r>
                     </a:p>
                   </a:txBody>
-                  <a:tcPr marL="81005" marR="6750" marT="6750" marB="0" anchor="ctr">
+                  <a:tcPr marL="81005" marR="6750" marT="6750" marB="6750" anchor="ctr">
                     <a:lnL>
                       <a:noFill/>
                     </a:lnL>
@@ -19320,7 +19320,7 @@
                       </a:r>
                     </a:p>
                   </a:txBody>
-                  <a:tcPr marL="81005" marR="6750" marT="6750" marB="0" anchor="ctr">
+                  <a:tcPr marL="81005" marR="6750" marT="6750" marB="6750" anchor="ctr">
                     <a:lnL>
                       <a:noFill/>
                     </a:lnL>
@@ -19374,7 +19374,7 @@
                       </a:r>
                     </a:p>
                   </a:txBody>
-                  <a:tcPr marL="81005" marR="6750" marT="6750" marB="0" anchor="ctr">
+                  <a:tcPr marL="81005" marR="6750" marT="6750" marB="6750" anchor="ctr">
                     <a:lnL>
                       <a:noFill/>
                     </a:lnL>
@@ -19430,7 +19430,7 @@
                       </a:r>
                     </a:p>
                   </a:txBody>
-                  <a:tcPr marL="81005" marR="6750" marT="6750" marB="0" anchor="ctr">
+                  <a:tcPr marL="81005" marR="6750" marT="6750" marB="6750" anchor="ctr">
                     <a:lnL>
                       <a:noFill/>
                     </a:lnL>
@@ -19488,7 +19488,7 @@
                       </a:r>
                     </a:p>
                   </a:txBody>
-                  <a:tcPr marL="81005" marR="6750" marT="6750" marB="0" anchor="ctr">
+                  <a:tcPr marL="81005" marR="6750" marT="6750" marB="6750" anchor="ctr">
                     <a:lnL>
                       <a:noFill/>
                     </a:lnL>
@@ -19542,7 +19542,7 @@
                       </a:r>
                     </a:p>
                   </a:txBody>
-                  <a:tcPr marL="81005" marR="6750" marT="6750" marB="0" anchor="ctr">
+                  <a:tcPr marL="81005" marR="6750" marT="6750" marB="6750" anchor="ctr">
                     <a:lnL>
                       <a:noFill/>
                     </a:lnL>
@@ -19598,7 +19598,7 @@
                       </a:r>
                     </a:p>
                   </a:txBody>
-                  <a:tcPr marL="81005" marR="6750" marT="6750" marB="0" anchor="ctr">
+                  <a:tcPr marL="81005" marR="6750" marT="6750" marB="6750" anchor="ctr">
                     <a:lnL>
                       <a:noFill/>
                     </a:lnL>
@@ -20145,7 +20145,7 @@
                       </a:r>
                     </a:p>
                   </a:txBody>
-                  <a:tcPr marL="6750" marR="6750" marT="6750" marB="0" anchor="ctr">
+                  <a:tcPr marL="6750" marR="6750" marT="6750" marB="6750" anchor="ctr">
                     <a:lnL>
                       <a:noFill/>
                     </a:lnL>
@@ -20207,7 +20207,7 @@
                       </a:r>
                     </a:p>
                   </a:txBody>
-                  <a:tcPr marL="6750" marR="6750" marT="6750" marB="0" anchor="ctr">
+                  <a:tcPr marL="6750" marR="6750" marT="6750" marB="6750" anchor="ctr">
                     <a:lnL w="9525" cap="flat" cmpd="sng" algn="ctr">
                       <a:solidFill>
                         <a:schemeClr val="bg1">
@@ -20277,7 +20277,7 @@
                       </a:r>
                     </a:p>
                   </a:txBody>
-                  <a:tcPr marL="6750" marR="6750" marT="6750" marB="0" anchor="ctr">
+                  <a:tcPr marL="6750" marR="6750" marT="6750" marB="6750" anchor="ctr">
                     <a:lnL w="9525" cap="flat" cmpd="sng" algn="ctr">
                       <a:solidFill>
                         <a:schemeClr val="bg1">
@@ -20349,7 +20349,7 @@
                       </a:r>
                     </a:p>
                   </a:txBody>
-                  <a:tcPr marL="81005" marR="6750" marT="6750" marB="0" anchor="ctr">
+                  <a:tcPr marL="81005" marR="6750" marT="6750" marB="6750" anchor="ctr">
                     <a:lnL>
                       <a:noFill/>
                     </a:lnL>
@@ -20403,7 +20403,7 @@
                       </a:r>
                     </a:p>
                   </a:txBody>
-                  <a:tcPr marL="81005" marR="6750" marT="6750" marB="0" anchor="ctr">
+                  <a:tcPr marL="81005" marR="6750" marT="6750" marB="6750" anchor="ctr">
                     <a:lnL>
                       <a:noFill/>
                     </a:lnL>
@@ -20459,7 +20459,7 @@
                       </a:r>
                     </a:p>
                   </a:txBody>
-                  <a:tcPr marL="81005" marR="6750" marT="6750" marB="0" anchor="ctr">
+                  <a:tcPr marL="81005" marR="6750" marT="6750" marB="6750" anchor="ctr">
                     <a:lnL>
                       <a:noFill/>
                     </a:lnL>
@@ -20517,7 +20517,7 @@
                       </a:r>
                     </a:p>
                   </a:txBody>
-                  <a:tcPr marL="81005" marR="6750" marT="6750" marB="0" anchor="ctr">
+                  <a:tcPr marL="81005" marR="6750" marT="6750" marB="6750" anchor="ctr">
                     <a:lnL>
                       <a:noFill/>
                     </a:lnL>
@@ -20571,7 +20571,7 @@
                       </a:r>
                     </a:p>
                   </a:txBody>
-                  <a:tcPr marL="81005" marR="6750" marT="6750" marB="0" anchor="ctr">
+                  <a:tcPr marL="81005" marR="6750" marT="6750" marB="6750" anchor="ctr">
                     <a:lnL>
                       <a:noFill/>
                     </a:lnL>
@@ -20627,7 +20627,7 @@
                       </a:r>
                     </a:p>
                   </a:txBody>
-                  <a:tcPr marL="81005" marR="6750" marT="6750" marB="0" anchor="ctr">
+                  <a:tcPr marL="81005" marR="6750" marT="6750" marB="6750" anchor="ctr">
                     <a:lnL>
                       <a:noFill/>
                     </a:lnL>
@@ -20685,7 +20685,7 @@
                       </a:r>
                     </a:p>
                   </a:txBody>
-                  <a:tcPr marL="81005" marR="6750" marT="6750" marB="0" anchor="ctr">
+                  <a:tcPr marL="81005" marR="6750" marT="6750" marB="6750" anchor="ctr">
                     <a:lnL>
                       <a:noFill/>
                     </a:lnL>
@@ -20739,7 +20739,7 @@
                       </a:r>
                     </a:p>
                   </a:txBody>
-                  <a:tcPr marL="81005" marR="6750" marT="6750" marB="0" anchor="ctr">
+                  <a:tcPr marL="81005" marR="6750" marT="6750" marB="6750" anchor="ctr">
                     <a:lnL>
                       <a:noFill/>
                     </a:lnL>
@@ -20795,7 +20795,7 @@
                       </a:r>
                     </a:p>
                   </a:txBody>
-                  <a:tcPr marL="81005" marR="6750" marT="6750" marB="0" anchor="ctr">
+                  <a:tcPr marL="81005" marR="6750" marT="6750" marB="6750" anchor="ctr">
                     <a:lnL>
                       <a:noFill/>
                     </a:lnL>
@@ -20853,7 +20853,7 @@
                       </a:r>
                     </a:p>
                   </a:txBody>
-                  <a:tcPr marL="81005" marR="6750" marT="6750" marB="0" anchor="ctr">
+                  <a:tcPr marL="81005" marR="6750" marT="6750" marB="6750" anchor="ctr">
                     <a:lnL>
                       <a:noFill/>
                     </a:lnL>
@@ -20907,7 +20907,7 @@
                       </a:r>
                     </a:p>
                   </a:txBody>
-                  <a:tcPr marL="81005" marR="6750" marT="6750" marB="0" anchor="ctr">
+                  <a:tcPr marL="81005" marR="6750" marT="6750" marB="6750" anchor="ctr">
                     <a:lnL>
                       <a:noFill/>
                     </a:lnL>
@@ -20963,7 +20963,7 @@
                       </a:r>
                     </a:p>
                   </a:txBody>
-                  <a:tcPr marL="81005" marR="6750" marT="6750" marB="0" anchor="ctr">
+                  <a:tcPr marL="81005" marR="6750" marT="6750" marB="6750" anchor="ctr">
                     <a:lnL>
                       <a:noFill/>
                     </a:lnL>
@@ -21021,7 +21021,7 @@
                       </a:r>
                     </a:p>
                   </a:txBody>
-                  <a:tcPr marL="81005" marR="6750" marT="6750" marB="0" anchor="ctr">
+                  <a:tcPr marL="81005" marR="6750" marT="6750" marB="6750" anchor="ctr">
                     <a:lnL>
                       <a:noFill/>
                     </a:lnL>
@@ -21075,7 +21075,7 @@
                       </a:r>
                     </a:p>
                   </a:txBody>
-                  <a:tcPr marL="81005" marR="6750" marT="6750" marB="0" anchor="ctr">
+                  <a:tcPr marL="81005" marR="6750" marT="6750" marB="6750" anchor="ctr">
                     <a:lnL>
                       <a:noFill/>
                     </a:lnL>
@@ -21131,7 +21131,7 @@
                       </a:r>
                     </a:p>
                   </a:txBody>
-                  <a:tcPr marL="81005" marR="6750" marT="6750" marB="0" anchor="ctr">
+                  <a:tcPr marL="81005" marR="6750" marT="6750" marB="6750" anchor="ctr">
                     <a:lnL>
                       <a:noFill/>
                     </a:lnL>
@@ -21189,7 +21189,7 @@
                       </a:r>
                     </a:p>
                   </a:txBody>
-                  <a:tcPr marL="81005" marR="6750" marT="6750" marB="0" anchor="ctr">
+                  <a:tcPr marL="81005" marR="6750" marT="6750" marB="6750" anchor="ctr">
                     <a:lnL>
                       <a:noFill/>
                     </a:lnL>
@@ -21243,7 +21243,7 @@
                       </a:r>
                     </a:p>
                   </a:txBody>
-                  <a:tcPr marL="81005" marR="6750" marT="6750" marB="0" anchor="ctr">
+                  <a:tcPr marL="81005" marR="6750" marT="6750" marB="6750" anchor="ctr">
                     <a:lnL>
                       <a:noFill/>
                     </a:lnL>
@@ -21299,7 +21299,7 @@
                       </a:r>
                     </a:p>
                   </a:txBody>
-                  <a:tcPr marL="81005" marR="6750" marT="6750" marB="0" anchor="ctr">
+                  <a:tcPr marL="81005" marR="6750" marT="6750" marB="6750" anchor="ctr">
                     <a:lnL>
                       <a:noFill/>
                     </a:lnL>
@@ -21873,7 +21873,7 @@
                       </a:r>
                     </a:p>
                   </a:txBody>
-                  <a:tcPr marL="6750" marR="6750" marT="6750" marB="0" anchor="ctr">
+                  <a:tcPr marL="6750" marR="6750" marT="6750" marB="6750" anchor="ctr">
                     <a:lnL>
                       <a:noFill/>
                     </a:lnL>
@@ -21935,7 +21935,7 @@
                       </a:r>
                     </a:p>
                   </a:txBody>
-                  <a:tcPr marL="6750" marR="6750" marT="6750" marB="0" anchor="ctr">
+                  <a:tcPr marL="6750" marR="6750" marT="6750" marB="6750" anchor="ctr">
                     <a:lnL w="9525" cap="flat" cmpd="sng" algn="ctr">
                       <a:solidFill>
                         <a:schemeClr val="bg1">
@@ -22005,7 +22005,7 @@
                       </a:r>
                     </a:p>
                   </a:txBody>
-                  <a:tcPr marL="6750" marR="6750" marT="6750" marB="0" anchor="ctr">
+                  <a:tcPr marL="6750" marR="6750" marT="6750" marB="6750" anchor="ctr">
                     <a:lnL w="9525" cap="flat" cmpd="sng" algn="ctr">
                       <a:solidFill>
                         <a:schemeClr val="bg1">
@@ -22077,7 +22077,7 @@
                       </a:r>
                     </a:p>
                   </a:txBody>
-                  <a:tcPr marL="81005" marR="6750" marT="6750" marB="0" anchor="ctr">
+                  <a:tcPr marL="81005" marR="6750" marT="6750" marB="6750" anchor="ctr">
                     <a:lnL>
                       <a:noFill/>
                     </a:lnL>
@@ -22131,7 +22131,7 @@
                       </a:r>
                     </a:p>
                   </a:txBody>
-                  <a:tcPr marL="81005" marR="6750" marT="6750" marB="0" anchor="ctr">
+                  <a:tcPr marL="81005" marR="6750" marT="6750" marB="6750" anchor="ctr">
                     <a:lnL>
                       <a:noFill/>
                     </a:lnL>
@@ -22187,7 +22187,7 @@
                       </a:r>
                     </a:p>
                   </a:txBody>
-                  <a:tcPr marL="81005" marR="6750" marT="6750" marB="0" anchor="ctr">
+                  <a:tcPr marL="81005" marR="6750" marT="6750" marB="6750" anchor="ctr">
                     <a:lnL>
                       <a:noFill/>
                     </a:lnL>
@@ -22245,7 +22245,7 @@
                       </a:r>
                     </a:p>
                   </a:txBody>
-                  <a:tcPr marL="81005" marR="6750" marT="6750" marB="0" anchor="ctr">
+                  <a:tcPr marL="81005" marR="6750" marT="6750" marB="6750" anchor="ctr">
                     <a:lnL>
                       <a:noFill/>
                     </a:lnL>
@@ -22299,7 +22299,7 @@
                       </a:r>
                     </a:p>
                   </a:txBody>
-                  <a:tcPr marL="81005" marR="6750" marT="6750" marB="0" anchor="ctr">
+                  <a:tcPr marL="81005" marR="6750" marT="6750" marB="6750" anchor="ctr">
                     <a:lnL>
                       <a:noFill/>
                     </a:lnL>
@@ -22355,7 +22355,7 @@
                       </a:r>
                     </a:p>
                   </a:txBody>
-                  <a:tcPr marL="81005" marR="6750" marT="6750" marB="0" anchor="ctr">
+                  <a:tcPr marL="81005" marR="6750" marT="6750" marB="6750" anchor="ctr">
                     <a:lnL>
                       <a:noFill/>
                     </a:lnL>
@@ -22413,7 +22413,7 @@
                       </a:r>
                     </a:p>
                   </a:txBody>
-                  <a:tcPr marL="81005" marR="6750" marT="6750" marB="0" anchor="ctr">
+                  <a:tcPr marL="81005" marR="6750" marT="6750" marB="6750" anchor="ctr">
                     <a:lnL>
                       <a:noFill/>
                     </a:lnL>
@@ -22467,7 +22467,7 @@
                       </a:r>
                     </a:p>
                   </a:txBody>
-                  <a:tcPr marL="81005" marR="6750" marT="6750" marB="0" anchor="ctr">
+                  <a:tcPr marL="81005" marR="6750" marT="6750" marB="6750" anchor="ctr">
                     <a:lnL>
                       <a:noFill/>
                     </a:lnL>
@@ -22523,7 +22523,7 @@
                       </a:r>
                     </a:p>
                   </a:txBody>
-                  <a:tcPr marL="81005" marR="6750" marT="6750" marB="0" anchor="ctr">
+                  <a:tcPr marL="81005" marR="6750" marT="6750" marB="6750" anchor="ctr">
                     <a:lnL>
                       <a:noFill/>
                     </a:lnL>
@@ -22581,7 +22581,7 @@
                       </a:r>
                     </a:p>
                   </a:txBody>
-                  <a:tcPr marL="81005" marR="6750" marT="6750" marB="0" anchor="ctr">
+                  <a:tcPr marL="81005" marR="6750" marT="6750" marB="6750" anchor="ctr">
                     <a:lnL>
                       <a:noFill/>
                     </a:lnL>
@@ -22635,7 +22635,7 @@
                       </a:r>
                     </a:p>
                   </a:txBody>
-                  <a:tcPr marL="81005" marR="6750" marT="6750" marB="0" anchor="ctr">
+                  <a:tcPr marL="81005" marR="6750" marT="6750" marB="6750" anchor="ctr">
                     <a:lnL>
                       <a:noFill/>
                     </a:lnL>
@@ -22691,7 +22691,7 @@
                       </a:r>
                     </a:p>
                   </a:txBody>
-                  <a:tcPr marL="81005" marR="6750" marT="6750" marB="0" anchor="ctr">
+                  <a:tcPr marL="81005" marR="6750" marT="6750" marB="6750" anchor="ctr">
                     <a:lnL>
                       <a:noFill/>
                     </a:lnL>
@@ -23245,7 +23245,7 @@
                       </a:r>
                     </a:p>
                   </a:txBody>
-                  <a:tcPr marL="6750" marR="6750" marT="6750" marB="0" anchor="ctr">
+                  <a:tcPr marL="6750" marR="6750" marT="6750" marB="6750" anchor="ctr">
                     <a:lnL>
                       <a:noFill/>
                     </a:lnL>
@@ -23307,7 +23307,7 @@
                       </a:r>
                     </a:p>
                   </a:txBody>
-                  <a:tcPr marL="6750" marR="6750" marT="6750" marB="0" anchor="ctr">
+                  <a:tcPr marL="6750" marR="6750" marT="6750" marB="6750" anchor="ctr">
                     <a:lnL w="9525" cap="flat" cmpd="sng" algn="ctr">
                       <a:solidFill>
                         <a:schemeClr val="bg1">
@@ -23377,7 +23377,7 @@
                       </a:r>
                     </a:p>
                   </a:txBody>
-                  <a:tcPr marL="6750" marR="6750" marT="6750" marB="0" anchor="ctr">
+                  <a:tcPr marL="6750" marR="6750" marT="6750" marB="6750" anchor="ctr">
                     <a:lnL w="9525" cap="flat" cmpd="sng" algn="ctr">
                       <a:solidFill>
                         <a:schemeClr val="bg1">
@@ -23449,7 +23449,7 @@
                       </a:r>
                     </a:p>
                   </a:txBody>
-                  <a:tcPr marL="81005" marR="6750" marT="6750" marB="0" anchor="ctr">
+                  <a:tcPr marL="81005" marR="6750" marT="6750" marB="6750" anchor="ctr">
                     <a:lnL>
                       <a:noFill/>
                     </a:lnL>
@@ -23503,7 +23503,7 @@
                       </a:r>
                     </a:p>
                   </a:txBody>
-                  <a:tcPr marL="81005" marR="6750" marT="6750" marB="0" anchor="ctr">
+                  <a:tcPr marL="81005" marR="6750" marT="6750" marB="6750" anchor="ctr">
                     <a:lnL>
                       <a:noFill/>
                     </a:lnL>
@@ -23559,7 +23559,7 @@
                       </a:r>
                     </a:p>
                   </a:txBody>
-                  <a:tcPr marL="81005" marR="6750" marT="6750" marB="0" anchor="ctr">
+                  <a:tcPr marL="81005" marR="6750" marT="6750" marB="6750" anchor="ctr">
                     <a:lnL>
                       <a:noFill/>
                     </a:lnL>
@@ -23617,7 +23617,7 @@
                       </a:r>
                     </a:p>
                   </a:txBody>
-                  <a:tcPr marL="81005" marR="6750" marT="6750" marB="0" anchor="ctr">
+                  <a:tcPr marL="81005" marR="6750" marT="6750" marB="6750" anchor="ctr">
                     <a:lnL>
                       <a:noFill/>
                     </a:lnL>
@@ -23671,7 +23671,7 @@
                       </a:r>
                     </a:p>
                   </a:txBody>
-                  <a:tcPr marL="81005" marR="6750" marT="6750" marB="0" anchor="ctr">
+                  <a:tcPr marL="81005" marR="6750" marT="6750" marB="6750" anchor="ctr">
                     <a:lnL>
                       <a:noFill/>
                     </a:lnL>
@@ -23727,7 +23727,7 @@
                       </a:r>
                     </a:p>
                   </a:txBody>
-                  <a:tcPr marL="81005" marR="6750" marT="6750" marB="0" anchor="ctr">
+                  <a:tcPr marL="81005" marR="6750" marT="6750" marB="6750" anchor="ctr">
                     <a:lnL>
                       <a:noFill/>
                     </a:lnL>
@@ -23785,7 +23785,7 @@
                       </a:r>
                     </a:p>
                   </a:txBody>
-                  <a:tcPr marL="81005" marR="6750" marT="6750" marB="0" anchor="ctr">
+                  <a:tcPr marL="81005" marR="6750" marT="6750" marB="6750" anchor="ctr">
                     <a:lnL>
                       <a:noFill/>
                     </a:lnL>
@@ -23839,7 +23839,7 @@
                       </a:r>
                     </a:p>
                   </a:txBody>
-                  <a:tcPr marL="81005" marR="6750" marT="6750" marB="0" anchor="ctr">
+                  <a:tcPr marL="81005" marR="6750" marT="6750" marB="6750" anchor="ctr">
                     <a:lnL>
                       <a:noFill/>
                     </a:lnL>
@@ -23895,7 +23895,7 @@
                       </a:r>
                     </a:p>
                   </a:txBody>
-                  <a:tcPr marL="81005" marR="6750" marT="6750" marB="0" anchor="ctr">
+                  <a:tcPr marL="81005" marR="6750" marT="6750" marB="6750" anchor="ctr">
                     <a:lnL>
                       <a:noFill/>
                     </a:lnL>
@@ -23953,7 +23953,7 @@
                       </a:r>
                     </a:p>
                   </a:txBody>
-                  <a:tcPr marL="81005" marR="6750" marT="6750" marB="0" anchor="ctr">
+                  <a:tcPr marL="81005" marR="6750" marT="6750" marB="6750" anchor="ctr">
                     <a:lnL>
                       <a:noFill/>
                     </a:lnL>
@@ -24007,7 +24007,7 @@
                       </a:r>
                     </a:p>
                   </a:txBody>
-                  <a:tcPr marL="81005" marR="6750" marT="6750" marB="0" anchor="ctr">
+                  <a:tcPr marL="81005" marR="6750" marT="6750" marB="6750" anchor="ctr">
                     <a:lnL>
                       <a:noFill/>
                     </a:lnL>
@@ -24063,7 +24063,7 @@
                       </a:r>
                     </a:p>
                   </a:txBody>
-                  <a:tcPr marL="81005" marR="6750" marT="6750" marB="0" anchor="ctr">
+                  <a:tcPr marL="81005" marR="6750" marT="6750" marB="6750" anchor="ctr">
                     <a:lnL>
                       <a:noFill/>
                     </a:lnL>
@@ -24121,7 +24121,7 @@
                       </a:r>
                     </a:p>
                   </a:txBody>
-                  <a:tcPr marL="81005" marR="6750" marT="6750" marB="0" anchor="ctr">
+                  <a:tcPr marL="81005" marR="6750" marT="6750" marB="6750" anchor="ctr">
                     <a:lnL>
                       <a:noFill/>
                     </a:lnL>
@@ -24175,7 +24175,7 @@
                       </a:r>
                     </a:p>
                   </a:txBody>
-                  <a:tcPr marL="81005" marR="6750" marT="6750" marB="0" anchor="ctr">
+                  <a:tcPr marL="81005" marR="6750" marT="6750" marB="6750" anchor="ctr">
                     <a:lnL>
                       <a:noFill/>
                     </a:lnL>
@@ -24231,7 +24231,7 @@
                       </a:r>
                     </a:p>
                   </a:txBody>
-                  <a:tcPr marL="81005" marR="6750" marT="6750" marB="0" anchor="ctr">
+                  <a:tcPr marL="81005" marR="6750" marT="6750" marB="6750" anchor="ctr">
                     <a:lnL>
                       <a:noFill/>
                     </a:lnL>
@@ -25490,7 +25490,7 @@
                       </a:r>
                     </a:p>
                   </a:txBody>
-                  <a:tcPr marL="6750" marR="6750" marT="6750" marB="0" anchor="ctr">
+                  <a:tcPr marL="6750" marR="6750" marT="6750" marB="6750" anchor="ctr">
                     <a:lnL>
                       <a:noFill/>
                     </a:lnL>
@@ -25552,7 +25552,7 @@
                       </a:r>
                     </a:p>
                   </a:txBody>
-                  <a:tcPr marL="6750" marR="6750" marT="6750" marB="0" anchor="ctr">
+                  <a:tcPr marL="6750" marR="6750" marT="6750" marB="6750" anchor="ctr">
                     <a:lnL w="9525" cap="flat" cmpd="sng" algn="ctr">
                       <a:solidFill>
                         <a:schemeClr val="bg1">
@@ -25622,7 +25622,7 @@
                       </a:r>
                     </a:p>
                   </a:txBody>
-                  <a:tcPr marL="6750" marR="6750" marT="6750" marB="0" anchor="ctr">
+                  <a:tcPr marL="6750" marR="6750" marT="6750" marB="6750" anchor="ctr">
                     <a:lnL w="9525" cap="flat" cmpd="sng" algn="ctr">
                       <a:solidFill>
                         <a:schemeClr val="bg1">
@@ -25694,7 +25694,7 @@
                       </a:r>
                     </a:p>
                   </a:txBody>
-                  <a:tcPr marL="81005" marR="6750" marT="6750" marB="0" anchor="ctr">
+                  <a:tcPr marL="81005" marR="6750" marT="6750" marB="6750" anchor="ctr">
                     <a:lnL>
                       <a:noFill/>
                     </a:lnL>
@@ -25748,7 +25748,7 @@
                       </a:r>
                     </a:p>
                   </a:txBody>
-                  <a:tcPr marL="81005" marR="6750" marT="6750" marB="0" anchor="ctr">
+                  <a:tcPr marL="81005" marR="6750" marT="6750" marB="6750" anchor="ctr">
                     <a:lnL>
                       <a:noFill/>
                     </a:lnL>
@@ -25804,7 +25804,7 @@
                       </a:r>
                     </a:p>
                   </a:txBody>
-                  <a:tcPr marL="81005" marR="6750" marT="6750" marB="0" anchor="ctr">
+                  <a:tcPr marL="81005" marR="6750" marT="6750" marB="6750" anchor="ctr">
                     <a:lnL>
                       <a:noFill/>
                     </a:lnL>
@@ -25862,7 +25862,7 @@
                       </a:r>
                     </a:p>
                   </a:txBody>
-                  <a:tcPr marL="81005" marR="6750" marT="6750" marB="0" anchor="ctr">
+                  <a:tcPr marL="81005" marR="6750" marT="6750" marB="6750" anchor="ctr">
                     <a:lnL>
                       <a:noFill/>
                     </a:lnL>
@@ -25916,7 +25916,7 @@
                       </a:r>
                     </a:p>
                   </a:txBody>
-                  <a:tcPr marL="81005" marR="6750" marT="6750" marB="0" anchor="ctr">
+                  <a:tcPr marL="81005" marR="6750" marT="6750" marB="6750" anchor="ctr">
                     <a:lnL>
                       <a:noFill/>
                     </a:lnL>
@@ -25972,7 +25972,7 @@
                       </a:r>
                     </a:p>
                   </a:txBody>
-                  <a:tcPr marL="81005" marR="6750" marT="6750" marB="0" anchor="ctr">
+                  <a:tcPr marL="81005" marR="6750" marT="6750" marB="6750" anchor="ctr">
                     <a:lnL>
                       <a:noFill/>
                     </a:lnL>
@@ -26030,7 +26030,7 @@
                       </a:r>
                     </a:p>
                   </a:txBody>
-                  <a:tcPr marL="81005" marR="6750" marT="6750" marB="0" anchor="ctr">
+                  <a:tcPr marL="81005" marR="6750" marT="6750" marB="6750" anchor="ctr">
                     <a:lnL>
                       <a:noFill/>
                     </a:lnL>
@@ -26084,7 +26084,7 @@
                       </a:r>
                     </a:p>
                   </a:txBody>
-                  <a:tcPr marL="81005" marR="6750" marT="6750" marB="0" anchor="ctr">
+                  <a:tcPr marL="81005" marR="6750" marT="6750" marB="6750" anchor="ctr">
                     <a:lnL>
                       <a:noFill/>
                     </a:lnL>
@@ -26140,7 +26140,7 @@
                       </a:r>
                     </a:p>
                   </a:txBody>
-                  <a:tcPr marL="81005" marR="6750" marT="6750" marB="0" anchor="ctr">
+                  <a:tcPr marL="81005" marR="6750" marT="6750" marB="6750" anchor="ctr">
                     <a:lnL>
                       <a:noFill/>
                     </a:lnL>
@@ -26198,7 +26198,7 @@
                       </a:r>
                     </a:p>
                   </a:txBody>
-                  <a:tcPr marL="81005" marR="6750" marT="6750" marB="0" anchor="ctr">
+                  <a:tcPr marL="81005" marR="6750" marT="6750" marB="6750" anchor="ctr">
                     <a:lnL>
                       <a:noFill/>
                     </a:lnL>
@@ -26252,7 +26252,7 @@
                       </a:r>
                     </a:p>
                   </a:txBody>
-                  <a:tcPr marL="81005" marR="6750" marT="6750" marB="0" anchor="ctr">
+                  <a:tcPr marL="81005" marR="6750" marT="6750" marB="6750" anchor="ctr">
                     <a:lnL>
                       <a:noFill/>
                     </a:lnL>
@@ -26308,7 +26308,7 @@
                       </a:r>
                     </a:p>
                   </a:txBody>
-                  <a:tcPr marL="81005" marR="6750" marT="6750" marB="0" anchor="ctr">
+                  <a:tcPr marL="81005" marR="6750" marT="6750" marB="6750" anchor="ctr">
                     <a:lnL>
                       <a:noFill/>
                     </a:lnL>
@@ -26879,7 +26879,7 @@
                 <a:latin typeface="맑은 고딕"/>
                 <a:ea typeface="맑은 고딕"/>
               </a:rPr>
-              <a:t>04. 달라지는 것 셋</a:t>
+              <a:t>04. 달라지는 것 3가지</a:t>
             </a:r>
           </a:p>
         </p:txBody>
@@ -27018,7 +27018,7 @@
                       </a:r>
                     </a:p>
                   </a:txBody>
-                  <a:tcPr marL="6750" marR="6750" marT="6750" marB="0" anchor="ctr">
+                  <a:tcPr marL="6750" marR="6750" marT="6750" marB="6750" anchor="ctr">
                     <a:lnL>
                       <a:noFill/>
                     </a:lnL>
@@ -27080,7 +27080,7 @@
                       </a:r>
                     </a:p>
                   </a:txBody>
-                  <a:tcPr marL="6750" marR="6750" marT="6750" marB="0" anchor="ctr">
+                  <a:tcPr marL="6750" marR="6750" marT="6750" marB="6750" anchor="ctr">
                     <a:lnL w="9525" cap="flat" cmpd="sng" algn="ctr">
                       <a:solidFill>
                         <a:schemeClr val="bg1">
@@ -27150,7 +27150,7 @@
                       </a:r>
                     </a:p>
                   </a:txBody>
-                  <a:tcPr marL="6750" marR="6750" marT="6750" marB="0" anchor="ctr">
+                  <a:tcPr marL="6750" marR="6750" marT="6750" marB="6750" anchor="ctr">
                     <a:lnL w="9525" cap="flat" cmpd="sng" algn="ctr">
                       <a:solidFill>
                         <a:schemeClr val="bg1">
@@ -27222,7 +27222,7 @@
                       </a:r>
                     </a:p>
                   </a:txBody>
-                  <a:tcPr marL="81005" marR="6750" marT="6750" marB="0" anchor="ctr">
+                  <a:tcPr marL="81005" marR="6750" marT="6750" marB="6750" anchor="ctr">
                     <a:lnL>
                       <a:noFill/>
                     </a:lnL>
@@ -27276,7 +27276,7 @@
                       </a:r>
                     </a:p>
                   </a:txBody>
-                  <a:tcPr marL="81005" marR="6750" marT="6750" marB="0" anchor="ctr">
+                  <a:tcPr marL="81005" marR="6750" marT="6750" marB="6750" anchor="ctr">
                     <a:lnL>
                       <a:noFill/>
                     </a:lnL>
@@ -27332,7 +27332,7 @@
                       </a:r>
                     </a:p>
                   </a:txBody>
-                  <a:tcPr marL="81005" marR="6750" marT="6750" marB="0" anchor="ctr">
+                  <a:tcPr marL="81005" marR="6750" marT="6750" marB="6750" anchor="ctr">
                     <a:lnL>
                       <a:noFill/>
                     </a:lnL>
@@ -27390,7 +27390,7 @@
                       </a:r>
                     </a:p>
                   </a:txBody>
-                  <a:tcPr marL="81005" marR="6750" marT="6750" marB="0" anchor="ctr">
+                  <a:tcPr marL="81005" marR="6750" marT="6750" marB="6750" anchor="ctr">
                     <a:lnL>
                       <a:noFill/>
                     </a:lnL>
@@ -27444,7 +27444,7 @@
                       </a:r>
                     </a:p>
                   </a:txBody>
-                  <a:tcPr marL="81005" marR="6750" marT="6750" marB="0" anchor="ctr">
+                  <a:tcPr marL="81005" marR="6750" marT="6750" marB="6750" anchor="ctr">
                     <a:lnL>
                       <a:noFill/>
                     </a:lnL>
@@ -27500,7 +27500,7 @@
                       </a:r>
                     </a:p>
                   </a:txBody>
-                  <a:tcPr marL="81005" marR="6750" marT="6750" marB="0" anchor="ctr">
+                  <a:tcPr marL="81005" marR="6750" marT="6750" marB="6750" anchor="ctr">
                     <a:lnL>
                       <a:noFill/>
                     </a:lnL>
@@ -27558,7 +27558,7 @@
                       </a:r>
                     </a:p>
                   </a:txBody>
-                  <a:tcPr marL="81005" marR="6750" marT="6750" marB="0" anchor="ctr">
+                  <a:tcPr marL="81005" marR="6750" marT="6750" marB="6750" anchor="ctr">
                     <a:lnL>
                       <a:noFill/>
                     </a:lnL>
@@ -27612,7 +27612,7 @@
                       </a:r>
                     </a:p>
                   </a:txBody>
-                  <a:tcPr marL="81005" marR="6750" marT="6750" marB="0" anchor="ctr">
+                  <a:tcPr marL="81005" marR="6750" marT="6750" marB="6750" anchor="ctr">
                     <a:lnL>
                       <a:noFill/>
                     </a:lnL>
@@ -27668,7 +27668,7 @@
                       </a:r>
                     </a:p>
                   </a:txBody>
-                  <a:tcPr marL="81005" marR="6750" marT="6750" marB="0" anchor="ctr">
+                  <a:tcPr marL="81005" marR="6750" marT="6750" marB="6750" anchor="ctr">
                     <a:lnL>
                       <a:noFill/>
                     </a:lnL>
@@ -28259,7 +28259,7 @@
                 <a:latin typeface="맑은 고딕"/>
                 <a:ea typeface="맑은 고딕"/>
               </a:rPr>
-              <a:t>04. 달라지는 것 셋</a:t>
+              <a:t>04. 달라지는 것 3가지</a:t>
             </a:r>
           </a:p>
         </p:txBody>
@@ -28398,7 +28398,7 @@
                       </a:r>
                     </a:p>
                   </a:txBody>
-                  <a:tcPr marL="6750" marR="6750" marT="6750" marB="0" anchor="ctr">
+                  <a:tcPr marL="6750" marR="6750" marT="6750" marB="6750" anchor="ctr">
                     <a:lnL>
                       <a:noFill/>
                     </a:lnL>
@@ -28460,7 +28460,7 @@
                       </a:r>
                     </a:p>
                   </a:txBody>
-                  <a:tcPr marL="6750" marR="6750" marT="6750" marB="0" anchor="ctr">
+                  <a:tcPr marL="6750" marR="6750" marT="6750" marB="6750" anchor="ctr">
                     <a:lnL w="9525" cap="flat" cmpd="sng" algn="ctr">
                       <a:solidFill>
                         <a:schemeClr val="bg1">
@@ -28530,7 +28530,7 @@
                       </a:r>
                     </a:p>
                   </a:txBody>
-                  <a:tcPr marL="6750" marR="6750" marT="6750" marB="0" anchor="ctr">
+                  <a:tcPr marL="6750" marR="6750" marT="6750" marB="6750" anchor="ctr">
                     <a:lnL w="9525" cap="flat" cmpd="sng" algn="ctr">
                       <a:solidFill>
                         <a:schemeClr val="bg1">
@@ -28602,7 +28602,7 @@
                       </a:r>
                     </a:p>
                   </a:txBody>
-                  <a:tcPr marL="81005" marR="6750" marT="6750" marB="0" anchor="ctr">
+                  <a:tcPr marL="81005" marR="6750" marT="6750" marB="6750" anchor="ctr">
                     <a:lnL>
                       <a:noFill/>
                     </a:lnL>
@@ -28656,7 +28656,7 @@
                       </a:r>
                     </a:p>
                   </a:txBody>
-                  <a:tcPr marL="81005" marR="6750" marT="6750" marB="0" anchor="ctr">
+                  <a:tcPr marL="81005" marR="6750" marT="6750" marB="6750" anchor="ctr">
                     <a:lnL>
                       <a:noFill/>
                     </a:lnL>
@@ -28712,7 +28712,7 @@
                       </a:r>
                     </a:p>
                   </a:txBody>
-                  <a:tcPr marL="81005" marR="6750" marT="6750" marB="0" anchor="ctr">
+                  <a:tcPr marL="81005" marR="6750" marT="6750" marB="6750" anchor="ctr">
                     <a:lnL>
                       <a:noFill/>
                     </a:lnL>
@@ -28770,7 +28770,7 @@
                       </a:r>
                     </a:p>
                   </a:txBody>
-                  <a:tcPr marL="81005" marR="6750" marT="6750" marB="0" anchor="ctr">
+                  <a:tcPr marL="81005" marR="6750" marT="6750" marB="6750" anchor="ctr">
                     <a:lnL>
                       <a:noFill/>
                     </a:lnL>
@@ -28824,7 +28824,7 @@
                       </a:r>
                     </a:p>
                   </a:txBody>
-                  <a:tcPr marL="81005" marR="6750" marT="6750" marB="0" anchor="ctr">
+                  <a:tcPr marL="81005" marR="6750" marT="6750" marB="6750" anchor="ctr">
                     <a:lnL>
                       <a:noFill/>
                     </a:lnL>
@@ -28880,7 +28880,7 @@
                       </a:r>
                     </a:p>
                   </a:txBody>
-                  <a:tcPr marL="81005" marR="6750" marT="6750" marB="0" anchor="ctr">
+                  <a:tcPr marL="81005" marR="6750" marT="6750" marB="6750" anchor="ctr">
                     <a:lnL>
                       <a:noFill/>
                     </a:lnL>

--- a/courses/ai-native/sessions/s09.pptx
+++ b/courses/ai-native/sessions/s09.pptx
@@ -3942,7 +3942,7 @@
         </p:nvGraphicFramePr>
         <p:xfrm>
           <a:off x="2641156" y="3061046"/>
-          <a:ext cx="3848100" cy="3873500"/>
+          <a:ext cx="3848100" cy="1152000"/>
         </p:xfrm>
         <a:graphic>
           <a:graphicData uri="http://schemas.openxmlformats.org/drawingml/2006/table">
@@ -5207,7 +5207,7 @@
         </p:nvGraphicFramePr>
         <p:xfrm>
           <a:off x="1830896" y="2112010"/>
-          <a:ext cx="5468620" cy="3873500"/>
+          <a:ext cx="5468620" cy="1440000"/>
         </p:xfrm>
         <a:graphic>
           <a:graphicData uri="http://schemas.openxmlformats.org/drawingml/2006/table">
@@ -7310,7 +7310,7 @@
         </p:nvGraphicFramePr>
         <p:xfrm>
           <a:off x="2267776" y="2350308"/>
-          <a:ext cx="4594860" cy="3873500"/>
+          <a:ext cx="4594860" cy="1728000"/>
         </p:xfrm>
         <a:graphic>
           <a:graphicData uri="http://schemas.openxmlformats.org/drawingml/2006/table">
@@ -10614,7 +10614,7 @@
         </p:nvGraphicFramePr>
         <p:xfrm>
           <a:off x="2402396" y="1837690"/>
-          <a:ext cx="4325620" cy="3873500"/>
+          <a:ext cx="4325620" cy="1440000"/>
         </p:xfrm>
         <a:graphic>
           <a:graphicData uri="http://schemas.openxmlformats.org/drawingml/2006/table">
@@ -11679,7 +11679,7 @@
         </p:nvGraphicFramePr>
         <p:xfrm>
           <a:off x="1956626" y="2112010"/>
-          <a:ext cx="5217160" cy="3873500"/>
+          <a:ext cx="5217160" cy="1728000"/>
         </p:xfrm>
         <a:graphic>
           <a:graphicData uri="http://schemas.openxmlformats.org/drawingml/2006/table">
@@ -13230,7 +13230,7 @@
         </p:nvGraphicFramePr>
         <p:xfrm>
           <a:off x="2136966" y="3173268"/>
-          <a:ext cx="4856480" cy="3873500"/>
+          <a:ext cx="4856480" cy="1152000"/>
         </p:xfrm>
         <a:graphic>
           <a:graphicData uri="http://schemas.openxmlformats.org/drawingml/2006/table">
@@ -14268,7 +14268,7 @@
         </p:nvGraphicFramePr>
         <p:xfrm>
           <a:off x="2011236" y="2112010"/>
-          <a:ext cx="5107940" cy="3873500"/>
+          <a:ext cx="5107940" cy="1152000"/>
         </p:xfrm>
         <a:graphic>
           <a:graphicData uri="http://schemas.openxmlformats.org/drawingml/2006/table">
@@ -15739,7 +15739,7 @@
         </p:nvGraphicFramePr>
         <p:xfrm>
           <a:off x="2542096" y="2112010"/>
-          <a:ext cx="4046220" cy="3873500"/>
+          <a:ext cx="4046220" cy="1152000"/>
         </p:xfrm>
         <a:graphic>
           <a:graphicData uri="http://schemas.openxmlformats.org/drawingml/2006/table">
@@ -18578,7 +18578,7 @@
         </p:nvGraphicFramePr>
         <p:xfrm>
           <a:off x="1719136" y="1690370"/>
-          <a:ext cx="5692140" cy="3873500"/>
+          <a:ext cx="5692140" cy="1728000"/>
         </p:xfrm>
         <a:graphic>
           <a:graphicData uri="http://schemas.openxmlformats.org/drawingml/2006/table">
@@ -20111,7 +20111,7 @@
         </p:nvGraphicFramePr>
         <p:xfrm>
           <a:off x="1886776" y="2112010"/>
-          <a:ext cx="5356860" cy="3873500"/>
+          <a:ext cx="5356860" cy="2016000"/>
         </p:xfrm>
         <a:graphic>
           <a:graphicData uri="http://schemas.openxmlformats.org/drawingml/2006/table">
@@ -21839,7 +21839,7 @@
         </p:nvGraphicFramePr>
         <p:xfrm>
           <a:off x="2375726" y="2112010"/>
-          <a:ext cx="4378960" cy="3873500"/>
+          <a:ext cx="4378960" cy="1440000"/>
         </p:xfrm>
         <a:graphic>
           <a:graphicData uri="http://schemas.openxmlformats.org/drawingml/2006/table">
@@ -23211,7 +23211,7 @@
         </p:nvGraphicFramePr>
         <p:xfrm>
           <a:off x="1802956" y="2112010"/>
-          <a:ext cx="5524500" cy="3873500"/>
+          <a:ext cx="5524500" cy="1728000"/>
         </p:xfrm>
         <a:graphic>
           <a:graphicData uri="http://schemas.openxmlformats.org/drawingml/2006/table">
@@ -25456,7 +25456,7 @@
         </p:nvGraphicFramePr>
         <p:xfrm>
           <a:off x="2040446" y="2898948"/>
-          <a:ext cx="5049520" cy="3873500"/>
+          <a:ext cx="5049520" cy="1440000"/>
         </p:xfrm>
         <a:graphic>
           <a:graphicData uri="http://schemas.openxmlformats.org/drawingml/2006/table">
@@ -26984,7 +26984,7 @@
         </p:nvGraphicFramePr>
         <p:xfrm>
           <a:off x="2571306" y="1837690"/>
-          <a:ext cx="3987800" cy="3873500"/>
+          <a:ext cx="3987800" cy="1152000"/>
         </p:xfrm>
         <a:graphic>
           <a:graphicData uri="http://schemas.openxmlformats.org/drawingml/2006/table">
@@ -28364,7 +28364,7 @@
         </p:nvGraphicFramePr>
         <p:xfrm>
           <a:off x="1788986" y="2898948"/>
-          <a:ext cx="5552440" cy="3873500"/>
+          <a:ext cx="5552440" cy="864000"/>
         </p:xfrm>
         <a:graphic>
           <a:graphicData uri="http://schemas.openxmlformats.org/drawingml/2006/table">
